--- a/output/wordlabs-warm-3day.pptx
+++ b/output/wordlabs-warm-3day.pptx
@@ -5622,7 +5622,7 @@
                 <a:ea typeface="Trebuchet MS" pitchFamily="34" charset="-122"/>
                 <a:cs typeface="Trebuchet MS" pitchFamily="34" charset="-120"/>
               </a:rPr>
-              <a:t>0</a:t>
+              <a:t>1</a:t>
             </a:r>
             <a:pPr algn="ctr" indent="0" marL="0">
               <a:buNone/>
@@ -6057,7 +6057,7 @@
                 <a:ea typeface="Calibri" pitchFamily="34" charset="-122"/>
                 <a:cs typeface="Calibri" pitchFamily="34" charset="-120"/>
               </a:rPr>
-              <a:t>warmth</a:t>
+              <a:t>lukewarm</a:t>
             </a:r>
             <a:pPr algn="l" indent="0" marL="0">
               <a:buNone/>
@@ -6071,7 +6071,7 @@
                 <a:ea typeface="Calibri" pitchFamily="34" charset="-122"/>
                 <a:cs typeface="Calibri" pitchFamily="34" charset="-120"/>
               </a:rPr>
-              <a:t> of the sun </a:t>
+              <a:t> water in the pool felt refreshing, and the </a:t>
             </a:r>
             <a:pPr algn="l" indent="0" marL="0">
               <a:buNone/>
@@ -6088,7 +6088,7 @@
                 <a:ea typeface="Calibri" pitchFamily="34" charset="-122"/>
                 <a:cs typeface="Calibri" pitchFamily="34" charset="-120"/>
               </a:rPr>
-              <a:t>rewarms</a:t>
+              <a:t>warming</a:t>
             </a:r>
             <a:pPr algn="l" indent="0" marL="0">
               <a:buNone/>
@@ -6102,7 +6102,7 @@
                 <a:ea typeface="Calibri" pitchFamily="34" charset="-122"/>
                 <a:cs typeface="Calibri" pitchFamily="34" charset="-120"/>
               </a:rPr>
-              <a:t> the earth each morning after a cold night.</a:t>
+              <a:t> sunshine made the afternoon perfect.</a:t>
             </a:r>
             <a:endParaRPr lang="en-US" sz="1800" dirty="0"/>
           </a:p>
@@ -6257,7 +6257,7 @@
                 <a:ea typeface="Trebuchet MS" pitchFamily="34" charset="-122"/>
                 <a:cs typeface="Trebuchet MS" pitchFamily="34" charset="-120"/>
               </a:rPr>
-              <a:t>warmth</a:t>
+              <a:t>lukewarm</a:t>
             </a:r>
             <a:endParaRPr lang="en-US" sz="1400" dirty="0"/>
           </a:p>
@@ -6385,7 +6385,7 @@
                 <a:ea typeface="Trebuchet MS" pitchFamily="34" charset="-122"/>
                 <a:cs typeface="Trebuchet MS" pitchFamily="34" charset="-120"/>
               </a:rPr>
-              <a:t>rewarms</a:t>
+              <a:t>warming</a:t>
             </a:r>
             <a:endParaRPr lang="en-US" sz="1400" dirty="0"/>
           </a:p>
@@ -6855,7 +6855,7 @@
                 <a:ea typeface="Trebuchet MS" pitchFamily="34" charset="-122"/>
                 <a:cs typeface="Trebuchet MS" pitchFamily="34" charset="-120"/>
               </a:rPr>
-              <a:t>warmth</a:t>
+              <a:t>lukewarm</a:t>
             </a:r>
             <a:endParaRPr lang="en-US" sz="2800" dirty="0"/>
           </a:p>
@@ -7682,7 +7682,7 @@
                 <a:ea typeface="Trebuchet MS" pitchFamily="34" charset="-122"/>
                 <a:cs typeface="Trebuchet MS" pitchFamily="34" charset="-120"/>
               </a:rPr>
-              <a:t>warmth</a:t>
+              <a:t>lukewarm</a:t>
             </a:r>
             <a:endParaRPr lang="en-US" sz="2800" dirty="0"/>
           </a:p>
@@ -7771,11 +7771,11 @@
             </a:avLst>
           </a:prstGeom>
           <a:solidFill>
-            <a:srgbClr val="CCFBF1"/>
+            <a:srgbClr val="DDD6FE"/>
           </a:solidFill>
           <a:ln w="19050">
             <a:solidFill>
-              <a:srgbClr val="0D9488"/>
+              <a:srgbClr val="7C3AED"/>
             </a:solidFill>
             <a:prstDash val="solid"/>
           </a:ln>
@@ -7815,13 +7815,13 @@
             <a:r>
               <a:rPr lang="en-US" sz="1300" b="1" dirty="0">
                 <a:solidFill>
-                  <a:srgbClr val="0F766E"/>
+                  <a:srgbClr val="4C1D95"/>
                 </a:solidFill>
                 <a:latin typeface="Trebuchet MS" pitchFamily="34" charset="0"/>
                 <a:ea typeface="Trebuchet MS" pitchFamily="34" charset="-122"/>
                 <a:cs typeface="Trebuchet MS" pitchFamily="34" charset="-120"/>
               </a:rPr>
-              <a:t>warm</a:t>
+              <a:t>luke</a:t>
             </a:r>
             <a:endParaRPr lang="en-US" sz="1300" dirty="0"/>
           </a:p>
@@ -7860,7 +7860,7 @@
                 <a:ea typeface="Calibri" pitchFamily="34" charset="-122"/>
                 <a:cs typeface="Calibri" pitchFamily="34" charset="-120"/>
               </a:rPr>
-              <a:t>having moderate heat</a:t>
+              <a:t>tepid or slightly warm</a:t>
             </a:r>
             <a:endParaRPr lang="en-US" sz="850" dirty="0"/>
           </a:p>
@@ -7883,11 +7883,11 @@
             </a:avLst>
           </a:prstGeom>
           <a:solidFill>
-            <a:srgbClr val="FCE7F3"/>
+            <a:srgbClr val="CCFBF1"/>
           </a:solidFill>
           <a:ln w="19050">
             <a:solidFill>
-              <a:srgbClr val="DB2777"/>
+              <a:srgbClr val="0D9488"/>
             </a:solidFill>
             <a:prstDash val="solid"/>
           </a:ln>
@@ -7927,13 +7927,13 @@
             <a:r>
               <a:rPr lang="en-US" sz="1300" b="1" dirty="0">
                 <a:solidFill>
-                  <a:srgbClr val="9D174D"/>
+                  <a:srgbClr val="0F766E"/>
                 </a:solidFill>
                 <a:latin typeface="Trebuchet MS" pitchFamily="34" charset="0"/>
                 <a:ea typeface="Trebuchet MS" pitchFamily="34" charset="-122"/>
                 <a:cs typeface="Trebuchet MS" pitchFamily="34" charset="-120"/>
               </a:rPr>
-              <a:t>th</a:t>
+              <a:t>warm</a:t>
             </a:r>
             <a:endParaRPr lang="en-US" sz="1300" dirty="0"/>
           </a:p>
@@ -7972,7 +7972,7 @@
                 <a:ea typeface="Calibri" pitchFamily="34" charset="-122"/>
                 <a:cs typeface="Calibri" pitchFamily="34" charset="-120"/>
               </a:rPr>
-              <a:t>forms a noun (state or quality of)</a:t>
+              <a:t>having moderate heat</a:t>
             </a:r>
             <a:endParaRPr lang="en-US" sz="850" dirty="0"/>
           </a:p>
@@ -8667,7 +8667,7 @@
                 <a:ea typeface="Trebuchet MS" pitchFamily="34" charset="-122"/>
                 <a:cs typeface="Trebuchet MS" pitchFamily="34" charset="-120"/>
               </a:rPr>
-              <a:t>warmth</a:t>
+              <a:t>lukewarm</a:t>
             </a:r>
             <a:endParaRPr lang="en-US" sz="2800" dirty="0"/>
           </a:p>
@@ -8756,11 +8756,11 @@
             </a:avLst>
           </a:prstGeom>
           <a:solidFill>
-            <a:srgbClr val="CCFBF1"/>
+            <a:srgbClr val="DDD6FE"/>
           </a:solidFill>
           <a:ln w="19050">
             <a:solidFill>
-              <a:srgbClr val="0D9488"/>
+              <a:srgbClr val="7C3AED"/>
             </a:solidFill>
             <a:prstDash val="solid"/>
           </a:ln>
@@ -8800,13 +8800,13 @@
             <a:r>
               <a:rPr lang="en-US" sz="1300" b="1" dirty="0">
                 <a:solidFill>
-                  <a:srgbClr val="0F766E"/>
+                  <a:srgbClr val="4C1D95"/>
                 </a:solidFill>
                 <a:latin typeface="Trebuchet MS" pitchFamily="34" charset="0"/>
                 <a:ea typeface="Trebuchet MS" pitchFamily="34" charset="-122"/>
                 <a:cs typeface="Trebuchet MS" pitchFamily="34" charset="-120"/>
               </a:rPr>
-              <a:t>warm</a:t>
+              <a:t>luke</a:t>
             </a:r>
             <a:endParaRPr lang="en-US" sz="1300" dirty="0"/>
           </a:p>
@@ -8845,7 +8845,7 @@
                 <a:ea typeface="Calibri" pitchFamily="34" charset="-122"/>
                 <a:cs typeface="Calibri" pitchFamily="34" charset="-120"/>
               </a:rPr>
-              <a:t>having moderate heat</a:t>
+              <a:t>tepid or slightly warm</a:t>
             </a:r>
             <a:endParaRPr lang="en-US" sz="850" dirty="0"/>
           </a:p>
@@ -8868,11 +8868,11 @@
             </a:avLst>
           </a:prstGeom>
           <a:solidFill>
-            <a:srgbClr val="FCE7F3"/>
+            <a:srgbClr val="CCFBF1"/>
           </a:solidFill>
           <a:ln w="19050">
             <a:solidFill>
-              <a:srgbClr val="DB2777"/>
+              <a:srgbClr val="0D9488"/>
             </a:solidFill>
             <a:prstDash val="solid"/>
           </a:ln>
@@ -8912,13 +8912,13 @@
             <a:r>
               <a:rPr lang="en-US" sz="1300" b="1" dirty="0">
                 <a:solidFill>
-                  <a:srgbClr val="9D174D"/>
+                  <a:srgbClr val="0F766E"/>
                 </a:solidFill>
                 <a:latin typeface="Trebuchet MS" pitchFamily="34" charset="0"/>
                 <a:ea typeface="Trebuchet MS" pitchFamily="34" charset="-122"/>
                 <a:cs typeface="Trebuchet MS" pitchFamily="34" charset="-120"/>
               </a:rPr>
-              <a:t>th</a:t>
+              <a:t>warm</a:t>
             </a:r>
             <a:endParaRPr lang="en-US" sz="1300" dirty="0"/>
           </a:p>
@@ -8957,7 +8957,7 @@
                 <a:ea typeface="Calibri" pitchFamily="34" charset="-122"/>
                 <a:cs typeface="Calibri" pitchFamily="34" charset="-120"/>
               </a:rPr>
-              <a:t>forms a noun (state or quality of)</a:t>
+              <a:t>having moderate heat</a:t>
             </a:r>
             <a:endParaRPr lang="en-US" sz="850" dirty="0"/>
           </a:p>
@@ -9064,7 +9064,7 @@
         </p:nvSpPr>
         <p:spPr>
           <a:xfrm>
-            <a:off x="4370832" y="3364992"/>
+            <a:off x="2999232" y="3364992"/>
             <a:ext cx="1645920" cy="475488"/>
           </a:xfrm>
           <a:prstGeom prst="rect">
@@ -9091,7 +9091,7 @@
         </p:nvSpPr>
         <p:spPr>
           <a:xfrm>
-            <a:off x="4370832" y="3364992"/>
+            <a:off x="2999232" y="3364992"/>
             <a:ext cx="1645920" cy="475488"/>
           </a:xfrm>
           <a:prstGeom prst="rect">
@@ -9116,7 +9116,7 @@
                 <a:ea typeface="Trebuchet MS" pitchFamily="34" charset="-122"/>
                 <a:cs typeface="Trebuchet MS" pitchFamily="34" charset="-120"/>
               </a:rPr>
-              <a:t>warmth</a:t>
+              <a:t>luke</a:t>
             </a:r>
             <a:endParaRPr lang="en-US" sz="1400" dirty="0"/>
           </a:p>
@@ -9124,7 +9124,112 @@
       </p:sp>
       <p:sp>
         <p:nvSpPr>
-          <p:cNvPr id="27" name="Shape 25"/>
+          <p:cNvPr id="27" name="Text 25"/>
+          <p:cNvSpPr/>
+          <p:nvPr/>
+        </p:nvSpPr>
+        <p:spPr>
+          <a:xfrm>
+            <a:off x="4645152" y="3364992"/>
+            <a:ext cx="1097280" cy="475488"/>
+          </a:xfrm>
+          <a:prstGeom prst="rect">
+            <a:avLst/>
+          </a:prstGeom>
+          <a:noFill/>
+          <a:ln/>
+        </p:spPr>
+        <p:txBody>
+          <a:bodyPr wrap="square" lIns="0" tIns="0" rIns="0" bIns="0" rtlCol="0" anchor="ctr"/>
+          <a:lstStyle/>
+          <a:p>
+            <a:pPr algn="ctr" indent="0" marL="0">
+              <a:buNone/>
+            </a:pPr>
+            <a:r>
+              <a:rPr lang="en-US" sz="1600" b="1" dirty="0">
+                <a:solidFill>
+                  <a:srgbClr val="0D9488"/>
+                </a:solidFill>
+                <a:latin typeface="Trebuchet MS" pitchFamily="34" charset="0"/>
+                <a:ea typeface="Trebuchet MS" pitchFamily="34" charset="-122"/>
+                <a:cs typeface="Trebuchet MS" pitchFamily="34" charset="-120"/>
+              </a:rPr>
+              <a:t>·</a:t>
+            </a:r>
+            <a:endParaRPr lang="en-US" sz="1600" dirty="0"/>
+          </a:p>
+        </p:txBody>
+      </p:sp>
+      <p:sp>
+        <p:nvSpPr>
+          <p:cNvPr id="28" name="Shape 26"/>
+          <p:cNvSpPr/>
+          <p:nvPr/>
+        </p:nvSpPr>
+        <p:spPr>
+          <a:xfrm>
+            <a:off x="5742432" y="3364992"/>
+            <a:ext cx="1645920" cy="475488"/>
+          </a:xfrm>
+          <a:prstGeom prst="rect">
+            <a:avLst>
+              <a:gd name="adj" fmla="val 9615"/>
+            </a:avLst>
+          </a:prstGeom>
+          <a:solidFill>
+            <a:srgbClr val="FFFFFF"/>
+          </a:solidFill>
+          <a:ln w="12700">
+            <a:solidFill>
+              <a:srgbClr val="0D9488"/>
+            </a:solidFill>
+            <a:prstDash val="solid"/>
+          </a:ln>
+        </p:spPr>
+      </p:sp>
+      <p:sp>
+        <p:nvSpPr>
+          <p:cNvPr id="29" name="Text 27"/>
+          <p:cNvSpPr/>
+          <p:nvPr/>
+        </p:nvSpPr>
+        <p:spPr>
+          <a:xfrm>
+            <a:off x="5742432" y="3364992"/>
+            <a:ext cx="1645920" cy="475488"/>
+          </a:xfrm>
+          <a:prstGeom prst="rect">
+            <a:avLst/>
+          </a:prstGeom>
+          <a:noFill/>
+          <a:ln/>
+        </p:spPr>
+        <p:txBody>
+          <a:bodyPr wrap="square" lIns="0" tIns="0" rIns="0" bIns="0" rtlCol="0" anchor="ctr"/>
+          <a:lstStyle/>
+          <a:p>
+            <a:pPr algn="ctr" indent="0" marL="0">
+              <a:buNone/>
+            </a:pPr>
+            <a:r>
+              <a:rPr lang="en-US" sz="1400" b="1" dirty="0">
+                <a:solidFill>
+                  <a:srgbClr val="0D9488"/>
+                </a:solidFill>
+                <a:latin typeface="Trebuchet MS" pitchFamily="34" charset="0"/>
+                <a:ea typeface="Trebuchet MS" pitchFamily="34" charset="-122"/>
+                <a:cs typeface="Trebuchet MS" pitchFamily="34" charset="-120"/>
+              </a:rPr>
+              <a:t>warm</a:t>
+            </a:r>
+            <a:endParaRPr lang="en-US" sz="1400" dirty="0"/>
+          </a:p>
+        </p:txBody>
+      </p:sp>
+      <p:sp>
+        <p:nvSpPr>
+          <p:cNvPr id="30" name="Shape 28"/>
           <p:cNvSpPr/>
           <p:nvPr/>
         </p:nvSpPr>
@@ -9151,7 +9256,7 @@
       </p:sp>
       <p:sp>
         <p:nvSpPr>
-          <p:cNvPr id="28" name="Text 26"/>
+          <p:cNvPr id="31" name="Text 29"/>
           <p:cNvSpPr/>
           <p:nvPr/>
         </p:nvSpPr>
@@ -9190,7 +9295,7 @@
       </p:sp>
       <p:sp>
         <p:nvSpPr>
-          <p:cNvPr id="29" name="Shape 27"/>
+          <p:cNvPr id="32" name="Shape 30"/>
           <p:cNvSpPr/>
           <p:nvPr/>
         </p:nvSpPr>
@@ -9217,7 +9322,7 @@
       </p:sp>
       <p:sp>
         <p:nvSpPr>
-          <p:cNvPr id="30" name="Text 28"/>
+          <p:cNvPr id="33" name="Text 31"/>
           <p:cNvSpPr/>
           <p:nvPr/>
         </p:nvSpPr>
@@ -9679,7 +9784,7 @@
                 <a:ea typeface="Trebuchet MS" pitchFamily="34" charset="-122"/>
                 <a:cs typeface="Trebuchet MS" pitchFamily="34" charset="-120"/>
               </a:rPr>
-              <a:t>warmth</a:t>
+              <a:t>lukewarm</a:t>
             </a:r>
             <a:endParaRPr lang="en-US" sz="2800" dirty="0"/>
           </a:p>
@@ -9768,11 +9873,11 @@
             </a:avLst>
           </a:prstGeom>
           <a:solidFill>
-            <a:srgbClr val="CCFBF1"/>
+            <a:srgbClr val="DDD6FE"/>
           </a:solidFill>
           <a:ln w="19050">
             <a:solidFill>
-              <a:srgbClr val="0D9488"/>
+              <a:srgbClr val="7C3AED"/>
             </a:solidFill>
             <a:prstDash val="solid"/>
           </a:ln>
@@ -9812,13 +9917,13 @@
             <a:r>
               <a:rPr lang="en-US" sz="1300" b="1" dirty="0">
                 <a:solidFill>
-                  <a:srgbClr val="0F766E"/>
+                  <a:srgbClr val="4C1D95"/>
                 </a:solidFill>
                 <a:latin typeface="Trebuchet MS" pitchFamily="34" charset="0"/>
                 <a:ea typeface="Trebuchet MS" pitchFamily="34" charset="-122"/>
                 <a:cs typeface="Trebuchet MS" pitchFamily="34" charset="-120"/>
               </a:rPr>
-              <a:t>warm</a:t>
+              <a:t>luke</a:t>
             </a:r>
             <a:endParaRPr lang="en-US" sz="1300" dirty="0"/>
           </a:p>
@@ -9857,7 +9962,7 @@
                 <a:ea typeface="Calibri" pitchFamily="34" charset="-122"/>
                 <a:cs typeface="Calibri" pitchFamily="34" charset="-120"/>
               </a:rPr>
-              <a:t>having moderate heat</a:t>
+              <a:t>tepid or slightly warm</a:t>
             </a:r>
             <a:endParaRPr lang="en-US" sz="850" dirty="0"/>
           </a:p>
@@ -9880,11 +9985,11 @@
             </a:avLst>
           </a:prstGeom>
           <a:solidFill>
-            <a:srgbClr val="FCE7F3"/>
+            <a:srgbClr val="CCFBF1"/>
           </a:solidFill>
           <a:ln w="19050">
             <a:solidFill>
-              <a:srgbClr val="DB2777"/>
+              <a:srgbClr val="0D9488"/>
             </a:solidFill>
             <a:prstDash val="solid"/>
           </a:ln>
@@ -9924,13 +10029,13 @@
             <a:r>
               <a:rPr lang="en-US" sz="1300" b="1" dirty="0">
                 <a:solidFill>
-                  <a:srgbClr val="9D174D"/>
+                  <a:srgbClr val="0F766E"/>
                 </a:solidFill>
                 <a:latin typeface="Trebuchet MS" pitchFamily="34" charset="0"/>
                 <a:ea typeface="Trebuchet MS" pitchFamily="34" charset="-122"/>
                 <a:cs typeface="Trebuchet MS" pitchFamily="34" charset="-120"/>
               </a:rPr>
-              <a:t>th</a:t>
+              <a:t>warm</a:t>
             </a:r>
             <a:endParaRPr lang="en-US" sz="1300" dirty="0"/>
           </a:p>
@@ -9969,7 +10074,7 @@
                 <a:ea typeface="Calibri" pitchFamily="34" charset="-122"/>
                 <a:cs typeface="Calibri" pitchFamily="34" charset="-120"/>
               </a:rPr>
-              <a:t>forms a noun (state or quality of)</a:t>
+              <a:t>having moderate heat</a:t>
             </a:r>
             <a:endParaRPr lang="en-US" sz="850" dirty="0"/>
           </a:p>
@@ -10076,7 +10181,7 @@
         </p:nvSpPr>
         <p:spPr>
           <a:xfrm>
-            <a:off x="4370832" y="3364992"/>
+            <a:off x="2999232" y="3364992"/>
             <a:ext cx="1645920" cy="475488"/>
           </a:xfrm>
           <a:prstGeom prst="rect">
@@ -10103,7 +10208,7 @@
         </p:nvSpPr>
         <p:spPr>
           <a:xfrm>
-            <a:off x="4370832" y="3364992"/>
+            <a:off x="2999232" y="3364992"/>
             <a:ext cx="1645920" cy="475488"/>
           </a:xfrm>
           <a:prstGeom prst="rect">
@@ -10128,7 +10233,7 @@
                 <a:ea typeface="Trebuchet MS" pitchFamily="34" charset="-122"/>
                 <a:cs typeface="Trebuchet MS" pitchFamily="34" charset="-120"/>
               </a:rPr>
-              <a:t>warmth</a:t>
+              <a:t>luke</a:t>
             </a:r>
             <a:endParaRPr lang="en-US" sz="1400" dirty="0"/>
           </a:p>
@@ -10136,7 +10241,112 @@
       </p:sp>
       <p:sp>
         <p:nvSpPr>
-          <p:cNvPr id="27" name="Shape 25"/>
+          <p:cNvPr id="27" name="Text 25"/>
+          <p:cNvSpPr/>
+          <p:nvPr/>
+        </p:nvSpPr>
+        <p:spPr>
+          <a:xfrm>
+            <a:off x="4645152" y="3364992"/>
+            <a:ext cx="1097280" cy="475488"/>
+          </a:xfrm>
+          <a:prstGeom prst="rect">
+            <a:avLst/>
+          </a:prstGeom>
+          <a:noFill/>
+          <a:ln/>
+        </p:spPr>
+        <p:txBody>
+          <a:bodyPr wrap="square" lIns="0" tIns="0" rIns="0" bIns="0" rtlCol="0" anchor="ctr"/>
+          <a:lstStyle/>
+          <a:p>
+            <a:pPr algn="ctr" indent="0" marL="0">
+              <a:buNone/>
+            </a:pPr>
+            <a:r>
+              <a:rPr lang="en-US" sz="1600" b="1" dirty="0">
+                <a:solidFill>
+                  <a:srgbClr val="0D9488"/>
+                </a:solidFill>
+                <a:latin typeface="Trebuchet MS" pitchFamily="34" charset="0"/>
+                <a:ea typeface="Trebuchet MS" pitchFamily="34" charset="-122"/>
+                <a:cs typeface="Trebuchet MS" pitchFamily="34" charset="-120"/>
+              </a:rPr>
+              <a:t>·</a:t>
+            </a:r>
+            <a:endParaRPr lang="en-US" sz="1600" dirty="0"/>
+          </a:p>
+        </p:txBody>
+      </p:sp>
+      <p:sp>
+        <p:nvSpPr>
+          <p:cNvPr id="28" name="Shape 26"/>
+          <p:cNvSpPr/>
+          <p:nvPr/>
+        </p:nvSpPr>
+        <p:spPr>
+          <a:xfrm>
+            <a:off x="5742432" y="3364992"/>
+            <a:ext cx="1645920" cy="475488"/>
+          </a:xfrm>
+          <a:prstGeom prst="rect">
+            <a:avLst>
+              <a:gd name="adj" fmla="val 9615"/>
+            </a:avLst>
+          </a:prstGeom>
+          <a:solidFill>
+            <a:srgbClr val="FFFFFF"/>
+          </a:solidFill>
+          <a:ln w="12700">
+            <a:solidFill>
+              <a:srgbClr val="0D9488"/>
+            </a:solidFill>
+            <a:prstDash val="solid"/>
+          </a:ln>
+        </p:spPr>
+      </p:sp>
+      <p:sp>
+        <p:nvSpPr>
+          <p:cNvPr id="29" name="Text 27"/>
+          <p:cNvSpPr/>
+          <p:nvPr/>
+        </p:nvSpPr>
+        <p:spPr>
+          <a:xfrm>
+            <a:off x="5742432" y="3364992"/>
+            <a:ext cx="1645920" cy="475488"/>
+          </a:xfrm>
+          <a:prstGeom prst="rect">
+            <a:avLst/>
+          </a:prstGeom>
+          <a:noFill/>
+          <a:ln/>
+        </p:spPr>
+        <p:txBody>
+          <a:bodyPr wrap="square" lIns="0" tIns="0" rIns="0" bIns="0" rtlCol="0" anchor="ctr"/>
+          <a:lstStyle/>
+          <a:p>
+            <a:pPr algn="ctr" indent="0" marL="0">
+              <a:buNone/>
+            </a:pPr>
+            <a:r>
+              <a:rPr lang="en-US" sz="1400" b="1" dirty="0">
+                <a:solidFill>
+                  <a:srgbClr val="0D9488"/>
+                </a:solidFill>
+                <a:latin typeface="Trebuchet MS" pitchFamily="34" charset="0"/>
+                <a:ea typeface="Trebuchet MS" pitchFamily="34" charset="-122"/>
+                <a:cs typeface="Trebuchet MS" pitchFamily="34" charset="-120"/>
+              </a:rPr>
+              <a:t>warm</a:t>
+            </a:r>
+            <a:endParaRPr lang="en-US" sz="1400" dirty="0"/>
+          </a:p>
+        </p:txBody>
+      </p:sp>
+      <p:sp>
+        <p:nvSpPr>
+          <p:cNvPr id="30" name="Shape 28"/>
           <p:cNvSpPr/>
           <p:nvPr/>
         </p:nvSpPr>
@@ -10163,7 +10373,7 @@
       </p:sp>
       <p:sp>
         <p:nvSpPr>
-          <p:cNvPr id="28" name="Text 26"/>
+          <p:cNvPr id="31" name="Text 29"/>
           <p:cNvSpPr/>
           <p:nvPr/>
         </p:nvSpPr>
@@ -10202,7 +10412,7 @@
       </p:sp>
       <p:sp>
         <p:nvSpPr>
-          <p:cNvPr id="29" name="Shape 27"/>
+          <p:cNvPr id="32" name="Shape 30"/>
           <p:cNvSpPr/>
           <p:nvPr/>
         </p:nvSpPr>
@@ -10229,13 +10439,13 @@
       </p:sp>
       <p:sp>
         <p:nvSpPr>
-          <p:cNvPr id="30" name="Shape 28"/>
-          <p:cNvSpPr/>
-          <p:nvPr/>
-        </p:nvSpPr>
-        <p:spPr>
-          <a:xfrm>
-            <a:off x="2670048" y="4169664"/>
+          <p:cNvPr id="33" name="Shape 31"/>
+          <p:cNvSpPr/>
+          <p:nvPr/>
+        </p:nvSpPr>
+        <p:spPr>
+          <a:xfrm>
+            <a:off x="2124837" y="4169664"/>
             <a:ext cx="685800" cy="475488"/>
           </a:xfrm>
           <a:prstGeom prst="rect">
@@ -10256,13 +10466,13 @@
       </p:sp>
       <p:sp>
         <p:nvSpPr>
-          <p:cNvPr id="31" name="Text 29"/>
-          <p:cNvSpPr/>
-          <p:nvPr/>
-        </p:nvSpPr>
-        <p:spPr>
-          <a:xfrm>
-            <a:off x="2670048" y="4169664"/>
+          <p:cNvPr id="34" name="Text 32"/>
+          <p:cNvSpPr/>
+          <p:nvPr/>
+        </p:nvSpPr>
+        <p:spPr>
+          <a:xfrm>
+            <a:off x="2124837" y="4169664"/>
             <a:ext cx="685800" cy="475488"/>
           </a:xfrm>
           <a:prstGeom prst="rect">
@@ -10287,7 +10497,7 @@
                 <a:ea typeface="Trebuchet MS" pitchFamily="34" charset="-122"/>
                 <a:cs typeface="Trebuchet MS" pitchFamily="34" charset="-120"/>
               </a:rPr>
-              <a:t>w</a:t>
+              <a:t>l</a:t>
             </a:r>
             <a:endParaRPr lang="en-US" sz="900" dirty="0"/>
           </a:p>
@@ -10295,13 +10505,13 @@
       </p:sp>
       <p:sp>
         <p:nvSpPr>
-          <p:cNvPr id="32" name="Shape 30"/>
-          <p:cNvSpPr/>
-          <p:nvPr/>
-        </p:nvSpPr>
-        <p:spPr>
-          <a:xfrm>
-            <a:off x="4123944" y="4169664"/>
+          <p:cNvPr id="35" name="Shape 33"/>
+          <p:cNvSpPr/>
+          <p:nvPr/>
+        </p:nvSpPr>
+        <p:spPr>
+          <a:xfrm>
+            <a:off x="3033522" y="4169664"/>
             <a:ext cx="685800" cy="475488"/>
           </a:xfrm>
           <a:prstGeom prst="rect">
@@ -10322,13 +10532,13 @@
       </p:sp>
       <p:sp>
         <p:nvSpPr>
-          <p:cNvPr id="33" name="Text 31"/>
-          <p:cNvSpPr/>
-          <p:nvPr/>
-        </p:nvSpPr>
-        <p:spPr>
-          <a:xfrm>
-            <a:off x="4123944" y="4169664"/>
+          <p:cNvPr id="36" name="Text 34"/>
+          <p:cNvSpPr/>
+          <p:nvPr/>
+        </p:nvSpPr>
+        <p:spPr>
+          <a:xfrm>
+            <a:off x="3033522" y="4169664"/>
             <a:ext cx="685800" cy="475488"/>
           </a:xfrm>
           <a:prstGeom prst="rect">
@@ -10353,7 +10563,7 @@
                 <a:ea typeface="Trebuchet MS" pitchFamily="34" charset="-122"/>
                 <a:cs typeface="Trebuchet MS" pitchFamily="34" charset="-120"/>
               </a:rPr>
-              <a:t>ar</a:t>
+              <a:t>u</a:t>
             </a:r>
             <a:endParaRPr lang="en-US" sz="900" dirty="0"/>
           </a:p>
@@ -10361,13 +10571,13 @@
       </p:sp>
       <p:sp>
         <p:nvSpPr>
-          <p:cNvPr id="34" name="Shape 32"/>
-          <p:cNvSpPr/>
-          <p:nvPr/>
-        </p:nvSpPr>
-        <p:spPr>
-          <a:xfrm>
-            <a:off x="5577840" y="4169664"/>
+          <p:cNvPr id="37" name="Shape 35"/>
+          <p:cNvSpPr/>
+          <p:nvPr/>
+        </p:nvSpPr>
+        <p:spPr>
+          <a:xfrm>
+            <a:off x="3942207" y="4169664"/>
             <a:ext cx="685800" cy="475488"/>
           </a:xfrm>
           <a:prstGeom prst="rect">
@@ -10388,13 +10598,13 @@
       </p:sp>
       <p:sp>
         <p:nvSpPr>
-          <p:cNvPr id="35" name="Text 33"/>
-          <p:cNvSpPr/>
-          <p:nvPr/>
-        </p:nvSpPr>
-        <p:spPr>
-          <a:xfrm>
-            <a:off x="5577840" y="4169664"/>
+          <p:cNvPr id="38" name="Text 36"/>
+          <p:cNvSpPr/>
+          <p:nvPr/>
+        </p:nvSpPr>
+        <p:spPr>
+          <a:xfrm>
+            <a:off x="3942207" y="4169664"/>
             <a:ext cx="685800" cy="475488"/>
           </a:xfrm>
           <a:prstGeom prst="rect">
@@ -10419,7 +10629,7 @@
                 <a:ea typeface="Trebuchet MS" pitchFamily="34" charset="-122"/>
                 <a:cs typeface="Trebuchet MS" pitchFamily="34" charset="-120"/>
               </a:rPr>
-              <a:t>m</a:t>
+              <a:t>k</a:t>
             </a:r>
             <a:endParaRPr lang="en-US" sz="900" dirty="0"/>
           </a:p>
@@ -10427,13 +10637,13 @@
       </p:sp>
       <p:sp>
         <p:nvSpPr>
-          <p:cNvPr id="36" name="Shape 34"/>
-          <p:cNvSpPr/>
-          <p:nvPr/>
-        </p:nvSpPr>
-        <p:spPr>
-          <a:xfrm>
-            <a:off x="7031736" y="4169664"/>
+          <p:cNvPr id="39" name="Shape 37"/>
+          <p:cNvSpPr/>
+          <p:nvPr/>
+        </p:nvSpPr>
+        <p:spPr>
+          <a:xfrm>
+            <a:off x="4850892" y="4169664"/>
             <a:ext cx="685800" cy="475488"/>
           </a:xfrm>
           <a:prstGeom prst="rect">
@@ -10454,13 +10664,13 @@
       </p:sp>
       <p:sp>
         <p:nvSpPr>
-          <p:cNvPr id="37" name="Text 35"/>
-          <p:cNvSpPr/>
-          <p:nvPr/>
-        </p:nvSpPr>
-        <p:spPr>
-          <a:xfrm>
-            <a:off x="7031736" y="4169664"/>
+          <p:cNvPr id="40" name="Text 38"/>
+          <p:cNvSpPr/>
+          <p:nvPr/>
+        </p:nvSpPr>
+        <p:spPr>
+          <a:xfrm>
+            <a:off x="4850892" y="4169664"/>
             <a:ext cx="685800" cy="475488"/>
           </a:xfrm>
           <a:prstGeom prst="rect">
@@ -10485,7 +10695,205 @@
                 <a:ea typeface="Trebuchet MS" pitchFamily="34" charset="-122"/>
                 <a:cs typeface="Trebuchet MS" pitchFamily="34" charset="-120"/>
               </a:rPr>
-              <a:t>th</a:t>
+              <a:t>e</a:t>
+            </a:r>
+            <a:endParaRPr lang="en-US" sz="900" dirty="0"/>
+          </a:p>
+        </p:txBody>
+      </p:sp>
+      <p:sp>
+        <p:nvSpPr>
+          <p:cNvPr id="41" name="Shape 39"/>
+          <p:cNvSpPr/>
+          <p:nvPr/>
+        </p:nvSpPr>
+        <p:spPr>
+          <a:xfrm>
+            <a:off x="5759577" y="4169664"/>
+            <a:ext cx="685800" cy="475488"/>
+          </a:xfrm>
+          <a:prstGeom prst="rect">
+            <a:avLst>
+              <a:gd name="adj" fmla="val 7692"/>
+            </a:avLst>
+          </a:prstGeom>
+          <a:solidFill>
+            <a:srgbClr val="FFFFFF"/>
+          </a:solidFill>
+          <a:ln w="12700">
+            <a:solidFill>
+              <a:srgbClr val="DB2777"/>
+            </a:solidFill>
+            <a:prstDash val="solid"/>
+          </a:ln>
+        </p:spPr>
+      </p:sp>
+      <p:sp>
+        <p:nvSpPr>
+          <p:cNvPr id="42" name="Text 40"/>
+          <p:cNvSpPr/>
+          <p:nvPr/>
+        </p:nvSpPr>
+        <p:spPr>
+          <a:xfrm>
+            <a:off x="5759577" y="4169664"/>
+            <a:ext cx="685800" cy="475488"/>
+          </a:xfrm>
+          <a:prstGeom prst="rect">
+            <a:avLst/>
+          </a:prstGeom>
+          <a:noFill/>
+          <a:ln/>
+        </p:spPr>
+        <p:txBody>
+          <a:bodyPr wrap="square" lIns="0" tIns="0" rIns="0" bIns="0" rtlCol="0" anchor="ctr"/>
+          <a:lstStyle/>
+          <a:p>
+            <a:pPr algn="ctr" indent="0" marL="0">
+              <a:buNone/>
+            </a:pPr>
+            <a:r>
+              <a:rPr lang="en-US" sz="900" b="1" dirty="0">
+                <a:solidFill>
+                  <a:srgbClr val="9D174D"/>
+                </a:solidFill>
+                <a:latin typeface="Trebuchet MS" pitchFamily="34" charset="0"/>
+                <a:ea typeface="Trebuchet MS" pitchFamily="34" charset="-122"/>
+                <a:cs typeface="Trebuchet MS" pitchFamily="34" charset="-120"/>
+              </a:rPr>
+              <a:t>w</a:t>
+            </a:r>
+            <a:endParaRPr lang="en-US" sz="900" dirty="0"/>
+          </a:p>
+        </p:txBody>
+      </p:sp>
+      <p:sp>
+        <p:nvSpPr>
+          <p:cNvPr id="43" name="Shape 41"/>
+          <p:cNvSpPr/>
+          <p:nvPr/>
+        </p:nvSpPr>
+        <p:spPr>
+          <a:xfrm>
+            <a:off x="6668262" y="4169664"/>
+            <a:ext cx="685800" cy="475488"/>
+          </a:xfrm>
+          <a:prstGeom prst="rect">
+            <a:avLst>
+              <a:gd name="adj" fmla="val 7692"/>
+            </a:avLst>
+          </a:prstGeom>
+          <a:solidFill>
+            <a:srgbClr val="FFFFFF"/>
+          </a:solidFill>
+          <a:ln w="12700">
+            <a:solidFill>
+              <a:srgbClr val="DB2777"/>
+            </a:solidFill>
+            <a:prstDash val="solid"/>
+          </a:ln>
+        </p:spPr>
+      </p:sp>
+      <p:sp>
+        <p:nvSpPr>
+          <p:cNvPr id="44" name="Text 42"/>
+          <p:cNvSpPr/>
+          <p:nvPr/>
+        </p:nvSpPr>
+        <p:spPr>
+          <a:xfrm>
+            <a:off x="6668262" y="4169664"/>
+            <a:ext cx="685800" cy="475488"/>
+          </a:xfrm>
+          <a:prstGeom prst="rect">
+            <a:avLst/>
+          </a:prstGeom>
+          <a:noFill/>
+          <a:ln/>
+        </p:spPr>
+        <p:txBody>
+          <a:bodyPr wrap="square" lIns="0" tIns="0" rIns="0" bIns="0" rtlCol="0" anchor="ctr"/>
+          <a:lstStyle/>
+          <a:p>
+            <a:pPr algn="ctr" indent="0" marL="0">
+              <a:buNone/>
+            </a:pPr>
+            <a:r>
+              <a:rPr lang="en-US" sz="900" b="1" dirty="0">
+                <a:solidFill>
+                  <a:srgbClr val="9D174D"/>
+                </a:solidFill>
+                <a:latin typeface="Trebuchet MS" pitchFamily="34" charset="0"/>
+                <a:ea typeface="Trebuchet MS" pitchFamily="34" charset="-122"/>
+                <a:cs typeface="Trebuchet MS" pitchFamily="34" charset="-120"/>
+              </a:rPr>
+              <a:t>ar</a:t>
+            </a:r>
+            <a:endParaRPr lang="en-US" sz="900" dirty="0"/>
+          </a:p>
+        </p:txBody>
+      </p:sp>
+      <p:sp>
+        <p:nvSpPr>
+          <p:cNvPr id="45" name="Shape 43"/>
+          <p:cNvSpPr/>
+          <p:nvPr/>
+        </p:nvSpPr>
+        <p:spPr>
+          <a:xfrm>
+            <a:off x="7576947" y="4169664"/>
+            <a:ext cx="685800" cy="475488"/>
+          </a:xfrm>
+          <a:prstGeom prst="rect">
+            <a:avLst>
+              <a:gd name="adj" fmla="val 7692"/>
+            </a:avLst>
+          </a:prstGeom>
+          <a:solidFill>
+            <a:srgbClr val="FFFFFF"/>
+          </a:solidFill>
+          <a:ln w="12700">
+            <a:solidFill>
+              <a:srgbClr val="DB2777"/>
+            </a:solidFill>
+            <a:prstDash val="solid"/>
+          </a:ln>
+        </p:spPr>
+      </p:sp>
+      <p:sp>
+        <p:nvSpPr>
+          <p:cNvPr id="46" name="Text 44"/>
+          <p:cNvSpPr/>
+          <p:nvPr/>
+        </p:nvSpPr>
+        <p:spPr>
+          <a:xfrm>
+            <a:off x="7576947" y="4169664"/>
+            <a:ext cx="685800" cy="475488"/>
+          </a:xfrm>
+          <a:prstGeom prst="rect">
+            <a:avLst/>
+          </a:prstGeom>
+          <a:noFill/>
+          <a:ln/>
+        </p:spPr>
+        <p:txBody>
+          <a:bodyPr wrap="square" lIns="0" tIns="0" rIns="0" bIns="0" rtlCol="0" anchor="ctr"/>
+          <a:lstStyle/>
+          <a:p>
+            <a:pPr algn="ctr" indent="0" marL="0">
+              <a:buNone/>
+            </a:pPr>
+            <a:r>
+              <a:rPr lang="en-US" sz="900" b="1" dirty="0">
+                <a:solidFill>
+                  <a:srgbClr val="9D174D"/>
+                </a:solidFill>
+                <a:latin typeface="Trebuchet MS" pitchFamily="34" charset="0"/>
+                <a:ea typeface="Trebuchet MS" pitchFamily="34" charset="-122"/>
+                <a:cs typeface="Trebuchet MS" pitchFamily="34" charset="-120"/>
+              </a:rPr>
+              <a:t>m</a:t>
             </a:r>
             <a:endParaRPr lang="en-US" sz="900" dirty="0"/>
           </a:p>
@@ -10916,7 +11324,7 @@
                 <a:ea typeface="Trebuchet MS" pitchFamily="34" charset="-122"/>
                 <a:cs typeface="Trebuchet MS" pitchFamily="34" charset="-120"/>
               </a:rPr>
-              <a:t>rewarms</a:t>
+              <a:t>warming</a:t>
             </a:r>
             <a:endParaRPr lang="en-US" sz="2800" dirty="0"/>
           </a:p>
@@ -11743,7 +12151,7 @@
                 <a:ea typeface="Trebuchet MS" pitchFamily="34" charset="-122"/>
                 <a:cs typeface="Trebuchet MS" pitchFamily="34" charset="-120"/>
               </a:rPr>
-              <a:t>rewarms</a:t>
+              <a:t>warming</a:t>
             </a:r>
             <a:endParaRPr lang="en-US" sz="2800" dirty="0"/>
           </a:p>
@@ -11823,7 +12231,7 @@
         </p:nvSpPr>
         <p:spPr>
           <a:xfrm>
-            <a:off x="2221992" y="2258568"/>
+            <a:off x="2938272" y="2258568"/>
             <a:ext cx="1828800" cy="292608"/>
           </a:xfrm>
           <a:prstGeom prst="rect">
@@ -11832,11 +12240,11 @@
             </a:avLst>
           </a:prstGeom>
           <a:solidFill>
-            <a:srgbClr val="DDD6FE"/>
+            <a:srgbClr val="CCFBF1"/>
           </a:solidFill>
           <a:ln w="19050">
             <a:solidFill>
-              <a:srgbClr val="7C3AED"/>
+              <a:srgbClr val="0D9488"/>
             </a:solidFill>
             <a:prstDash val="solid"/>
           </a:ln>
@@ -11857,7 +12265,7 @@
         </p:nvSpPr>
         <p:spPr>
           <a:xfrm>
-            <a:off x="2221992" y="2258568"/>
+            <a:off x="2938272" y="2258568"/>
             <a:ext cx="1828800" cy="292608"/>
           </a:xfrm>
           <a:prstGeom prst="rect">
@@ -11876,13 +12284,13 @@
             <a:r>
               <a:rPr lang="en-US" sz="1300" b="1" dirty="0">
                 <a:solidFill>
-                  <a:srgbClr val="4C1D95"/>
+                  <a:srgbClr val="0F766E"/>
                 </a:solidFill>
                 <a:latin typeface="Trebuchet MS" pitchFamily="34" charset="0"/>
                 <a:ea typeface="Trebuchet MS" pitchFamily="34" charset="-122"/>
                 <a:cs typeface="Trebuchet MS" pitchFamily="34" charset="-120"/>
               </a:rPr>
-              <a:t>re</a:t>
+              <a:t>warm</a:t>
             </a:r>
             <a:endParaRPr lang="en-US" sz="1300" dirty="0"/>
           </a:p>
@@ -11896,7 +12304,7 @@
         </p:nvSpPr>
         <p:spPr>
           <a:xfrm>
-            <a:off x="2221992" y="2569464"/>
+            <a:off x="2938272" y="2569464"/>
             <a:ext cx="1828800" cy="201168"/>
           </a:xfrm>
           <a:prstGeom prst="rect">
@@ -11921,7 +12329,7 @@
                 <a:ea typeface="Calibri" pitchFamily="34" charset="-122"/>
                 <a:cs typeface="Calibri" pitchFamily="34" charset="-120"/>
               </a:rPr>
-              <a:t>again</a:t>
+              <a:t>having moderate heat</a:t>
             </a:r>
             <a:endParaRPr lang="en-US" sz="850" dirty="0"/>
           </a:p>
@@ -11935,7 +12343,7 @@
         </p:nvSpPr>
         <p:spPr>
           <a:xfrm>
-            <a:off x="4370832" y="2258568"/>
+            <a:off x="5803392" y="2258568"/>
             <a:ext cx="1828800" cy="292608"/>
           </a:xfrm>
           <a:prstGeom prst="rect">
@@ -11944,11 +12352,11 @@
             </a:avLst>
           </a:prstGeom>
           <a:solidFill>
-            <a:srgbClr val="CCFBF1"/>
+            <a:srgbClr val="FCE7F3"/>
           </a:solidFill>
           <a:ln w="19050">
             <a:solidFill>
-              <a:srgbClr val="0D9488"/>
+              <a:srgbClr val="DB2777"/>
             </a:solidFill>
             <a:prstDash val="solid"/>
           </a:ln>
@@ -11969,7 +12377,7 @@
         </p:nvSpPr>
         <p:spPr>
           <a:xfrm>
-            <a:off x="4370832" y="2258568"/>
+            <a:off x="5803392" y="2258568"/>
             <a:ext cx="1828800" cy="292608"/>
           </a:xfrm>
           <a:prstGeom prst="rect">
@@ -11988,13 +12396,13 @@
             <a:r>
               <a:rPr lang="en-US" sz="1300" b="1" dirty="0">
                 <a:solidFill>
-                  <a:srgbClr val="0F766E"/>
+                  <a:srgbClr val="9D174D"/>
                 </a:solidFill>
                 <a:latin typeface="Trebuchet MS" pitchFamily="34" charset="0"/>
                 <a:ea typeface="Trebuchet MS" pitchFamily="34" charset="-122"/>
                 <a:cs typeface="Trebuchet MS" pitchFamily="34" charset="-120"/>
               </a:rPr>
-              <a:t>warm</a:t>
+              <a:t>ing</a:t>
             </a:r>
             <a:endParaRPr lang="en-US" sz="1300" dirty="0"/>
           </a:p>
@@ -12008,7 +12416,7 @@
         </p:nvSpPr>
         <p:spPr>
           <a:xfrm>
-            <a:off x="4370832" y="2569464"/>
+            <a:off x="5803392" y="2569464"/>
             <a:ext cx="1828800" cy="201168"/>
           </a:xfrm>
           <a:prstGeom prst="rect">
@@ -12033,7 +12441,7 @@
                 <a:ea typeface="Calibri" pitchFamily="34" charset="-122"/>
                 <a:cs typeface="Calibri" pitchFamily="34" charset="-120"/>
               </a:rPr>
-              <a:t>having moderate heat</a:t>
+              <a:t>action in progress</a:t>
             </a:r>
             <a:endParaRPr lang="en-US" sz="850" dirty="0"/>
           </a:p>
@@ -12047,30 +12455,23 @@
         </p:nvSpPr>
         <p:spPr>
           <a:xfrm>
-            <a:off x="6519672" y="2258568"/>
-            <a:ext cx="1828800" cy="292608"/>
+            <a:off x="365760" y="3273552"/>
+            <a:ext cx="1371600" cy="658368"/>
           </a:xfrm>
           <a:prstGeom prst="rect">
             <a:avLst>
-              <a:gd name="adj" fmla="val 25000"/>
+              <a:gd name="adj" fmla="val 8333"/>
             </a:avLst>
           </a:prstGeom>
           <a:solidFill>
-            <a:srgbClr val="FCE7F3"/>
-          </a:solidFill>
-          <a:ln w="19050">
-            <a:solidFill>
-              <a:srgbClr val="DB2777"/>
-            </a:solidFill>
-            <a:prstDash val="solid"/>
-          </a:ln>
-          <a:effectLst>
-            <a:outerShdw sx="100000" sy="100000" kx="0" ky="0" algn="bl" rotWithShape="0" blurRad="101600" dist="38100" dir="8100000">
-              <a:srgbClr val="000000">
-                <a:alpha val="12000"/>
-              </a:srgbClr>
-            </a:outerShdw>
-          </a:effectLst>
+            <a:srgbClr val="E2E8F0"/>
+          </a:solidFill>
+          <a:ln w="12700">
+            <a:solidFill>
+              <a:srgbClr val="E2E8F0"/>
+            </a:solidFill>
+            <a:prstDash val="solid"/>
+          </a:ln>
         </p:spPr>
       </p:sp>
       <p:sp>
@@ -12081,8 +12482,8 @@
         </p:nvSpPr>
         <p:spPr>
           <a:xfrm>
-            <a:off x="6519672" y="2258568"/>
-            <a:ext cx="1828800" cy="292608"/>
+            <a:off x="365760" y="3273552"/>
+            <a:ext cx="1371600" cy="658368"/>
           </a:xfrm>
           <a:prstGeom prst="rect">
             <a:avLst/>
@@ -12098,73 +12499,100 @@
               <a:buNone/>
             </a:pPr>
             <a:r>
-              <a:rPr lang="en-US" sz="1300" b="1" dirty="0">
-                <a:solidFill>
-                  <a:srgbClr val="9D174D"/>
+              <a:rPr lang="en-US" sz="1100" b="1" dirty="0">
+                <a:solidFill>
+                  <a:srgbClr val="475569"/>
                 </a:solidFill>
                 <a:latin typeface="Trebuchet MS" pitchFamily="34" charset="0"/>
                 <a:ea typeface="Trebuchet MS" pitchFamily="34" charset="-122"/>
                 <a:cs typeface="Trebuchet MS" pitchFamily="34" charset="-120"/>
               </a:rPr>
-              <a:t>s</a:t>
-            </a:r>
-            <a:endParaRPr lang="en-US" sz="1300" dirty="0"/>
-          </a:p>
-        </p:txBody>
-      </p:sp>
-      <p:sp>
-        <p:nvSpPr>
-          <p:cNvPr id="24" name="Text 22"/>
-          <p:cNvSpPr/>
-          <p:nvPr/>
-        </p:nvSpPr>
-        <p:spPr>
-          <a:xfrm>
-            <a:off x="6519672" y="2569464"/>
-            <a:ext cx="1828800" cy="201168"/>
-          </a:xfrm>
-          <a:prstGeom prst="rect">
-            <a:avLst/>
-          </a:prstGeom>
-          <a:noFill/>
-          <a:ln/>
-        </p:spPr>
-        <p:txBody>
-          <a:bodyPr wrap="square" lIns="0" tIns="0" rIns="0" bIns="0" rtlCol="0" anchor="t"/>
-          <a:lstStyle/>
-          <a:p>
-            <a:pPr algn="ctr" indent="0" marL="0">
-              <a:buNone/>
-            </a:pPr>
-            <a:r>
-              <a:rPr lang="en-US" sz="850" dirty="0">
-                <a:solidFill>
-                  <a:srgbClr val="475569"/>
+              <a:t>Syllables</a:t>
+            </a:r>
+            <a:endParaRPr lang="en-US" sz="1100" dirty="0"/>
+          </a:p>
+        </p:txBody>
+      </p:sp>
+      <p:sp>
+        <p:nvSpPr>
+          <p:cNvPr id="24" name="Shape 22"/>
+          <p:cNvSpPr/>
+          <p:nvPr/>
+        </p:nvSpPr>
+        <p:spPr>
+          <a:xfrm>
+            <a:off x="1874520" y="3273552"/>
+            <a:ext cx="6903720" cy="658368"/>
+          </a:xfrm>
+          <a:prstGeom prst="rect">
+            <a:avLst>
+              <a:gd name="adj" fmla="val 8333"/>
+            </a:avLst>
+          </a:prstGeom>
+          <a:solidFill>
+            <a:srgbClr val="F8FAFC"/>
+          </a:solidFill>
+          <a:ln w="12700">
+            <a:solidFill>
+              <a:srgbClr val="E2E8F0"/>
+            </a:solidFill>
+            <a:prstDash val="dash"/>
+          </a:ln>
+        </p:spPr>
+      </p:sp>
+      <p:sp>
+        <p:nvSpPr>
+          <p:cNvPr id="25" name="Text 23"/>
+          <p:cNvSpPr/>
+          <p:nvPr/>
+        </p:nvSpPr>
+        <p:spPr>
+          <a:xfrm>
+            <a:off x="1874520" y="3273552"/>
+            <a:ext cx="6903720" cy="658368"/>
+          </a:xfrm>
+          <a:prstGeom prst="rect">
+            <a:avLst/>
+          </a:prstGeom>
+          <a:noFill/>
+          <a:ln/>
+        </p:spPr>
+        <p:txBody>
+          <a:bodyPr wrap="square" rtlCol="0" anchor="ctr"/>
+          <a:lstStyle/>
+          <a:p>
+            <a:pPr algn="ctr" indent="0" marL="0">
+              <a:buNone/>
+            </a:pPr>
+            <a:r>
+              <a:rPr lang="en-US" sz="1100" i="1" dirty="0">
+                <a:solidFill>
+                  <a:srgbClr val="CBD5E1"/>
                 </a:solidFill>
                 <a:latin typeface="Calibri" pitchFamily="34" charset="0"/>
                 <a:ea typeface="Calibri" pitchFamily="34" charset="-122"/>
                 <a:cs typeface="Calibri" pitchFamily="34" charset="-120"/>
               </a:rPr>
-              <a:t>third person singular verb ending</a:t>
-            </a:r>
-            <a:endParaRPr lang="en-US" sz="850" dirty="0"/>
-          </a:p>
-        </p:txBody>
-      </p:sp>
-      <p:sp>
-        <p:nvSpPr>
-          <p:cNvPr id="25" name="Shape 23"/>
-          <p:cNvSpPr/>
-          <p:nvPr/>
-        </p:nvSpPr>
-        <p:spPr>
-          <a:xfrm>
-            <a:off x="365760" y="3273552"/>
-            <a:ext cx="1371600" cy="658368"/>
+              <a:t>Write here...</a:t>
+            </a:r>
+            <a:endParaRPr lang="en-US" sz="1100" dirty="0"/>
+          </a:p>
+        </p:txBody>
+      </p:sp>
+      <p:sp>
+        <p:nvSpPr>
+          <p:cNvPr id="26" name="Shape 24"/>
+          <p:cNvSpPr/>
+          <p:nvPr/>
+        </p:nvSpPr>
+        <p:spPr>
+          <a:xfrm>
+            <a:off x="365760" y="4096512"/>
+            <a:ext cx="1371600" cy="804672"/>
           </a:xfrm>
           <a:prstGeom prst="rect">
             <a:avLst>
-              <a:gd name="adj" fmla="val 8333"/>
+              <a:gd name="adj" fmla="val 6818"/>
             </a:avLst>
           </a:prstGeom>
           <a:solidFill>
@@ -12180,14 +12608,14 @@
       </p:sp>
       <p:sp>
         <p:nvSpPr>
-          <p:cNvPr id="26" name="Text 24"/>
-          <p:cNvSpPr/>
-          <p:nvPr/>
-        </p:nvSpPr>
-        <p:spPr>
-          <a:xfrm>
-            <a:off x="365760" y="3273552"/>
-            <a:ext cx="1371600" cy="658368"/>
+          <p:cNvPr id="27" name="Text 25"/>
+          <p:cNvSpPr/>
+          <p:nvPr/>
+        </p:nvSpPr>
+        <p:spPr>
+          <a:xfrm>
+            <a:off x="365760" y="4096512"/>
+            <a:ext cx="1371600" cy="804672"/>
           </a:xfrm>
           <a:prstGeom prst="rect">
             <a:avLst/>
@@ -12211,7 +12639,7 @@
                 <a:ea typeface="Trebuchet MS" pitchFamily="34" charset="-122"/>
                 <a:cs typeface="Trebuchet MS" pitchFamily="34" charset="-120"/>
               </a:rPr>
-              <a:t>Syllables</a:t>
+              <a:t>Phonemes</a:t>
             </a:r>
             <a:endParaRPr lang="en-US" sz="1100" dirty="0"/>
           </a:p>
@@ -12219,80 +12647,14 @@
       </p:sp>
       <p:sp>
         <p:nvSpPr>
-          <p:cNvPr id="27" name="Shape 25"/>
-          <p:cNvSpPr/>
-          <p:nvPr/>
-        </p:nvSpPr>
-        <p:spPr>
-          <a:xfrm>
-            <a:off x="1874520" y="3273552"/>
-            <a:ext cx="6903720" cy="658368"/>
-          </a:xfrm>
-          <a:prstGeom prst="rect">
-            <a:avLst>
-              <a:gd name="adj" fmla="val 8333"/>
-            </a:avLst>
-          </a:prstGeom>
-          <a:solidFill>
-            <a:srgbClr val="F8FAFC"/>
-          </a:solidFill>
-          <a:ln w="12700">
-            <a:solidFill>
-              <a:srgbClr val="E2E8F0"/>
-            </a:solidFill>
-            <a:prstDash val="dash"/>
-          </a:ln>
-        </p:spPr>
-      </p:sp>
-      <p:sp>
-        <p:nvSpPr>
-          <p:cNvPr id="28" name="Text 26"/>
-          <p:cNvSpPr/>
-          <p:nvPr/>
-        </p:nvSpPr>
-        <p:spPr>
-          <a:xfrm>
-            <a:off x="1874520" y="3273552"/>
-            <a:ext cx="6903720" cy="658368"/>
-          </a:xfrm>
-          <a:prstGeom prst="rect">
-            <a:avLst/>
-          </a:prstGeom>
-          <a:noFill/>
-          <a:ln/>
-        </p:spPr>
-        <p:txBody>
-          <a:bodyPr wrap="square" rtlCol="0" anchor="ctr"/>
-          <a:lstStyle/>
-          <a:p>
-            <a:pPr algn="ctr" indent="0" marL="0">
-              <a:buNone/>
-            </a:pPr>
-            <a:r>
-              <a:rPr lang="en-US" sz="1100" i="1" dirty="0">
-                <a:solidFill>
-                  <a:srgbClr val="CBD5E1"/>
-                </a:solidFill>
-                <a:latin typeface="Calibri" pitchFamily="34" charset="0"/>
-                <a:ea typeface="Calibri" pitchFamily="34" charset="-122"/>
-                <a:cs typeface="Calibri" pitchFamily="34" charset="-120"/>
-              </a:rPr>
-              <a:t>Write here...</a:t>
-            </a:r>
-            <a:endParaRPr lang="en-US" sz="1100" dirty="0"/>
-          </a:p>
-        </p:txBody>
-      </p:sp>
-      <p:sp>
-        <p:nvSpPr>
-          <p:cNvPr id="29" name="Shape 27"/>
-          <p:cNvSpPr/>
-          <p:nvPr/>
-        </p:nvSpPr>
-        <p:spPr>
-          <a:xfrm>
-            <a:off x="365760" y="4096512"/>
-            <a:ext cx="1371600" cy="804672"/>
+          <p:cNvPr id="28" name="Shape 26"/>
+          <p:cNvSpPr/>
+          <p:nvPr/>
+        </p:nvSpPr>
+        <p:spPr>
+          <a:xfrm>
+            <a:off x="1874520" y="4096512"/>
+            <a:ext cx="6903720" cy="804672"/>
           </a:xfrm>
           <a:prstGeom prst="rect">
             <a:avLst>
@@ -12300,85 +12662,19 @@
             </a:avLst>
           </a:prstGeom>
           <a:solidFill>
-            <a:srgbClr val="E2E8F0"/>
+            <a:srgbClr val="F8FAFC"/>
           </a:solidFill>
           <a:ln w="12700">
             <a:solidFill>
               <a:srgbClr val="E2E8F0"/>
             </a:solidFill>
-            <a:prstDash val="solid"/>
-          </a:ln>
-        </p:spPr>
-      </p:sp>
-      <p:sp>
-        <p:nvSpPr>
-          <p:cNvPr id="30" name="Text 28"/>
-          <p:cNvSpPr/>
-          <p:nvPr/>
-        </p:nvSpPr>
-        <p:spPr>
-          <a:xfrm>
-            <a:off x="365760" y="4096512"/>
-            <a:ext cx="1371600" cy="804672"/>
-          </a:xfrm>
-          <a:prstGeom prst="rect">
-            <a:avLst/>
-          </a:prstGeom>
-          <a:noFill/>
-          <a:ln/>
-        </p:spPr>
-        <p:txBody>
-          <a:bodyPr wrap="square" lIns="0" tIns="0" rIns="0" bIns="0" rtlCol="0" anchor="ctr"/>
-          <a:lstStyle/>
-          <a:p>
-            <a:pPr algn="ctr" indent="0" marL="0">
-              <a:buNone/>
-            </a:pPr>
-            <a:r>
-              <a:rPr lang="en-US" sz="1100" b="1" dirty="0">
-                <a:solidFill>
-                  <a:srgbClr val="475569"/>
-                </a:solidFill>
-                <a:latin typeface="Trebuchet MS" pitchFamily="34" charset="0"/>
-                <a:ea typeface="Trebuchet MS" pitchFamily="34" charset="-122"/>
-                <a:cs typeface="Trebuchet MS" pitchFamily="34" charset="-120"/>
-              </a:rPr>
-              <a:t>Phonemes</a:t>
-            </a:r>
-            <a:endParaRPr lang="en-US" sz="1100" dirty="0"/>
-          </a:p>
-        </p:txBody>
-      </p:sp>
-      <p:sp>
-        <p:nvSpPr>
-          <p:cNvPr id="31" name="Shape 29"/>
-          <p:cNvSpPr/>
-          <p:nvPr/>
-        </p:nvSpPr>
-        <p:spPr>
-          <a:xfrm>
-            <a:off x="1874520" y="4096512"/>
-            <a:ext cx="6903720" cy="804672"/>
-          </a:xfrm>
-          <a:prstGeom prst="rect">
-            <a:avLst>
-              <a:gd name="adj" fmla="val 6818"/>
-            </a:avLst>
-          </a:prstGeom>
-          <a:solidFill>
-            <a:srgbClr val="F8FAFC"/>
-          </a:solidFill>
-          <a:ln w="12700">
-            <a:solidFill>
-              <a:srgbClr val="E2E8F0"/>
-            </a:solidFill>
             <a:prstDash val="dash"/>
           </a:ln>
         </p:spPr>
       </p:sp>
       <p:sp>
         <p:nvSpPr>
-          <p:cNvPr id="32" name="Text 30"/>
+          <p:cNvPr id="29" name="Text 27"/>
           <p:cNvSpPr/>
           <p:nvPr/>
         </p:nvSpPr>
@@ -12840,7 +13136,7 @@
                 <a:ea typeface="Trebuchet MS" pitchFamily="34" charset="-122"/>
                 <a:cs typeface="Trebuchet MS" pitchFamily="34" charset="-120"/>
               </a:rPr>
-              <a:t>rewarms</a:t>
+              <a:t>warming</a:t>
             </a:r>
             <a:endParaRPr lang="en-US" sz="2800" dirty="0"/>
           </a:p>
@@ -12920,7 +13216,7 @@
         </p:nvSpPr>
         <p:spPr>
           <a:xfrm>
-            <a:off x="2221992" y="2258568"/>
+            <a:off x="2938272" y="2258568"/>
             <a:ext cx="1828800" cy="292608"/>
           </a:xfrm>
           <a:prstGeom prst="rect">
@@ -12929,11 +13225,11 @@
             </a:avLst>
           </a:prstGeom>
           <a:solidFill>
-            <a:srgbClr val="DDD6FE"/>
+            <a:srgbClr val="CCFBF1"/>
           </a:solidFill>
           <a:ln w="19050">
             <a:solidFill>
-              <a:srgbClr val="7C3AED"/>
+              <a:srgbClr val="0D9488"/>
             </a:solidFill>
             <a:prstDash val="solid"/>
           </a:ln>
@@ -12954,7 +13250,7 @@
         </p:nvSpPr>
         <p:spPr>
           <a:xfrm>
-            <a:off x="2221992" y="2258568"/>
+            <a:off x="2938272" y="2258568"/>
             <a:ext cx="1828800" cy="292608"/>
           </a:xfrm>
           <a:prstGeom prst="rect">
@@ -12973,13 +13269,13 @@
             <a:r>
               <a:rPr lang="en-US" sz="1300" b="1" dirty="0">
                 <a:solidFill>
-                  <a:srgbClr val="4C1D95"/>
+                  <a:srgbClr val="0F766E"/>
                 </a:solidFill>
                 <a:latin typeface="Trebuchet MS" pitchFamily="34" charset="0"/>
                 <a:ea typeface="Trebuchet MS" pitchFamily="34" charset="-122"/>
                 <a:cs typeface="Trebuchet MS" pitchFamily="34" charset="-120"/>
               </a:rPr>
-              <a:t>re</a:t>
+              <a:t>warm</a:t>
             </a:r>
             <a:endParaRPr lang="en-US" sz="1300" dirty="0"/>
           </a:p>
@@ -12993,7 +13289,7 @@
         </p:nvSpPr>
         <p:spPr>
           <a:xfrm>
-            <a:off x="2221992" y="2569464"/>
+            <a:off x="2938272" y="2569464"/>
             <a:ext cx="1828800" cy="201168"/>
           </a:xfrm>
           <a:prstGeom prst="rect">
@@ -13018,7 +13314,7 @@
                 <a:ea typeface="Calibri" pitchFamily="34" charset="-122"/>
                 <a:cs typeface="Calibri" pitchFamily="34" charset="-120"/>
               </a:rPr>
-              <a:t>again</a:t>
+              <a:t>having moderate heat</a:t>
             </a:r>
             <a:endParaRPr lang="en-US" sz="850" dirty="0"/>
           </a:p>
@@ -13032,7 +13328,7 @@
         </p:nvSpPr>
         <p:spPr>
           <a:xfrm>
-            <a:off x="4370832" y="2258568"/>
+            <a:off x="5803392" y="2258568"/>
             <a:ext cx="1828800" cy="292608"/>
           </a:xfrm>
           <a:prstGeom prst="rect">
@@ -13041,11 +13337,11 @@
             </a:avLst>
           </a:prstGeom>
           <a:solidFill>
-            <a:srgbClr val="CCFBF1"/>
+            <a:srgbClr val="FCE7F3"/>
           </a:solidFill>
           <a:ln w="19050">
             <a:solidFill>
-              <a:srgbClr val="0D9488"/>
+              <a:srgbClr val="DB2777"/>
             </a:solidFill>
             <a:prstDash val="solid"/>
           </a:ln>
@@ -13066,7 +13362,7 @@
         </p:nvSpPr>
         <p:spPr>
           <a:xfrm>
-            <a:off x="4370832" y="2258568"/>
+            <a:off x="5803392" y="2258568"/>
             <a:ext cx="1828800" cy="292608"/>
           </a:xfrm>
           <a:prstGeom prst="rect">
@@ -13085,13 +13381,13 @@
             <a:r>
               <a:rPr lang="en-US" sz="1300" b="1" dirty="0">
                 <a:solidFill>
-                  <a:srgbClr val="0F766E"/>
+                  <a:srgbClr val="9D174D"/>
                 </a:solidFill>
                 <a:latin typeface="Trebuchet MS" pitchFamily="34" charset="0"/>
                 <a:ea typeface="Trebuchet MS" pitchFamily="34" charset="-122"/>
                 <a:cs typeface="Trebuchet MS" pitchFamily="34" charset="-120"/>
               </a:rPr>
-              <a:t>warm</a:t>
+              <a:t>ing</a:t>
             </a:r>
             <a:endParaRPr lang="en-US" sz="1300" dirty="0"/>
           </a:p>
@@ -13105,7 +13401,7 @@
         </p:nvSpPr>
         <p:spPr>
           <a:xfrm>
-            <a:off x="4370832" y="2569464"/>
+            <a:off x="5803392" y="2569464"/>
             <a:ext cx="1828800" cy="201168"/>
           </a:xfrm>
           <a:prstGeom prst="rect">
@@ -13130,7 +13426,7 @@
                 <a:ea typeface="Calibri" pitchFamily="34" charset="-122"/>
                 <a:cs typeface="Calibri" pitchFamily="34" charset="-120"/>
               </a:rPr>
-              <a:t>having moderate heat</a:t>
+              <a:t>action in progress</a:t>
             </a:r>
             <a:endParaRPr lang="en-US" sz="850" dirty="0"/>
           </a:p>
@@ -13144,30 +13440,23 @@
         </p:nvSpPr>
         <p:spPr>
           <a:xfrm>
-            <a:off x="6519672" y="2258568"/>
-            <a:ext cx="1828800" cy="292608"/>
+            <a:off x="365760" y="3273552"/>
+            <a:ext cx="1371600" cy="658368"/>
           </a:xfrm>
           <a:prstGeom prst="rect">
             <a:avLst>
-              <a:gd name="adj" fmla="val 25000"/>
+              <a:gd name="adj" fmla="val 8333"/>
             </a:avLst>
           </a:prstGeom>
           <a:solidFill>
-            <a:srgbClr val="FCE7F3"/>
-          </a:solidFill>
-          <a:ln w="19050">
-            <a:solidFill>
-              <a:srgbClr val="DB2777"/>
-            </a:solidFill>
-            <a:prstDash val="solid"/>
-          </a:ln>
-          <a:effectLst>
-            <a:outerShdw sx="100000" sy="100000" kx="0" ky="0" algn="bl" rotWithShape="0" blurRad="101600" dist="38100" dir="8100000">
-              <a:srgbClr val="000000">
-                <a:alpha val="12000"/>
-              </a:srgbClr>
-            </a:outerShdw>
-          </a:effectLst>
+            <a:srgbClr val="E2E8F0"/>
+          </a:solidFill>
+          <a:ln w="12700">
+            <a:solidFill>
+              <a:srgbClr val="E2E8F0"/>
+            </a:solidFill>
+            <a:prstDash val="solid"/>
+          </a:ln>
         </p:spPr>
       </p:sp>
       <p:sp>
@@ -13178,8 +13467,8 @@
         </p:nvSpPr>
         <p:spPr>
           <a:xfrm>
-            <a:off x="6519672" y="2258568"/>
-            <a:ext cx="1828800" cy="292608"/>
+            <a:off x="365760" y="3273552"/>
+            <a:ext cx="1371600" cy="658368"/>
           </a:xfrm>
           <a:prstGeom prst="rect">
             <a:avLst/>
@@ -13195,69 +13484,30 @@
               <a:buNone/>
             </a:pPr>
             <a:r>
-              <a:rPr lang="en-US" sz="1300" b="1" dirty="0">
-                <a:solidFill>
-                  <a:srgbClr val="9D174D"/>
+              <a:rPr lang="en-US" sz="1100" b="1" dirty="0">
+                <a:solidFill>
+                  <a:srgbClr val="475569"/>
                 </a:solidFill>
                 <a:latin typeface="Trebuchet MS" pitchFamily="34" charset="0"/>
                 <a:ea typeface="Trebuchet MS" pitchFamily="34" charset="-122"/>
                 <a:cs typeface="Trebuchet MS" pitchFamily="34" charset="-120"/>
               </a:rPr>
-              <a:t>s</a:t>
-            </a:r>
-            <a:endParaRPr lang="en-US" sz="1300" dirty="0"/>
-          </a:p>
-        </p:txBody>
-      </p:sp>
-      <p:sp>
-        <p:nvSpPr>
-          <p:cNvPr id="24" name="Text 22"/>
-          <p:cNvSpPr/>
-          <p:nvPr/>
-        </p:nvSpPr>
-        <p:spPr>
-          <a:xfrm>
-            <a:off x="6519672" y="2569464"/>
-            <a:ext cx="1828800" cy="201168"/>
-          </a:xfrm>
-          <a:prstGeom prst="rect">
-            <a:avLst/>
-          </a:prstGeom>
-          <a:noFill/>
-          <a:ln/>
-        </p:spPr>
-        <p:txBody>
-          <a:bodyPr wrap="square" lIns="0" tIns="0" rIns="0" bIns="0" rtlCol="0" anchor="t"/>
-          <a:lstStyle/>
-          <a:p>
-            <a:pPr algn="ctr" indent="0" marL="0">
-              <a:buNone/>
-            </a:pPr>
-            <a:r>
-              <a:rPr lang="en-US" sz="850" dirty="0">
-                <a:solidFill>
-                  <a:srgbClr val="475569"/>
-                </a:solidFill>
-                <a:latin typeface="Calibri" pitchFamily="34" charset="0"/>
-                <a:ea typeface="Calibri" pitchFamily="34" charset="-122"/>
-                <a:cs typeface="Calibri" pitchFamily="34" charset="-120"/>
-              </a:rPr>
-              <a:t>third person singular verb ending</a:t>
-            </a:r>
-            <a:endParaRPr lang="en-US" sz="850" dirty="0"/>
-          </a:p>
-        </p:txBody>
-      </p:sp>
-      <p:sp>
-        <p:nvSpPr>
-          <p:cNvPr id="25" name="Shape 23"/>
-          <p:cNvSpPr/>
-          <p:nvPr/>
-        </p:nvSpPr>
-        <p:spPr>
-          <a:xfrm>
-            <a:off x="365760" y="3273552"/>
-            <a:ext cx="1371600" cy="658368"/>
+              <a:t>Syllables</a:t>
+            </a:r>
+            <a:endParaRPr lang="en-US" sz="1100" dirty="0"/>
+          </a:p>
+        </p:txBody>
+      </p:sp>
+      <p:sp>
+        <p:nvSpPr>
+          <p:cNvPr id="24" name="Shape 22"/>
+          <p:cNvSpPr/>
+          <p:nvPr/>
+        </p:nvSpPr>
+        <p:spPr>
+          <a:xfrm>
+            <a:off x="1874520" y="3273552"/>
+            <a:ext cx="6903720" cy="658368"/>
           </a:xfrm>
           <a:prstGeom prst="rect">
             <a:avLst>
@@ -13265,11 +13515,38 @@
             </a:avLst>
           </a:prstGeom>
           <a:solidFill>
-            <a:srgbClr val="E2E8F0"/>
-          </a:solidFill>
-          <a:ln w="12700">
-            <a:solidFill>
-              <a:srgbClr val="E2E8F0"/>
+            <a:srgbClr val="CCFBF1"/>
+          </a:solidFill>
+          <a:ln w="12700">
+            <a:solidFill>
+              <a:srgbClr val="0D9488"/>
+            </a:solidFill>
+            <a:prstDash val="solid"/>
+          </a:ln>
+        </p:spPr>
+      </p:sp>
+      <p:sp>
+        <p:nvSpPr>
+          <p:cNvPr id="25" name="Shape 23"/>
+          <p:cNvSpPr/>
+          <p:nvPr/>
+        </p:nvSpPr>
+        <p:spPr>
+          <a:xfrm>
+            <a:off x="2999232" y="3364992"/>
+            <a:ext cx="1645920" cy="475488"/>
+          </a:xfrm>
+          <a:prstGeom prst="rect">
+            <a:avLst>
+              <a:gd name="adj" fmla="val 9615"/>
+            </a:avLst>
+          </a:prstGeom>
+          <a:solidFill>
+            <a:srgbClr val="FFFFFF"/>
+          </a:solidFill>
+          <a:ln w="12700">
+            <a:solidFill>
+              <a:srgbClr val="0D9488"/>
             </a:solidFill>
             <a:prstDash val="solid"/>
           </a:ln>
@@ -13283,8 +13560,8 @@
         </p:nvSpPr>
         <p:spPr>
           <a:xfrm>
-            <a:off x="365760" y="3273552"/>
-            <a:ext cx="1371600" cy="658368"/>
+            <a:off x="2999232" y="3364992"/>
+            <a:ext cx="1645920" cy="475488"/>
           </a:xfrm>
           <a:prstGeom prst="rect">
             <a:avLst/>
@@ -13300,46 +13577,58 @@
               <a:buNone/>
             </a:pPr>
             <a:r>
-              <a:rPr lang="en-US" sz="1100" b="1" dirty="0">
-                <a:solidFill>
-                  <a:srgbClr val="475569"/>
+              <a:rPr lang="en-US" sz="1400" b="1" dirty="0">
+                <a:solidFill>
+                  <a:srgbClr val="0D9488"/>
                 </a:solidFill>
                 <a:latin typeface="Trebuchet MS" pitchFamily="34" charset="0"/>
                 <a:ea typeface="Trebuchet MS" pitchFamily="34" charset="-122"/>
                 <a:cs typeface="Trebuchet MS" pitchFamily="34" charset="-120"/>
               </a:rPr>
-              <a:t>Syllables</a:t>
-            </a:r>
-            <a:endParaRPr lang="en-US" sz="1100" dirty="0"/>
-          </a:p>
-        </p:txBody>
-      </p:sp>
-      <p:sp>
-        <p:nvSpPr>
-          <p:cNvPr id="27" name="Shape 25"/>
-          <p:cNvSpPr/>
-          <p:nvPr/>
-        </p:nvSpPr>
-        <p:spPr>
-          <a:xfrm>
-            <a:off x="1874520" y="3273552"/>
-            <a:ext cx="6903720" cy="658368"/>
-          </a:xfrm>
-          <a:prstGeom prst="rect">
-            <a:avLst>
-              <a:gd name="adj" fmla="val 8333"/>
-            </a:avLst>
-          </a:prstGeom>
-          <a:solidFill>
-            <a:srgbClr val="CCFBF1"/>
-          </a:solidFill>
-          <a:ln w="12700">
-            <a:solidFill>
-              <a:srgbClr val="0D9488"/>
-            </a:solidFill>
-            <a:prstDash val="solid"/>
-          </a:ln>
-        </p:spPr>
+              <a:t>warm</a:t>
+            </a:r>
+            <a:endParaRPr lang="en-US" sz="1400" dirty="0"/>
+          </a:p>
+        </p:txBody>
+      </p:sp>
+      <p:sp>
+        <p:nvSpPr>
+          <p:cNvPr id="27" name="Text 25"/>
+          <p:cNvSpPr/>
+          <p:nvPr/>
+        </p:nvSpPr>
+        <p:spPr>
+          <a:xfrm>
+            <a:off x="4645152" y="3364992"/>
+            <a:ext cx="1097280" cy="475488"/>
+          </a:xfrm>
+          <a:prstGeom prst="rect">
+            <a:avLst/>
+          </a:prstGeom>
+          <a:noFill/>
+          <a:ln/>
+        </p:spPr>
+        <p:txBody>
+          <a:bodyPr wrap="square" lIns="0" tIns="0" rIns="0" bIns="0" rtlCol="0" anchor="ctr"/>
+          <a:lstStyle/>
+          <a:p>
+            <a:pPr algn="ctr" indent="0" marL="0">
+              <a:buNone/>
+            </a:pPr>
+            <a:r>
+              <a:rPr lang="en-US" sz="1600" b="1" dirty="0">
+                <a:solidFill>
+                  <a:srgbClr val="0D9488"/>
+                </a:solidFill>
+                <a:latin typeface="Trebuchet MS" pitchFamily="34" charset="0"/>
+                <a:ea typeface="Trebuchet MS" pitchFamily="34" charset="-122"/>
+                <a:cs typeface="Trebuchet MS" pitchFamily="34" charset="-120"/>
+              </a:rPr>
+              <a:t>·</a:t>
+            </a:r>
+            <a:endParaRPr lang="en-US" sz="1600" dirty="0"/>
+          </a:p>
+        </p:txBody>
       </p:sp>
       <p:sp>
         <p:nvSpPr>
@@ -13349,7 +13638,7 @@
         </p:nvSpPr>
         <p:spPr>
           <a:xfrm>
-            <a:off x="2999232" y="3364992"/>
+            <a:off x="5742432" y="3364992"/>
             <a:ext cx="1645920" cy="475488"/>
           </a:xfrm>
           <a:prstGeom prst="rect">
@@ -13376,7 +13665,7 @@
         </p:nvSpPr>
         <p:spPr>
           <a:xfrm>
-            <a:off x="2999232" y="3364992"/>
+            <a:off x="5742432" y="3364992"/>
             <a:ext cx="1645920" cy="475488"/>
           </a:xfrm>
           <a:prstGeom prst="rect">
@@ -13401,7 +13690,7 @@
                 <a:ea typeface="Trebuchet MS" pitchFamily="34" charset="-122"/>
                 <a:cs typeface="Trebuchet MS" pitchFamily="34" charset="-120"/>
               </a:rPr>
-              <a:t>re</a:t>
+              <a:t>ing</a:t>
             </a:r>
             <a:endParaRPr lang="en-US" sz="1400" dirty="0"/>
           </a:p>
@@ -13409,14 +13698,41 @@
       </p:sp>
       <p:sp>
         <p:nvSpPr>
-          <p:cNvPr id="30" name="Text 28"/>
-          <p:cNvSpPr/>
-          <p:nvPr/>
-        </p:nvSpPr>
-        <p:spPr>
-          <a:xfrm>
-            <a:off x="4645152" y="3364992"/>
-            <a:ext cx="1097280" cy="475488"/>
+          <p:cNvPr id="30" name="Shape 28"/>
+          <p:cNvSpPr/>
+          <p:nvPr/>
+        </p:nvSpPr>
+        <p:spPr>
+          <a:xfrm>
+            <a:off x="365760" y="4096512"/>
+            <a:ext cx="1371600" cy="804672"/>
+          </a:xfrm>
+          <a:prstGeom prst="rect">
+            <a:avLst>
+              <a:gd name="adj" fmla="val 6818"/>
+            </a:avLst>
+          </a:prstGeom>
+          <a:solidFill>
+            <a:srgbClr val="E2E8F0"/>
+          </a:solidFill>
+          <a:ln w="12700">
+            <a:solidFill>
+              <a:srgbClr val="E2E8F0"/>
+            </a:solidFill>
+            <a:prstDash val="solid"/>
+          </a:ln>
+        </p:spPr>
+      </p:sp>
+      <p:sp>
+        <p:nvSpPr>
+          <p:cNvPr id="31" name="Text 29"/>
+          <p:cNvSpPr/>
+          <p:nvPr/>
+        </p:nvSpPr>
+        <p:spPr>
+          <a:xfrm>
+            <a:off x="365760" y="4096512"/>
+            <a:ext cx="1371600" cy="804672"/>
           </a:xfrm>
           <a:prstGeom prst="rect">
             <a:avLst/>
@@ -13432,96 +13748,30 @@
               <a:buNone/>
             </a:pPr>
             <a:r>
-              <a:rPr lang="en-US" sz="1600" b="1" dirty="0">
-                <a:solidFill>
-                  <a:srgbClr val="0D9488"/>
+              <a:rPr lang="en-US" sz="1100" b="1" dirty="0">
+                <a:solidFill>
+                  <a:srgbClr val="475569"/>
                 </a:solidFill>
                 <a:latin typeface="Trebuchet MS" pitchFamily="34" charset="0"/>
                 <a:ea typeface="Trebuchet MS" pitchFamily="34" charset="-122"/>
                 <a:cs typeface="Trebuchet MS" pitchFamily="34" charset="-120"/>
               </a:rPr>
-              <a:t>·</a:t>
-            </a:r>
-            <a:endParaRPr lang="en-US" sz="1600" dirty="0"/>
-          </a:p>
-        </p:txBody>
-      </p:sp>
-      <p:sp>
-        <p:nvSpPr>
-          <p:cNvPr id="31" name="Shape 29"/>
-          <p:cNvSpPr/>
-          <p:nvPr/>
-        </p:nvSpPr>
-        <p:spPr>
-          <a:xfrm>
-            <a:off x="5742432" y="3364992"/>
-            <a:ext cx="1645920" cy="475488"/>
-          </a:xfrm>
-          <a:prstGeom prst="rect">
-            <a:avLst>
-              <a:gd name="adj" fmla="val 9615"/>
-            </a:avLst>
-          </a:prstGeom>
-          <a:solidFill>
-            <a:srgbClr val="FFFFFF"/>
-          </a:solidFill>
-          <a:ln w="12700">
-            <a:solidFill>
-              <a:srgbClr val="0D9488"/>
-            </a:solidFill>
-            <a:prstDash val="solid"/>
-          </a:ln>
-        </p:spPr>
-      </p:sp>
-      <p:sp>
-        <p:nvSpPr>
-          <p:cNvPr id="32" name="Text 30"/>
-          <p:cNvSpPr/>
-          <p:nvPr/>
-        </p:nvSpPr>
-        <p:spPr>
-          <a:xfrm>
-            <a:off x="5742432" y="3364992"/>
-            <a:ext cx="1645920" cy="475488"/>
-          </a:xfrm>
-          <a:prstGeom prst="rect">
-            <a:avLst/>
-          </a:prstGeom>
-          <a:noFill/>
-          <a:ln/>
-        </p:spPr>
-        <p:txBody>
-          <a:bodyPr wrap="square" lIns="0" tIns="0" rIns="0" bIns="0" rtlCol="0" anchor="ctr"/>
-          <a:lstStyle/>
-          <a:p>
-            <a:pPr algn="ctr" indent="0" marL="0">
-              <a:buNone/>
-            </a:pPr>
-            <a:r>
-              <a:rPr lang="en-US" sz="1400" b="1" dirty="0">
-                <a:solidFill>
-                  <a:srgbClr val="0D9488"/>
-                </a:solidFill>
-                <a:latin typeface="Trebuchet MS" pitchFamily="34" charset="0"/>
-                <a:ea typeface="Trebuchet MS" pitchFamily="34" charset="-122"/>
-                <a:cs typeface="Trebuchet MS" pitchFamily="34" charset="-120"/>
-              </a:rPr>
-              <a:t>warms</a:t>
-            </a:r>
-            <a:endParaRPr lang="en-US" sz="1400" dirty="0"/>
-          </a:p>
-        </p:txBody>
-      </p:sp>
-      <p:sp>
-        <p:nvSpPr>
-          <p:cNvPr id="33" name="Shape 31"/>
-          <p:cNvSpPr/>
-          <p:nvPr/>
-        </p:nvSpPr>
-        <p:spPr>
-          <a:xfrm>
-            <a:off x="365760" y="4096512"/>
-            <a:ext cx="1371600" cy="804672"/>
+              <a:t>Phonemes</a:t>
+            </a:r>
+            <a:endParaRPr lang="en-US" sz="1100" dirty="0"/>
+          </a:p>
+        </p:txBody>
+      </p:sp>
+      <p:sp>
+        <p:nvSpPr>
+          <p:cNvPr id="32" name="Shape 30"/>
+          <p:cNvSpPr/>
+          <p:nvPr/>
+        </p:nvSpPr>
+        <p:spPr>
+          <a:xfrm>
+            <a:off x="1874520" y="4096512"/>
+            <a:ext cx="6903720" cy="804672"/>
           </a:xfrm>
           <a:prstGeom prst="rect">
             <a:avLst>
@@ -13529,85 +13779,19 @@
             </a:avLst>
           </a:prstGeom>
           <a:solidFill>
-            <a:srgbClr val="E2E8F0"/>
+            <a:srgbClr val="F8FAFC"/>
           </a:solidFill>
           <a:ln w="12700">
             <a:solidFill>
               <a:srgbClr val="E2E8F0"/>
             </a:solidFill>
-            <a:prstDash val="solid"/>
-          </a:ln>
-        </p:spPr>
-      </p:sp>
-      <p:sp>
-        <p:nvSpPr>
-          <p:cNvPr id="34" name="Text 32"/>
-          <p:cNvSpPr/>
-          <p:nvPr/>
-        </p:nvSpPr>
-        <p:spPr>
-          <a:xfrm>
-            <a:off x="365760" y="4096512"/>
-            <a:ext cx="1371600" cy="804672"/>
-          </a:xfrm>
-          <a:prstGeom prst="rect">
-            <a:avLst/>
-          </a:prstGeom>
-          <a:noFill/>
-          <a:ln/>
-        </p:spPr>
-        <p:txBody>
-          <a:bodyPr wrap="square" lIns="0" tIns="0" rIns="0" bIns="0" rtlCol="0" anchor="ctr"/>
-          <a:lstStyle/>
-          <a:p>
-            <a:pPr algn="ctr" indent="0" marL="0">
-              <a:buNone/>
-            </a:pPr>
-            <a:r>
-              <a:rPr lang="en-US" sz="1100" b="1" dirty="0">
-                <a:solidFill>
-                  <a:srgbClr val="475569"/>
-                </a:solidFill>
-                <a:latin typeface="Trebuchet MS" pitchFamily="34" charset="0"/>
-                <a:ea typeface="Trebuchet MS" pitchFamily="34" charset="-122"/>
-                <a:cs typeface="Trebuchet MS" pitchFamily="34" charset="-120"/>
-              </a:rPr>
-              <a:t>Phonemes</a:t>
-            </a:r>
-            <a:endParaRPr lang="en-US" sz="1100" dirty="0"/>
-          </a:p>
-        </p:txBody>
-      </p:sp>
-      <p:sp>
-        <p:nvSpPr>
-          <p:cNvPr id="35" name="Shape 33"/>
-          <p:cNvSpPr/>
-          <p:nvPr/>
-        </p:nvSpPr>
-        <p:spPr>
-          <a:xfrm>
-            <a:off x="1874520" y="4096512"/>
-            <a:ext cx="6903720" cy="804672"/>
-          </a:xfrm>
-          <a:prstGeom prst="rect">
-            <a:avLst>
-              <a:gd name="adj" fmla="val 6818"/>
-            </a:avLst>
-          </a:prstGeom>
-          <a:solidFill>
-            <a:srgbClr val="F8FAFC"/>
-          </a:solidFill>
-          <a:ln w="12700">
-            <a:solidFill>
-              <a:srgbClr val="E2E8F0"/>
-            </a:solidFill>
             <a:prstDash val="dash"/>
           </a:ln>
         </p:spPr>
       </p:sp>
       <p:sp>
         <p:nvSpPr>
-          <p:cNvPr id="36" name="Text 34"/>
+          <p:cNvPr id="33" name="Text 31"/>
           <p:cNvSpPr/>
           <p:nvPr/>
         </p:nvSpPr>
@@ -14334,7 +14518,7 @@
                 <a:ea typeface="Trebuchet MS" pitchFamily="34" charset="-122"/>
                 <a:cs typeface="Trebuchet MS" pitchFamily="34" charset="-120"/>
               </a:rPr>
-              <a:t>rewarms</a:t>
+              <a:t>warming</a:t>
             </a:r>
             <a:endParaRPr lang="en-US" sz="2800" dirty="0"/>
           </a:p>
@@ -14414,7 +14598,7 @@
         </p:nvSpPr>
         <p:spPr>
           <a:xfrm>
-            <a:off x="2221992" y="2258568"/>
+            <a:off x="2938272" y="2258568"/>
             <a:ext cx="1828800" cy="292608"/>
           </a:xfrm>
           <a:prstGeom prst="rect">
@@ -14423,11 +14607,11 @@
             </a:avLst>
           </a:prstGeom>
           <a:solidFill>
-            <a:srgbClr val="DDD6FE"/>
+            <a:srgbClr val="CCFBF1"/>
           </a:solidFill>
           <a:ln w="19050">
             <a:solidFill>
-              <a:srgbClr val="7C3AED"/>
+              <a:srgbClr val="0D9488"/>
             </a:solidFill>
             <a:prstDash val="solid"/>
           </a:ln>
@@ -14448,7 +14632,7 @@
         </p:nvSpPr>
         <p:spPr>
           <a:xfrm>
-            <a:off x="2221992" y="2258568"/>
+            <a:off x="2938272" y="2258568"/>
             <a:ext cx="1828800" cy="292608"/>
           </a:xfrm>
           <a:prstGeom prst="rect">
@@ -14467,13 +14651,13 @@
             <a:r>
               <a:rPr lang="en-US" sz="1300" b="1" dirty="0">
                 <a:solidFill>
-                  <a:srgbClr val="4C1D95"/>
+                  <a:srgbClr val="0F766E"/>
                 </a:solidFill>
                 <a:latin typeface="Trebuchet MS" pitchFamily="34" charset="0"/>
                 <a:ea typeface="Trebuchet MS" pitchFamily="34" charset="-122"/>
                 <a:cs typeface="Trebuchet MS" pitchFamily="34" charset="-120"/>
               </a:rPr>
-              <a:t>re</a:t>
+              <a:t>warm</a:t>
             </a:r>
             <a:endParaRPr lang="en-US" sz="1300" dirty="0"/>
           </a:p>
@@ -14487,7 +14671,7 @@
         </p:nvSpPr>
         <p:spPr>
           <a:xfrm>
-            <a:off x="2221992" y="2569464"/>
+            <a:off x="2938272" y="2569464"/>
             <a:ext cx="1828800" cy="201168"/>
           </a:xfrm>
           <a:prstGeom prst="rect">
@@ -14512,7 +14696,7 @@
                 <a:ea typeface="Calibri" pitchFamily="34" charset="-122"/>
                 <a:cs typeface="Calibri" pitchFamily="34" charset="-120"/>
               </a:rPr>
-              <a:t>again</a:t>
+              <a:t>having moderate heat</a:t>
             </a:r>
             <a:endParaRPr lang="en-US" sz="850" dirty="0"/>
           </a:p>
@@ -14526,7 +14710,7 @@
         </p:nvSpPr>
         <p:spPr>
           <a:xfrm>
-            <a:off x="4370832" y="2258568"/>
+            <a:off x="5803392" y="2258568"/>
             <a:ext cx="1828800" cy="292608"/>
           </a:xfrm>
           <a:prstGeom prst="rect">
@@ -14535,11 +14719,11 @@
             </a:avLst>
           </a:prstGeom>
           <a:solidFill>
-            <a:srgbClr val="CCFBF1"/>
+            <a:srgbClr val="FCE7F3"/>
           </a:solidFill>
           <a:ln w="19050">
             <a:solidFill>
-              <a:srgbClr val="0D9488"/>
+              <a:srgbClr val="DB2777"/>
             </a:solidFill>
             <a:prstDash val="solid"/>
           </a:ln>
@@ -14560,7 +14744,7 @@
         </p:nvSpPr>
         <p:spPr>
           <a:xfrm>
-            <a:off x="4370832" y="2258568"/>
+            <a:off x="5803392" y="2258568"/>
             <a:ext cx="1828800" cy="292608"/>
           </a:xfrm>
           <a:prstGeom prst="rect">
@@ -14579,13 +14763,13 @@
             <a:r>
               <a:rPr lang="en-US" sz="1300" b="1" dirty="0">
                 <a:solidFill>
-                  <a:srgbClr val="0F766E"/>
+                  <a:srgbClr val="9D174D"/>
                 </a:solidFill>
                 <a:latin typeface="Trebuchet MS" pitchFamily="34" charset="0"/>
                 <a:ea typeface="Trebuchet MS" pitchFamily="34" charset="-122"/>
                 <a:cs typeface="Trebuchet MS" pitchFamily="34" charset="-120"/>
               </a:rPr>
-              <a:t>warm</a:t>
+              <a:t>ing</a:t>
             </a:r>
             <a:endParaRPr lang="en-US" sz="1300" dirty="0"/>
           </a:p>
@@ -14599,7 +14783,7 @@
         </p:nvSpPr>
         <p:spPr>
           <a:xfrm>
-            <a:off x="4370832" y="2569464"/>
+            <a:off x="5803392" y="2569464"/>
             <a:ext cx="1828800" cy="201168"/>
           </a:xfrm>
           <a:prstGeom prst="rect">
@@ -14624,7 +14808,7 @@
                 <a:ea typeface="Calibri" pitchFamily="34" charset="-122"/>
                 <a:cs typeface="Calibri" pitchFamily="34" charset="-120"/>
               </a:rPr>
-              <a:t>having moderate heat</a:t>
+              <a:t>action in progress</a:t>
             </a:r>
             <a:endParaRPr lang="en-US" sz="850" dirty="0"/>
           </a:p>
@@ -14638,30 +14822,23 @@
         </p:nvSpPr>
         <p:spPr>
           <a:xfrm>
-            <a:off x="6519672" y="2258568"/>
-            <a:ext cx="1828800" cy="292608"/>
+            <a:off x="365760" y="3273552"/>
+            <a:ext cx="1371600" cy="658368"/>
           </a:xfrm>
           <a:prstGeom prst="rect">
             <a:avLst>
-              <a:gd name="adj" fmla="val 25000"/>
+              <a:gd name="adj" fmla="val 8333"/>
             </a:avLst>
           </a:prstGeom>
           <a:solidFill>
-            <a:srgbClr val="FCE7F3"/>
-          </a:solidFill>
-          <a:ln w="19050">
-            <a:solidFill>
-              <a:srgbClr val="DB2777"/>
-            </a:solidFill>
-            <a:prstDash val="solid"/>
-          </a:ln>
-          <a:effectLst>
-            <a:outerShdw sx="100000" sy="100000" kx="0" ky="0" algn="bl" rotWithShape="0" blurRad="101600" dist="38100" dir="8100000">
-              <a:srgbClr val="000000">
-                <a:alpha val="12000"/>
-              </a:srgbClr>
-            </a:outerShdw>
-          </a:effectLst>
+            <a:srgbClr val="E2E8F0"/>
+          </a:solidFill>
+          <a:ln w="12700">
+            <a:solidFill>
+              <a:srgbClr val="E2E8F0"/>
+            </a:solidFill>
+            <a:prstDash val="solid"/>
+          </a:ln>
         </p:spPr>
       </p:sp>
       <p:sp>
@@ -14672,8 +14849,8 @@
         </p:nvSpPr>
         <p:spPr>
           <a:xfrm>
-            <a:off x="6519672" y="2258568"/>
-            <a:ext cx="1828800" cy="292608"/>
+            <a:off x="365760" y="3273552"/>
+            <a:ext cx="1371600" cy="658368"/>
           </a:xfrm>
           <a:prstGeom prst="rect">
             <a:avLst/>
@@ -14689,69 +14866,30 @@
               <a:buNone/>
             </a:pPr>
             <a:r>
-              <a:rPr lang="en-US" sz="1300" b="1" dirty="0">
-                <a:solidFill>
-                  <a:srgbClr val="9D174D"/>
+              <a:rPr lang="en-US" sz="1100" b="1" dirty="0">
+                <a:solidFill>
+                  <a:srgbClr val="475569"/>
                 </a:solidFill>
                 <a:latin typeface="Trebuchet MS" pitchFamily="34" charset="0"/>
                 <a:ea typeface="Trebuchet MS" pitchFamily="34" charset="-122"/>
                 <a:cs typeface="Trebuchet MS" pitchFamily="34" charset="-120"/>
               </a:rPr>
-              <a:t>s</a:t>
-            </a:r>
-            <a:endParaRPr lang="en-US" sz="1300" dirty="0"/>
-          </a:p>
-        </p:txBody>
-      </p:sp>
-      <p:sp>
-        <p:nvSpPr>
-          <p:cNvPr id="24" name="Text 22"/>
-          <p:cNvSpPr/>
-          <p:nvPr/>
-        </p:nvSpPr>
-        <p:spPr>
-          <a:xfrm>
-            <a:off x="6519672" y="2569464"/>
-            <a:ext cx="1828800" cy="201168"/>
-          </a:xfrm>
-          <a:prstGeom prst="rect">
-            <a:avLst/>
-          </a:prstGeom>
-          <a:noFill/>
-          <a:ln/>
-        </p:spPr>
-        <p:txBody>
-          <a:bodyPr wrap="square" lIns="0" tIns="0" rIns="0" bIns="0" rtlCol="0" anchor="t"/>
-          <a:lstStyle/>
-          <a:p>
-            <a:pPr algn="ctr" indent="0" marL="0">
-              <a:buNone/>
-            </a:pPr>
-            <a:r>
-              <a:rPr lang="en-US" sz="850" dirty="0">
-                <a:solidFill>
-                  <a:srgbClr val="475569"/>
-                </a:solidFill>
-                <a:latin typeface="Calibri" pitchFamily="34" charset="0"/>
-                <a:ea typeface="Calibri" pitchFamily="34" charset="-122"/>
-                <a:cs typeface="Calibri" pitchFamily="34" charset="-120"/>
-              </a:rPr>
-              <a:t>third person singular verb ending</a:t>
-            </a:r>
-            <a:endParaRPr lang="en-US" sz="850" dirty="0"/>
-          </a:p>
-        </p:txBody>
-      </p:sp>
-      <p:sp>
-        <p:nvSpPr>
-          <p:cNvPr id="25" name="Shape 23"/>
-          <p:cNvSpPr/>
-          <p:nvPr/>
-        </p:nvSpPr>
-        <p:spPr>
-          <a:xfrm>
-            <a:off x="365760" y="3273552"/>
-            <a:ext cx="1371600" cy="658368"/>
+              <a:t>Syllables</a:t>
+            </a:r>
+            <a:endParaRPr lang="en-US" sz="1100" dirty="0"/>
+          </a:p>
+        </p:txBody>
+      </p:sp>
+      <p:sp>
+        <p:nvSpPr>
+          <p:cNvPr id="24" name="Shape 22"/>
+          <p:cNvSpPr/>
+          <p:nvPr/>
+        </p:nvSpPr>
+        <p:spPr>
+          <a:xfrm>
+            <a:off x="1874520" y="3273552"/>
+            <a:ext cx="6903720" cy="658368"/>
           </a:xfrm>
           <a:prstGeom prst="rect">
             <a:avLst>
@@ -14759,11 +14897,38 @@
             </a:avLst>
           </a:prstGeom>
           <a:solidFill>
-            <a:srgbClr val="E2E8F0"/>
-          </a:solidFill>
-          <a:ln w="12700">
-            <a:solidFill>
-              <a:srgbClr val="E2E8F0"/>
+            <a:srgbClr val="CCFBF1"/>
+          </a:solidFill>
+          <a:ln w="12700">
+            <a:solidFill>
+              <a:srgbClr val="0D9488"/>
+            </a:solidFill>
+            <a:prstDash val="solid"/>
+          </a:ln>
+        </p:spPr>
+      </p:sp>
+      <p:sp>
+        <p:nvSpPr>
+          <p:cNvPr id="25" name="Shape 23"/>
+          <p:cNvSpPr/>
+          <p:nvPr/>
+        </p:nvSpPr>
+        <p:spPr>
+          <a:xfrm>
+            <a:off x="2999232" y="3364992"/>
+            <a:ext cx="1645920" cy="475488"/>
+          </a:xfrm>
+          <a:prstGeom prst="rect">
+            <a:avLst>
+              <a:gd name="adj" fmla="val 9615"/>
+            </a:avLst>
+          </a:prstGeom>
+          <a:solidFill>
+            <a:srgbClr val="FFFFFF"/>
+          </a:solidFill>
+          <a:ln w="12700">
+            <a:solidFill>
+              <a:srgbClr val="0D9488"/>
             </a:solidFill>
             <a:prstDash val="solid"/>
           </a:ln>
@@ -14777,8 +14942,8 @@
         </p:nvSpPr>
         <p:spPr>
           <a:xfrm>
-            <a:off x="365760" y="3273552"/>
-            <a:ext cx="1371600" cy="658368"/>
+            <a:off x="2999232" y="3364992"/>
+            <a:ext cx="1645920" cy="475488"/>
           </a:xfrm>
           <a:prstGeom prst="rect">
             <a:avLst/>
@@ -14794,15 +14959,186 @@
               <a:buNone/>
             </a:pPr>
             <a:r>
-              <a:rPr lang="en-US" sz="1100" b="1" dirty="0">
-                <a:solidFill>
-                  <a:srgbClr val="475569"/>
+              <a:rPr lang="en-US" sz="1400" b="1" dirty="0">
+                <a:solidFill>
+                  <a:srgbClr val="0D9488"/>
                 </a:solidFill>
                 <a:latin typeface="Trebuchet MS" pitchFamily="34" charset="0"/>
                 <a:ea typeface="Trebuchet MS" pitchFamily="34" charset="-122"/>
                 <a:cs typeface="Trebuchet MS" pitchFamily="34" charset="-120"/>
               </a:rPr>
-              <a:t>Syllables</a:t>
+              <a:t>warm</a:t>
+            </a:r>
+            <a:endParaRPr lang="en-US" sz="1400" dirty="0"/>
+          </a:p>
+        </p:txBody>
+      </p:sp>
+      <p:sp>
+        <p:nvSpPr>
+          <p:cNvPr id="27" name="Text 25"/>
+          <p:cNvSpPr/>
+          <p:nvPr/>
+        </p:nvSpPr>
+        <p:spPr>
+          <a:xfrm>
+            <a:off x="4645152" y="3364992"/>
+            <a:ext cx="1097280" cy="475488"/>
+          </a:xfrm>
+          <a:prstGeom prst="rect">
+            <a:avLst/>
+          </a:prstGeom>
+          <a:noFill/>
+          <a:ln/>
+        </p:spPr>
+        <p:txBody>
+          <a:bodyPr wrap="square" lIns="0" tIns="0" rIns="0" bIns="0" rtlCol="0" anchor="ctr"/>
+          <a:lstStyle/>
+          <a:p>
+            <a:pPr algn="ctr" indent="0" marL="0">
+              <a:buNone/>
+            </a:pPr>
+            <a:r>
+              <a:rPr lang="en-US" sz="1600" b="1" dirty="0">
+                <a:solidFill>
+                  <a:srgbClr val="0D9488"/>
+                </a:solidFill>
+                <a:latin typeface="Trebuchet MS" pitchFamily="34" charset="0"/>
+                <a:ea typeface="Trebuchet MS" pitchFamily="34" charset="-122"/>
+                <a:cs typeface="Trebuchet MS" pitchFamily="34" charset="-120"/>
+              </a:rPr>
+              <a:t>·</a:t>
+            </a:r>
+            <a:endParaRPr lang="en-US" sz="1600" dirty="0"/>
+          </a:p>
+        </p:txBody>
+      </p:sp>
+      <p:sp>
+        <p:nvSpPr>
+          <p:cNvPr id="28" name="Shape 26"/>
+          <p:cNvSpPr/>
+          <p:nvPr/>
+        </p:nvSpPr>
+        <p:spPr>
+          <a:xfrm>
+            <a:off x="5742432" y="3364992"/>
+            <a:ext cx="1645920" cy="475488"/>
+          </a:xfrm>
+          <a:prstGeom prst="rect">
+            <a:avLst>
+              <a:gd name="adj" fmla="val 9615"/>
+            </a:avLst>
+          </a:prstGeom>
+          <a:solidFill>
+            <a:srgbClr val="FFFFFF"/>
+          </a:solidFill>
+          <a:ln w="12700">
+            <a:solidFill>
+              <a:srgbClr val="0D9488"/>
+            </a:solidFill>
+            <a:prstDash val="solid"/>
+          </a:ln>
+        </p:spPr>
+      </p:sp>
+      <p:sp>
+        <p:nvSpPr>
+          <p:cNvPr id="29" name="Text 27"/>
+          <p:cNvSpPr/>
+          <p:nvPr/>
+        </p:nvSpPr>
+        <p:spPr>
+          <a:xfrm>
+            <a:off x="5742432" y="3364992"/>
+            <a:ext cx="1645920" cy="475488"/>
+          </a:xfrm>
+          <a:prstGeom prst="rect">
+            <a:avLst/>
+          </a:prstGeom>
+          <a:noFill/>
+          <a:ln/>
+        </p:spPr>
+        <p:txBody>
+          <a:bodyPr wrap="square" lIns="0" tIns="0" rIns="0" bIns="0" rtlCol="0" anchor="ctr"/>
+          <a:lstStyle/>
+          <a:p>
+            <a:pPr algn="ctr" indent="0" marL="0">
+              <a:buNone/>
+            </a:pPr>
+            <a:r>
+              <a:rPr lang="en-US" sz="1400" b="1" dirty="0">
+                <a:solidFill>
+                  <a:srgbClr val="0D9488"/>
+                </a:solidFill>
+                <a:latin typeface="Trebuchet MS" pitchFamily="34" charset="0"/>
+                <a:ea typeface="Trebuchet MS" pitchFamily="34" charset="-122"/>
+                <a:cs typeface="Trebuchet MS" pitchFamily="34" charset="-120"/>
+              </a:rPr>
+              <a:t>ing</a:t>
+            </a:r>
+            <a:endParaRPr lang="en-US" sz="1400" dirty="0"/>
+          </a:p>
+        </p:txBody>
+      </p:sp>
+      <p:sp>
+        <p:nvSpPr>
+          <p:cNvPr id="30" name="Shape 28"/>
+          <p:cNvSpPr/>
+          <p:nvPr/>
+        </p:nvSpPr>
+        <p:spPr>
+          <a:xfrm>
+            <a:off x="365760" y="4096512"/>
+            <a:ext cx="1371600" cy="804672"/>
+          </a:xfrm>
+          <a:prstGeom prst="rect">
+            <a:avLst>
+              <a:gd name="adj" fmla="val 6818"/>
+            </a:avLst>
+          </a:prstGeom>
+          <a:solidFill>
+            <a:srgbClr val="E2E8F0"/>
+          </a:solidFill>
+          <a:ln w="12700">
+            <a:solidFill>
+              <a:srgbClr val="E2E8F0"/>
+            </a:solidFill>
+            <a:prstDash val="solid"/>
+          </a:ln>
+        </p:spPr>
+      </p:sp>
+      <p:sp>
+        <p:nvSpPr>
+          <p:cNvPr id="31" name="Text 29"/>
+          <p:cNvSpPr/>
+          <p:nvPr/>
+        </p:nvSpPr>
+        <p:spPr>
+          <a:xfrm>
+            <a:off x="365760" y="4096512"/>
+            <a:ext cx="1371600" cy="804672"/>
+          </a:xfrm>
+          <a:prstGeom prst="rect">
+            <a:avLst/>
+          </a:prstGeom>
+          <a:noFill/>
+          <a:ln/>
+        </p:spPr>
+        <p:txBody>
+          <a:bodyPr wrap="square" lIns="0" tIns="0" rIns="0" bIns="0" rtlCol="0" anchor="ctr"/>
+          <a:lstStyle/>
+          <a:p>
+            <a:pPr algn="ctr" indent="0" marL="0">
+              <a:buNone/>
+            </a:pPr>
+            <a:r>
+              <a:rPr lang="en-US" sz="1100" b="1" dirty="0">
+                <a:solidFill>
+                  <a:srgbClr val="475569"/>
+                </a:solidFill>
+                <a:latin typeface="Trebuchet MS" pitchFamily="34" charset="0"/>
+                <a:ea typeface="Trebuchet MS" pitchFamily="34" charset="-122"/>
+                <a:cs typeface="Trebuchet MS" pitchFamily="34" charset="-120"/>
+              </a:rPr>
+              <a:t>Phonemes</a:t>
             </a:r>
             <a:endParaRPr lang="en-US" sz="1100" dirty="0"/>
           </a:p>
@@ -14810,13 +15146,13 @@
       </p:sp>
       <p:sp>
         <p:nvSpPr>
-          <p:cNvPr id="27" name="Shape 25"/>
-          <p:cNvSpPr/>
-          <p:nvPr/>
-        </p:nvSpPr>
-        <p:spPr>
-          <a:xfrm>
-            <a:off x="1874520" y="3273552"/>
+          <p:cNvPr id="32" name="Shape 30"/>
+          <p:cNvSpPr/>
+          <p:nvPr/>
+        </p:nvSpPr>
+        <p:spPr>
+          <a:xfrm>
+            <a:off x="1874520" y="4096512"/>
             <a:ext cx="6903720" cy="658368"/>
           </a:xfrm>
           <a:prstGeom prst="rect">
@@ -14825,30 +15161,30 @@
             </a:avLst>
           </a:prstGeom>
           <a:solidFill>
-            <a:srgbClr val="CCFBF1"/>
-          </a:solidFill>
-          <a:ln w="12700">
-            <a:solidFill>
-              <a:srgbClr val="0D9488"/>
-            </a:solidFill>
-            <a:prstDash val="solid"/>
-          </a:ln>
-        </p:spPr>
-      </p:sp>
-      <p:sp>
-        <p:nvSpPr>
-          <p:cNvPr id="28" name="Shape 26"/>
-          <p:cNvSpPr/>
-          <p:nvPr/>
-        </p:nvSpPr>
-        <p:spPr>
-          <a:xfrm>
-            <a:off x="2999232" y="3364992"/>
-            <a:ext cx="1645920" cy="475488"/>
+            <a:srgbClr val="FCE7F3"/>
+          </a:solidFill>
+          <a:ln w="12700">
+            <a:solidFill>
+              <a:srgbClr val="DB2777"/>
+            </a:solidFill>
+            <a:prstDash val="solid"/>
+          </a:ln>
+        </p:spPr>
+      </p:sp>
+      <p:sp>
+        <p:nvSpPr>
+          <p:cNvPr id="33" name="Shape 31"/>
+          <p:cNvSpPr/>
+          <p:nvPr/>
+        </p:nvSpPr>
+        <p:spPr>
+          <a:xfrm>
+            <a:off x="2427732" y="4169664"/>
+            <a:ext cx="685800" cy="475488"/>
           </a:xfrm>
           <a:prstGeom prst="rect">
             <a:avLst>
-              <a:gd name="adj" fmla="val 9615"/>
+              <a:gd name="adj" fmla="val 7692"/>
             </a:avLst>
           </a:prstGeom>
           <a:solidFill>
@@ -14856,22 +15192,22 @@
           </a:solidFill>
           <a:ln w="12700">
             <a:solidFill>
-              <a:srgbClr val="0D9488"/>
-            </a:solidFill>
-            <a:prstDash val="solid"/>
-          </a:ln>
-        </p:spPr>
-      </p:sp>
-      <p:sp>
-        <p:nvSpPr>
-          <p:cNvPr id="29" name="Text 27"/>
-          <p:cNvSpPr/>
-          <p:nvPr/>
-        </p:nvSpPr>
-        <p:spPr>
-          <a:xfrm>
-            <a:off x="2999232" y="3364992"/>
-            <a:ext cx="1645920" cy="475488"/>
+              <a:srgbClr val="DB2777"/>
+            </a:solidFill>
+            <a:prstDash val="solid"/>
+          </a:ln>
+        </p:spPr>
+      </p:sp>
+      <p:sp>
+        <p:nvSpPr>
+          <p:cNvPr id="34" name="Text 32"/>
+          <p:cNvSpPr/>
+          <p:nvPr/>
+        </p:nvSpPr>
+        <p:spPr>
+          <a:xfrm>
+            <a:off x="2427732" y="4169664"/>
+            <a:ext cx="685800" cy="475488"/>
           </a:xfrm>
           <a:prstGeom prst="rect">
             <a:avLst/>
@@ -14887,30 +15223,57 @@
               <a:buNone/>
             </a:pPr>
             <a:r>
-              <a:rPr lang="en-US" sz="1400" b="1" dirty="0">
-                <a:solidFill>
-                  <a:srgbClr val="0D9488"/>
+              <a:rPr lang="en-US" sz="900" b="1" dirty="0">
+                <a:solidFill>
+                  <a:srgbClr val="9D174D"/>
                 </a:solidFill>
                 <a:latin typeface="Trebuchet MS" pitchFamily="34" charset="0"/>
                 <a:ea typeface="Trebuchet MS" pitchFamily="34" charset="-122"/>
                 <a:cs typeface="Trebuchet MS" pitchFamily="34" charset="-120"/>
               </a:rPr>
-              <a:t>re</a:t>
-            </a:r>
-            <a:endParaRPr lang="en-US" sz="1400" dirty="0"/>
-          </a:p>
-        </p:txBody>
-      </p:sp>
-      <p:sp>
-        <p:nvSpPr>
-          <p:cNvPr id="30" name="Text 28"/>
-          <p:cNvSpPr/>
-          <p:nvPr/>
-        </p:nvSpPr>
-        <p:spPr>
-          <a:xfrm>
-            <a:off x="4645152" y="3364992"/>
-            <a:ext cx="1097280" cy="475488"/>
+              <a:t>w</a:t>
+            </a:r>
+            <a:endParaRPr lang="en-US" sz="900" dirty="0"/>
+          </a:p>
+        </p:txBody>
+      </p:sp>
+      <p:sp>
+        <p:nvSpPr>
+          <p:cNvPr id="35" name="Shape 33"/>
+          <p:cNvSpPr/>
+          <p:nvPr/>
+        </p:nvSpPr>
+        <p:spPr>
+          <a:xfrm>
+            <a:off x="3639312" y="4169664"/>
+            <a:ext cx="685800" cy="475488"/>
+          </a:xfrm>
+          <a:prstGeom prst="rect">
+            <a:avLst>
+              <a:gd name="adj" fmla="val 7692"/>
+            </a:avLst>
+          </a:prstGeom>
+          <a:solidFill>
+            <a:srgbClr val="FFFFFF"/>
+          </a:solidFill>
+          <a:ln w="12700">
+            <a:solidFill>
+              <a:srgbClr val="DB2777"/>
+            </a:solidFill>
+            <a:prstDash val="solid"/>
+          </a:ln>
+        </p:spPr>
+      </p:sp>
+      <p:sp>
+        <p:nvSpPr>
+          <p:cNvPr id="36" name="Text 34"/>
+          <p:cNvSpPr/>
+          <p:nvPr/>
+        </p:nvSpPr>
+        <p:spPr>
+          <a:xfrm>
+            <a:off x="3639312" y="4169664"/>
+            <a:ext cx="685800" cy="475488"/>
           </a:xfrm>
           <a:prstGeom prst="rect">
             <a:avLst/>
@@ -14926,34 +15289,34 @@
               <a:buNone/>
             </a:pPr>
             <a:r>
-              <a:rPr lang="en-US" sz="1600" b="1" dirty="0">
-                <a:solidFill>
-                  <a:srgbClr val="0D9488"/>
+              <a:rPr lang="en-US" sz="900" b="1" dirty="0">
+                <a:solidFill>
+                  <a:srgbClr val="9D174D"/>
                 </a:solidFill>
                 <a:latin typeface="Trebuchet MS" pitchFamily="34" charset="0"/>
                 <a:ea typeface="Trebuchet MS" pitchFamily="34" charset="-122"/>
                 <a:cs typeface="Trebuchet MS" pitchFamily="34" charset="-120"/>
               </a:rPr>
-              <a:t>·</a:t>
-            </a:r>
-            <a:endParaRPr lang="en-US" sz="1600" dirty="0"/>
-          </a:p>
-        </p:txBody>
-      </p:sp>
-      <p:sp>
-        <p:nvSpPr>
-          <p:cNvPr id="31" name="Shape 29"/>
-          <p:cNvSpPr/>
-          <p:nvPr/>
-        </p:nvSpPr>
-        <p:spPr>
-          <a:xfrm>
-            <a:off x="5742432" y="3364992"/>
-            <a:ext cx="1645920" cy="475488"/>
+              <a:t>ar</a:t>
+            </a:r>
+            <a:endParaRPr lang="en-US" sz="900" dirty="0"/>
+          </a:p>
+        </p:txBody>
+      </p:sp>
+      <p:sp>
+        <p:nvSpPr>
+          <p:cNvPr id="37" name="Shape 35"/>
+          <p:cNvSpPr/>
+          <p:nvPr/>
+        </p:nvSpPr>
+        <p:spPr>
+          <a:xfrm>
+            <a:off x="4850892" y="4169664"/>
+            <a:ext cx="685800" cy="475488"/>
           </a:xfrm>
           <a:prstGeom prst="rect">
             <a:avLst>
-              <a:gd name="adj" fmla="val 9615"/>
+              <a:gd name="adj" fmla="val 7692"/>
             </a:avLst>
           </a:prstGeom>
           <a:solidFill>
@@ -14961,22 +15324,22 @@
           </a:solidFill>
           <a:ln w="12700">
             <a:solidFill>
-              <a:srgbClr val="0D9488"/>
-            </a:solidFill>
-            <a:prstDash val="solid"/>
-          </a:ln>
-        </p:spPr>
-      </p:sp>
-      <p:sp>
-        <p:nvSpPr>
-          <p:cNvPr id="32" name="Text 30"/>
-          <p:cNvSpPr/>
-          <p:nvPr/>
-        </p:nvSpPr>
-        <p:spPr>
-          <a:xfrm>
-            <a:off x="5742432" y="3364992"/>
-            <a:ext cx="1645920" cy="475488"/>
+              <a:srgbClr val="DB2777"/>
+            </a:solidFill>
+            <a:prstDash val="solid"/>
+          </a:ln>
+        </p:spPr>
+      </p:sp>
+      <p:sp>
+        <p:nvSpPr>
+          <p:cNvPr id="38" name="Text 36"/>
+          <p:cNvSpPr/>
+          <p:nvPr/>
+        </p:nvSpPr>
+        <p:spPr>
+          <a:xfrm>
+            <a:off x="4850892" y="4169664"/>
+            <a:ext cx="685800" cy="475488"/>
           </a:xfrm>
           <a:prstGeom prst="rect">
             <a:avLst/>
@@ -14992,57 +15355,57 @@
               <a:buNone/>
             </a:pPr>
             <a:r>
-              <a:rPr lang="en-US" sz="1400" b="1" dirty="0">
-                <a:solidFill>
-                  <a:srgbClr val="0D9488"/>
+              <a:rPr lang="en-US" sz="900" b="1" dirty="0">
+                <a:solidFill>
+                  <a:srgbClr val="9D174D"/>
                 </a:solidFill>
                 <a:latin typeface="Trebuchet MS" pitchFamily="34" charset="0"/>
                 <a:ea typeface="Trebuchet MS" pitchFamily="34" charset="-122"/>
                 <a:cs typeface="Trebuchet MS" pitchFamily="34" charset="-120"/>
               </a:rPr>
-              <a:t>warms</a:t>
-            </a:r>
-            <a:endParaRPr lang="en-US" sz="1400" dirty="0"/>
-          </a:p>
-        </p:txBody>
-      </p:sp>
-      <p:sp>
-        <p:nvSpPr>
-          <p:cNvPr id="33" name="Shape 31"/>
-          <p:cNvSpPr/>
-          <p:nvPr/>
-        </p:nvSpPr>
-        <p:spPr>
-          <a:xfrm>
-            <a:off x="365760" y="4096512"/>
-            <a:ext cx="1371600" cy="804672"/>
+              <a:t>m</a:t>
+            </a:r>
+            <a:endParaRPr lang="en-US" sz="900" dirty="0"/>
+          </a:p>
+        </p:txBody>
+      </p:sp>
+      <p:sp>
+        <p:nvSpPr>
+          <p:cNvPr id="39" name="Shape 37"/>
+          <p:cNvSpPr/>
+          <p:nvPr/>
+        </p:nvSpPr>
+        <p:spPr>
+          <a:xfrm>
+            <a:off x="6062472" y="4169664"/>
+            <a:ext cx="685800" cy="475488"/>
           </a:xfrm>
           <a:prstGeom prst="rect">
             <a:avLst>
-              <a:gd name="adj" fmla="val 6818"/>
+              <a:gd name="adj" fmla="val 7692"/>
             </a:avLst>
           </a:prstGeom>
           <a:solidFill>
-            <a:srgbClr val="E2E8F0"/>
-          </a:solidFill>
-          <a:ln w="12700">
-            <a:solidFill>
-              <a:srgbClr val="E2E8F0"/>
-            </a:solidFill>
-            <a:prstDash val="solid"/>
-          </a:ln>
-        </p:spPr>
-      </p:sp>
-      <p:sp>
-        <p:nvSpPr>
-          <p:cNvPr id="34" name="Text 32"/>
-          <p:cNvSpPr/>
-          <p:nvPr/>
-        </p:nvSpPr>
-        <p:spPr>
-          <a:xfrm>
-            <a:off x="365760" y="4096512"/>
-            <a:ext cx="1371600" cy="804672"/>
+            <a:srgbClr val="FFFFFF"/>
+          </a:solidFill>
+          <a:ln w="12700">
+            <a:solidFill>
+              <a:srgbClr val="DB2777"/>
+            </a:solidFill>
+            <a:prstDash val="solid"/>
+          </a:ln>
+        </p:spPr>
+      </p:sp>
+      <p:sp>
+        <p:nvSpPr>
+          <p:cNvPr id="40" name="Text 38"/>
+          <p:cNvSpPr/>
+          <p:nvPr/>
+        </p:nvSpPr>
+        <p:spPr>
+          <a:xfrm>
+            <a:off x="6062472" y="4169664"/>
+            <a:ext cx="685800" cy="475488"/>
           </a:xfrm>
           <a:prstGeom prst="rect">
             <a:avLst/>
@@ -15058,56 +15421,29 @@
               <a:buNone/>
             </a:pPr>
             <a:r>
-              <a:rPr lang="en-US" sz="1100" b="1" dirty="0">
-                <a:solidFill>
-                  <a:srgbClr val="475569"/>
+              <a:rPr lang="en-US" sz="900" b="1" dirty="0">
+                <a:solidFill>
+                  <a:srgbClr val="9D174D"/>
                 </a:solidFill>
                 <a:latin typeface="Trebuchet MS" pitchFamily="34" charset="0"/>
                 <a:ea typeface="Trebuchet MS" pitchFamily="34" charset="-122"/>
                 <a:cs typeface="Trebuchet MS" pitchFamily="34" charset="-120"/>
               </a:rPr>
-              <a:t>Phonemes</a:t>
-            </a:r>
-            <a:endParaRPr lang="en-US" sz="1100" dirty="0"/>
-          </a:p>
-        </p:txBody>
-      </p:sp>
-      <p:sp>
-        <p:nvSpPr>
-          <p:cNvPr id="35" name="Shape 33"/>
-          <p:cNvSpPr/>
-          <p:nvPr/>
-        </p:nvSpPr>
-        <p:spPr>
-          <a:xfrm>
-            <a:off x="1874520" y="4096512"/>
-            <a:ext cx="6903720" cy="658368"/>
-          </a:xfrm>
-          <a:prstGeom prst="rect">
-            <a:avLst>
-              <a:gd name="adj" fmla="val 8333"/>
-            </a:avLst>
-          </a:prstGeom>
-          <a:solidFill>
-            <a:srgbClr val="FCE7F3"/>
-          </a:solidFill>
-          <a:ln w="12700">
-            <a:solidFill>
-              <a:srgbClr val="DB2777"/>
-            </a:solidFill>
-            <a:prstDash val="solid"/>
-          </a:ln>
-        </p:spPr>
-      </p:sp>
-      <p:sp>
-        <p:nvSpPr>
-          <p:cNvPr id="36" name="Shape 34"/>
-          <p:cNvSpPr/>
-          <p:nvPr/>
-        </p:nvSpPr>
-        <p:spPr>
-          <a:xfrm>
-            <a:off x="2254649" y="4169664"/>
+              <a:t>i</a:t>
+            </a:r>
+            <a:endParaRPr lang="en-US" sz="900" dirty="0"/>
+          </a:p>
+        </p:txBody>
+      </p:sp>
+      <p:sp>
+        <p:nvSpPr>
+          <p:cNvPr id="41" name="Shape 39"/>
+          <p:cNvSpPr/>
+          <p:nvPr/>
+        </p:nvSpPr>
+        <p:spPr>
+          <a:xfrm>
+            <a:off x="7274052" y="4169664"/>
             <a:ext cx="685800" cy="475488"/>
           </a:xfrm>
           <a:prstGeom prst="rect">
@@ -15128,13 +15464,13 @@
       </p:sp>
       <p:sp>
         <p:nvSpPr>
-          <p:cNvPr id="37" name="Text 35"/>
-          <p:cNvSpPr/>
-          <p:nvPr/>
-        </p:nvSpPr>
-        <p:spPr>
-          <a:xfrm>
-            <a:off x="2254649" y="4169664"/>
+          <p:cNvPr id="42" name="Text 40"/>
+          <p:cNvSpPr/>
+          <p:nvPr/>
+        </p:nvSpPr>
+        <p:spPr>
+          <a:xfrm>
+            <a:off x="7274052" y="4169664"/>
             <a:ext cx="685800" cy="475488"/>
           </a:xfrm>
           <a:prstGeom prst="rect">
@@ -15159,337 +15495,7 @@
                 <a:ea typeface="Trebuchet MS" pitchFamily="34" charset="-122"/>
                 <a:cs typeface="Trebuchet MS" pitchFamily="34" charset="-120"/>
               </a:rPr>
-              <a:t>r</a:t>
-            </a:r>
-            <a:endParaRPr lang="en-US" sz="900" dirty="0"/>
-          </a:p>
-        </p:txBody>
-      </p:sp>
-      <p:sp>
-        <p:nvSpPr>
-          <p:cNvPr id="38" name="Shape 36"/>
-          <p:cNvSpPr/>
-          <p:nvPr/>
-        </p:nvSpPr>
-        <p:spPr>
-          <a:xfrm>
-            <a:off x="3293146" y="4169664"/>
-            <a:ext cx="685800" cy="475488"/>
-          </a:xfrm>
-          <a:prstGeom prst="rect">
-            <a:avLst>
-              <a:gd name="adj" fmla="val 7692"/>
-            </a:avLst>
-          </a:prstGeom>
-          <a:solidFill>
-            <a:srgbClr val="FFFFFF"/>
-          </a:solidFill>
-          <a:ln w="12700">
-            <a:solidFill>
-              <a:srgbClr val="DB2777"/>
-            </a:solidFill>
-            <a:prstDash val="solid"/>
-          </a:ln>
-        </p:spPr>
-      </p:sp>
-      <p:sp>
-        <p:nvSpPr>
-          <p:cNvPr id="39" name="Text 37"/>
-          <p:cNvSpPr/>
-          <p:nvPr/>
-        </p:nvSpPr>
-        <p:spPr>
-          <a:xfrm>
-            <a:off x="3293146" y="4169664"/>
-            <a:ext cx="685800" cy="475488"/>
-          </a:xfrm>
-          <a:prstGeom prst="rect">
-            <a:avLst/>
-          </a:prstGeom>
-          <a:noFill/>
-          <a:ln/>
-        </p:spPr>
-        <p:txBody>
-          <a:bodyPr wrap="square" lIns="0" tIns="0" rIns="0" bIns="0" rtlCol="0" anchor="ctr"/>
-          <a:lstStyle/>
-          <a:p>
-            <a:pPr algn="ctr" indent="0" marL="0">
-              <a:buNone/>
-            </a:pPr>
-            <a:r>
-              <a:rPr lang="en-US" sz="900" b="1" dirty="0">
-                <a:solidFill>
-                  <a:srgbClr val="9D174D"/>
-                </a:solidFill>
-                <a:latin typeface="Trebuchet MS" pitchFamily="34" charset="0"/>
-                <a:ea typeface="Trebuchet MS" pitchFamily="34" charset="-122"/>
-                <a:cs typeface="Trebuchet MS" pitchFamily="34" charset="-120"/>
-              </a:rPr>
-              <a:t>e</a:t>
-            </a:r>
-            <a:endParaRPr lang="en-US" sz="900" dirty="0"/>
-          </a:p>
-        </p:txBody>
-      </p:sp>
-      <p:sp>
-        <p:nvSpPr>
-          <p:cNvPr id="40" name="Shape 38"/>
-          <p:cNvSpPr/>
-          <p:nvPr/>
-        </p:nvSpPr>
-        <p:spPr>
-          <a:xfrm>
-            <a:off x="4331643" y="4169664"/>
-            <a:ext cx="685800" cy="475488"/>
-          </a:xfrm>
-          <a:prstGeom prst="rect">
-            <a:avLst>
-              <a:gd name="adj" fmla="val 7692"/>
-            </a:avLst>
-          </a:prstGeom>
-          <a:solidFill>
-            <a:srgbClr val="FFFFFF"/>
-          </a:solidFill>
-          <a:ln w="12700">
-            <a:solidFill>
-              <a:srgbClr val="DB2777"/>
-            </a:solidFill>
-            <a:prstDash val="solid"/>
-          </a:ln>
-        </p:spPr>
-      </p:sp>
-      <p:sp>
-        <p:nvSpPr>
-          <p:cNvPr id="41" name="Text 39"/>
-          <p:cNvSpPr/>
-          <p:nvPr/>
-        </p:nvSpPr>
-        <p:spPr>
-          <a:xfrm>
-            <a:off x="4331643" y="4169664"/>
-            <a:ext cx="685800" cy="475488"/>
-          </a:xfrm>
-          <a:prstGeom prst="rect">
-            <a:avLst/>
-          </a:prstGeom>
-          <a:noFill/>
-          <a:ln/>
-        </p:spPr>
-        <p:txBody>
-          <a:bodyPr wrap="square" lIns="0" tIns="0" rIns="0" bIns="0" rtlCol="0" anchor="ctr"/>
-          <a:lstStyle/>
-          <a:p>
-            <a:pPr algn="ctr" indent="0" marL="0">
-              <a:buNone/>
-            </a:pPr>
-            <a:r>
-              <a:rPr lang="en-US" sz="900" b="1" dirty="0">
-                <a:solidFill>
-                  <a:srgbClr val="9D174D"/>
-                </a:solidFill>
-                <a:latin typeface="Trebuchet MS" pitchFamily="34" charset="0"/>
-                <a:ea typeface="Trebuchet MS" pitchFamily="34" charset="-122"/>
-                <a:cs typeface="Trebuchet MS" pitchFamily="34" charset="-120"/>
-              </a:rPr>
-              <a:t>w</a:t>
-            </a:r>
-            <a:endParaRPr lang="en-US" sz="900" dirty="0"/>
-          </a:p>
-        </p:txBody>
-      </p:sp>
-      <p:sp>
-        <p:nvSpPr>
-          <p:cNvPr id="42" name="Shape 40"/>
-          <p:cNvSpPr/>
-          <p:nvPr/>
-        </p:nvSpPr>
-        <p:spPr>
-          <a:xfrm>
-            <a:off x="5370141" y="4169664"/>
-            <a:ext cx="685800" cy="475488"/>
-          </a:xfrm>
-          <a:prstGeom prst="rect">
-            <a:avLst>
-              <a:gd name="adj" fmla="val 7692"/>
-            </a:avLst>
-          </a:prstGeom>
-          <a:solidFill>
-            <a:srgbClr val="FFFFFF"/>
-          </a:solidFill>
-          <a:ln w="12700">
-            <a:solidFill>
-              <a:srgbClr val="DB2777"/>
-            </a:solidFill>
-            <a:prstDash val="solid"/>
-          </a:ln>
-        </p:spPr>
-      </p:sp>
-      <p:sp>
-        <p:nvSpPr>
-          <p:cNvPr id="43" name="Text 41"/>
-          <p:cNvSpPr/>
-          <p:nvPr/>
-        </p:nvSpPr>
-        <p:spPr>
-          <a:xfrm>
-            <a:off x="5370141" y="4169664"/>
-            <a:ext cx="685800" cy="475488"/>
-          </a:xfrm>
-          <a:prstGeom prst="rect">
-            <a:avLst/>
-          </a:prstGeom>
-          <a:noFill/>
-          <a:ln/>
-        </p:spPr>
-        <p:txBody>
-          <a:bodyPr wrap="square" lIns="0" tIns="0" rIns="0" bIns="0" rtlCol="0" anchor="ctr"/>
-          <a:lstStyle/>
-          <a:p>
-            <a:pPr algn="ctr" indent="0" marL="0">
-              <a:buNone/>
-            </a:pPr>
-            <a:r>
-              <a:rPr lang="en-US" sz="900" b="1" dirty="0">
-                <a:solidFill>
-                  <a:srgbClr val="9D174D"/>
-                </a:solidFill>
-                <a:latin typeface="Trebuchet MS" pitchFamily="34" charset="0"/>
-                <a:ea typeface="Trebuchet MS" pitchFamily="34" charset="-122"/>
-                <a:cs typeface="Trebuchet MS" pitchFamily="34" charset="-120"/>
-              </a:rPr>
-              <a:t>ar</a:t>
-            </a:r>
-            <a:endParaRPr lang="en-US" sz="900" dirty="0"/>
-          </a:p>
-        </p:txBody>
-      </p:sp>
-      <p:sp>
-        <p:nvSpPr>
-          <p:cNvPr id="44" name="Shape 42"/>
-          <p:cNvSpPr/>
-          <p:nvPr/>
-        </p:nvSpPr>
-        <p:spPr>
-          <a:xfrm>
-            <a:off x="6408638" y="4169664"/>
-            <a:ext cx="685800" cy="475488"/>
-          </a:xfrm>
-          <a:prstGeom prst="rect">
-            <a:avLst>
-              <a:gd name="adj" fmla="val 7692"/>
-            </a:avLst>
-          </a:prstGeom>
-          <a:solidFill>
-            <a:srgbClr val="FFFFFF"/>
-          </a:solidFill>
-          <a:ln w="12700">
-            <a:solidFill>
-              <a:srgbClr val="DB2777"/>
-            </a:solidFill>
-            <a:prstDash val="solid"/>
-          </a:ln>
-        </p:spPr>
-      </p:sp>
-      <p:sp>
-        <p:nvSpPr>
-          <p:cNvPr id="45" name="Text 43"/>
-          <p:cNvSpPr/>
-          <p:nvPr/>
-        </p:nvSpPr>
-        <p:spPr>
-          <a:xfrm>
-            <a:off x="6408638" y="4169664"/>
-            <a:ext cx="685800" cy="475488"/>
-          </a:xfrm>
-          <a:prstGeom prst="rect">
-            <a:avLst/>
-          </a:prstGeom>
-          <a:noFill/>
-          <a:ln/>
-        </p:spPr>
-        <p:txBody>
-          <a:bodyPr wrap="square" lIns="0" tIns="0" rIns="0" bIns="0" rtlCol="0" anchor="ctr"/>
-          <a:lstStyle/>
-          <a:p>
-            <a:pPr algn="ctr" indent="0" marL="0">
-              <a:buNone/>
-            </a:pPr>
-            <a:r>
-              <a:rPr lang="en-US" sz="900" b="1" dirty="0">
-                <a:solidFill>
-                  <a:srgbClr val="9D174D"/>
-                </a:solidFill>
-                <a:latin typeface="Trebuchet MS" pitchFamily="34" charset="0"/>
-                <a:ea typeface="Trebuchet MS" pitchFamily="34" charset="-122"/>
-                <a:cs typeface="Trebuchet MS" pitchFamily="34" charset="-120"/>
-              </a:rPr>
-              <a:t>m</a:t>
-            </a:r>
-            <a:endParaRPr lang="en-US" sz="900" dirty="0"/>
-          </a:p>
-        </p:txBody>
-      </p:sp>
-      <p:sp>
-        <p:nvSpPr>
-          <p:cNvPr id="46" name="Shape 44"/>
-          <p:cNvSpPr/>
-          <p:nvPr/>
-        </p:nvSpPr>
-        <p:spPr>
-          <a:xfrm>
-            <a:off x="7447135" y="4169664"/>
-            <a:ext cx="685800" cy="475488"/>
-          </a:xfrm>
-          <a:prstGeom prst="rect">
-            <a:avLst>
-              <a:gd name="adj" fmla="val 7692"/>
-            </a:avLst>
-          </a:prstGeom>
-          <a:solidFill>
-            <a:srgbClr val="FFFFFF"/>
-          </a:solidFill>
-          <a:ln w="12700">
-            <a:solidFill>
-              <a:srgbClr val="DB2777"/>
-            </a:solidFill>
-            <a:prstDash val="solid"/>
-          </a:ln>
-        </p:spPr>
-      </p:sp>
-      <p:sp>
-        <p:nvSpPr>
-          <p:cNvPr id="47" name="Text 45"/>
-          <p:cNvSpPr/>
-          <p:nvPr/>
-        </p:nvSpPr>
-        <p:spPr>
-          <a:xfrm>
-            <a:off x="7447135" y="4169664"/>
-            <a:ext cx="685800" cy="475488"/>
-          </a:xfrm>
-          <a:prstGeom prst="rect">
-            <a:avLst/>
-          </a:prstGeom>
-          <a:noFill/>
-          <a:ln/>
-        </p:spPr>
-        <p:txBody>
-          <a:bodyPr wrap="square" lIns="0" tIns="0" rIns="0" bIns="0" rtlCol="0" anchor="ctr"/>
-          <a:lstStyle/>
-          <a:p>
-            <a:pPr algn="ctr" indent="0" marL="0">
-              <a:buNone/>
-            </a:pPr>
-            <a:r>
-              <a:rPr lang="en-US" sz="900" b="1" dirty="0">
-                <a:solidFill>
-                  <a:srgbClr val="9D174D"/>
-                </a:solidFill>
-                <a:latin typeface="Trebuchet MS" pitchFamily="34" charset="0"/>
-                <a:ea typeface="Trebuchet MS" pitchFamily="34" charset="-122"/>
-                <a:cs typeface="Trebuchet MS" pitchFamily="34" charset="-120"/>
-              </a:rPr>
-              <a:t>s</a:t>
+              <a:t>ng</a:t>
             </a:r>
             <a:endParaRPr lang="en-US" sz="900" dirty="0"/>
           </a:p>
@@ -16832,7 +16838,7 @@
                 <a:ea typeface="Calibri" pitchFamily="34" charset="-122"/>
                 <a:cs typeface="Calibri" pitchFamily="34" charset="-120"/>
               </a:rPr>
-              <a:t>warmed</a:t>
+              <a:t>warmly</a:t>
             </a:r>
             <a:pPr algn="l" indent="0" marL="0">
               <a:buNone/>
@@ -16846,7 +16852,7 @@
                 <a:ea typeface="Calibri" pitchFamily="34" charset="-122"/>
                 <a:cs typeface="Calibri" pitchFamily="34" charset="-120"/>
               </a:rPr>
-              <a:t> the </a:t>
+              <a:t> greeted her guests, checked the </a:t>
             </a:r>
             <a:pPr algn="l" indent="0" marL="0">
               <a:buNone/>
@@ -16863,7 +16869,7 @@
                 <a:ea typeface="Calibri" pitchFamily="34" charset="-122"/>
                 <a:cs typeface="Calibri" pitchFamily="34" charset="-120"/>
               </a:rPr>
-              <a:t>lukewarm</a:t>
+              <a:t>warmth</a:t>
             </a:r>
             <a:pPr algn="l" indent="0" marL="0">
               <a:buNone/>
@@ -16877,7 +16883,7 @@
                 <a:ea typeface="Calibri" pitchFamily="34" charset="-122"/>
                 <a:cs typeface="Calibri" pitchFamily="34" charset="-120"/>
               </a:rPr>
-              <a:t> soup on the stove, then </a:t>
+              <a:t> of the room, and then </a:t>
             </a:r>
             <a:pPr algn="l" indent="0" marL="0">
               <a:buNone/>
@@ -16894,7 +16900,7 @@
                 <a:ea typeface="Calibri" pitchFamily="34" charset="-122"/>
                 <a:cs typeface="Calibri" pitchFamily="34" charset="-120"/>
               </a:rPr>
-              <a:t>warmly</a:t>
+              <a:t>rewarmed</a:t>
             </a:r>
             <a:pPr algn="l" indent="0" marL="0">
               <a:buNone/>
@@ -16908,7 +16914,7 @@
                 <a:ea typeface="Calibri" pitchFamily="34" charset="-122"/>
                 <a:cs typeface="Calibri" pitchFamily="34" charset="-120"/>
               </a:rPr>
-              <a:t> offered a bowl to every guest.</a:t>
+              <a:t> the soup on the stove.</a:t>
             </a:r>
             <a:endParaRPr lang="en-US" sz="1800" dirty="0"/>
           </a:p>
@@ -17063,7 +17069,7 @@
                 <a:ea typeface="Trebuchet MS" pitchFamily="34" charset="-122"/>
                 <a:cs typeface="Trebuchet MS" pitchFamily="34" charset="-120"/>
               </a:rPr>
-              <a:t>warmed</a:t>
+              <a:t>warmly</a:t>
             </a:r>
             <a:endParaRPr lang="en-US" sz="1400" dirty="0"/>
           </a:p>
@@ -17191,7 +17197,7 @@
                 <a:ea typeface="Trebuchet MS" pitchFamily="34" charset="-122"/>
                 <a:cs typeface="Trebuchet MS" pitchFamily="34" charset="-120"/>
               </a:rPr>
-              <a:t>lukewarm</a:t>
+              <a:t>warmth</a:t>
             </a:r>
             <a:endParaRPr lang="en-US" sz="1400" dirty="0"/>
           </a:p>
@@ -17319,7 +17325,7 @@
                 <a:ea typeface="Trebuchet MS" pitchFamily="34" charset="-122"/>
                 <a:cs typeface="Trebuchet MS" pitchFamily="34" charset="-120"/>
               </a:rPr>
-              <a:t>warmly</a:t>
+              <a:t>rewarmed</a:t>
             </a:r>
             <a:endParaRPr lang="en-US" sz="1400" dirty="0"/>
           </a:p>
@@ -17789,7 +17795,7 @@
                 <a:ea typeface="Trebuchet MS" pitchFamily="34" charset="-122"/>
                 <a:cs typeface="Trebuchet MS" pitchFamily="34" charset="-120"/>
               </a:rPr>
-              <a:t>warmed</a:t>
+              <a:t>warmly</a:t>
             </a:r>
             <a:endParaRPr lang="en-US" sz="2800" dirty="0"/>
           </a:p>
@@ -18616,7 +18622,7 @@
                 <a:ea typeface="Trebuchet MS" pitchFamily="34" charset="-122"/>
                 <a:cs typeface="Trebuchet MS" pitchFamily="34" charset="-120"/>
               </a:rPr>
-              <a:t>warmed</a:t>
+              <a:t>warmly</a:t>
             </a:r>
             <a:endParaRPr lang="en-US" sz="2800" dirty="0"/>
           </a:p>
@@ -18867,7 +18873,7 @@
                 <a:ea typeface="Trebuchet MS" pitchFamily="34" charset="-122"/>
                 <a:cs typeface="Trebuchet MS" pitchFamily="34" charset="-120"/>
               </a:rPr>
-              <a:t>ed</a:t>
+              <a:t>ly</a:t>
             </a:r>
             <a:endParaRPr lang="en-US" sz="1300" dirty="0"/>
           </a:p>
@@ -18906,7 +18912,7 @@
                 <a:ea typeface="Calibri" pitchFamily="34" charset="-122"/>
                 <a:cs typeface="Calibri" pitchFamily="34" charset="-120"/>
               </a:rPr>
-              <a:t>past tense</a:t>
+              <a:t>in a certain way</a:t>
             </a:r>
             <a:endParaRPr lang="en-US" sz="850" dirty="0"/>
           </a:p>
@@ -19601,7 +19607,7 @@
                 <a:ea typeface="Trebuchet MS" pitchFamily="34" charset="-122"/>
                 <a:cs typeface="Trebuchet MS" pitchFamily="34" charset="-120"/>
               </a:rPr>
-              <a:t>warmed</a:t>
+              <a:t>warmly</a:t>
             </a:r>
             <a:endParaRPr lang="en-US" sz="2800" dirty="0"/>
           </a:p>
@@ -19852,7 +19858,7 @@
                 <a:ea typeface="Trebuchet MS" pitchFamily="34" charset="-122"/>
                 <a:cs typeface="Trebuchet MS" pitchFamily="34" charset="-120"/>
               </a:rPr>
-              <a:t>ed</a:t>
+              <a:t>ly</a:t>
             </a:r>
             <a:endParaRPr lang="en-US" sz="1300" dirty="0"/>
           </a:p>
@@ -19891,7 +19897,7 @@
                 <a:ea typeface="Calibri" pitchFamily="34" charset="-122"/>
                 <a:cs typeface="Calibri" pitchFamily="34" charset="-120"/>
               </a:rPr>
-              <a:t>past tense</a:t>
+              <a:t>in a certain way</a:t>
             </a:r>
             <a:endParaRPr lang="en-US" sz="850" dirty="0"/>
           </a:p>
@@ -19998,7 +20004,7 @@
         </p:nvSpPr>
         <p:spPr>
           <a:xfrm>
-            <a:off x="4370832" y="3364992"/>
+            <a:off x="2999232" y="3364992"/>
             <a:ext cx="1645920" cy="475488"/>
           </a:xfrm>
           <a:prstGeom prst="rect">
@@ -20025,7 +20031,7 @@
         </p:nvSpPr>
         <p:spPr>
           <a:xfrm>
-            <a:off x="4370832" y="3364992"/>
+            <a:off x="2999232" y="3364992"/>
             <a:ext cx="1645920" cy="475488"/>
           </a:xfrm>
           <a:prstGeom prst="rect">
@@ -20050,7 +20056,7 @@
                 <a:ea typeface="Trebuchet MS" pitchFamily="34" charset="-122"/>
                 <a:cs typeface="Trebuchet MS" pitchFamily="34" charset="-120"/>
               </a:rPr>
-              <a:t>warmed</a:t>
+              <a:t>warm</a:t>
             </a:r>
             <a:endParaRPr lang="en-US" sz="1400" dirty="0"/>
           </a:p>
@@ -20058,7 +20064,112 @@
       </p:sp>
       <p:sp>
         <p:nvSpPr>
-          <p:cNvPr id="27" name="Shape 25"/>
+          <p:cNvPr id="27" name="Text 25"/>
+          <p:cNvSpPr/>
+          <p:nvPr/>
+        </p:nvSpPr>
+        <p:spPr>
+          <a:xfrm>
+            <a:off x="4645152" y="3364992"/>
+            <a:ext cx="1097280" cy="475488"/>
+          </a:xfrm>
+          <a:prstGeom prst="rect">
+            <a:avLst/>
+          </a:prstGeom>
+          <a:noFill/>
+          <a:ln/>
+        </p:spPr>
+        <p:txBody>
+          <a:bodyPr wrap="square" lIns="0" tIns="0" rIns="0" bIns="0" rtlCol="0" anchor="ctr"/>
+          <a:lstStyle/>
+          <a:p>
+            <a:pPr algn="ctr" indent="0" marL="0">
+              <a:buNone/>
+            </a:pPr>
+            <a:r>
+              <a:rPr lang="en-US" sz="1600" b="1" dirty="0">
+                <a:solidFill>
+                  <a:srgbClr val="0D9488"/>
+                </a:solidFill>
+                <a:latin typeface="Trebuchet MS" pitchFamily="34" charset="0"/>
+                <a:ea typeface="Trebuchet MS" pitchFamily="34" charset="-122"/>
+                <a:cs typeface="Trebuchet MS" pitchFamily="34" charset="-120"/>
+              </a:rPr>
+              <a:t>·</a:t>
+            </a:r>
+            <a:endParaRPr lang="en-US" sz="1600" dirty="0"/>
+          </a:p>
+        </p:txBody>
+      </p:sp>
+      <p:sp>
+        <p:nvSpPr>
+          <p:cNvPr id="28" name="Shape 26"/>
+          <p:cNvSpPr/>
+          <p:nvPr/>
+        </p:nvSpPr>
+        <p:spPr>
+          <a:xfrm>
+            <a:off x="5742432" y="3364992"/>
+            <a:ext cx="1645920" cy="475488"/>
+          </a:xfrm>
+          <a:prstGeom prst="rect">
+            <a:avLst>
+              <a:gd name="adj" fmla="val 9615"/>
+            </a:avLst>
+          </a:prstGeom>
+          <a:solidFill>
+            <a:srgbClr val="FFFFFF"/>
+          </a:solidFill>
+          <a:ln w="12700">
+            <a:solidFill>
+              <a:srgbClr val="0D9488"/>
+            </a:solidFill>
+            <a:prstDash val="solid"/>
+          </a:ln>
+        </p:spPr>
+      </p:sp>
+      <p:sp>
+        <p:nvSpPr>
+          <p:cNvPr id="29" name="Text 27"/>
+          <p:cNvSpPr/>
+          <p:nvPr/>
+        </p:nvSpPr>
+        <p:spPr>
+          <a:xfrm>
+            <a:off x="5742432" y="3364992"/>
+            <a:ext cx="1645920" cy="475488"/>
+          </a:xfrm>
+          <a:prstGeom prst="rect">
+            <a:avLst/>
+          </a:prstGeom>
+          <a:noFill/>
+          <a:ln/>
+        </p:spPr>
+        <p:txBody>
+          <a:bodyPr wrap="square" lIns="0" tIns="0" rIns="0" bIns="0" rtlCol="0" anchor="ctr"/>
+          <a:lstStyle/>
+          <a:p>
+            <a:pPr algn="ctr" indent="0" marL="0">
+              <a:buNone/>
+            </a:pPr>
+            <a:r>
+              <a:rPr lang="en-US" sz="1400" b="1" dirty="0">
+                <a:solidFill>
+                  <a:srgbClr val="0D9488"/>
+                </a:solidFill>
+                <a:latin typeface="Trebuchet MS" pitchFamily="34" charset="0"/>
+                <a:ea typeface="Trebuchet MS" pitchFamily="34" charset="-122"/>
+                <a:cs typeface="Trebuchet MS" pitchFamily="34" charset="-120"/>
+              </a:rPr>
+              <a:t>ly</a:t>
+            </a:r>
+            <a:endParaRPr lang="en-US" sz="1400" dirty="0"/>
+          </a:p>
+        </p:txBody>
+      </p:sp>
+      <p:sp>
+        <p:nvSpPr>
+          <p:cNvPr id="30" name="Shape 28"/>
           <p:cNvSpPr/>
           <p:nvPr/>
         </p:nvSpPr>
@@ -20085,7 +20196,7 @@
       </p:sp>
       <p:sp>
         <p:nvSpPr>
-          <p:cNvPr id="28" name="Text 26"/>
+          <p:cNvPr id="31" name="Text 29"/>
           <p:cNvSpPr/>
           <p:nvPr/>
         </p:nvSpPr>
@@ -20124,7 +20235,7 @@
       </p:sp>
       <p:sp>
         <p:nvSpPr>
-          <p:cNvPr id="29" name="Shape 27"/>
+          <p:cNvPr id="32" name="Shape 30"/>
           <p:cNvSpPr/>
           <p:nvPr/>
         </p:nvSpPr>
@@ -20151,7 +20262,7 @@
       </p:sp>
       <p:sp>
         <p:nvSpPr>
-          <p:cNvPr id="30" name="Text 28"/>
+          <p:cNvPr id="33" name="Text 31"/>
           <p:cNvSpPr/>
           <p:nvPr/>
         </p:nvSpPr>
@@ -20613,7 +20724,7 @@
                 <a:ea typeface="Trebuchet MS" pitchFamily="34" charset="-122"/>
                 <a:cs typeface="Trebuchet MS" pitchFamily="34" charset="-120"/>
               </a:rPr>
-              <a:t>warmed</a:t>
+              <a:t>warmly</a:t>
             </a:r>
             <a:endParaRPr lang="en-US" sz="2800" dirty="0"/>
           </a:p>
@@ -20864,7 +20975,7 @@
                 <a:ea typeface="Trebuchet MS" pitchFamily="34" charset="-122"/>
                 <a:cs typeface="Trebuchet MS" pitchFamily="34" charset="-120"/>
               </a:rPr>
-              <a:t>ed</a:t>
+              <a:t>ly</a:t>
             </a:r>
             <a:endParaRPr lang="en-US" sz="1300" dirty="0"/>
           </a:p>
@@ -20903,7 +21014,7 @@
                 <a:ea typeface="Calibri" pitchFamily="34" charset="-122"/>
                 <a:cs typeface="Calibri" pitchFamily="34" charset="-120"/>
               </a:rPr>
-              <a:t>past tense</a:t>
+              <a:t>in a certain way</a:t>
             </a:r>
             <a:endParaRPr lang="en-US" sz="850" dirty="0"/>
           </a:p>
@@ -21010,7 +21121,7 @@
         </p:nvSpPr>
         <p:spPr>
           <a:xfrm>
-            <a:off x="4370832" y="3364992"/>
+            <a:off x="2999232" y="3364992"/>
             <a:ext cx="1645920" cy="475488"/>
           </a:xfrm>
           <a:prstGeom prst="rect">
@@ -21037,7 +21148,7 @@
         </p:nvSpPr>
         <p:spPr>
           <a:xfrm>
-            <a:off x="4370832" y="3364992"/>
+            <a:off x="2999232" y="3364992"/>
             <a:ext cx="1645920" cy="475488"/>
           </a:xfrm>
           <a:prstGeom prst="rect">
@@ -21062,7 +21173,7 @@
                 <a:ea typeface="Trebuchet MS" pitchFamily="34" charset="-122"/>
                 <a:cs typeface="Trebuchet MS" pitchFamily="34" charset="-120"/>
               </a:rPr>
-              <a:t>warmed</a:t>
+              <a:t>warm</a:t>
             </a:r>
             <a:endParaRPr lang="en-US" sz="1400" dirty="0"/>
           </a:p>
@@ -21070,7 +21181,112 @@
       </p:sp>
       <p:sp>
         <p:nvSpPr>
-          <p:cNvPr id="27" name="Shape 25"/>
+          <p:cNvPr id="27" name="Text 25"/>
+          <p:cNvSpPr/>
+          <p:nvPr/>
+        </p:nvSpPr>
+        <p:spPr>
+          <a:xfrm>
+            <a:off x="4645152" y="3364992"/>
+            <a:ext cx="1097280" cy="475488"/>
+          </a:xfrm>
+          <a:prstGeom prst="rect">
+            <a:avLst/>
+          </a:prstGeom>
+          <a:noFill/>
+          <a:ln/>
+        </p:spPr>
+        <p:txBody>
+          <a:bodyPr wrap="square" lIns="0" tIns="0" rIns="0" bIns="0" rtlCol="0" anchor="ctr"/>
+          <a:lstStyle/>
+          <a:p>
+            <a:pPr algn="ctr" indent="0" marL="0">
+              <a:buNone/>
+            </a:pPr>
+            <a:r>
+              <a:rPr lang="en-US" sz="1600" b="1" dirty="0">
+                <a:solidFill>
+                  <a:srgbClr val="0D9488"/>
+                </a:solidFill>
+                <a:latin typeface="Trebuchet MS" pitchFamily="34" charset="0"/>
+                <a:ea typeface="Trebuchet MS" pitchFamily="34" charset="-122"/>
+                <a:cs typeface="Trebuchet MS" pitchFamily="34" charset="-120"/>
+              </a:rPr>
+              <a:t>·</a:t>
+            </a:r>
+            <a:endParaRPr lang="en-US" sz="1600" dirty="0"/>
+          </a:p>
+        </p:txBody>
+      </p:sp>
+      <p:sp>
+        <p:nvSpPr>
+          <p:cNvPr id="28" name="Shape 26"/>
+          <p:cNvSpPr/>
+          <p:nvPr/>
+        </p:nvSpPr>
+        <p:spPr>
+          <a:xfrm>
+            <a:off x="5742432" y="3364992"/>
+            <a:ext cx="1645920" cy="475488"/>
+          </a:xfrm>
+          <a:prstGeom prst="rect">
+            <a:avLst>
+              <a:gd name="adj" fmla="val 9615"/>
+            </a:avLst>
+          </a:prstGeom>
+          <a:solidFill>
+            <a:srgbClr val="FFFFFF"/>
+          </a:solidFill>
+          <a:ln w="12700">
+            <a:solidFill>
+              <a:srgbClr val="0D9488"/>
+            </a:solidFill>
+            <a:prstDash val="solid"/>
+          </a:ln>
+        </p:spPr>
+      </p:sp>
+      <p:sp>
+        <p:nvSpPr>
+          <p:cNvPr id="29" name="Text 27"/>
+          <p:cNvSpPr/>
+          <p:nvPr/>
+        </p:nvSpPr>
+        <p:spPr>
+          <a:xfrm>
+            <a:off x="5742432" y="3364992"/>
+            <a:ext cx="1645920" cy="475488"/>
+          </a:xfrm>
+          <a:prstGeom prst="rect">
+            <a:avLst/>
+          </a:prstGeom>
+          <a:noFill/>
+          <a:ln/>
+        </p:spPr>
+        <p:txBody>
+          <a:bodyPr wrap="square" lIns="0" tIns="0" rIns="0" bIns="0" rtlCol="0" anchor="ctr"/>
+          <a:lstStyle/>
+          <a:p>
+            <a:pPr algn="ctr" indent="0" marL="0">
+              <a:buNone/>
+            </a:pPr>
+            <a:r>
+              <a:rPr lang="en-US" sz="1400" b="1" dirty="0">
+                <a:solidFill>
+                  <a:srgbClr val="0D9488"/>
+                </a:solidFill>
+                <a:latin typeface="Trebuchet MS" pitchFamily="34" charset="0"/>
+                <a:ea typeface="Trebuchet MS" pitchFamily="34" charset="-122"/>
+                <a:cs typeface="Trebuchet MS" pitchFamily="34" charset="-120"/>
+              </a:rPr>
+              <a:t>ly</a:t>
+            </a:r>
+            <a:endParaRPr lang="en-US" sz="1400" dirty="0"/>
+          </a:p>
+        </p:txBody>
+      </p:sp>
+      <p:sp>
+        <p:nvSpPr>
+          <p:cNvPr id="30" name="Shape 28"/>
           <p:cNvSpPr/>
           <p:nvPr/>
         </p:nvSpPr>
@@ -21097,7 +21313,7 @@
       </p:sp>
       <p:sp>
         <p:nvSpPr>
-          <p:cNvPr id="28" name="Text 26"/>
+          <p:cNvPr id="31" name="Text 29"/>
           <p:cNvSpPr/>
           <p:nvPr/>
         </p:nvSpPr>
@@ -21136,18 +21352,18 @@
       </p:sp>
       <p:sp>
         <p:nvSpPr>
-          <p:cNvPr id="29" name="Shape 27"/>
+          <p:cNvPr id="32" name="Shape 30"/>
           <p:cNvSpPr/>
           <p:nvPr/>
         </p:nvSpPr>
         <p:spPr>
           <a:xfrm>
             <a:off x="1874520" y="4096512"/>
-            <a:ext cx="6903720" cy="658368"/>
+            <a:ext cx="6903720" cy="804672"/>
           </a:xfrm>
           <a:prstGeom prst="rect">
             <a:avLst>
-              <a:gd name="adj" fmla="val 8333"/>
+              <a:gd name="adj" fmla="val 6818"/>
             </a:avLst>
           </a:prstGeom>
           <a:solidFill>
@@ -21163,18 +21379,18 @@
       </p:sp>
       <p:sp>
         <p:nvSpPr>
-          <p:cNvPr id="30" name="Shape 28"/>
-          <p:cNvSpPr/>
-          <p:nvPr/>
-        </p:nvSpPr>
-        <p:spPr>
-          <a:xfrm>
-            <a:off x="2670048" y="4169664"/>
-            <a:ext cx="685800" cy="475488"/>
+          <p:cNvPr id="33" name="Shape 31"/>
+          <p:cNvSpPr/>
+          <p:nvPr/>
+        </p:nvSpPr>
+        <p:spPr>
+          <a:xfrm>
+            <a:off x="2427732" y="4169664"/>
+            <a:ext cx="685800" cy="384048"/>
           </a:xfrm>
           <a:prstGeom prst="rect">
             <a:avLst>
-              <a:gd name="adj" fmla="val 7692"/>
+              <a:gd name="adj" fmla="val 9524"/>
             </a:avLst>
           </a:prstGeom>
           <a:solidFill>
@@ -21190,14 +21406,14 @@
       </p:sp>
       <p:sp>
         <p:nvSpPr>
-          <p:cNvPr id="31" name="Text 29"/>
-          <p:cNvSpPr/>
-          <p:nvPr/>
-        </p:nvSpPr>
-        <p:spPr>
-          <a:xfrm>
-            <a:off x="2670048" y="4169664"/>
-            <a:ext cx="685800" cy="475488"/>
+          <p:cNvPr id="34" name="Text 32"/>
+          <p:cNvSpPr/>
+          <p:nvPr/>
+        </p:nvSpPr>
+        <p:spPr>
+          <a:xfrm>
+            <a:off x="2427732" y="4169664"/>
+            <a:ext cx="685800" cy="384048"/>
           </a:xfrm>
           <a:prstGeom prst="rect">
             <a:avLst/>
@@ -21229,18 +21445,18 @@
       </p:sp>
       <p:sp>
         <p:nvSpPr>
-          <p:cNvPr id="32" name="Shape 30"/>
-          <p:cNvSpPr/>
-          <p:nvPr/>
-        </p:nvSpPr>
-        <p:spPr>
-          <a:xfrm>
-            <a:off x="4123944" y="4169664"/>
-            <a:ext cx="685800" cy="475488"/>
+          <p:cNvPr id="35" name="Shape 33"/>
+          <p:cNvSpPr/>
+          <p:nvPr/>
+        </p:nvSpPr>
+        <p:spPr>
+          <a:xfrm>
+            <a:off x="3639312" y="4169664"/>
+            <a:ext cx="685800" cy="384048"/>
           </a:xfrm>
           <a:prstGeom prst="rect">
             <a:avLst>
-              <a:gd name="adj" fmla="val 7692"/>
+              <a:gd name="adj" fmla="val 9524"/>
             </a:avLst>
           </a:prstGeom>
           <a:solidFill>
@@ -21256,14 +21472,14 @@
       </p:sp>
       <p:sp>
         <p:nvSpPr>
-          <p:cNvPr id="33" name="Text 31"/>
-          <p:cNvSpPr/>
-          <p:nvPr/>
-        </p:nvSpPr>
-        <p:spPr>
-          <a:xfrm>
-            <a:off x="4123944" y="4169664"/>
-            <a:ext cx="685800" cy="475488"/>
+          <p:cNvPr id="36" name="Text 34"/>
+          <p:cNvSpPr/>
+          <p:nvPr/>
+        </p:nvSpPr>
+        <p:spPr>
+          <a:xfrm>
+            <a:off x="3639312" y="4169664"/>
+            <a:ext cx="685800" cy="384048"/>
           </a:xfrm>
           <a:prstGeom prst="rect">
             <a:avLst/>
@@ -21295,18 +21511,18 @@
       </p:sp>
       <p:sp>
         <p:nvSpPr>
-          <p:cNvPr id="34" name="Shape 32"/>
-          <p:cNvSpPr/>
-          <p:nvPr/>
-        </p:nvSpPr>
-        <p:spPr>
-          <a:xfrm>
-            <a:off x="5577840" y="4169664"/>
-            <a:ext cx="685800" cy="475488"/>
+          <p:cNvPr id="37" name="Shape 35"/>
+          <p:cNvSpPr/>
+          <p:nvPr/>
+        </p:nvSpPr>
+        <p:spPr>
+          <a:xfrm>
+            <a:off x="4850892" y="4169664"/>
+            <a:ext cx="685800" cy="384048"/>
           </a:xfrm>
           <a:prstGeom prst="rect">
             <a:avLst>
-              <a:gd name="adj" fmla="val 7692"/>
+              <a:gd name="adj" fmla="val 9524"/>
             </a:avLst>
           </a:prstGeom>
           <a:solidFill>
@@ -21322,14 +21538,14 @@
       </p:sp>
       <p:sp>
         <p:nvSpPr>
-          <p:cNvPr id="35" name="Text 33"/>
-          <p:cNvSpPr/>
-          <p:nvPr/>
-        </p:nvSpPr>
-        <p:spPr>
-          <a:xfrm>
-            <a:off x="5577840" y="4169664"/>
-            <a:ext cx="685800" cy="475488"/>
+          <p:cNvPr id="38" name="Text 36"/>
+          <p:cNvSpPr/>
+          <p:nvPr/>
+        </p:nvSpPr>
+        <p:spPr>
+          <a:xfrm>
+            <a:off x="4850892" y="4169664"/>
+            <a:ext cx="685800" cy="384048"/>
           </a:xfrm>
           <a:prstGeom prst="rect">
             <a:avLst/>
@@ -21361,18 +21577,18 @@
       </p:sp>
       <p:sp>
         <p:nvSpPr>
-          <p:cNvPr id="36" name="Shape 34"/>
-          <p:cNvSpPr/>
-          <p:nvPr/>
-        </p:nvSpPr>
-        <p:spPr>
-          <a:xfrm>
-            <a:off x="7031736" y="4169664"/>
-            <a:ext cx="685800" cy="475488"/>
+          <p:cNvPr id="39" name="Shape 37"/>
+          <p:cNvSpPr/>
+          <p:nvPr/>
+        </p:nvSpPr>
+        <p:spPr>
+          <a:xfrm>
+            <a:off x="6062472" y="4169664"/>
+            <a:ext cx="685800" cy="384048"/>
           </a:xfrm>
           <a:prstGeom prst="rect">
             <a:avLst>
-              <a:gd name="adj" fmla="val 7692"/>
+              <a:gd name="adj" fmla="val 9524"/>
             </a:avLst>
           </a:prstGeom>
           <a:solidFill>
@@ -21388,14 +21604,14 @@
       </p:sp>
       <p:sp>
         <p:nvSpPr>
-          <p:cNvPr id="37" name="Text 35"/>
-          <p:cNvSpPr/>
-          <p:nvPr/>
-        </p:nvSpPr>
-        <p:spPr>
-          <a:xfrm>
-            <a:off x="7031736" y="4169664"/>
-            <a:ext cx="685800" cy="475488"/>
+          <p:cNvPr id="40" name="Text 38"/>
+          <p:cNvSpPr/>
+          <p:nvPr/>
+        </p:nvSpPr>
+        <p:spPr>
+          <a:xfrm>
+            <a:off x="6062472" y="4169664"/>
+            <a:ext cx="685800" cy="384048"/>
           </a:xfrm>
           <a:prstGeom prst="rect">
             <a:avLst/>
@@ -21419,9 +21635,114 @@
                 <a:ea typeface="Trebuchet MS" pitchFamily="34" charset="-122"/>
                 <a:cs typeface="Trebuchet MS" pitchFamily="34" charset="-120"/>
               </a:rPr>
-              <a:t>d</a:t>
+              <a:t>l</a:t>
             </a:r>
             <a:endParaRPr lang="en-US" sz="900" dirty="0"/>
+          </a:p>
+        </p:txBody>
+      </p:sp>
+      <p:sp>
+        <p:nvSpPr>
+          <p:cNvPr id="41" name="Shape 39"/>
+          <p:cNvSpPr/>
+          <p:nvPr/>
+        </p:nvSpPr>
+        <p:spPr>
+          <a:xfrm>
+            <a:off x="7274052" y="4169664"/>
+            <a:ext cx="685800" cy="384048"/>
+          </a:xfrm>
+          <a:prstGeom prst="rect">
+            <a:avLst>
+              <a:gd name="adj" fmla="val 9524"/>
+            </a:avLst>
+          </a:prstGeom>
+          <a:solidFill>
+            <a:srgbClr val="FFFFFF"/>
+          </a:solidFill>
+          <a:ln w="12700">
+            <a:solidFill>
+              <a:srgbClr val="DB2777"/>
+            </a:solidFill>
+            <a:prstDash val="solid"/>
+          </a:ln>
+        </p:spPr>
+      </p:sp>
+      <p:sp>
+        <p:nvSpPr>
+          <p:cNvPr id="42" name="Text 40"/>
+          <p:cNvSpPr/>
+          <p:nvPr/>
+        </p:nvSpPr>
+        <p:spPr>
+          <a:xfrm>
+            <a:off x="7274052" y="4169664"/>
+            <a:ext cx="685800" cy="384048"/>
+          </a:xfrm>
+          <a:prstGeom prst="rect">
+            <a:avLst/>
+          </a:prstGeom>
+          <a:noFill/>
+          <a:ln/>
+        </p:spPr>
+        <p:txBody>
+          <a:bodyPr wrap="square" lIns="0" tIns="0" rIns="0" bIns="0" rtlCol="0" anchor="ctr"/>
+          <a:lstStyle/>
+          <a:p>
+            <a:pPr algn="ctr" indent="0" marL="0">
+              <a:buNone/>
+            </a:pPr>
+            <a:r>
+              <a:rPr lang="en-US" sz="900" b="1" dirty="0">
+                <a:solidFill>
+                  <a:srgbClr val="9D174D"/>
+                </a:solidFill>
+                <a:latin typeface="Trebuchet MS" pitchFamily="34" charset="0"/>
+                <a:ea typeface="Trebuchet MS" pitchFamily="34" charset="-122"/>
+                <a:cs typeface="Trebuchet MS" pitchFamily="34" charset="-120"/>
+              </a:rPr>
+              <a:t>ee</a:t>
+            </a:r>
+            <a:endParaRPr lang="en-US" sz="900" dirty="0"/>
+          </a:p>
+        </p:txBody>
+      </p:sp>
+      <p:sp>
+        <p:nvSpPr>
+          <p:cNvPr id="43" name="Text 41"/>
+          <p:cNvSpPr/>
+          <p:nvPr/>
+        </p:nvSpPr>
+        <p:spPr>
+          <a:xfrm>
+            <a:off x="7274052" y="4572000"/>
+            <a:ext cx="685800" cy="219456"/>
+          </a:xfrm>
+          <a:prstGeom prst="rect">
+            <a:avLst/>
+          </a:prstGeom>
+          <a:noFill/>
+          <a:ln/>
+        </p:spPr>
+        <p:txBody>
+          <a:bodyPr wrap="square" lIns="0" tIns="0" rIns="0" bIns="0" rtlCol="0" anchor="t"/>
+          <a:lstStyle/>
+          <a:p>
+            <a:pPr algn="ctr" indent="0" marL="0">
+              <a:buNone/>
+            </a:pPr>
+            <a:r>
+              <a:rPr lang="en-US" sz="750" i="1" dirty="0">
+                <a:solidFill>
+                  <a:srgbClr val="94A3B8"/>
+                </a:solidFill>
+                <a:latin typeface="Calibri" pitchFamily="34" charset="0"/>
+                <a:ea typeface="Calibri" pitchFamily="34" charset="-122"/>
+                <a:cs typeface="Calibri" pitchFamily="34" charset="-120"/>
+              </a:rPr>
+              <a:t>/ee/</a:t>
+            </a:r>
+            <a:endParaRPr lang="en-US" sz="750" dirty="0"/>
           </a:p>
         </p:txBody>
       </p:sp>
@@ -21850,7 +22171,7 @@
                 <a:ea typeface="Trebuchet MS" pitchFamily="34" charset="-122"/>
                 <a:cs typeface="Trebuchet MS" pitchFamily="34" charset="-120"/>
               </a:rPr>
-              <a:t>lukewarm</a:t>
+              <a:t>warmth</a:t>
             </a:r>
             <a:endParaRPr lang="en-US" sz="2800" dirty="0"/>
           </a:p>
@@ -22677,7 +22998,7 @@
                 <a:ea typeface="Trebuchet MS" pitchFamily="34" charset="-122"/>
                 <a:cs typeface="Trebuchet MS" pitchFamily="34" charset="-120"/>
               </a:rPr>
-              <a:t>lukewarm</a:t>
+              <a:t>warmth</a:t>
             </a:r>
             <a:endParaRPr lang="en-US" sz="2800" dirty="0"/>
           </a:p>
@@ -22766,11 +23087,11 @@
             </a:avLst>
           </a:prstGeom>
           <a:solidFill>
-            <a:srgbClr val="DDD6FE"/>
+            <a:srgbClr val="CCFBF1"/>
           </a:solidFill>
           <a:ln w="19050">
             <a:solidFill>
-              <a:srgbClr val="7C3AED"/>
+              <a:srgbClr val="0D9488"/>
             </a:solidFill>
             <a:prstDash val="solid"/>
           </a:ln>
@@ -22810,13 +23131,13 @@
             <a:r>
               <a:rPr lang="en-US" sz="1300" b="1" dirty="0">
                 <a:solidFill>
-                  <a:srgbClr val="4C1D95"/>
+                  <a:srgbClr val="0F766E"/>
                 </a:solidFill>
                 <a:latin typeface="Trebuchet MS" pitchFamily="34" charset="0"/>
                 <a:ea typeface="Trebuchet MS" pitchFamily="34" charset="-122"/>
                 <a:cs typeface="Trebuchet MS" pitchFamily="34" charset="-120"/>
               </a:rPr>
-              <a:t>luke</a:t>
+              <a:t>warm</a:t>
             </a:r>
             <a:endParaRPr lang="en-US" sz="1300" dirty="0"/>
           </a:p>
@@ -22855,7 +23176,7 @@
                 <a:ea typeface="Calibri" pitchFamily="34" charset="-122"/>
                 <a:cs typeface="Calibri" pitchFamily="34" charset="-120"/>
               </a:rPr>
-              <a:t>slightly or moderately</a:t>
+              <a:t>having moderate heat</a:t>
             </a:r>
             <a:endParaRPr lang="en-US" sz="850" dirty="0"/>
           </a:p>
@@ -22878,11 +23199,11 @@
             </a:avLst>
           </a:prstGeom>
           <a:solidFill>
-            <a:srgbClr val="CCFBF1"/>
+            <a:srgbClr val="FCE7F3"/>
           </a:solidFill>
           <a:ln w="19050">
             <a:solidFill>
-              <a:srgbClr val="0D9488"/>
+              <a:srgbClr val="DB2777"/>
             </a:solidFill>
             <a:prstDash val="solid"/>
           </a:ln>
@@ -22922,13 +23243,13 @@
             <a:r>
               <a:rPr lang="en-US" sz="1300" b="1" dirty="0">
                 <a:solidFill>
-                  <a:srgbClr val="0F766E"/>
+                  <a:srgbClr val="9D174D"/>
                 </a:solidFill>
                 <a:latin typeface="Trebuchet MS" pitchFamily="34" charset="0"/>
                 <a:ea typeface="Trebuchet MS" pitchFamily="34" charset="-122"/>
                 <a:cs typeface="Trebuchet MS" pitchFamily="34" charset="-120"/>
               </a:rPr>
-              <a:t>warm</a:t>
+              <a:t>th</a:t>
             </a:r>
             <a:endParaRPr lang="en-US" sz="1300" dirty="0"/>
           </a:p>
@@ -22967,7 +23288,7 @@
                 <a:ea typeface="Calibri" pitchFamily="34" charset="-122"/>
                 <a:cs typeface="Calibri" pitchFamily="34" charset="-120"/>
               </a:rPr>
-              <a:t>having moderate heat</a:t>
+              <a:t>state or quality of</a:t>
             </a:r>
             <a:endParaRPr lang="en-US" sz="850" dirty="0"/>
           </a:p>
@@ -24381,7 +24702,7 @@
                 <a:ea typeface="Trebuchet MS" pitchFamily="34" charset="-122"/>
                 <a:cs typeface="Trebuchet MS" pitchFamily="34" charset="-120"/>
               </a:rPr>
-              <a:t>lukewarm</a:t>
+              <a:t>warmth</a:t>
             </a:r>
             <a:endParaRPr lang="en-US" sz="2800" dirty="0"/>
           </a:p>
@@ -24470,11 +24791,11 @@
             </a:avLst>
           </a:prstGeom>
           <a:solidFill>
-            <a:srgbClr val="DDD6FE"/>
+            <a:srgbClr val="CCFBF1"/>
           </a:solidFill>
           <a:ln w="19050">
             <a:solidFill>
-              <a:srgbClr val="7C3AED"/>
+              <a:srgbClr val="0D9488"/>
             </a:solidFill>
             <a:prstDash val="solid"/>
           </a:ln>
@@ -24514,13 +24835,13 @@
             <a:r>
               <a:rPr lang="en-US" sz="1300" b="1" dirty="0">
                 <a:solidFill>
-                  <a:srgbClr val="4C1D95"/>
+                  <a:srgbClr val="0F766E"/>
                 </a:solidFill>
                 <a:latin typeface="Trebuchet MS" pitchFamily="34" charset="0"/>
                 <a:ea typeface="Trebuchet MS" pitchFamily="34" charset="-122"/>
                 <a:cs typeface="Trebuchet MS" pitchFamily="34" charset="-120"/>
               </a:rPr>
-              <a:t>luke</a:t>
+              <a:t>warm</a:t>
             </a:r>
             <a:endParaRPr lang="en-US" sz="1300" dirty="0"/>
           </a:p>
@@ -24559,7 +24880,7 @@
                 <a:ea typeface="Calibri" pitchFamily="34" charset="-122"/>
                 <a:cs typeface="Calibri" pitchFamily="34" charset="-120"/>
               </a:rPr>
-              <a:t>slightly or moderately</a:t>
+              <a:t>having moderate heat</a:t>
             </a:r>
             <a:endParaRPr lang="en-US" sz="850" dirty="0"/>
           </a:p>
@@ -24582,11 +24903,11 @@
             </a:avLst>
           </a:prstGeom>
           <a:solidFill>
-            <a:srgbClr val="CCFBF1"/>
+            <a:srgbClr val="FCE7F3"/>
           </a:solidFill>
           <a:ln w="19050">
             <a:solidFill>
-              <a:srgbClr val="0D9488"/>
+              <a:srgbClr val="DB2777"/>
             </a:solidFill>
             <a:prstDash val="solid"/>
           </a:ln>
@@ -24626,13 +24947,13 @@
             <a:r>
               <a:rPr lang="en-US" sz="1300" b="1" dirty="0">
                 <a:solidFill>
-                  <a:srgbClr val="0F766E"/>
+                  <a:srgbClr val="9D174D"/>
                 </a:solidFill>
                 <a:latin typeface="Trebuchet MS" pitchFamily="34" charset="0"/>
                 <a:ea typeface="Trebuchet MS" pitchFamily="34" charset="-122"/>
                 <a:cs typeface="Trebuchet MS" pitchFamily="34" charset="-120"/>
               </a:rPr>
-              <a:t>warm</a:t>
+              <a:t>th</a:t>
             </a:r>
             <a:endParaRPr lang="en-US" sz="1300" dirty="0"/>
           </a:p>
@@ -24671,7 +24992,7 @@
                 <a:ea typeface="Calibri" pitchFamily="34" charset="-122"/>
                 <a:cs typeface="Calibri" pitchFamily="34" charset="-120"/>
               </a:rPr>
-              <a:t>having moderate heat</a:t>
+              <a:t>state or quality of</a:t>
             </a:r>
             <a:endParaRPr lang="en-US" sz="850" dirty="0"/>
           </a:p>
@@ -24778,7 +25099,7 @@
         </p:nvSpPr>
         <p:spPr>
           <a:xfrm>
-            <a:off x="2999232" y="3364992"/>
+            <a:off x="4370832" y="3364992"/>
             <a:ext cx="1645920" cy="475488"/>
           </a:xfrm>
           <a:prstGeom prst="rect">
@@ -24805,7 +25126,7 @@
         </p:nvSpPr>
         <p:spPr>
           <a:xfrm>
-            <a:off x="2999232" y="3364992"/>
+            <a:off x="4370832" y="3364992"/>
             <a:ext cx="1645920" cy="475488"/>
           </a:xfrm>
           <a:prstGeom prst="rect">
@@ -24830,7 +25151,7 @@
                 <a:ea typeface="Trebuchet MS" pitchFamily="34" charset="-122"/>
                 <a:cs typeface="Trebuchet MS" pitchFamily="34" charset="-120"/>
               </a:rPr>
-              <a:t>luke</a:t>
+              <a:t>warmth</a:t>
             </a:r>
             <a:endParaRPr lang="en-US" sz="1400" dirty="0"/>
           </a:p>
@@ -24838,14 +25159,41 @@
       </p:sp>
       <p:sp>
         <p:nvSpPr>
-          <p:cNvPr id="27" name="Text 25"/>
-          <p:cNvSpPr/>
-          <p:nvPr/>
-        </p:nvSpPr>
-        <p:spPr>
-          <a:xfrm>
-            <a:off x="4645152" y="3364992"/>
-            <a:ext cx="1097280" cy="475488"/>
+          <p:cNvPr id="27" name="Shape 25"/>
+          <p:cNvSpPr/>
+          <p:nvPr/>
+        </p:nvSpPr>
+        <p:spPr>
+          <a:xfrm>
+            <a:off x="365760" y="4096512"/>
+            <a:ext cx="1371600" cy="804672"/>
+          </a:xfrm>
+          <a:prstGeom prst="rect">
+            <a:avLst>
+              <a:gd name="adj" fmla="val 6818"/>
+            </a:avLst>
+          </a:prstGeom>
+          <a:solidFill>
+            <a:srgbClr val="E2E8F0"/>
+          </a:solidFill>
+          <a:ln w="12700">
+            <a:solidFill>
+              <a:srgbClr val="E2E8F0"/>
+            </a:solidFill>
+            <a:prstDash val="solid"/>
+          </a:ln>
+        </p:spPr>
+      </p:sp>
+      <p:sp>
+        <p:nvSpPr>
+          <p:cNvPr id="28" name="Text 26"/>
+          <p:cNvSpPr/>
+          <p:nvPr/>
+        </p:nvSpPr>
+        <p:spPr>
+          <a:xfrm>
+            <a:off x="365760" y="4096512"/>
+            <a:ext cx="1371600" cy="804672"/>
           </a:xfrm>
           <a:prstGeom prst="rect">
             <a:avLst/>
@@ -24861,96 +25209,30 @@
               <a:buNone/>
             </a:pPr>
             <a:r>
-              <a:rPr lang="en-US" sz="1600" b="1" dirty="0">
-                <a:solidFill>
-                  <a:srgbClr val="0D9488"/>
+              <a:rPr lang="en-US" sz="1100" b="1" dirty="0">
+                <a:solidFill>
+                  <a:srgbClr val="475569"/>
                 </a:solidFill>
                 <a:latin typeface="Trebuchet MS" pitchFamily="34" charset="0"/>
                 <a:ea typeface="Trebuchet MS" pitchFamily="34" charset="-122"/>
                 <a:cs typeface="Trebuchet MS" pitchFamily="34" charset="-120"/>
               </a:rPr>
-              <a:t>·</a:t>
-            </a:r>
-            <a:endParaRPr lang="en-US" sz="1600" dirty="0"/>
-          </a:p>
-        </p:txBody>
-      </p:sp>
-      <p:sp>
-        <p:nvSpPr>
-          <p:cNvPr id="28" name="Shape 26"/>
-          <p:cNvSpPr/>
-          <p:nvPr/>
-        </p:nvSpPr>
-        <p:spPr>
-          <a:xfrm>
-            <a:off x="5742432" y="3364992"/>
-            <a:ext cx="1645920" cy="475488"/>
-          </a:xfrm>
-          <a:prstGeom prst="rect">
-            <a:avLst>
-              <a:gd name="adj" fmla="val 9615"/>
-            </a:avLst>
-          </a:prstGeom>
-          <a:solidFill>
-            <a:srgbClr val="FFFFFF"/>
-          </a:solidFill>
-          <a:ln w="12700">
-            <a:solidFill>
-              <a:srgbClr val="0D9488"/>
-            </a:solidFill>
-            <a:prstDash val="solid"/>
-          </a:ln>
-        </p:spPr>
-      </p:sp>
-      <p:sp>
-        <p:nvSpPr>
-          <p:cNvPr id="29" name="Text 27"/>
-          <p:cNvSpPr/>
-          <p:nvPr/>
-        </p:nvSpPr>
-        <p:spPr>
-          <a:xfrm>
-            <a:off x="5742432" y="3364992"/>
-            <a:ext cx="1645920" cy="475488"/>
-          </a:xfrm>
-          <a:prstGeom prst="rect">
-            <a:avLst/>
-          </a:prstGeom>
-          <a:noFill/>
-          <a:ln/>
-        </p:spPr>
-        <p:txBody>
-          <a:bodyPr wrap="square" lIns="0" tIns="0" rIns="0" bIns="0" rtlCol="0" anchor="ctr"/>
-          <a:lstStyle/>
-          <a:p>
-            <a:pPr algn="ctr" indent="0" marL="0">
-              <a:buNone/>
-            </a:pPr>
-            <a:r>
-              <a:rPr lang="en-US" sz="1400" b="1" dirty="0">
-                <a:solidFill>
-                  <a:srgbClr val="0D9488"/>
-                </a:solidFill>
-                <a:latin typeface="Trebuchet MS" pitchFamily="34" charset="0"/>
-                <a:ea typeface="Trebuchet MS" pitchFamily="34" charset="-122"/>
-                <a:cs typeface="Trebuchet MS" pitchFamily="34" charset="-120"/>
-              </a:rPr>
-              <a:t>warm</a:t>
-            </a:r>
-            <a:endParaRPr lang="en-US" sz="1400" dirty="0"/>
-          </a:p>
-        </p:txBody>
-      </p:sp>
-      <p:sp>
-        <p:nvSpPr>
-          <p:cNvPr id="30" name="Shape 28"/>
-          <p:cNvSpPr/>
-          <p:nvPr/>
-        </p:nvSpPr>
-        <p:spPr>
-          <a:xfrm>
-            <a:off x="365760" y="4096512"/>
-            <a:ext cx="1371600" cy="804672"/>
+              <a:t>Phonemes</a:t>
+            </a:r>
+            <a:endParaRPr lang="en-US" sz="1100" dirty="0"/>
+          </a:p>
+        </p:txBody>
+      </p:sp>
+      <p:sp>
+        <p:nvSpPr>
+          <p:cNvPr id="29" name="Shape 27"/>
+          <p:cNvSpPr/>
+          <p:nvPr/>
+        </p:nvSpPr>
+        <p:spPr>
+          <a:xfrm>
+            <a:off x="1874520" y="4096512"/>
+            <a:ext cx="6903720" cy="804672"/>
           </a:xfrm>
           <a:prstGeom prst="rect">
             <a:avLst>
@@ -24958,85 +25240,19 @@
             </a:avLst>
           </a:prstGeom>
           <a:solidFill>
-            <a:srgbClr val="E2E8F0"/>
+            <a:srgbClr val="F8FAFC"/>
           </a:solidFill>
           <a:ln w="12700">
             <a:solidFill>
               <a:srgbClr val="E2E8F0"/>
             </a:solidFill>
-            <a:prstDash val="solid"/>
-          </a:ln>
-        </p:spPr>
-      </p:sp>
-      <p:sp>
-        <p:nvSpPr>
-          <p:cNvPr id="31" name="Text 29"/>
-          <p:cNvSpPr/>
-          <p:nvPr/>
-        </p:nvSpPr>
-        <p:spPr>
-          <a:xfrm>
-            <a:off x="365760" y="4096512"/>
-            <a:ext cx="1371600" cy="804672"/>
-          </a:xfrm>
-          <a:prstGeom prst="rect">
-            <a:avLst/>
-          </a:prstGeom>
-          <a:noFill/>
-          <a:ln/>
-        </p:spPr>
-        <p:txBody>
-          <a:bodyPr wrap="square" lIns="0" tIns="0" rIns="0" bIns="0" rtlCol="0" anchor="ctr"/>
-          <a:lstStyle/>
-          <a:p>
-            <a:pPr algn="ctr" indent="0" marL="0">
-              <a:buNone/>
-            </a:pPr>
-            <a:r>
-              <a:rPr lang="en-US" sz="1100" b="1" dirty="0">
-                <a:solidFill>
-                  <a:srgbClr val="475569"/>
-                </a:solidFill>
-                <a:latin typeface="Trebuchet MS" pitchFamily="34" charset="0"/>
-                <a:ea typeface="Trebuchet MS" pitchFamily="34" charset="-122"/>
-                <a:cs typeface="Trebuchet MS" pitchFamily="34" charset="-120"/>
-              </a:rPr>
-              <a:t>Phonemes</a:t>
-            </a:r>
-            <a:endParaRPr lang="en-US" sz="1100" dirty="0"/>
-          </a:p>
-        </p:txBody>
-      </p:sp>
-      <p:sp>
-        <p:nvSpPr>
-          <p:cNvPr id="32" name="Shape 30"/>
-          <p:cNvSpPr/>
-          <p:nvPr/>
-        </p:nvSpPr>
-        <p:spPr>
-          <a:xfrm>
-            <a:off x="1874520" y="4096512"/>
-            <a:ext cx="6903720" cy="804672"/>
-          </a:xfrm>
-          <a:prstGeom prst="rect">
-            <a:avLst>
-              <a:gd name="adj" fmla="val 6818"/>
-            </a:avLst>
-          </a:prstGeom>
-          <a:solidFill>
-            <a:srgbClr val="F8FAFC"/>
-          </a:solidFill>
-          <a:ln w="12700">
-            <a:solidFill>
-              <a:srgbClr val="E2E8F0"/>
-            </a:solidFill>
             <a:prstDash val="dash"/>
           </a:ln>
         </p:spPr>
       </p:sp>
       <p:sp>
         <p:nvSpPr>
-          <p:cNvPr id="33" name="Text 31"/>
+          <p:cNvPr id="30" name="Text 28"/>
           <p:cNvSpPr/>
           <p:nvPr/>
         </p:nvSpPr>
@@ -25498,7 +25714,7 @@
                 <a:ea typeface="Trebuchet MS" pitchFamily="34" charset="-122"/>
                 <a:cs typeface="Trebuchet MS" pitchFamily="34" charset="-120"/>
               </a:rPr>
-              <a:t>lukewarm</a:t>
+              <a:t>warmth</a:t>
             </a:r>
             <a:endParaRPr lang="en-US" sz="2800" dirty="0"/>
           </a:p>
@@ -25587,11 +25803,11 @@
             </a:avLst>
           </a:prstGeom>
           <a:solidFill>
-            <a:srgbClr val="DDD6FE"/>
+            <a:srgbClr val="CCFBF1"/>
           </a:solidFill>
           <a:ln w="19050">
             <a:solidFill>
-              <a:srgbClr val="7C3AED"/>
+              <a:srgbClr val="0D9488"/>
             </a:solidFill>
             <a:prstDash val="solid"/>
           </a:ln>
@@ -25631,13 +25847,13 @@
             <a:r>
               <a:rPr lang="en-US" sz="1300" b="1" dirty="0">
                 <a:solidFill>
-                  <a:srgbClr val="4C1D95"/>
+                  <a:srgbClr val="0F766E"/>
                 </a:solidFill>
                 <a:latin typeface="Trebuchet MS" pitchFamily="34" charset="0"/>
                 <a:ea typeface="Trebuchet MS" pitchFamily="34" charset="-122"/>
                 <a:cs typeface="Trebuchet MS" pitchFamily="34" charset="-120"/>
               </a:rPr>
-              <a:t>luke</a:t>
+              <a:t>warm</a:t>
             </a:r>
             <a:endParaRPr lang="en-US" sz="1300" dirty="0"/>
           </a:p>
@@ -25676,7 +25892,7 @@
                 <a:ea typeface="Calibri" pitchFamily="34" charset="-122"/>
                 <a:cs typeface="Calibri" pitchFamily="34" charset="-120"/>
               </a:rPr>
-              <a:t>slightly or moderately</a:t>
+              <a:t>having moderate heat</a:t>
             </a:r>
             <a:endParaRPr lang="en-US" sz="850" dirty="0"/>
           </a:p>
@@ -25699,11 +25915,11 @@
             </a:avLst>
           </a:prstGeom>
           <a:solidFill>
-            <a:srgbClr val="CCFBF1"/>
+            <a:srgbClr val="FCE7F3"/>
           </a:solidFill>
           <a:ln w="19050">
             <a:solidFill>
-              <a:srgbClr val="0D9488"/>
+              <a:srgbClr val="DB2777"/>
             </a:solidFill>
             <a:prstDash val="solid"/>
           </a:ln>
@@ -25743,13 +25959,13 @@
             <a:r>
               <a:rPr lang="en-US" sz="1300" b="1" dirty="0">
                 <a:solidFill>
-                  <a:srgbClr val="0F766E"/>
+                  <a:srgbClr val="9D174D"/>
                 </a:solidFill>
                 <a:latin typeface="Trebuchet MS" pitchFamily="34" charset="0"/>
                 <a:ea typeface="Trebuchet MS" pitchFamily="34" charset="-122"/>
                 <a:cs typeface="Trebuchet MS" pitchFamily="34" charset="-120"/>
               </a:rPr>
-              <a:t>warm</a:t>
+              <a:t>th</a:t>
             </a:r>
             <a:endParaRPr lang="en-US" sz="1300" dirty="0"/>
           </a:p>
@@ -25788,7 +26004,7 @@
                 <a:ea typeface="Calibri" pitchFamily="34" charset="-122"/>
                 <a:cs typeface="Calibri" pitchFamily="34" charset="-120"/>
               </a:rPr>
-              <a:t>having moderate heat</a:t>
+              <a:t>state or quality of</a:t>
             </a:r>
             <a:endParaRPr lang="en-US" sz="850" dirty="0"/>
           </a:p>
@@ -25895,7 +26111,7 @@
         </p:nvSpPr>
         <p:spPr>
           <a:xfrm>
-            <a:off x="2999232" y="3364992"/>
+            <a:off x="4370832" y="3364992"/>
             <a:ext cx="1645920" cy="475488"/>
           </a:xfrm>
           <a:prstGeom prst="rect">
@@ -25922,7 +26138,7 @@
         </p:nvSpPr>
         <p:spPr>
           <a:xfrm>
-            <a:off x="2999232" y="3364992"/>
+            <a:off x="4370832" y="3364992"/>
             <a:ext cx="1645920" cy="475488"/>
           </a:xfrm>
           <a:prstGeom prst="rect">
@@ -25947,7 +26163,7 @@
                 <a:ea typeface="Trebuchet MS" pitchFamily="34" charset="-122"/>
                 <a:cs typeface="Trebuchet MS" pitchFamily="34" charset="-120"/>
               </a:rPr>
-              <a:t>luke</a:t>
+              <a:t>warmth</a:t>
             </a:r>
             <a:endParaRPr lang="en-US" sz="1400" dirty="0"/>
           </a:p>
@@ -25955,14 +26171,41 @@
       </p:sp>
       <p:sp>
         <p:nvSpPr>
-          <p:cNvPr id="27" name="Text 25"/>
-          <p:cNvSpPr/>
-          <p:nvPr/>
-        </p:nvSpPr>
-        <p:spPr>
-          <a:xfrm>
-            <a:off x="4645152" y="3364992"/>
-            <a:ext cx="1097280" cy="475488"/>
+          <p:cNvPr id="27" name="Shape 25"/>
+          <p:cNvSpPr/>
+          <p:nvPr/>
+        </p:nvSpPr>
+        <p:spPr>
+          <a:xfrm>
+            <a:off x="365760" y="4096512"/>
+            <a:ext cx="1371600" cy="804672"/>
+          </a:xfrm>
+          <a:prstGeom prst="rect">
+            <a:avLst>
+              <a:gd name="adj" fmla="val 6818"/>
+            </a:avLst>
+          </a:prstGeom>
+          <a:solidFill>
+            <a:srgbClr val="E2E8F0"/>
+          </a:solidFill>
+          <a:ln w="12700">
+            <a:solidFill>
+              <a:srgbClr val="E2E8F0"/>
+            </a:solidFill>
+            <a:prstDash val="solid"/>
+          </a:ln>
+        </p:spPr>
+      </p:sp>
+      <p:sp>
+        <p:nvSpPr>
+          <p:cNvPr id="28" name="Text 26"/>
+          <p:cNvSpPr/>
+          <p:nvPr/>
+        </p:nvSpPr>
+        <p:spPr>
+          <a:xfrm>
+            <a:off x="365760" y="4096512"/>
+            <a:ext cx="1371600" cy="804672"/>
           </a:xfrm>
           <a:prstGeom prst="rect">
             <a:avLst/>
@@ -25978,57 +26221,84 @@
               <a:buNone/>
             </a:pPr>
             <a:r>
-              <a:rPr lang="en-US" sz="1600" b="1" dirty="0">
-                <a:solidFill>
-                  <a:srgbClr val="0D9488"/>
+              <a:rPr lang="en-US" sz="1100" b="1" dirty="0">
+                <a:solidFill>
+                  <a:srgbClr val="475569"/>
                 </a:solidFill>
                 <a:latin typeface="Trebuchet MS" pitchFamily="34" charset="0"/>
                 <a:ea typeface="Trebuchet MS" pitchFamily="34" charset="-122"/>
                 <a:cs typeface="Trebuchet MS" pitchFamily="34" charset="-120"/>
               </a:rPr>
-              <a:t>·</a:t>
-            </a:r>
-            <a:endParaRPr lang="en-US" sz="1600" dirty="0"/>
-          </a:p>
-        </p:txBody>
-      </p:sp>
-      <p:sp>
-        <p:nvSpPr>
-          <p:cNvPr id="28" name="Shape 26"/>
-          <p:cNvSpPr/>
-          <p:nvPr/>
-        </p:nvSpPr>
-        <p:spPr>
-          <a:xfrm>
-            <a:off x="5742432" y="3364992"/>
-            <a:ext cx="1645920" cy="475488"/>
+              <a:t>Phonemes</a:t>
+            </a:r>
+            <a:endParaRPr lang="en-US" sz="1100" dirty="0"/>
+          </a:p>
+        </p:txBody>
+      </p:sp>
+      <p:sp>
+        <p:nvSpPr>
+          <p:cNvPr id="29" name="Shape 27"/>
+          <p:cNvSpPr/>
+          <p:nvPr/>
+        </p:nvSpPr>
+        <p:spPr>
+          <a:xfrm>
+            <a:off x="1874520" y="4096512"/>
+            <a:ext cx="6903720" cy="658368"/>
           </a:xfrm>
           <a:prstGeom prst="rect">
             <a:avLst>
-              <a:gd name="adj" fmla="val 9615"/>
+              <a:gd name="adj" fmla="val 8333"/>
             </a:avLst>
           </a:prstGeom>
           <a:solidFill>
+            <a:srgbClr val="FCE7F3"/>
+          </a:solidFill>
+          <a:ln w="12700">
+            <a:solidFill>
+              <a:srgbClr val="DB2777"/>
+            </a:solidFill>
+            <a:prstDash val="solid"/>
+          </a:ln>
+        </p:spPr>
+      </p:sp>
+      <p:sp>
+        <p:nvSpPr>
+          <p:cNvPr id="30" name="Shape 28"/>
+          <p:cNvSpPr/>
+          <p:nvPr/>
+        </p:nvSpPr>
+        <p:spPr>
+          <a:xfrm>
+            <a:off x="2670048" y="4169664"/>
+            <a:ext cx="685800" cy="475488"/>
+          </a:xfrm>
+          <a:prstGeom prst="rect">
+            <a:avLst>
+              <a:gd name="adj" fmla="val 7692"/>
+            </a:avLst>
+          </a:prstGeom>
+          <a:solidFill>
             <a:srgbClr val="FFFFFF"/>
           </a:solidFill>
           <a:ln w="12700">
             <a:solidFill>
-              <a:srgbClr val="0D9488"/>
-            </a:solidFill>
-            <a:prstDash val="solid"/>
-          </a:ln>
-        </p:spPr>
-      </p:sp>
-      <p:sp>
-        <p:nvSpPr>
-          <p:cNvPr id="29" name="Text 27"/>
-          <p:cNvSpPr/>
-          <p:nvPr/>
-        </p:nvSpPr>
-        <p:spPr>
-          <a:xfrm>
-            <a:off x="5742432" y="3364992"/>
-            <a:ext cx="1645920" cy="475488"/>
+              <a:srgbClr val="DB2777"/>
+            </a:solidFill>
+            <a:prstDash val="solid"/>
+          </a:ln>
+        </p:spPr>
+      </p:sp>
+      <p:sp>
+        <p:nvSpPr>
+          <p:cNvPr id="31" name="Text 29"/>
+          <p:cNvSpPr/>
+          <p:nvPr/>
+        </p:nvSpPr>
+        <p:spPr>
+          <a:xfrm>
+            <a:off x="2670048" y="4169664"/>
+            <a:ext cx="685800" cy="475488"/>
           </a:xfrm>
           <a:prstGeom prst="rect">
             <a:avLst/>
@@ -26044,57 +26314,57 @@
               <a:buNone/>
             </a:pPr>
             <a:r>
-              <a:rPr lang="en-US" sz="1400" b="1" dirty="0">
-                <a:solidFill>
-                  <a:srgbClr val="0D9488"/>
+              <a:rPr lang="en-US" sz="900" b="1" dirty="0">
+                <a:solidFill>
+                  <a:srgbClr val="9D174D"/>
                 </a:solidFill>
                 <a:latin typeface="Trebuchet MS" pitchFamily="34" charset="0"/>
                 <a:ea typeface="Trebuchet MS" pitchFamily="34" charset="-122"/>
                 <a:cs typeface="Trebuchet MS" pitchFamily="34" charset="-120"/>
               </a:rPr>
-              <a:t>warm</a:t>
-            </a:r>
-            <a:endParaRPr lang="en-US" sz="1400" dirty="0"/>
-          </a:p>
-        </p:txBody>
-      </p:sp>
-      <p:sp>
-        <p:nvSpPr>
-          <p:cNvPr id="30" name="Shape 28"/>
-          <p:cNvSpPr/>
-          <p:nvPr/>
-        </p:nvSpPr>
-        <p:spPr>
-          <a:xfrm>
-            <a:off x="365760" y="4096512"/>
-            <a:ext cx="1371600" cy="804672"/>
+              <a:t>w</a:t>
+            </a:r>
+            <a:endParaRPr lang="en-US" sz="900" dirty="0"/>
+          </a:p>
+        </p:txBody>
+      </p:sp>
+      <p:sp>
+        <p:nvSpPr>
+          <p:cNvPr id="32" name="Shape 30"/>
+          <p:cNvSpPr/>
+          <p:nvPr/>
+        </p:nvSpPr>
+        <p:spPr>
+          <a:xfrm>
+            <a:off x="4123944" y="4169664"/>
+            <a:ext cx="685800" cy="475488"/>
           </a:xfrm>
           <a:prstGeom prst="rect">
             <a:avLst>
-              <a:gd name="adj" fmla="val 6818"/>
+              <a:gd name="adj" fmla="val 7692"/>
             </a:avLst>
           </a:prstGeom>
           <a:solidFill>
-            <a:srgbClr val="E2E8F0"/>
-          </a:solidFill>
-          <a:ln w="12700">
-            <a:solidFill>
-              <a:srgbClr val="E2E8F0"/>
-            </a:solidFill>
-            <a:prstDash val="solid"/>
-          </a:ln>
-        </p:spPr>
-      </p:sp>
-      <p:sp>
-        <p:nvSpPr>
-          <p:cNvPr id="31" name="Text 29"/>
-          <p:cNvSpPr/>
-          <p:nvPr/>
-        </p:nvSpPr>
-        <p:spPr>
-          <a:xfrm>
-            <a:off x="365760" y="4096512"/>
-            <a:ext cx="1371600" cy="804672"/>
+            <a:srgbClr val="FFFFFF"/>
+          </a:solidFill>
+          <a:ln w="12700">
+            <a:solidFill>
+              <a:srgbClr val="DB2777"/>
+            </a:solidFill>
+            <a:prstDash val="solid"/>
+          </a:ln>
+        </p:spPr>
+      </p:sp>
+      <p:sp>
+        <p:nvSpPr>
+          <p:cNvPr id="33" name="Text 31"/>
+          <p:cNvSpPr/>
+          <p:nvPr/>
+        </p:nvSpPr>
+        <p:spPr>
+          <a:xfrm>
+            <a:off x="4123944" y="4169664"/>
+            <a:ext cx="685800" cy="475488"/>
           </a:xfrm>
           <a:prstGeom prst="rect">
             <a:avLst/>
@@ -26110,56 +26380,29 @@
               <a:buNone/>
             </a:pPr>
             <a:r>
-              <a:rPr lang="en-US" sz="1100" b="1" dirty="0">
-                <a:solidFill>
-                  <a:srgbClr val="475569"/>
+              <a:rPr lang="en-US" sz="900" b="1" dirty="0">
+                <a:solidFill>
+                  <a:srgbClr val="9D174D"/>
                 </a:solidFill>
                 <a:latin typeface="Trebuchet MS" pitchFamily="34" charset="0"/>
                 <a:ea typeface="Trebuchet MS" pitchFamily="34" charset="-122"/>
                 <a:cs typeface="Trebuchet MS" pitchFamily="34" charset="-120"/>
               </a:rPr>
-              <a:t>Phonemes</a:t>
-            </a:r>
-            <a:endParaRPr lang="en-US" sz="1100" dirty="0"/>
-          </a:p>
-        </p:txBody>
-      </p:sp>
-      <p:sp>
-        <p:nvSpPr>
-          <p:cNvPr id="32" name="Shape 30"/>
-          <p:cNvSpPr/>
-          <p:nvPr/>
-        </p:nvSpPr>
-        <p:spPr>
-          <a:xfrm>
-            <a:off x="1874520" y="4096512"/>
-            <a:ext cx="6903720" cy="658368"/>
-          </a:xfrm>
-          <a:prstGeom prst="rect">
-            <a:avLst>
-              <a:gd name="adj" fmla="val 8333"/>
-            </a:avLst>
-          </a:prstGeom>
-          <a:solidFill>
-            <a:srgbClr val="FCE7F3"/>
-          </a:solidFill>
-          <a:ln w="12700">
-            <a:solidFill>
-              <a:srgbClr val="DB2777"/>
-            </a:solidFill>
-            <a:prstDash val="solid"/>
-          </a:ln>
-        </p:spPr>
-      </p:sp>
-      <p:sp>
-        <p:nvSpPr>
-          <p:cNvPr id="33" name="Shape 31"/>
-          <p:cNvSpPr/>
-          <p:nvPr/>
-        </p:nvSpPr>
-        <p:spPr>
-          <a:xfrm>
-            <a:off x="2124837" y="4169664"/>
+              <a:t>ar</a:t>
+            </a:r>
+            <a:endParaRPr lang="en-US" sz="900" dirty="0"/>
+          </a:p>
+        </p:txBody>
+      </p:sp>
+      <p:sp>
+        <p:nvSpPr>
+          <p:cNvPr id="34" name="Shape 32"/>
+          <p:cNvSpPr/>
+          <p:nvPr/>
+        </p:nvSpPr>
+        <p:spPr>
+          <a:xfrm>
+            <a:off x="5577840" y="4169664"/>
             <a:ext cx="685800" cy="475488"/>
           </a:xfrm>
           <a:prstGeom prst="rect">
@@ -26180,13 +26423,13 @@
       </p:sp>
       <p:sp>
         <p:nvSpPr>
-          <p:cNvPr id="34" name="Text 32"/>
-          <p:cNvSpPr/>
-          <p:nvPr/>
-        </p:nvSpPr>
-        <p:spPr>
-          <a:xfrm>
-            <a:off x="2124837" y="4169664"/>
+          <p:cNvPr id="35" name="Text 33"/>
+          <p:cNvSpPr/>
+          <p:nvPr/>
+        </p:nvSpPr>
+        <p:spPr>
+          <a:xfrm>
+            <a:off x="5577840" y="4169664"/>
             <a:ext cx="685800" cy="475488"/>
           </a:xfrm>
           <a:prstGeom prst="rect">
@@ -26211,7 +26454,7 @@
                 <a:ea typeface="Trebuchet MS" pitchFamily="34" charset="-122"/>
                 <a:cs typeface="Trebuchet MS" pitchFamily="34" charset="-120"/>
               </a:rPr>
-              <a:t>l</a:t>
+              <a:t>m</a:t>
             </a:r>
             <a:endParaRPr lang="en-US" sz="900" dirty="0"/>
           </a:p>
@@ -26219,13 +26462,13 @@
       </p:sp>
       <p:sp>
         <p:nvSpPr>
-          <p:cNvPr id="35" name="Shape 33"/>
-          <p:cNvSpPr/>
-          <p:nvPr/>
-        </p:nvSpPr>
-        <p:spPr>
-          <a:xfrm>
-            <a:off x="3033522" y="4169664"/>
+          <p:cNvPr id="36" name="Shape 34"/>
+          <p:cNvSpPr/>
+          <p:nvPr/>
+        </p:nvSpPr>
+        <p:spPr>
+          <a:xfrm>
+            <a:off x="7031736" y="4169664"/>
             <a:ext cx="685800" cy="475488"/>
           </a:xfrm>
           <a:prstGeom prst="rect">
@@ -26246,13 +26489,13 @@
       </p:sp>
       <p:sp>
         <p:nvSpPr>
-          <p:cNvPr id="36" name="Text 34"/>
-          <p:cNvSpPr/>
-          <p:nvPr/>
-        </p:nvSpPr>
-        <p:spPr>
-          <a:xfrm>
-            <a:off x="3033522" y="4169664"/>
+          <p:cNvPr id="37" name="Text 35"/>
+          <p:cNvSpPr/>
+          <p:nvPr/>
+        </p:nvSpPr>
+        <p:spPr>
+          <a:xfrm>
+            <a:off x="7031736" y="4169664"/>
             <a:ext cx="685800" cy="475488"/>
           </a:xfrm>
           <a:prstGeom prst="rect">
@@ -26277,337 +26520,7 @@
                 <a:ea typeface="Trebuchet MS" pitchFamily="34" charset="-122"/>
                 <a:cs typeface="Trebuchet MS" pitchFamily="34" charset="-120"/>
               </a:rPr>
-              <a:t>u</a:t>
-            </a:r>
-            <a:endParaRPr lang="en-US" sz="900" dirty="0"/>
-          </a:p>
-        </p:txBody>
-      </p:sp>
-      <p:sp>
-        <p:nvSpPr>
-          <p:cNvPr id="37" name="Shape 35"/>
-          <p:cNvSpPr/>
-          <p:nvPr/>
-        </p:nvSpPr>
-        <p:spPr>
-          <a:xfrm>
-            <a:off x="3942207" y="4169664"/>
-            <a:ext cx="685800" cy="475488"/>
-          </a:xfrm>
-          <a:prstGeom prst="rect">
-            <a:avLst>
-              <a:gd name="adj" fmla="val 7692"/>
-            </a:avLst>
-          </a:prstGeom>
-          <a:solidFill>
-            <a:srgbClr val="FFFFFF"/>
-          </a:solidFill>
-          <a:ln w="12700">
-            <a:solidFill>
-              <a:srgbClr val="DB2777"/>
-            </a:solidFill>
-            <a:prstDash val="solid"/>
-          </a:ln>
-        </p:spPr>
-      </p:sp>
-      <p:sp>
-        <p:nvSpPr>
-          <p:cNvPr id="38" name="Text 36"/>
-          <p:cNvSpPr/>
-          <p:nvPr/>
-        </p:nvSpPr>
-        <p:spPr>
-          <a:xfrm>
-            <a:off x="3942207" y="4169664"/>
-            <a:ext cx="685800" cy="475488"/>
-          </a:xfrm>
-          <a:prstGeom prst="rect">
-            <a:avLst/>
-          </a:prstGeom>
-          <a:noFill/>
-          <a:ln/>
-        </p:spPr>
-        <p:txBody>
-          <a:bodyPr wrap="square" lIns="0" tIns="0" rIns="0" bIns="0" rtlCol="0" anchor="ctr"/>
-          <a:lstStyle/>
-          <a:p>
-            <a:pPr algn="ctr" indent="0" marL="0">
-              <a:buNone/>
-            </a:pPr>
-            <a:r>
-              <a:rPr lang="en-US" sz="900" b="1" dirty="0">
-                <a:solidFill>
-                  <a:srgbClr val="9D174D"/>
-                </a:solidFill>
-                <a:latin typeface="Trebuchet MS" pitchFamily="34" charset="0"/>
-                <a:ea typeface="Trebuchet MS" pitchFamily="34" charset="-122"/>
-                <a:cs typeface="Trebuchet MS" pitchFamily="34" charset="-120"/>
-              </a:rPr>
-              <a:t>k</a:t>
-            </a:r>
-            <a:endParaRPr lang="en-US" sz="900" dirty="0"/>
-          </a:p>
-        </p:txBody>
-      </p:sp>
-      <p:sp>
-        <p:nvSpPr>
-          <p:cNvPr id="39" name="Shape 37"/>
-          <p:cNvSpPr/>
-          <p:nvPr/>
-        </p:nvSpPr>
-        <p:spPr>
-          <a:xfrm>
-            <a:off x="4850892" y="4169664"/>
-            <a:ext cx="685800" cy="475488"/>
-          </a:xfrm>
-          <a:prstGeom prst="rect">
-            <a:avLst>
-              <a:gd name="adj" fmla="val 7692"/>
-            </a:avLst>
-          </a:prstGeom>
-          <a:solidFill>
-            <a:srgbClr val="FFFFFF"/>
-          </a:solidFill>
-          <a:ln w="12700">
-            <a:solidFill>
-              <a:srgbClr val="DB2777"/>
-            </a:solidFill>
-            <a:prstDash val="solid"/>
-          </a:ln>
-        </p:spPr>
-      </p:sp>
-      <p:sp>
-        <p:nvSpPr>
-          <p:cNvPr id="40" name="Text 38"/>
-          <p:cNvSpPr/>
-          <p:nvPr/>
-        </p:nvSpPr>
-        <p:spPr>
-          <a:xfrm>
-            <a:off x="4850892" y="4169664"/>
-            <a:ext cx="685800" cy="475488"/>
-          </a:xfrm>
-          <a:prstGeom prst="rect">
-            <a:avLst/>
-          </a:prstGeom>
-          <a:noFill/>
-          <a:ln/>
-        </p:spPr>
-        <p:txBody>
-          <a:bodyPr wrap="square" lIns="0" tIns="0" rIns="0" bIns="0" rtlCol="0" anchor="ctr"/>
-          <a:lstStyle/>
-          <a:p>
-            <a:pPr algn="ctr" indent="0" marL="0">
-              <a:buNone/>
-            </a:pPr>
-            <a:r>
-              <a:rPr lang="en-US" sz="900" b="1" dirty="0">
-                <a:solidFill>
-                  <a:srgbClr val="9D174D"/>
-                </a:solidFill>
-                <a:latin typeface="Trebuchet MS" pitchFamily="34" charset="0"/>
-                <a:ea typeface="Trebuchet MS" pitchFamily="34" charset="-122"/>
-                <a:cs typeface="Trebuchet MS" pitchFamily="34" charset="-120"/>
-              </a:rPr>
-              <a:t>e</a:t>
-            </a:r>
-            <a:endParaRPr lang="en-US" sz="900" dirty="0"/>
-          </a:p>
-        </p:txBody>
-      </p:sp>
-      <p:sp>
-        <p:nvSpPr>
-          <p:cNvPr id="41" name="Shape 39"/>
-          <p:cNvSpPr/>
-          <p:nvPr/>
-        </p:nvSpPr>
-        <p:spPr>
-          <a:xfrm>
-            <a:off x="5759577" y="4169664"/>
-            <a:ext cx="685800" cy="475488"/>
-          </a:xfrm>
-          <a:prstGeom prst="rect">
-            <a:avLst>
-              <a:gd name="adj" fmla="val 7692"/>
-            </a:avLst>
-          </a:prstGeom>
-          <a:solidFill>
-            <a:srgbClr val="FFFFFF"/>
-          </a:solidFill>
-          <a:ln w="12700">
-            <a:solidFill>
-              <a:srgbClr val="DB2777"/>
-            </a:solidFill>
-            <a:prstDash val="solid"/>
-          </a:ln>
-        </p:spPr>
-      </p:sp>
-      <p:sp>
-        <p:nvSpPr>
-          <p:cNvPr id="42" name="Text 40"/>
-          <p:cNvSpPr/>
-          <p:nvPr/>
-        </p:nvSpPr>
-        <p:spPr>
-          <a:xfrm>
-            <a:off x="5759577" y="4169664"/>
-            <a:ext cx="685800" cy="475488"/>
-          </a:xfrm>
-          <a:prstGeom prst="rect">
-            <a:avLst/>
-          </a:prstGeom>
-          <a:noFill/>
-          <a:ln/>
-        </p:spPr>
-        <p:txBody>
-          <a:bodyPr wrap="square" lIns="0" tIns="0" rIns="0" bIns="0" rtlCol="0" anchor="ctr"/>
-          <a:lstStyle/>
-          <a:p>
-            <a:pPr algn="ctr" indent="0" marL="0">
-              <a:buNone/>
-            </a:pPr>
-            <a:r>
-              <a:rPr lang="en-US" sz="900" b="1" dirty="0">
-                <a:solidFill>
-                  <a:srgbClr val="9D174D"/>
-                </a:solidFill>
-                <a:latin typeface="Trebuchet MS" pitchFamily="34" charset="0"/>
-                <a:ea typeface="Trebuchet MS" pitchFamily="34" charset="-122"/>
-                <a:cs typeface="Trebuchet MS" pitchFamily="34" charset="-120"/>
-              </a:rPr>
-              <a:t>w</a:t>
-            </a:r>
-            <a:endParaRPr lang="en-US" sz="900" dirty="0"/>
-          </a:p>
-        </p:txBody>
-      </p:sp>
-      <p:sp>
-        <p:nvSpPr>
-          <p:cNvPr id="43" name="Shape 41"/>
-          <p:cNvSpPr/>
-          <p:nvPr/>
-        </p:nvSpPr>
-        <p:spPr>
-          <a:xfrm>
-            <a:off x="6668262" y="4169664"/>
-            <a:ext cx="685800" cy="475488"/>
-          </a:xfrm>
-          <a:prstGeom prst="rect">
-            <a:avLst>
-              <a:gd name="adj" fmla="val 7692"/>
-            </a:avLst>
-          </a:prstGeom>
-          <a:solidFill>
-            <a:srgbClr val="FFFFFF"/>
-          </a:solidFill>
-          <a:ln w="12700">
-            <a:solidFill>
-              <a:srgbClr val="DB2777"/>
-            </a:solidFill>
-            <a:prstDash val="solid"/>
-          </a:ln>
-        </p:spPr>
-      </p:sp>
-      <p:sp>
-        <p:nvSpPr>
-          <p:cNvPr id="44" name="Text 42"/>
-          <p:cNvSpPr/>
-          <p:nvPr/>
-        </p:nvSpPr>
-        <p:spPr>
-          <a:xfrm>
-            <a:off x="6668262" y="4169664"/>
-            <a:ext cx="685800" cy="475488"/>
-          </a:xfrm>
-          <a:prstGeom prst="rect">
-            <a:avLst/>
-          </a:prstGeom>
-          <a:noFill/>
-          <a:ln/>
-        </p:spPr>
-        <p:txBody>
-          <a:bodyPr wrap="square" lIns="0" tIns="0" rIns="0" bIns="0" rtlCol="0" anchor="ctr"/>
-          <a:lstStyle/>
-          <a:p>
-            <a:pPr algn="ctr" indent="0" marL="0">
-              <a:buNone/>
-            </a:pPr>
-            <a:r>
-              <a:rPr lang="en-US" sz="900" b="1" dirty="0">
-                <a:solidFill>
-                  <a:srgbClr val="9D174D"/>
-                </a:solidFill>
-                <a:latin typeface="Trebuchet MS" pitchFamily="34" charset="0"/>
-                <a:ea typeface="Trebuchet MS" pitchFamily="34" charset="-122"/>
-                <a:cs typeface="Trebuchet MS" pitchFamily="34" charset="-120"/>
-              </a:rPr>
-              <a:t>ar</a:t>
-            </a:r>
-            <a:endParaRPr lang="en-US" sz="900" dirty="0"/>
-          </a:p>
-        </p:txBody>
-      </p:sp>
-      <p:sp>
-        <p:nvSpPr>
-          <p:cNvPr id="45" name="Shape 43"/>
-          <p:cNvSpPr/>
-          <p:nvPr/>
-        </p:nvSpPr>
-        <p:spPr>
-          <a:xfrm>
-            <a:off x="7576947" y="4169664"/>
-            <a:ext cx="685800" cy="475488"/>
-          </a:xfrm>
-          <a:prstGeom prst="rect">
-            <a:avLst>
-              <a:gd name="adj" fmla="val 7692"/>
-            </a:avLst>
-          </a:prstGeom>
-          <a:solidFill>
-            <a:srgbClr val="FFFFFF"/>
-          </a:solidFill>
-          <a:ln w="12700">
-            <a:solidFill>
-              <a:srgbClr val="DB2777"/>
-            </a:solidFill>
-            <a:prstDash val="solid"/>
-          </a:ln>
-        </p:spPr>
-      </p:sp>
-      <p:sp>
-        <p:nvSpPr>
-          <p:cNvPr id="46" name="Text 44"/>
-          <p:cNvSpPr/>
-          <p:nvPr/>
-        </p:nvSpPr>
-        <p:spPr>
-          <a:xfrm>
-            <a:off x="7576947" y="4169664"/>
-            <a:ext cx="685800" cy="475488"/>
-          </a:xfrm>
-          <a:prstGeom prst="rect">
-            <a:avLst/>
-          </a:prstGeom>
-          <a:noFill/>
-          <a:ln/>
-        </p:spPr>
-        <p:txBody>
-          <a:bodyPr wrap="square" lIns="0" tIns="0" rIns="0" bIns="0" rtlCol="0" anchor="ctr"/>
-          <a:lstStyle/>
-          <a:p>
-            <a:pPr algn="ctr" indent="0" marL="0">
-              <a:buNone/>
-            </a:pPr>
-            <a:r>
-              <a:rPr lang="en-US" sz="900" b="1" dirty="0">
-                <a:solidFill>
-                  <a:srgbClr val="9D174D"/>
-                </a:solidFill>
-                <a:latin typeface="Trebuchet MS" pitchFamily="34" charset="0"/>
-                <a:ea typeface="Trebuchet MS" pitchFamily="34" charset="-122"/>
-                <a:cs typeface="Trebuchet MS" pitchFamily="34" charset="-120"/>
-              </a:rPr>
-              <a:t>m</a:t>
+              <a:t>th</a:t>
             </a:r>
             <a:endParaRPr lang="en-US" sz="900" dirty="0"/>
           </a:p>
@@ -27038,7 +26951,7 @@
                 <a:ea typeface="Trebuchet MS" pitchFamily="34" charset="-122"/>
                 <a:cs typeface="Trebuchet MS" pitchFamily="34" charset="-120"/>
               </a:rPr>
-              <a:t>warmly</a:t>
+              <a:t>rewarmed</a:t>
             </a:r>
             <a:endParaRPr lang="en-US" sz="2800" dirty="0"/>
           </a:p>
@@ -27865,7 +27778,7 @@
                 <a:ea typeface="Trebuchet MS" pitchFamily="34" charset="-122"/>
                 <a:cs typeface="Trebuchet MS" pitchFamily="34" charset="-120"/>
               </a:rPr>
-              <a:t>warmly</a:t>
+              <a:t>rewarmed</a:t>
             </a:r>
             <a:endParaRPr lang="en-US" sz="2800" dirty="0"/>
           </a:p>
@@ -27945,7 +27858,7 @@
         </p:nvSpPr>
         <p:spPr>
           <a:xfrm>
-            <a:off x="2938272" y="2258568"/>
+            <a:off x="2221992" y="2258568"/>
             <a:ext cx="1828800" cy="292608"/>
           </a:xfrm>
           <a:prstGeom prst="rect">
@@ -27954,11 +27867,11 @@
             </a:avLst>
           </a:prstGeom>
           <a:solidFill>
-            <a:srgbClr val="CCFBF1"/>
+            <a:srgbClr val="DDD6FE"/>
           </a:solidFill>
           <a:ln w="19050">
             <a:solidFill>
-              <a:srgbClr val="0D9488"/>
+              <a:srgbClr val="7C3AED"/>
             </a:solidFill>
             <a:prstDash val="solid"/>
           </a:ln>
@@ -27979,7 +27892,7 @@
         </p:nvSpPr>
         <p:spPr>
           <a:xfrm>
-            <a:off x="2938272" y="2258568"/>
+            <a:off x="2221992" y="2258568"/>
             <a:ext cx="1828800" cy="292608"/>
           </a:xfrm>
           <a:prstGeom prst="rect">
@@ -27998,13 +27911,13 @@
             <a:r>
               <a:rPr lang="en-US" sz="1300" b="1" dirty="0">
                 <a:solidFill>
-                  <a:srgbClr val="0F766E"/>
+                  <a:srgbClr val="4C1D95"/>
                 </a:solidFill>
                 <a:latin typeface="Trebuchet MS" pitchFamily="34" charset="0"/>
                 <a:ea typeface="Trebuchet MS" pitchFamily="34" charset="-122"/>
                 <a:cs typeface="Trebuchet MS" pitchFamily="34" charset="-120"/>
               </a:rPr>
-              <a:t>warm</a:t>
+              <a:t>re</a:t>
             </a:r>
             <a:endParaRPr lang="en-US" sz="1300" dirty="0"/>
           </a:p>
@@ -28018,7 +27931,7 @@
         </p:nvSpPr>
         <p:spPr>
           <a:xfrm>
-            <a:off x="2938272" y="2569464"/>
+            <a:off x="2221992" y="2569464"/>
             <a:ext cx="1828800" cy="201168"/>
           </a:xfrm>
           <a:prstGeom prst="rect">
@@ -28043,7 +27956,7 @@
                 <a:ea typeface="Calibri" pitchFamily="34" charset="-122"/>
                 <a:cs typeface="Calibri" pitchFamily="34" charset="-120"/>
               </a:rPr>
-              <a:t>having moderate heat</a:t>
+              <a:t>again</a:t>
             </a:r>
             <a:endParaRPr lang="en-US" sz="850" dirty="0"/>
           </a:p>
@@ -28057,7 +27970,7 @@
         </p:nvSpPr>
         <p:spPr>
           <a:xfrm>
-            <a:off x="5803392" y="2258568"/>
+            <a:off x="4370832" y="2258568"/>
             <a:ext cx="1828800" cy="292608"/>
           </a:xfrm>
           <a:prstGeom prst="rect">
@@ -28066,11 +27979,11 @@
             </a:avLst>
           </a:prstGeom>
           <a:solidFill>
-            <a:srgbClr val="FCE7F3"/>
+            <a:srgbClr val="CCFBF1"/>
           </a:solidFill>
           <a:ln w="19050">
             <a:solidFill>
-              <a:srgbClr val="DB2777"/>
+              <a:srgbClr val="0D9488"/>
             </a:solidFill>
             <a:prstDash val="solid"/>
           </a:ln>
@@ -28091,7 +28004,7 @@
         </p:nvSpPr>
         <p:spPr>
           <a:xfrm>
-            <a:off x="5803392" y="2258568"/>
+            <a:off x="4370832" y="2258568"/>
             <a:ext cx="1828800" cy="292608"/>
           </a:xfrm>
           <a:prstGeom prst="rect">
@@ -28110,13 +28023,13 @@
             <a:r>
               <a:rPr lang="en-US" sz="1300" b="1" dirty="0">
                 <a:solidFill>
-                  <a:srgbClr val="9D174D"/>
+                  <a:srgbClr val="0F766E"/>
                 </a:solidFill>
                 <a:latin typeface="Trebuchet MS" pitchFamily="34" charset="0"/>
                 <a:ea typeface="Trebuchet MS" pitchFamily="34" charset="-122"/>
                 <a:cs typeface="Trebuchet MS" pitchFamily="34" charset="-120"/>
               </a:rPr>
-              <a:t>ly</a:t>
+              <a:t>warm</a:t>
             </a:r>
             <a:endParaRPr lang="en-US" sz="1300" dirty="0"/>
           </a:p>
@@ -28130,7 +28043,7 @@
         </p:nvSpPr>
         <p:spPr>
           <a:xfrm>
-            <a:off x="5803392" y="2569464"/>
+            <a:off x="4370832" y="2569464"/>
             <a:ext cx="1828800" cy="201168"/>
           </a:xfrm>
           <a:prstGeom prst="rect">
@@ -28155,7 +28068,7 @@
                 <a:ea typeface="Calibri" pitchFamily="34" charset="-122"/>
                 <a:cs typeface="Calibri" pitchFamily="34" charset="-120"/>
               </a:rPr>
-              <a:t>in a particular way (forms an adverb)</a:t>
+              <a:t>having moderate heat</a:t>
             </a:r>
             <a:endParaRPr lang="en-US" sz="850" dirty="0"/>
           </a:p>
@@ -28164,6 +28077,118 @@
       <p:sp>
         <p:nvSpPr>
           <p:cNvPr id="22" name="Shape 20"/>
+          <p:cNvSpPr/>
+          <p:nvPr/>
+        </p:nvSpPr>
+        <p:spPr>
+          <a:xfrm>
+            <a:off x="6519672" y="2258568"/>
+            <a:ext cx="1828800" cy="292608"/>
+          </a:xfrm>
+          <a:prstGeom prst="rect">
+            <a:avLst>
+              <a:gd name="adj" fmla="val 25000"/>
+            </a:avLst>
+          </a:prstGeom>
+          <a:solidFill>
+            <a:srgbClr val="FCE7F3"/>
+          </a:solidFill>
+          <a:ln w="19050">
+            <a:solidFill>
+              <a:srgbClr val="DB2777"/>
+            </a:solidFill>
+            <a:prstDash val="solid"/>
+          </a:ln>
+          <a:effectLst>
+            <a:outerShdw sx="100000" sy="100000" kx="0" ky="0" algn="bl" rotWithShape="0" blurRad="101600" dist="38100" dir="8100000">
+              <a:srgbClr val="000000">
+                <a:alpha val="12000"/>
+              </a:srgbClr>
+            </a:outerShdw>
+          </a:effectLst>
+        </p:spPr>
+      </p:sp>
+      <p:sp>
+        <p:nvSpPr>
+          <p:cNvPr id="23" name="Text 21"/>
+          <p:cNvSpPr/>
+          <p:nvPr/>
+        </p:nvSpPr>
+        <p:spPr>
+          <a:xfrm>
+            <a:off x="6519672" y="2258568"/>
+            <a:ext cx="1828800" cy="292608"/>
+          </a:xfrm>
+          <a:prstGeom prst="rect">
+            <a:avLst/>
+          </a:prstGeom>
+          <a:noFill/>
+          <a:ln/>
+        </p:spPr>
+        <p:txBody>
+          <a:bodyPr wrap="square" lIns="0" tIns="0" rIns="0" bIns="0" rtlCol="0" anchor="ctr"/>
+          <a:lstStyle/>
+          <a:p>
+            <a:pPr algn="ctr" indent="0" marL="0">
+              <a:buNone/>
+            </a:pPr>
+            <a:r>
+              <a:rPr lang="en-US" sz="1300" b="1" dirty="0">
+                <a:solidFill>
+                  <a:srgbClr val="9D174D"/>
+                </a:solidFill>
+                <a:latin typeface="Trebuchet MS" pitchFamily="34" charset="0"/>
+                <a:ea typeface="Trebuchet MS" pitchFamily="34" charset="-122"/>
+                <a:cs typeface="Trebuchet MS" pitchFamily="34" charset="-120"/>
+              </a:rPr>
+              <a:t>ed</a:t>
+            </a:r>
+            <a:endParaRPr lang="en-US" sz="1300" dirty="0"/>
+          </a:p>
+        </p:txBody>
+      </p:sp>
+      <p:sp>
+        <p:nvSpPr>
+          <p:cNvPr id="24" name="Text 22"/>
+          <p:cNvSpPr/>
+          <p:nvPr/>
+        </p:nvSpPr>
+        <p:spPr>
+          <a:xfrm>
+            <a:off x="6519672" y="2569464"/>
+            <a:ext cx="1828800" cy="201168"/>
+          </a:xfrm>
+          <a:prstGeom prst="rect">
+            <a:avLst/>
+          </a:prstGeom>
+          <a:noFill/>
+          <a:ln/>
+        </p:spPr>
+        <p:txBody>
+          <a:bodyPr wrap="square" lIns="0" tIns="0" rIns="0" bIns="0" rtlCol="0" anchor="t"/>
+          <a:lstStyle/>
+          <a:p>
+            <a:pPr algn="ctr" indent="0" marL="0">
+              <a:buNone/>
+            </a:pPr>
+            <a:r>
+              <a:rPr lang="en-US" sz="850" dirty="0">
+                <a:solidFill>
+                  <a:srgbClr val="475569"/>
+                </a:solidFill>
+                <a:latin typeface="Calibri" pitchFamily="34" charset="0"/>
+                <a:ea typeface="Calibri" pitchFamily="34" charset="-122"/>
+                <a:cs typeface="Calibri" pitchFamily="34" charset="-120"/>
+              </a:rPr>
+              <a:t>past tense</a:t>
+            </a:r>
+            <a:endParaRPr lang="en-US" sz="850" dirty="0"/>
+          </a:p>
+        </p:txBody>
+      </p:sp>
+      <p:sp>
+        <p:nvSpPr>
+          <p:cNvPr id="25" name="Shape 23"/>
           <p:cNvSpPr/>
           <p:nvPr/>
         </p:nvSpPr>
@@ -28190,7 +28215,7 @@
       </p:sp>
       <p:sp>
         <p:nvSpPr>
-          <p:cNvPr id="23" name="Text 21"/>
+          <p:cNvPr id="26" name="Text 24"/>
           <p:cNvSpPr/>
           <p:nvPr/>
         </p:nvSpPr>
@@ -28229,7 +28254,7 @@
       </p:sp>
       <p:sp>
         <p:nvSpPr>
-          <p:cNvPr id="24" name="Shape 22"/>
+          <p:cNvPr id="27" name="Shape 25"/>
           <p:cNvSpPr/>
           <p:nvPr/>
         </p:nvSpPr>
@@ -28256,7 +28281,7 @@
       </p:sp>
       <p:sp>
         <p:nvSpPr>
-          <p:cNvPr id="25" name="Text 23"/>
+          <p:cNvPr id="28" name="Text 26"/>
           <p:cNvSpPr/>
           <p:nvPr/>
         </p:nvSpPr>
@@ -28295,7 +28320,7 @@
       </p:sp>
       <p:sp>
         <p:nvSpPr>
-          <p:cNvPr id="26" name="Shape 24"/>
+          <p:cNvPr id="29" name="Shape 27"/>
           <p:cNvSpPr/>
           <p:nvPr/>
         </p:nvSpPr>
@@ -28322,7 +28347,7 @@
       </p:sp>
       <p:sp>
         <p:nvSpPr>
-          <p:cNvPr id="27" name="Text 25"/>
+          <p:cNvPr id="30" name="Text 28"/>
           <p:cNvSpPr/>
           <p:nvPr/>
         </p:nvSpPr>
@@ -28361,7 +28386,7 @@
       </p:sp>
       <p:sp>
         <p:nvSpPr>
-          <p:cNvPr id="28" name="Shape 26"/>
+          <p:cNvPr id="31" name="Shape 29"/>
           <p:cNvSpPr/>
           <p:nvPr/>
         </p:nvSpPr>
@@ -28388,7 +28413,7 @@
       </p:sp>
       <p:sp>
         <p:nvSpPr>
-          <p:cNvPr id="29" name="Text 27"/>
+          <p:cNvPr id="32" name="Text 30"/>
           <p:cNvSpPr/>
           <p:nvPr/>
         </p:nvSpPr>
@@ -28850,7 +28875,7 @@
                 <a:ea typeface="Trebuchet MS" pitchFamily="34" charset="-122"/>
                 <a:cs typeface="Trebuchet MS" pitchFamily="34" charset="-120"/>
               </a:rPr>
-              <a:t>warmly</a:t>
+              <a:t>rewarmed</a:t>
             </a:r>
             <a:endParaRPr lang="en-US" sz="2800" dirty="0"/>
           </a:p>
@@ -28930,7 +28955,7 @@
         </p:nvSpPr>
         <p:spPr>
           <a:xfrm>
-            <a:off x="2938272" y="2258568"/>
+            <a:off x="2221992" y="2258568"/>
             <a:ext cx="1828800" cy="292608"/>
           </a:xfrm>
           <a:prstGeom prst="rect">
@@ -28939,11 +28964,11 @@
             </a:avLst>
           </a:prstGeom>
           <a:solidFill>
-            <a:srgbClr val="CCFBF1"/>
+            <a:srgbClr val="DDD6FE"/>
           </a:solidFill>
           <a:ln w="19050">
             <a:solidFill>
-              <a:srgbClr val="0D9488"/>
+              <a:srgbClr val="7C3AED"/>
             </a:solidFill>
             <a:prstDash val="solid"/>
           </a:ln>
@@ -28964,7 +28989,7 @@
         </p:nvSpPr>
         <p:spPr>
           <a:xfrm>
-            <a:off x="2938272" y="2258568"/>
+            <a:off x="2221992" y="2258568"/>
             <a:ext cx="1828800" cy="292608"/>
           </a:xfrm>
           <a:prstGeom prst="rect">
@@ -28983,13 +29008,13 @@
             <a:r>
               <a:rPr lang="en-US" sz="1300" b="1" dirty="0">
                 <a:solidFill>
-                  <a:srgbClr val="0F766E"/>
+                  <a:srgbClr val="4C1D95"/>
                 </a:solidFill>
                 <a:latin typeface="Trebuchet MS" pitchFamily="34" charset="0"/>
                 <a:ea typeface="Trebuchet MS" pitchFamily="34" charset="-122"/>
                 <a:cs typeface="Trebuchet MS" pitchFamily="34" charset="-120"/>
               </a:rPr>
-              <a:t>warm</a:t>
+              <a:t>re</a:t>
             </a:r>
             <a:endParaRPr lang="en-US" sz="1300" dirty="0"/>
           </a:p>
@@ -29003,7 +29028,7 @@
         </p:nvSpPr>
         <p:spPr>
           <a:xfrm>
-            <a:off x="2938272" y="2569464"/>
+            <a:off x="2221992" y="2569464"/>
             <a:ext cx="1828800" cy="201168"/>
           </a:xfrm>
           <a:prstGeom prst="rect">
@@ -29028,7 +29053,7 @@
                 <a:ea typeface="Calibri" pitchFamily="34" charset="-122"/>
                 <a:cs typeface="Calibri" pitchFamily="34" charset="-120"/>
               </a:rPr>
-              <a:t>having moderate heat</a:t>
+              <a:t>again</a:t>
             </a:r>
             <a:endParaRPr lang="en-US" sz="850" dirty="0"/>
           </a:p>
@@ -29042,7 +29067,7 @@
         </p:nvSpPr>
         <p:spPr>
           <a:xfrm>
-            <a:off x="5803392" y="2258568"/>
+            <a:off x="4370832" y="2258568"/>
             <a:ext cx="1828800" cy="292608"/>
           </a:xfrm>
           <a:prstGeom prst="rect">
@@ -29051,11 +29076,11 @@
             </a:avLst>
           </a:prstGeom>
           <a:solidFill>
-            <a:srgbClr val="FCE7F3"/>
+            <a:srgbClr val="CCFBF1"/>
           </a:solidFill>
           <a:ln w="19050">
             <a:solidFill>
-              <a:srgbClr val="DB2777"/>
+              <a:srgbClr val="0D9488"/>
             </a:solidFill>
             <a:prstDash val="solid"/>
           </a:ln>
@@ -29076,7 +29101,7 @@
         </p:nvSpPr>
         <p:spPr>
           <a:xfrm>
-            <a:off x="5803392" y="2258568"/>
+            <a:off x="4370832" y="2258568"/>
             <a:ext cx="1828800" cy="292608"/>
           </a:xfrm>
           <a:prstGeom prst="rect">
@@ -29095,13 +29120,13 @@
             <a:r>
               <a:rPr lang="en-US" sz="1300" b="1" dirty="0">
                 <a:solidFill>
-                  <a:srgbClr val="9D174D"/>
+                  <a:srgbClr val="0F766E"/>
                 </a:solidFill>
                 <a:latin typeface="Trebuchet MS" pitchFamily="34" charset="0"/>
                 <a:ea typeface="Trebuchet MS" pitchFamily="34" charset="-122"/>
                 <a:cs typeface="Trebuchet MS" pitchFamily="34" charset="-120"/>
               </a:rPr>
-              <a:t>ly</a:t>
+              <a:t>warm</a:t>
             </a:r>
             <a:endParaRPr lang="en-US" sz="1300" dirty="0"/>
           </a:p>
@@ -29115,7 +29140,7 @@
         </p:nvSpPr>
         <p:spPr>
           <a:xfrm>
-            <a:off x="5803392" y="2569464"/>
+            <a:off x="4370832" y="2569464"/>
             <a:ext cx="1828800" cy="201168"/>
           </a:xfrm>
           <a:prstGeom prst="rect">
@@ -29140,7 +29165,7 @@
                 <a:ea typeface="Calibri" pitchFamily="34" charset="-122"/>
                 <a:cs typeface="Calibri" pitchFamily="34" charset="-120"/>
               </a:rPr>
-              <a:t>in a particular way (forms an adverb)</a:t>
+              <a:t>having moderate heat</a:t>
             </a:r>
             <a:endParaRPr lang="en-US" sz="850" dirty="0"/>
           </a:p>
@@ -29149,6 +29174,118 @@
       <p:sp>
         <p:nvSpPr>
           <p:cNvPr id="22" name="Shape 20"/>
+          <p:cNvSpPr/>
+          <p:nvPr/>
+        </p:nvSpPr>
+        <p:spPr>
+          <a:xfrm>
+            <a:off x="6519672" y="2258568"/>
+            <a:ext cx="1828800" cy="292608"/>
+          </a:xfrm>
+          <a:prstGeom prst="rect">
+            <a:avLst>
+              <a:gd name="adj" fmla="val 25000"/>
+            </a:avLst>
+          </a:prstGeom>
+          <a:solidFill>
+            <a:srgbClr val="FCE7F3"/>
+          </a:solidFill>
+          <a:ln w="19050">
+            <a:solidFill>
+              <a:srgbClr val="DB2777"/>
+            </a:solidFill>
+            <a:prstDash val="solid"/>
+          </a:ln>
+          <a:effectLst>
+            <a:outerShdw sx="100000" sy="100000" kx="0" ky="0" algn="bl" rotWithShape="0" blurRad="101600" dist="38100" dir="8100000">
+              <a:srgbClr val="000000">
+                <a:alpha val="12000"/>
+              </a:srgbClr>
+            </a:outerShdw>
+          </a:effectLst>
+        </p:spPr>
+      </p:sp>
+      <p:sp>
+        <p:nvSpPr>
+          <p:cNvPr id="23" name="Text 21"/>
+          <p:cNvSpPr/>
+          <p:nvPr/>
+        </p:nvSpPr>
+        <p:spPr>
+          <a:xfrm>
+            <a:off x="6519672" y="2258568"/>
+            <a:ext cx="1828800" cy="292608"/>
+          </a:xfrm>
+          <a:prstGeom prst="rect">
+            <a:avLst/>
+          </a:prstGeom>
+          <a:noFill/>
+          <a:ln/>
+        </p:spPr>
+        <p:txBody>
+          <a:bodyPr wrap="square" lIns="0" tIns="0" rIns="0" bIns="0" rtlCol="0" anchor="ctr"/>
+          <a:lstStyle/>
+          <a:p>
+            <a:pPr algn="ctr" indent="0" marL="0">
+              <a:buNone/>
+            </a:pPr>
+            <a:r>
+              <a:rPr lang="en-US" sz="1300" b="1" dirty="0">
+                <a:solidFill>
+                  <a:srgbClr val="9D174D"/>
+                </a:solidFill>
+                <a:latin typeface="Trebuchet MS" pitchFamily="34" charset="0"/>
+                <a:ea typeface="Trebuchet MS" pitchFamily="34" charset="-122"/>
+                <a:cs typeface="Trebuchet MS" pitchFamily="34" charset="-120"/>
+              </a:rPr>
+              <a:t>ed</a:t>
+            </a:r>
+            <a:endParaRPr lang="en-US" sz="1300" dirty="0"/>
+          </a:p>
+        </p:txBody>
+      </p:sp>
+      <p:sp>
+        <p:nvSpPr>
+          <p:cNvPr id="24" name="Text 22"/>
+          <p:cNvSpPr/>
+          <p:nvPr/>
+        </p:nvSpPr>
+        <p:spPr>
+          <a:xfrm>
+            <a:off x="6519672" y="2569464"/>
+            <a:ext cx="1828800" cy="201168"/>
+          </a:xfrm>
+          <a:prstGeom prst="rect">
+            <a:avLst/>
+          </a:prstGeom>
+          <a:noFill/>
+          <a:ln/>
+        </p:spPr>
+        <p:txBody>
+          <a:bodyPr wrap="square" lIns="0" tIns="0" rIns="0" bIns="0" rtlCol="0" anchor="t"/>
+          <a:lstStyle/>
+          <a:p>
+            <a:pPr algn="ctr" indent="0" marL="0">
+              <a:buNone/>
+            </a:pPr>
+            <a:r>
+              <a:rPr lang="en-US" sz="850" dirty="0">
+                <a:solidFill>
+                  <a:srgbClr val="475569"/>
+                </a:solidFill>
+                <a:latin typeface="Calibri" pitchFamily="34" charset="0"/>
+                <a:ea typeface="Calibri" pitchFamily="34" charset="-122"/>
+                <a:cs typeface="Calibri" pitchFamily="34" charset="-120"/>
+              </a:rPr>
+              <a:t>past tense</a:t>
+            </a:r>
+            <a:endParaRPr lang="en-US" sz="850" dirty="0"/>
+          </a:p>
+        </p:txBody>
+      </p:sp>
+      <p:sp>
+        <p:nvSpPr>
+          <p:cNvPr id="25" name="Shape 23"/>
           <p:cNvSpPr/>
           <p:nvPr/>
         </p:nvSpPr>
@@ -29175,7 +29312,7 @@
       </p:sp>
       <p:sp>
         <p:nvSpPr>
-          <p:cNvPr id="23" name="Text 21"/>
+          <p:cNvPr id="26" name="Text 24"/>
           <p:cNvSpPr/>
           <p:nvPr/>
         </p:nvSpPr>
@@ -29214,7 +29351,7 @@
       </p:sp>
       <p:sp>
         <p:nvSpPr>
-          <p:cNvPr id="24" name="Shape 22"/>
+          <p:cNvPr id="27" name="Shape 25"/>
           <p:cNvSpPr/>
           <p:nvPr/>
         </p:nvSpPr>
@@ -29241,7 +29378,7 @@
       </p:sp>
       <p:sp>
         <p:nvSpPr>
-          <p:cNvPr id="25" name="Shape 23"/>
+          <p:cNvPr id="28" name="Shape 26"/>
           <p:cNvSpPr/>
           <p:nvPr/>
         </p:nvSpPr>
@@ -29268,7 +29405,7 @@
       </p:sp>
       <p:sp>
         <p:nvSpPr>
-          <p:cNvPr id="26" name="Text 24"/>
+          <p:cNvPr id="29" name="Text 27"/>
           <p:cNvSpPr/>
           <p:nvPr/>
         </p:nvSpPr>
@@ -29299,7 +29436,7 @@
                 <a:ea typeface="Trebuchet MS" pitchFamily="34" charset="-122"/>
                 <a:cs typeface="Trebuchet MS" pitchFamily="34" charset="-120"/>
               </a:rPr>
-              <a:t>warm</a:t>
+              <a:t>re</a:t>
             </a:r>
             <a:endParaRPr lang="en-US" sz="1400" dirty="0"/>
           </a:p>
@@ -29307,7 +29444,7 @@
       </p:sp>
       <p:sp>
         <p:nvSpPr>
-          <p:cNvPr id="27" name="Text 25"/>
+          <p:cNvPr id="30" name="Text 28"/>
           <p:cNvSpPr/>
           <p:nvPr/>
         </p:nvSpPr>
@@ -29346,7 +29483,7 @@
       </p:sp>
       <p:sp>
         <p:nvSpPr>
-          <p:cNvPr id="28" name="Shape 26"/>
+          <p:cNvPr id="31" name="Shape 29"/>
           <p:cNvSpPr/>
           <p:nvPr/>
         </p:nvSpPr>
@@ -29373,7 +29510,7 @@
       </p:sp>
       <p:sp>
         <p:nvSpPr>
-          <p:cNvPr id="29" name="Text 27"/>
+          <p:cNvPr id="32" name="Text 30"/>
           <p:cNvSpPr/>
           <p:nvPr/>
         </p:nvSpPr>
@@ -29404,7 +29541,7 @@
                 <a:ea typeface="Trebuchet MS" pitchFamily="34" charset="-122"/>
                 <a:cs typeface="Trebuchet MS" pitchFamily="34" charset="-120"/>
               </a:rPr>
-              <a:t>ly</a:t>
+              <a:t>warmed</a:t>
             </a:r>
             <a:endParaRPr lang="en-US" sz="1400" dirty="0"/>
           </a:p>
@@ -29412,7 +29549,7 @@
       </p:sp>
       <p:sp>
         <p:nvSpPr>
-          <p:cNvPr id="30" name="Shape 28"/>
+          <p:cNvPr id="33" name="Shape 31"/>
           <p:cNvSpPr/>
           <p:nvPr/>
         </p:nvSpPr>
@@ -29439,7 +29576,7 @@
       </p:sp>
       <p:sp>
         <p:nvSpPr>
-          <p:cNvPr id="31" name="Text 29"/>
+          <p:cNvPr id="34" name="Text 32"/>
           <p:cNvSpPr/>
           <p:nvPr/>
         </p:nvSpPr>
@@ -29478,7 +29615,7 @@
       </p:sp>
       <p:sp>
         <p:nvSpPr>
-          <p:cNvPr id="32" name="Shape 30"/>
+          <p:cNvPr id="35" name="Shape 33"/>
           <p:cNvSpPr/>
           <p:nvPr/>
         </p:nvSpPr>
@@ -29505,7 +29642,7 @@
       </p:sp>
       <p:sp>
         <p:nvSpPr>
-          <p:cNvPr id="33" name="Text 31"/>
+          <p:cNvPr id="36" name="Text 34"/>
           <p:cNvSpPr/>
           <p:nvPr/>
         </p:nvSpPr>
@@ -29967,7 +30104,7 @@
                 <a:ea typeface="Trebuchet MS" pitchFamily="34" charset="-122"/>
                 <a:cs typeface="Trebuchet MS" pitchFamily="34" charset="-120"/>
               </a:rPr>
-              <a:t>warmly</a:t>
+              <a:t>rewarmed</a:t>
             </a:r>
             <a:endParaRPr lang="en-US" sz="2800" dirty="0"/>
           </a:p>
@@ -30047,7 +30184,7 @@
         </p:nvSpPr>
         <p:spPr>
           <a:xfrm>
-            <a:off x="2938272" y="2258568"/>
+            <a:off x="2221992" y="2258568"/>
             <a:ext cx="1828800" cy="292608"/>
           </a:xfrm>
           <a:prstGeom prst="rect">
@@ -30056,11 +30193,11 @@
             </a:avLst>
           </a:prstGeom>
           <a:solidFill>
-            <a:srgbClr val="CCFBF1"/>
+            <a:srgbClr val="DDD6FE"/>
           </a:solidFill>
           <a:ln w="19050">
             <a:solidFill>
-              <a:srgbClr val="0D9488"/>
+              <a:srgbClr val="7C3AED"/>
             </a:solidFill>
             <a:prstDash val="solid"/>
           </a:ln>
@@ -30081,7 +30218,7 @@
         </p:nvSpPr>
         <p:spPr>
           <a:xfrm>
-            <a:off x="2938272" y="2258568"/>
+            <a:off x="2221992" y="2258568"/>
             <a:ext cx="1828800" cy="292608"/>
           </a:xfrm>
           <a:prstGeom prst="rect">
@@ -30100,13 +30237,13 @@
             <a:r>
               <a:rPr lang="en-US" sz="1300" b="1" dirty="0">
                 <a:solidFill>
-                  <a:srgbClr val="0F766E"/>
+                  <a:srgbClr val="4C1D95"/>
                 </a:solidFill>
                 <a:latin typeface="Trebuchet MS" pitchFamily="34" charset="0"/>
                 <a:ea typeface="Trebuchet MS" pitchFamily="34" charset="-122"/>
                 <a:cs typeface="Trebuchet MS" pitchFamily="34" charset="-120"/>
               </a:rPr>
-              <a:t>warm</a:t>
+              <a:t>re</a:t>
             </a:r>
             <a:endParaRPr lang="en-US" sz="1300" dirty="0"/>
           </a:p>
@@ -30120,7 +30257,7 @@
         </p:nvSpPr>
         <p:spPr>
           <a:xfrm>
-            <a:off x="2938272" y="2569464"/>
+            <a:off x="2221992" y="2569464"/>
             <a:ext cx="1828800" cy="201168"/>
           </a:xfrm>
           <a:prstGeom prst="rect">
@@ -30145,7 +30282,7 @@
                 <a:ea typeface="Calibri" pitchFamily="34" charset="-122"/>
                 <a:cs typeface="Calibri" pitchFamily="34" charset="-120"/>
               </a:rPr>
-              <a:t>having moderate heat</a:t>
+              <a:t>again</a:t>
             </a:r>
             <a:endParaRPr lang="en-US" sz="850" dirty="0"/>
           </a:p>
@@ -30159,7 +30296,7 @@
         </p:nvSpPr>
         <p:spPr>
           <a:xfrm>
-            <a:off x="5803392" y="2258568"/>
+            <a:off x="4370832" y="2258568"/>
             <a:ext cx="1828800" cy="292608"/>
           </a:xfrm>
           <a:prstGeom prst="rect">
@@ -30168,11 +30305,11 @@
             </a:avLst>
           </a:prstGeom>
           <a:solidFill>
-            <a:srgbClr val="FCE7F3"/>
+            <a:srgbClr val="CCFBF1"/>
           </a:solidFill>
           <a:ln w="19050">
             <a:solidFill>
-              <a:srgbClr val="DB2777"/>
+              <a:srgbClr val="0D9488"/>
             </a:solidFill>
             <a:prstDash val="solid"/>
           </a:ln>
@@ -30193,7 +30330,7 @@
         </p:nvSpPr>
         <p:spPr>
           <a:xfrm>
-            <a:off x="5803392" y="2258568"/>
+            <a:off x="4370832" y="2258568"/>
             <a:ext cx="1828800" cy="292608"/>
           </a:xfrm>
           <a:prstGeom prst="rect">
@@ -30212,13 +30349,13 @@
             <a:r>
               <a:rPr lang="en-US" sz="1300" b="1" dirty="0">
                 <a:solidFill>
-                  <a:srgbClr val="9D174D"/>
+                  <a:srgbClr val="0F766E"/>
                 </a:solidFill>
                 <a:latin typeface="Trebuchet MS" pitchFamily="34" charset="0"/>
                 <a:ea typeface="Trebuchet MS" pitchFamily="34" charset="-122"/>
                 <a:cs typeface="Trebuchet MS" pitchFamily="34" charset="-120"/>
               </a:rPr>
-              <a:t>ly</a:t>
+              <a:t>warm</a:t>
             </a:r>
             <a:endParaRPr lang="en-US" sz="1300" dirty="0"/>
           </a:p>
@@ -30232,7 +30369,7 @@
         </p:nvSpPr>
         <p:spPr>
           <a:xfrm>
-            <a:off x="5803392" y="2569464"/>
+            <a:off x="4370832" y="2569464"/>
             <a:ext cx="1828800" cy="201168"/>
           </a:xfrm>
           <a:prstGeom prst="rect">
@@ -30257,7 +30394,7 @@
                 <a:ea typeface="Calibri" pitchFamily="34" charset="-122"/>
                 <a:cs typeface="Calibri" pitchFamily="34" charset="-120"/>
               </a:rPr>
-              <a:t>in a particular way (forms an adverb)</a:t>
+              <a:t>having moderate heat</a:t>
             </a:r>
             <a:endParaRPr lang="en-US" sz="850" dirty="0"/>
           </a:p>
@@ -30266,6 +30403,118 @@
       <p:sp>
         <p:nvSpPr>
           <p:cNvPr id="22" name="Shape 20"/>
+          <p:cNvSpPr/>
+          <p:nvPr/>
+        </p:nvSpPr>
+        <p:spPr>
+          <a:xfrm>
+            <a:off x="6519672" y="2258568"/>
+            <a:ext cx="1828800" cy="292608"/>
+          </a:xfrm>
+          <a:prstGeom prst="rect">
+            <a:avLst>
+              <a:gd name="adj" fmla="val 25000"/>
+            </a:avLst>
+          </a:prstGeom>
+          <a:solidFill>
+            <a:srgbClr val="FCE7F3"/>
+          </a:solidFill>
+          <a:ln w="19050">
+            <a:solidFill>
+              <a:srgbClr val="DB2777"/>
+            </a:solidFill>
+            <a:prstDash val="solid"/>
+          </a:ln>
+          <a:effectLst>
+            <a:outerShdw sx="100000" sy="100000" kx="0" ky="0" algn="bl" rotWithShape="0" blurRad="101600" dist="38100" dir="8100000">
+              <a:srgbClr val="000000">
+                <a:alpha val="12000"/>
+              </a:srgbClr>
+            </a:outerShdw>
+          </a:effectLst>
+        </p:spPr>
+      </p:sp>
+      <p:sp>
+        <p:nvSpPr>
+          <p:cNvPr id="23" name="Text 21"/>
+          <p:cNvSpPr/>
+          <p:nvPr/>
+        </p:nvSpPr>
+        <p:spPr>
+          <a:xfrm>
+            <a:off x="6519672" y="2258568"/>
+            <a:ext cx="1828800" cy="292608"/>
+          </a:xfrm>
+          <a:prstGeom prst="rect">
+            <a:avLst/>
+          </a:prstGeom>
+          <a:noFill/>
+          <a:ln/>
+        </p:spPr>
+        <p:txBody>
+          <a:bodyPr wrap="square" lIns="0" tIns="0" rIns="0" bIns="0" rtlCol="0" anchor="ctr"/>
+          <a:lstStyle/>
+          <a:p>
+            <a:pPr algn="ctr" indent="0" marL="0">
+              <a:buNone/>
+            </a:pPr>
+            <a:r>
+              <a:rPr lang="en-US" sz="1300" b="1" dirty="0">
+                <a:solidFill>
+                  <a:srgbClr val="9D174D"/>
+                </a:solidFill>
+                <a:latin typeface="Trebuchet MS" pitchFamily="34" charset="0"/>
+                <a:ea typeface="Trebuchet MS" pitchFamily="34" charset="-122"/>
+                <a:cs typeface="Trebuchet MS" pitchFamily="34" charset="-120"/>
+              </a:rPr>
+              <a:t>ed</a:t>
+            </a:r>
+            <a:endParaRPr lang="en-US" sz="1300" dirty="0"/>
+          </a:p>
+        </p:txBody>
+      </p:sp>
+      <p:sp>
+        <p:nvSpPr>
+          <p:cNvPr id="24" name="Text 22"/>
+          <p:cNvSpPr/>
+          <p:nvPr/>
+        </p:nvSpPr>
+        <p:spPr>
+          <a:xfrm>
+            <a:off x="6519672" y="2569464"/>
+            <a:ext cx="1828800" cy="201168"/>
+          </a:xfrm>
+          <a:prstGeom prst="rect">
+            <a:avLst/>
+          </a:prstGeom>
+          <a:noFill/>
+          <a:ln/>
+        </p:spPr>
+        <p:txBody>
+          <a:bodyPr wrap="square" lIns="0" tIns="0" rIns="0" bIns="0" rtlCol="0" anchor="t"/>
+          <a:lstStyle/>
+          <a:p>
+            <a:pPr algn="ctr" indent="0" marL="0">
+              <a:buNone/>
+            </a:pPr>
+            <a:r>
+              <a:rPr lang="en-US" sz="850" dirty="0">
+                <a:solidFill>
+                  <a:srgbClr val="475569"/>
+                </a:solidFill>
+                <a:latin typeface="Calibri" pitchFamily="34" charset="0"/>
+                <a:ea typeface="Calibri" pitchFamily="34" charset="-122"/>
+                <a:cs typeface="Calibri" pitchFamily="34" charset="-120"/>
+              </a:rPr>
+              <a:t>past tense</a:t>
+            </a:r>
+            <a:endParaRPr lang="en-US" sz="850" dirty="0"/>
+          </a:p>
+        </p:txBody>
+      </p:sp>
+      <p:sp>
+        <p:nvSpPr>
+          <p:cNvPr id="25" name="Shape 23"/>
           <p:cNvSpPr/>
           <p:nvPr/>
         </p:nvSpPr>
@@ -30292,7 +30541,7 @@
       </p:sp>
       <p:sp>
         <p:nvSpPr>
-          <p:cNvPr id="23" name="Text 21"/>
+          <p:cNvPr id="26" name="Text 24"/>
           <p:cNvSpPr/>
           <p:nvPr/>
         </p:nvSpPr>
@@ -30331,7 +30580,7 @@
       </p:sp>
       <p:sp>
         <p:nvSpPr>
-          <p:cNvPr id="24" name="Shape 22"/>
+          <p:cNvPr id="27" name="Shape 25"/>
           <p:cNvSpPr/>
           <p:nvPr/>
         </p:nvSpPr>
@@ -30358,7 +30607,7 @@
       </p:sp>
       <p:sp>
         <p:nvSpPr>
-          <p:cNvPr id="25" name="Shape 23"/>
+          <p:cNvPr id="28" name="Shape 26"/>
           <p:cNvSpPr/>
           <p:nvPr/>
         </p:nvSpPr>
@@ -30385,7 +30634,7 @@
       </p:sp>
       <p:sp>
         <p:nvSpPr>
-          <p:cNvPr id="26" name="Text 24"/>
+          <p:cNvPr id="29" name="Text 27"/>
           <p:cNvSpPr/>
           <p:nvPr/>
         </p:nvSpPr>
@@ -30416,7 +30665,7 @@
                 <a:ea typeface="Trebuchet MS" pitchFamily="34" charset="-122"/>
                 <a:cs typeface="Trebuchet MS" pitchFamily="34" charset="-120"/>
               </a:rPr>
-              <a:t>warm</a:t>
+              <a:t>re</a:t>
             </a:r>
             <a:endParaRPr lang="en-US" sz="1400" dirty="0"/>
           </a:p>
@@ -30424,7 +30673,7 @@
       </p:sp>
       <p:sp>
         <p:nvSpPr>
-          <p:cNvPr id="27" name="Text 25"/>
+          <p:cNvPr id="30" name="Text 28"/>
           <p:cNvSpPr/>
           <p:nvPr/>
         </p:nvSpPr>
@@ -30463,7 +30712,7 @@
       </p:sp>
       <p:sp>
         <p:nvSpPr>
-          <p:cNvPr id="28" name="Shape 26"/>
+          <p:cNvPr id="31" name="Shape 29"/>
           <p:cNvSpPr/>
           <p:nvPr/>
         </p:nvSpPr>
@@ -30490,7 +30739,7 @@
       </p:sp>
       <p:sp>
         <p:nvSpPr>
-          <p:cNvPr id="29" name="Text 27"/>
+          <p:cNvPr id="32" name="Text 30"/>
           <p:cNvSpPr/>
           <p:nvPr/>
         </p:nvSpPr>
@@ -30521,7 +30770,7 @@
                 <a:ea typeface="Trebuchet MS" pitchFamily="34" charset="-122"/>
                 <a:cs typeface="Trebuchet MS" pitchFamily="34" charset="-120"/>
               </a:rPr>
-              <a:t>ly</a:t>
+              <a:t>warmed</a:t>
             </a:r>
             <a:endParaRPr lang="en-US" sz="1400" dirty="0"/>
           </a:p>
@@ -30529,7 +30778,7 @@
       </p:sp>
       <p:sp>
         <p:nvSpPr>
-          <p:cNvPr id="30" name="Shape 28"/>
+          <p:cNvPr id="33" name="Shape 31"/>
           <p:cNvSpPr/>
           <p:nvPr/>
         </p:nvSpPr>
@@ -30556,7 +30805,7 @@
       </p:sp>
       <p:sp>
         <p:nvSpPr>
-          <p:cNvPr id="31" name="Text 29"/>
+          <p:cNvPr id="34" name="Text 32"/>
           <p:cNvSpPr/>
           <p:nvPr/>
         </p:nvSpPr>
@@ -30595,7 +30844,7 @@
       </p:sp>
       <p:sp>
         <p:nvSpPr>
-          <p:cNvPr id="32" name="Shape 30"/>
+          <p:cNvPr id="35" name="Shape 33"/>
           <p:cNvSpPr/>
           <p:nvPr/>
         </p:nvSpPr>
@@ -30622,13 +30871,13 @@
       </p:sp>
       <p:sp>
         <p:nvSpPr>
-          <p:cNvPr id="33" name="Shape 31"/>
-          <p:cNvSpPr/>
-          <p:nvPr/>
-        </p:nvSpPr>
-        <p:spPr>
-          <a:xfrm>
-            <a:off x="2427732" y="4169664"/>
+          <p:cNvPr id="36" name="Shape 34"/>
+          <p:cNvSpPr/>
+          <p:nvPr/>
+        </p:nvSpPr>
+        <p:spPr>
+          <a:xfrm>
+            <a:off x="2254649" y="4169664"/>
             <a:ext cx="685800" cy="475488"/>
           </a:xfrm>
           <a:prstGeom prst="rect">
@@ -30649,13 +30898,13 @@
       </p:sp>
       <p:sp>
         <p:nvSpPr>
-          <p:cNvPr id="34" name="Text 32"/>
-          <p:cNvSpPr/>
-          <p:nvPr/>
-        </p:nvSpPr>
-        <p:spPr>
-          <a:xfrm>
-            <a:off x="2427732" y="4169664"/>
+          <p:cNvPr id="37" name="Text 35"/>
+          <p:cNvSpPr/>
+          <p:nvPr/>
+        </p:nvSpPr>
+        <p:spPr>
+          <a:xfrm>
+            <a:off x="2254649" y="4169664"/>
             <a:ext cx="685800" cy="475488"/>
           </a:xfrm>
           <a:prstGeom prst="rect">
@@ -30680,7 +30929,7 @@
                 <a:ea typeface="Trebuchet MS" pitchFamily="34" charset="-122"/>
                 <a:cs typeface="Trebuchet MS" pitchFamily="34" charset="-120"/>
               </a:rPr>
-              <a:t>w</a:t>
+              <a:t>r</a:t>
             </a:r>
             <a:endParaRPr lang="en-US" sz="900" dirty="0"/>
           </a:p>
@@ -30688,13 +30937,13 @@
       </p:sp>
       <p:sp>
         <p:nvSpPr>
-          <p:cNvPr id="35" name="Shape 33"/>
-          <p:cNvSpPr/>
-          <p:nvPr/>
-        </p:nvSpPr>
-        <p:spPr>
-          <a:xfrm>
-            <a:off x="3639312" y="4169664"/>
+          <p:cNvPr id="38" name="Shape 36"/>
+          <p:cNvSpPr/>
+          <p:nvPr/>
+        </p:nvSpPr>
+        <p:spPr>
+          <a:xfrm>
+            <a:off x="3293146" y="4169664"/>
             <a:ext cx="685800" cy="475488"/>
           </a:xfrm>
           <a:prstGeom prst="rect">
@@ -30715,13 +30964,13 @@
       </p:sp>
       <p:sp>
         <p:nvSpPr>
-          <p:cNvPr id="36" name="Text 34"/>
-          <p:cNvSpPr/>
-          <p:nvPr/>
-        </p:nvSpPr>
-        <p:spPr>
-          <a:xfrm>
-            <a:off x="3639312" y="4169664"/>
+          <p:cNvPr id="39" name="Text 37"/>
+          <p:cNvSpPr/>
+          <p:nvPr/>
+        </p:nvSpPr>
+        <p:spPr>
+          <a:xfrm>
+            <a:off x="3293146" y="4169664"/>
             <a:ext cx="685800" cy="475488"/>
           </a:xfrm>
           <a:prstGeom prst="rect">
@@ -30746,7 +30995,7 @@
                 <a:ea typeface="Trebuchet MS" pitchFamily="34" charset="-122"/>
                 <a:cs typeface="Trebuchet MS" pitchFamily="34" charset="-120"/>
               </a:rPr>
-              <a:t>ar</a:t>
+              <a:t>e</a:t>
             </a:r>
             <a:endParaRPr lang="en-US" sz="900" dirty="0"/>
           </a:p>
@@ -30754,13 +31003,13 @@
       </p:sp>
       <p:sp>
         <p:nvSpPr>
-          <p:cNvPr id="37" name="Shape 35"/>
-          <p:cNvSpPr/>
-          <p:nvPr/>
-        </p:nvSpPr>
-        <p:spPr>
-          <a:xfrm>
-            <a:off x="4850892" y="4169664"/>
+          <p:cNvPr id="40" name="Shape 38"/>
+          <p:cNvSpPr/>
+          <p:nvPr/>
+        </p:nvSpPr>
+        <p:spPr>
+          <a:xfrm>
+            <a:off x="4331643" y="4169664"/>
             <a:ext cx="685800" cy="475488"/>
           </a:xfrm>
           <a:prstGeom prst="rect">
@@ -30781,13 +31030,13 @@
       </p:sp>
       <p:sp>
         <p:nvSpPr>
-          <p:cNvPr id="38" name="Text 36"/>
-          <p:cNvSpPr/>
-          <p:nvPr/>
-        </p:nvSpPr>
-        <p:spPr>
-          <a:xfrm>
-            <a:off x="4850892" y="4169664"/>
+          <p:cNvPr id="41" name="Text 39"/>
+          <p:cNvSpPr/>
+          <p:nvPr/>
+        </p:nvSpPr>
+        <p:spPr>
+          <a:xfrm>
+            <a:off x="4331643" y="4169664"/>
             <a:ext cx="685800" cy="475488"/>
           </a:xfrm>
           <a:prstGeom prst="rect">
@@ -30812,7 +31061,7 @@
                 <a:ea typeface="Trebuchet MS" pitchFamily="34" charset="-122"/>
                 <a:cs typeface="Trebuchet MS" pitchFamily="34" charset="-120"/>
               </a:rPr>
-              <a:t>m</a:t>
+              <a:t>w</a:t>
             </a:r>
             <a:endParaRPr lang="en-US" sz="900" dirty="0"/>
           </a:p>
@@ -30820,13 +31069,13 @@
       </p:sp>
       <p:sp>
         <p:nvSpPr>
-          <p:cNvPr id="39" name="Shape 37"/>
-          <p:cNvSpPr/>
-          <p:nvPr/>
-        </p:nvSpPr>
-        <p:spPr>
-          <a:xfrm>
-            <a:off x="6062472" y="4169664"/>
+          <p:cNvPr id="42" name="Shape 40"/>
+          <p:cNvSpPr/>
+          <p:nvPr/>
+        </p:nvSpPr>
+        <p:spPr>
+          <a:xfrm>
+            <a:off x="5370141" y="4169664"/>
             <a:ext cx="685800" cy="475488"/>
           </a:xfrm>
           <a:prstGeom prst="rect">
@@ -30847,13 +31096,13 @@
       </p:sp>
       <p:sp>
         <p:nvSpPr>
-          <p:cNvPr id="40" name="Text 38"/>
-          <p:cNvSpPr/>
-          <p:nvPr/>
-        </p:nvSpPr>
-        <p:spPr>
-          <a:xfrm>
-            <a:off x="6062472" y="4169664"/>
+          <p:cNvPr id="43" name="Text 41"/>
+          <p:cNvSpPr/>
+          <p:nvPr/>
+        </p:nvSpPr>
+        <p:spPr>
+          <a:xfrm>
+            <a:off x="5370141" y="4169664"/>
             <a:ext cx="685800" cy="475488"/>
           </a:xfrm>
           <a:prstGeom prst="rect">
@@ -30878,7 +31127,7 @@
                 <a:ea typeface="Trebuchet MS" pitchFamily="34" charset="-122"/>
                 <a:cs typeface="Trebuchet MS" pitchFamily="34" charset="-120"/>
               </a:rPr>
-              <a:t>l</a:t>
+              <a:t>ar</a:t>
             </a:r>
             <a:endParaRPr lang="en-US" sz="900" dirty="0"/>
           </a:p>
@@ -30886,13 +31135,13 @@
       </p:sp>
       <p:sp>
         <p:nvSpPr>
-          <p:cNvPr id="41" name="Shape 39"/>
-          <p:cNvSpPr/>
-          <p:nvPr/>
-        </p:nvSpPr>
-        <p:spPr>
-          <a:xfrm>
-            <a:off x="7274052" y="4169664"/>
+          <p:cNvPr id="44" name="Shape 42"/>
+          <p:cNvSpPr/>
+          <p:nvPr/>
+        </p:nvSpPr>
+        <p:spPr>
+          <a:xfrm>
+            <a:off x="6408638" y="4169664"/>
             <a:ext cx="685800" cy="475488"/>
           </a:xfrm>
           <a:prstGeom prst="rect">
@@ -30913,13 +31162,13 @@
       </p:sp>
       <p:sp>
         <p:nvSpPr>
-          <p:cNvPr id="42" name="Text 40"/>
-          <p:cNvSpPr/>
-          <p:nvPr/>
-        </p:nvSpPr>
-        <p:spPr>
-          <a:xfrm>
-            <a:off x="7274052" y="4169664"/>
+          <p:cNvPr id="45" name="Text 43"/>
+          <p:cNvSpPr/>
+          <p:nvPr/>
+        </p:nvSpPr>
+        <p:spPr>
+          <a:xfrm>
+            <a:off x="6408638" y="4169664"/>
             <a:ext cx="685800" cy="475488"/>
           </a:xfrm>
           <a:prstGeom prst="rect">
@@ -30944,7 +31193,73 @@
                 <a:ea typeface="Trebuchet MS" pitchFamily="34" charset="-122"/>
                 <a:cs typeface="Trebuchet MS" pitchFamily="34" charset="-120"/>
               </a:rPr>
-              <a:t>y</a:t>
+              <a:t>m</a:t>
+            </a:r>
+            <a:endParaRPr lang="en-US" sz="900" dirty="0"/>
+          </a:p>
+        </p:txBody>
+      </p:sp>
+      <p:sp>
+        <p:nvSpPr>
+          <p:cNvPr id="46" name="Shape 44"/>
+          <p:cNvSpPr/>
+          <p:nvPr/>
+        </p:nvSpPr>
+        <p:spPr>
+          <a:xfrm>
+            <a:off x="7447135" y="4169664"/>
+            <a:ext cx="685800" cy="475488"/>
+          </a:xfrm>
+          <a:prstGeom prst="rect">
+            <a:avLst>
+              <a:gd name="adj" fmla="val 7692"/>
+            </a:avLst>
+          </a:prstGeom>
+          <a:solidFill>
+            <a:srgbClr val="FFFFFF"/>
+          </a:solidFill>
+          <a:ln w="12700">
+            <a:solidFill>
+              <a:srgbClr val="DB2777"/>
+            </a:solidFill>
+            <a:prstDash val="solid"/>
+          </a:ln>
+        </p:spPr>
+      </p:sp>
+      <p:sp>
+        <p:nvSpPr>
+          <p:cNvPr id="47" name="Text 45"/>
+          <p:cNvSpPr/>
+          <p:nvPr/>
+        </p:nvSpPr>
+        <p:spPr>
+          <a:xfrm>
+            <a:off x="7447135" y="4169664"/>
+            <a:ext cx="685800" cy="475488"/>
+          </a:xfrm>
+          <a:prstGeom prst="rect">
+            <a:avLst/>
+          </a:prstGeom>
+          <a:noFill/>
+          <a:ln/>
+        </p:spPr>
+        <p:txBody>
+          <a:bodyPr wrap="square" lIns="0" tIns="0" rIns="0" bIns="0" rtlCol="0" anchor="ctr"/>
+          <a:lstStyle/>
+          <a:p>
+            <a:pPr algn="ctr" indent="0" marL="0">
+              <a:buNone/>
+            </a:pPr>
+            <a:r>
+              <a:rPr lang="en-US" sz="900" b="1" dirty="0">
+                <a:solidFill>
+                  <a:srgbClr val="9D174D"/>
+                </a:solidFill>
+                <a:latin typeface="Trebuchet MS" pitchFamily="34" charset="0"/>
+                <a:ea typeface="Trebuchet MS" pitchFamily="34" charset="-122"/>
+                <a:cs typeface="Trebuchet MS" pitchFamily="34" charset="-120"/>
+              </a:rPr>
+              <a:t>d</a:t>
             </a:r>
             <a:endParaRPr lang="en-US" sz="900" dirty="0"/>
           </a:p>
@@ -32706,7 +33021,7 @@
                 <a:ea typeface="Trebuchet MS" pitchFamily="34" charset="-122"/>
                 <a:cs typeface="Trebuchet MS" pitchFamily="34" charset="-120"/>
               </a:rPr>
-              <a:t>luke-</a:t>
+              <a:t>re-</a:t>
             </a:r>
             <a:endParaRPr lang="en-US" sz="1300" dirty="0"/>
           </a:p>
@@ -32834,7 +33149,7 @@
                 <a:ea typeface="Trebuchet MS" pitchFamily="34" charset="-122"/>
                 <a:cs typeface="Trebuchet MS" pitchFamily="34" charset="-120"/>
               </a:rPr>
-              <a:t>-er</a:t>
+              <a:t>-ed</a:t>
             </a:r>
             <a:endParaRPr lang="en-US" sz="1300" dirty="0"/>
           </a:p>
@@ -32898,7 +33213,7 @@
                 <a:ea typeface="Trebuchet MS" pitchFamily="34" charset="-122"/>
                 <a:cs typeface="Trebuchet MS" pitchFamily="34" charset="-120"/>
               </a:rPr>
-              <a:t>re-</a:t>
+              <a:t>luke-</a:t>
             </a:r>
             <a:endParaRPr lang="en-US" sz="1300" dirty="0"/>
           </a:p>
@@ -32987,7 +33302,7 @@
                 <a:ea typeface="Trebuchet MS" pitchFamily="34" charset="-122"/>
                 <a:cs typeface="Trebuchet MS" pitchFamily="34" charset="-120"/>
               </a:rPr>
-              <a:t>-est</a:t>
+              <a:t>-ing</a:t>
             </a:r>
             <a:endParaRPr lang="en-US" sz="1300" dirty="0"/>
           </a:p>
@@ -33293,7 +33608,7 @@
                 <a:ea typeface="Trebuchet MS" pitchFamily="34" charset="-122"/>
                 <a:cs typeface="Trebuchet MS" pitchFamily="34" charset="-120"/>
               </a:rPr>
-              <a:t>-ly</a:t>
+              <a:t>-er</a:t>
             </a:r>
             <a:endParaRPr lang="en-US" sz="1300" dirty="0"/>
           </a:p>
@@ -33357,7 +33672,7 @@
                 <a:ea typeface="Trebuchet MS" pitchFamily="34" charset="-122"/>
                 <a:cs typeface="Trebuchet MS" pitchFamily="34" charset="-120"/>
               </a:rPr>
-              <a:t>pre-</a:t>
+              <a:t>heart-</a:t>
             </a:r>
             <a:endParaRPr lang="en-US" sz="1300" dirty="0"/>
           </a:p>
@@ -33446,7 +33761,7 @@
                 <a:ea typeface="Trebuchet MS" pitchFamily="34" charset="-122"/>
                 <a:cs typeface="Trebuchet MS" pitchFamily="34" charset="-120"/>
               </a:rPr>
-              <a:t>-ing</a:t>
+              <a:t>-ly</a:t>
             </a:r>
             <a:endParaRPr lang="en-US" sz="1300" dirty="0"/>
           </a:p>
@@ -33551,7 +33866,7 @@
                 <a:ea typeface="Trebuchet MS" pitchFamily="34" charset="-122"/>
                 <a:cs typeface="Trebuchet MS" pitchFamily="34" charset="-120"/>
               </a:rPr>
-              <a:t>warmer</a:t>
+              <a:t>warmed</a:t>
             </a:r>
             <a:endParaRPr lang="en-US" sz="1200" dirty="0"/>
           </a:p>
@@ -33617,7 +33932,7 @@
                 <a:ea typeface="Trebuchet MS" pitchFamily="34" charset="-122"/>
                 <a:cs typeface="Trebuchet MS" pitchFamily="34" charset="-120"/>
               </a:rPr>
-              <a:t>warmth</a:t>
+              <a:t>warming</a:t>
             </a:r>
             <a:endParaRPr lang="en-US" sz="1200" dirty="0"/>
           </a:p>
@@ -33683,7 +33998,7 @@
                 <a:ea typeface="Trebuchet MS" pitchFamily="34" charset="-122"/>
                 <a:cs typeface="Trebuchet MS" pitchFamily="34" charset="-120"/>
               </a:rPr>
-              <a:t>warming</a:t>
+              <a:t>warmth</a:t>
             </a:r>
             <a:endParaRPr lang="en-US" sz="1200" dirty="0"/>
           </a:p>
@@ -33749,7 +34064,7 @@
                 <a:ea typeface="Trebuchet MS" pitchFamily="34" charset="-122"/>
                 <a:cs typeface="Trebuchet MS" pitchFamily="34" charset="-120"/>
               </a:rPr>
-              <a:t>warmly</a:t>
+              <a:t>warmer</a:t>
             </a:r>
             <a:endParaRPr lang="en-US" sz="1200" dirty="0"/>
           </a:p>
@@ -33815,7 +34130,7 @@
                 <a:ea typeface="Trebuchet MS" pitchFamily="34" charset="-122"/>
                 <a:cs typeface="Trebuchet MS" pitchFamily="34" charset="-120"/>
               </a:rPr>
-              <a:t>lukewarm</a:t>
+              <a:t>warmly</a:t>
             </a:r>
             <a:endParaRPr lang="en-US" sz="1200" dirty="0"/>
           </a:p>
@@ -33947,7 +34262,7 @@
                 <a:ea typeface="Trebuchet MS" pitchFamily="34" charset="-122"/>
                 <a:cs typeface="Trebuchet MS" pitchFamily="34" charset="-120"/>
               </a:rPr>
-              <a:t>warmest</a:t>
+              <a:t>lukewarm</a:t>
             </a:r>
             <a:endParaRPr lang="en-US" sz="1200" dirty="0"/>
           </a:p>
@@ -34013,7 +34328,7 @@
                 <a:ea typeface="Trebuchet MS" pitchFamily="34" charset="-122"/>
                 <a:cs typeface="Trebuchet MS" pitchFamily="34" charset="-120"/>
               </a:rPr>
-              <a:t>overwarm</a:t>
+              <a:t>warmhearted</a:t>
             </a:r>
             <a:endParaRPr lang="en-US" sz="1200" dirty="0"/>
           </a:p>
@@ -35201,7 +35516,7 @@
                 <a:ea typeface="Calibri" pitchFamily="34" charset="-122"/>
                 <a:cs typeface="Calibri" pitchFamily="34" charset="-120"/>
               </a:rPr>
-              <a:t>1.  The word 'warmth' contains the root 'warm' plus the suffix '-th'.</a:t>
+              <a:t>1.  A 'warmhearted' person is unkind and unfriendly.</a:t>
             </a:r>
             <a:endParaRPr lang="en-US" sz="1300" dirty="0"/>
           </a:p>
@@ -35224,11 +35539,11 @@
             </a:avLst>
           </a:prstGeom>
           <a:solidFill>
-            <a:srgbClr val="DCFCE7"/>
-          </a:solidFill>
-          <a:ln w="12700">
-            <a:solidFill>
-              <a:srgbClr val="16A34A"/>
+            <a:srgbClr val="FEE2E2"/>
+          </a:solidFill>
+          <a:ln w="12700">
+            <a:solidFill>
+              <a:srgbClr val="DC2626"/>
             </a:solidFill>
             <a:prstDash val="solid"/>
           </a:ln>
@@ -35261,13 +35576,13 @@
             <a:r>
               <a:rPr lang="en-US" sz="1100" b="1" dirty="0">
                 <a:solidFill>
-                  <a:srgbClr val="16A34A"/>
+                  <a:srgbClr val="DC2626"/>
                 </a:solidFill>
                 <a:latin typeface="Trebuchet MS" pitchFamily="34" charset="0"/>
                 <a:ea typeface="Trebuchet MS" pitchFamily="34" charset="-122"/>
                 <a:cs typeface="Trebuchet MS" pitchFamily="34" charset="-120"/>
               </a:rPr>
-              <a:t>TRUE</a:t>
+              <a:t>FALSE</a:t>
             </a:r>
             <a:endParaRPr lang="en-US" sz="1100" dirty="0"/>
           </a:p>
@@ -35340,7 +35655,7 @@
                 <a:ea typeface="Calibri" pitchFamily="34" charset="-122"/>
                 <a:cs typeface="Calibri" pitchFamily="34" charset="-120"/>
               </a:rPr>
-              <a:t>2.  The word 'lukewarm' means extremely hot.</a:t>
+              <a:t>2.  Adding the suffix '-th' to 'warm' makes the word 'warmth'.</a:t>
             </a:r>
             <a:endParaRPr lang="en-US" sz="1300" dirty="0"/>
           </a:p>
@@ -35363,11 +35678,11 @@
             </a:avLst>
           </a:prstGeom>
           <a:solidFill>
-            <a:srgbClr val="FEE2E2"/>
-          </a:solidFill>
-          <a:ln w="12700">
-            <a:solidFill>
-              <a:srgbClr val="DC2626"/>
+            <a:srgbClr val="DCFCE7"/>
+          </a:solidFill>
+          <a:ln w="12700">
+            <a:solidFill>
+              <a:srgbClr val="16A34A"/>
             </a:solidFill>
             <a:prstDash val="solid"/>
           </a:ln>
@@ -35400,13 +35715,13 @@
             <a:r>
               <a:rPr lang="en-US" sz="1100" b="1" dirty="0">
                 <a:solidFill>
-                  <a:srgbClr val="DC2626"/>
+                  <a:srgbClr val="16A34A"/>
                 </a:solidFill>
                 <a:latin typeface="Trebuchet MS" pitchFamily="34" charset="0"/>
                 <a:ea typeface="Trebuchet MS" pitchFamily="34" charset="-122"/>
                 <a:cs typeface="Trebuchet MS" pitchFamily="34" charset="-120"/>
               </a:rPr>
-              <a:t>FALSE</a:t>
+              <a:t>TRUE</a:t>
             </a:r>
             <a:endParaRPr lang="en-US" sz="1100" dirty="0"/>
           </a:p>
@@ -35479,7 +35794,7 @@
                 <a:ea typeface="Calibri" pitchFamily="34" charset="-122"/>
                 <a:cs typeface="Calibri" pitchFamily="34" charset="-120"/>
               </a:rPr>
-              <a:t>3.  The suffix '-ly' in 'warmly' turns the adjective 'warm' into an adverb.</a:t>
+              <a:t>3.  The root 'warm' means extremely cold.</a:t>
             </a:r>
             <a:endParaRPr lang="en-US" sz="1300" dirty="0"/>
           </a:p>
@@ -35502,11 +35817,11 @@
             </a:avLst>
           </a:prstGeom>
           <a:solidFill>
-            <a:srgbClr val="DCFCE7"/>
-          </a:solidFill>
-          <a:ln w="12700">
-            <a:solidFill>
-              <a:srgbClr val="16A34A"/>
+            <a:srgbClr val="FEE2E2"/>
+          </a:solidFill>
+          <a:ln w="12700">
+            <a:solidFill>
+              <a:srgbClr val="DC2626"/>
             </a:solidFill>
             <a:prstDash val="solid"/>
           </a:ln>
@@ -35539,13 +35854,13 @@
             <a:r>
               <a:rPr lang="en-US" sz="1100" b="1" dirty="0">
                 <a:solidFill>
-                  <a:srgbClr val="16A34A"/>
+                  <a:srgbClr val="DC2626"/>
                 </a:solidFill>
                 <a:latin typeface="Trebuchet MS" pitchFamily="34" charset="0"/>
                 <a:ea typeface="Trebuchet MS" pitchFamily="34" charset="-122"/>
                 <a:cs typeface="Trebuchet MS" pitchFamily="34" charset="-120"/>
               </a:rPr>
-              <a:t>TRUE</a:t>
+              <a:t>FALSE</a:t>
             </a:r>
             <a:endParaRPr lang="en-US" sz="1100" dirty="0"/>
           </a:p>
@@ -35618,7 +35933,7 @@
                 <a:ea typeface="Calibri" pitchFamily="34" charset="-122"/>
                 <a:cs typeface="Calibri" pitchFamily="34" charset="-120"/>
               </a:rPr>
-              <a:t>4.  The word 'rewarm' means to heat something up again.</a:t>
+              <a:t>4.  The word 'lukewarm' contains the root 'warm'.</a:t>
             </a:r>
             <a:endParaRPr lang="en-US" sz="1300" dirty="0"/>
           </a:p>
@@ -35757,7 +36072,7 @@
                 <a:ea typeface="Calibri" pitchFamily="34" charset="-122"/>
                 <a:cs typeface="Calibri" pitchFamily="34" charset="-120"/>
               </a:rPr>
-              <a:t>5.  The root 'warm' originally comes from French.</a:t>
+              <a:t>5.  The word 'warming' uses the suffix '-ing' added to the root 'warm'.</a:t>
             </a:r>
             <a:endParaRPr lang="en-US" sz="1300" dirty="0"/>
           </a:p>
@@ -35780,11 +36095,11 @@
             </a:avLst>
           </a:prstGeom>
           <a:solidFill>
-            <a:srgbClr val="FEE2E2"/>
-          </a:solidFill>
-          <a:ln w="12700">
-            <a:solidFill>
-              <a:srgbClr val="DC2626"/>
+            <a:srgbClr val="DCFCE7"/>
+          </a:solidFill>
+          <a:ln w="12700">
+            <a:solidFill>
+              <a:srgbClr val="16A34A"/>
             </a:solidFill>
             <a:prstDash val="solid"/>
           </a:ln>
@@ -35817,13 +36132,13 @@
             <a:r>
               <a:rPr lang="en-US" sz="1100" b="1" dirty="0">
                 <a:solidFill>
-                  <a:srgbClr val="DC2626"/>
+                  <a:srgbClr val="16A34A"/>
                 </a:solidFill>
                 <a:latin typeface="Trebuchet MS" pitchFamily="34" charset="0"/>
                 <a:ea typeface="Trebuchet MS" pitchFamily="34" charset="-122"/>
                 <a:cs typeface="Trebuchet MS" pitchFamily="34" charset="-120"/>
               </a:rPr>
-              <a:t>FALSE</a:t>
+              <a:t>TRUE</a:t>
             </a:r>
             <a:endParaRPr lang="en-US" sz="1100" dirty="0"/>
           </a:p>
@@ -36396,7 +36711,7 @@
                 <a:ea typeface="Trebuchet MS" pitchFamily="34" charset="-122"/>
                 <a:cs typeface="Trebuchet MS" pitchFamily="34" charset="-120"/>
               </a:rPr>
-              <a:t>warmer</a:t>
+              <a:t>warmed</a:t>
             </a:r>
             <a:endParaRPr lang="en-US" sz="1300" dirty="0"/>
           </a:p>
@@ -36462,7 +36777,7 @@
                 <a:ea typeface="Trebuchet MS" pitchFamily="34" charset="-122"/>
                 <a:cs typeface="Trebuchet MS" pitchFamily="34" charset="-120"/>
               </a:rPr>
-              <a:t>warmth</a:t>
+              <a:t>warming</a:t>
             </a:r>
             <a:endParaRPr lang="en-US" sz="1300" dirty="0"/>
           </a:p>
@@ -36528,7 +36843,7 @@
                 <a:ea typeface="Trebuchet MS" pitchFamily="34" charset="-122"/>
                 <a:cs typeface="Trebuchet MS" pitchFamily="34" charset="-120"/>
               </a:rPr>
-              <a:t>warming</a:t>
+              <a:t>warmth</a:t>
             </a:r>
             <a:endParaRPr lang="en-US" sz="1300" dirty="0"/>
           </a:p>
@@ -36594,7 +36909,7 @@
                 <a:ea typeface="Trebuchet MS" pitchFamily="34" charset="-122"/>
                 <a:cs typeface="Trebuchet MS" pitchFamily="34" charset="-120"/>
               </a:rPr>
-              <a:t>warmly</a:t>
+              <a:t>warmer</a:t>
             </a:r>
             <a:endParaRPr lang="en-US" sz="1300" dirty="0"/>
           </a:p>
@@ -36660,7 +36975,7 @@
                 <a:ea typeface="Trebuchet MS" pitchFamily="34" charset="-122"/>
                 <a:cs typeface="Trebuchet MS" pitchFamily="34" charset="-120"/>
               </a:rPr>
-              <a:t>lukewarm</a:t>
+              <a:t>warmly</a:t>
             </a:r>
             <a:endParaRPr lang="en-US" sz="1300" dirty="0"/>
           </a:p>
@@ -36792,7 +37107,7 @@
                 <a:ea typeface="Trebuchet MS" pitchFamily="34" charset="-122"/>
                 <a:cs typeface="Trebuchet MS" pitchFamily="34" charset="-120"/>
               </a:rPr>
-              <a:t>warmest</a:t>
+              <a:t>lukewarm</a:t>
             </a:r>
             <a:endParaRPr lang="en-US" sz="1300" dirty="0"/>
           </a:p>
@@ -37385,7 +37700,7 @@
                 <a:ea typeface="Trebuchet MS" pitchFamily="34" charset="-122"/>
                 <a:cs typeface="Trebuchet MS" pitchFamily="34" charset="-120"/>
               </a:rPr>
-              <a:t>luke-</a:t>
+              <a:t>re-</a:t>
             </a:r>
             <a:endParaRPr lang="en-US" sz="1300" dirty="0"/>
           </a:p>
@@ -37513,7 +37828,7 @@
                 <a:ea typeface="Trebuchet MS" pitchFamily="34" charset="-122"/>
                 <a:cs typeface="Trebuchet MS" pitchFamily="34" charset="-120"/>
               </a:rPr>
-              <a:t>-er</a:t>
+              <a:t>-ed</a:t>
             </a:r>
             <a:endParaRPr lang="en-US" sz="1300" dirty="0"/>
           </a:p>
@@ -37577,7 +37892,7 @@
                 <a:ea typeface="Trebuchet MS" pitchFamily="34" charset="-122"/>
                 <a:cs typeface="Trebuchet MS" pitchFamily="34" charset="-120"/>
               </a:rPr>
-              <a:t>re-</a:t>
+              <a:t>luke-</a:t>
             </a:r>
             <a:endParaRPr lang="en-US" sz="1300" dirty="0"/>
           </a:p>
@@ -37666,7 +37981,7 @@
                 <a:ea typeface="Trebuchet MS" pitchFamily="34" charset="-122"/>
                 <a:cs typeface="Trebuchet MS" pitchFamily="34" charset="-120"/>
               </a:rPr>
-              <a:t>-est</a:t>
+              <a:t>-ing</a:t>
             </a:r>
             <a:endParaRPr lang="en-US" sz="1300" dirty="0"/>
           </a:p>
@@ -37972,7 +38287,7 @@
                 <a:ea typeface="Trebuchet MS" pitchFamily="34" charset="-122"/>
                 <a:cs typeface="Trebuchet MS" pitchFamily="34" charset="-120"/>
               </a:rPr>
-              <a:t>-ly</a:t>
+              <a:t>-er</a:t>
             </a:r>
             <a:endParaRPr lang="en-US" sz="1300" dirty="0"/>
           </a:p>
@@ -38036,7 +38351,7 @@
                 <a:ea typeface="Trebuchet MS" pitchFamily="34" charset="-122"/>
                 <a:cs typeface="Trebuchet MS" pitchFamily="34" charset="-120"/>
               </a:rPr>
-              <a:t>pre-</a:t>
+              <a:t>heart-</a:t>
             </a:r>
             <a:endParaRPr lang="en-US" sz="1300" dirty="0"/>
           </a:p>
@@ -38125,7 +38440,7 @@
                 <a:ea typeface="Trebuchet MS" pitchFamily="34" charset="-122"/>
                 <a:cs typeface="Trebuchet MS" pitchFamily="34" charset="-120"/>
               </a:rPr>
-              <a:t>-ing</a:t>
+              <a:t>-ly</a:t>
             </a:r>
             <a:endParaRPr lang="en-US" sz="1300" dirty="0"/>
           </a:p>
@@ -38179,7 +38494,7 @@
         <p:spPr>
           <a:xfrm>
             <a:off x="1508760" y="4178808"/>
-            <a:ext cx="1097280" cy="420624"/>
+            <a:ext cx="822960" cy="420624"/>
           </a:xfrm>
           <a:prstGeom prst="rect">
             <a:avLst>
@@ -38213,7 +38528,7 @@
         <p:spPr>
           <a:xfrm>
             <a:off x="1508760" y="4178808"/>
-            <a:ext cx="1097280" cy="420624"/>
+            <a:ext cx="822960" cy="420624"/>
           </a:xfrm>
           <a:prstGeom prst="rect">
             <a:avLst/>
@@ -38237,7 +38552,7 @@
                 <a:ea typeface="Trebuchet MS" pitchFamily="34" charset="-122"/>
                 <a:cs typeface="Trebuchet MS" pitchFamily="34" charset="-120"/>
               </a:rPr>
-              <a:t>luke-</a:t>
+              <a:t>re-</a:t>
             </a:r>
             <a:endParaRPr lang="en-US" sz="1300" dirty="0"/>
           </a:p>
@@ -38251,7 +38566,7 @@
         </p:nvSpPr>
         <p:spPr>
           <a:xfrm>
-            <a:off x="2633472" y="4178808"/>
+            <a:off x="2359152" y="4178808"/>
             <a:ext cx="320040" cy="420624"/>
           </a:xfrm>
           <a:prstGeom prst="rect">
@@ -38290,7 +38605,7 @@
         </p:nvSpPr>
         <p:spPr>
           <a:xfrm>
-            <a:off x="2980944" y="4178808"/>
+            <a:off x="2706624" y="4178808"/>
             <a:ext cx="1243584" cy="420624"/>
           </a:xfrm>
           <a:prstGeom prst="rect">
@@ -38324,7 +38639,7 @@
         </p:nvSpPr>
         <p:spPr>
           <a:xfrm>
-            <a:off x="2980944" y="4178808"/>
+            <a:off x="2706624" y="4178808"/>
             <a:ext cx="1243584" cy="420624"/>
           </a:xfrm>
           <a:prstGeom prst="rect">
@@ -38363,7 +38678,7 @@
         </p:nvSpPr>
         <p:spPr>
           <a:xfrm>
-            <a:off x="4251960" y="4178808"/>
+            <a:off x="3977640" y="4178808"/>
             <a:ext cx="320040" cy="420624"/>
           </a:xfrm>
           <a:prstGeom prst="rect">
@@ -38402,7 +38717,7 @@
         </p:nvSpPr>
         <p:spPr>
           <a:xfrm>
-            <a:off x="4599432" y="4178808"/>
+            <a:off x="4325112" y="4178808"/>
             <a:ext cx="822960" cy="420624"/>
           </a:xfrm>
           <a:prstGeom prst="rect">
@@ -38436,7 +38751,7 @@
         </p:nvSpPr>
         <p:spPr>
           <a:xfrm>
-            <a:off x="4599432" y="4178808"/>
+            <a:off x="4325112" y="4178808"/>
             <a:ext cx="822960" cy="420624"/>
           </a:xfrm>
           <a:prstGeom prst="rect">
@@ -38461,7 +38776,7 @@
                 <a:ea typeface="Trebuchet MS" pitchFamily="34" charset="-122"/>
                 <a:cs typeface="Trebuchet MS" pitchFamily="34" charset="-120"/>
               </a:rPr>
-              <a:t>-er</a:t>
+              <a:t>-ed</a:t>
             </a:r>
             <a:endParaRPr lang="en-US" sz="1300" dirty="0"/>
           </a:p>
@@ -38475,7 +38790,7 @@
         </p:nvSpPr>
         <p:spPr>
           <a:xfrm>
-            <a:off x="5495544" y="4178808"/>
+            <a:off x="5221224" y="4178808"/>
             <a:ext cx="365760" cy="420624"/>
           </a:xfrm>
           <a:prstGeom prst="rect">
@@ -38514,7 +38829,7 @@
         </p:nvSpPr>
         <p:spPr>
           <a:xfrm>
-            <a:off x="5907024" y="4178808"/>
+            <a:off x="5632704" y="4178808"/>
             <a:ext cx="2194560" cy="420624"/>
           </a:xfrm>
           <a:prstGeom prst="rect">
@@ -38541,7 +38856,7 @@
         </p:nvSpPr>
         <p:spPr>
           <a:xfrm>
-            <a:off x="5907024" y="4178808"/>
+            <a:off x="5632704" y="4178808"/>
             <a:ext cx="2194560" cy="420624"/>
           </a:xfrm>
           <a:prstGeom prst="rect">
@@ -38566,7 +38881,7 @@
                 <a:ea typeface="Trebuchet MS" pitchFamily="34" charset="-122"/>
                 <a:cs typeface="Trebuchet MS" pitchFamily="34" charset="-120"/>
               </a:rPr>
-              <a:t>warmer</a:t>
+              <a:t>warmed</a:t>
             </a:r>
             <a:endParaRPr lang="en-US" sz="1400" dirty="0"/>
           </a:p>
@@ -38970,7 +39285,7 @@
                 <a:ea typeface="Trebuchet MS" pitchFamily="34" charset="-122"/>
                 <a:cs typeface="Trebuchet MS" pitchFamily="34" charset="-120"/>
               </a:rPr>
-              <a:t>warmer</a:t>
+              <a:t>warmed</a:t>
             </a:r>
             <a:endParaRPr lang="en-US" sz="1200" dirty="0"/>
           </a:p>
@@ -39036,7 +39351,7 @@
                 <a:ea typeface="Calibri" pitchFamily="34" charset="-122"/>
                 <a:cs typeface="Calibri" pitchFamily="34" charset="-120"/>
               </a:rPr>
-              <a:t>Becoming more warm, or making something hotter than it was before.</a:t>
+              <a:t>A pleasant feeling of heat or friendliness.</a:t>
             </a:r>
             <a:endParaRPr lang="en-US" sz="1200" dirty="0"/>
           </a:p>
@@ -39109,7 +39424,7 @@
                 <a:ea typeface="Trebuchet MS" pitchFamily="34" charset="-122"/>
                 <a:cs typeface="Trebuchet MS" pitchFamily="34" charset="-120"/>
               </a:rPr>
-              <a:t>warmth</a:t>
+              <a:t>warming</a:t>
             </a:r>
             <a:endParaRPr lang="en-US" sz="1200" dirty="0"/>
           </a:p>
@@ -39175,7 +39490,7 @@
                 <a:ea typeface="Calibri" pitchFamily="34" charset="-122"/>
                 <a:cs typeface="Calibri" pitchFamily="34" charset="-120"/>
               </a:rPr>
-              <a:t>In a friendly and kind way, or in a way that keeps you feeling warm.</a:t>
+              <a:t>Something or someone that has more heat than another, or a device that heats things up.</a:t>
             </a:r>
             <a:endParaRPr lang="en-US" sz="1200" dirty="0"/>
           </a:p>
@@ -39248,7 +39563,7 @@
                 <a:ea typeface="Trebuchet MS" pitchFamily="34" charset="-122"/>
                 <a:cs typeface="Trebuchet MS" pitchFamily="34" charset="-120"/>
               </a:rPr>
-              <a:t>warming</a:t>
+              <a:t>warmth</a:t>
             </a:r>
             <a:endParaRPr lang="en-US" sz="1200" dirty="0"/>
           </a:p>
@@ -39314,7 +39629,7 @@
                 <a:ea typeface="Calibri" pitchFamily="34" charset="-122"/>
                 <a:cs typeface="Calibri" pitchFamily="34" charset="-120"/>
               </a:rPr>
-              <a:t>The most warm of all — used when comparing temperatures or feelings of kindness.</a:t>
+              <a:t>Only slightly warm — not hot and not cold, like lukewarm bathwater.</a:t>
             </a:r>
             <a:endParaRPr lang="en-US" sz="1200" dirty="0"/>
           </a:p>
@@ -39387,7 +39702,7 @@
                 <a:ea typeface="Trebuchet MS" pitchFamily="34" charset="-122"/>
                 <a:cs typeface="Trebuchet MS" pitchFamily="34" charset="-120"/>
               </a:rPr>
-              <a:t>warmly</a:t>
+              <a:t>warmer</a:t>
             </a:r>
             <a:endParaRPr lang="en-US" sz="1200" dirty="0"/>
           </a:p>
@@ -39453,7 +39768,7 @@
                 <a:ea typeface="Calibri" pitchFamily="34" charset="-122"/>
                 <a:cs typeface="Calibri" pitchFamily="34" charset="-120"/>
               </a:rPr>
-              <a:t>To heat something up again after it has gone cold.</a:t>
+              <a:t>To heat something up again after it has cooled down.</a:t>
             </a:r>
             <a:endParaRPr lang="en-US" sz="1200" dirty="0"/>
           </a:p>
@@ -39526,7 +39841,7 @@
                 <a:ea typeface="Trebuchet MS" pitchFamily="34" charset="-122"/>
                 <a:cs typeface="Trebuchet MS" pitchFamily="34" charset="-120"/>
               </a:rPr>
-              <a:t>lukewarm</a:t>
+              <a:t>warmly</a:t>
             </a:r>
             <a:endParaRPr lang="en-US" sz="1200" dirty="0"/>
           </a:p>
@@ -39592,7 +39907,7 @@
                 <a:ea typeface="Calibri" pitchFamily="34" charset="-122"/>
                 <a:cs typeface="Calibri" pitchFamily="34" charset="-120"/>
               </a:rPr>
-              <a:t>Something that has more heat than another thing, or a device used to heat something up.</a:t>
+              <a:t>Made something hotter or less cold, like warmed-up soup.</a:t>
             </a:r>
             <a:endParaRPr lang="en-US" sz="1200" dirty="0"/>
           </a:p>
@@ -39731,7 +40046,7 @@
                 <a:ea typeface="Calibri" pitchFamily="34" charset="-122"/>
                 <a:cs typeface="Calibri" pitchFamily="34" charset="-120"/>
               </a:rPr>
-              <a:t>Only slightly warm — not hot and not cold, like water that has been sitting out for a while.</a:t>
+              <a:t>In a friendly or heated way, like greeting someone warmly.</a:t>
             </a:r>
             <a:endParaRPr lang="en-US" sz="1200" dirty="0"/>
           </a:p>
@@ -39804,7 +40119,7 @@
                 <a:ea typeface="Trebuchet MS" pitchFamily="34" charset="-122"/>
                 <a:cs typeface="Trebuchet MS" pitchFamily="34" charset="-120"/>
               </a:rPr>
-              <a:t>warmest</a:t>
+              <a:t>lukewarm</a:t>
             </a:r>
             <a:endParaRPr lang="en-US" sz="1200" dirty="0"/>
           </a:p>
@@ -39870,7 +40185,7 @@
                 <a:ea typeface="Calibri" pitchFamily="34" charset="-122"/>
                 <a:cs typeface="Calibri" pitchFamily="34" charset="-120"/>
               </a:rPr>
-              <a:t>The feeling of gentle heat, or a sense of kindness and friendliness.</a:t>
+              <a:t>The process of making something warmer, like warming your hands by a fire.</a:t>
             </a:r>
             <a:endParaRPr lang="en-US" sz="1200" dirty="0"/>
           </a:p>
@@ -40365,7 +40680,7 @@
                 <a:ea typeface="Calibri" pitchFamily="34" charset="-122"/>
                 <a:cs typeface="Calibri" pitchFamily="34" charset="-120"/>
               </a:rPr>
-              <a:t>The warmth of the fireplace made the whole family feel cosy on the cold winter evening.</a:t>
+              <a:t>The warmth of the campfire made everyone feel safe and comfortable on the cold night.</a:t>
             </a:r>
             <a:endParaRPr lang="en-US" sz="1500" dirty="0"/>
           </a:p>
@@ -40529,7 +40844,7 @@
                 <a:ea typeface="Calibri" pitchFamily="34" charset="-122"/>
                 <a:cs typeface="Calibri" pitchFamily="34" charset="-120"/>
               </a:rPr>
-              <a:t>She smiled warmly at the new student to help them feel welcome on their first day.</a:t>
+              <a:t>She warmed up her breakfast in the microwave before eating it at the kitchen table.</a:t>
             </a:r>
             <a:endParaRPr lang="en-US" sz="1500" dirty="0"/>
           </a:p>
@@ -40693,7 +41008,7 @@
                 <a:ea typeface="Calibri" pitchFamily="34" charset="-122"/>
                 <a:cs typeface="Calibri" pitchFamily="34" charset="-120"/>
               </a:rPr>
-              <a:t>The scientist explained that global warming is causing temperatures around the world to rise.</a:t>
+              <a:t>The teacher gave the new student a warmly worded welcome card on her first day of school.</a:t>
             </a:r>
             <a:endParaRPr lang="en-US" sz="1500" dirty="0"/>
           </a:p>

--- a/output/wordlabs-warm-3day.pptx
+++ b/output/wordlabs-warm-3day.pptx
@@ -21359,11 +21359,11 @@
         <p:spPr>
           <a:xfrm>
             <a:off x="1874520" y="4096512"/>
-            <a:ext cx="6903720" cy="804672"/>
+            <a:ext cx="6903720" cy="658368"/>
           </a:xfrm>
           <a:prstGeom prst="rect">
             <a:avLst>
-              <a:gd name="adj" fmla="val 6818"/>
+              <a:gd name="adj" fmla="val 8333"/>
             </a:avLst>
           </a:prstGeom>
           <a:solidFill>
@@ -21386,11 +21386,11 @@
         <p:spPr>
           <a:xfrm>
             <a:off x="2427732" y="4169664"/>
-            <a:ext cx="685800" cy="384048"/>
+            <a:ext cx="685800" cy="475488"/>
           </a:xfrm>
           <a:prstGeom prst="rect">
             <a:avLst>
-              <a:gd name="adj" fmla="val 9524"/>
+              <a:gd name="adj" fmla="val 7692"/>
             </a:avLst>
           </a:prstGeom>
           <a:solidFill>
@@ -21413,7 +21413,7 @@
         <p:spPr>
           <a:xfrm>
             <a:off x="2427732" y="4169664"/>
-            <a:ext cx="685800" cy="384048"/>
+            <a:ext cx="685800" cy="475488"/>
           </a:xfrm>
           <a:prstGeom prst="rect">
             <a:avLst/>
@@ -21452,11 +21452,11 @@
         <p:spPr>
           <a:xfrm>
             <a:off x="3639312" y="4169664"/>
-            <a:ext cx="685800" cy="384048"/>
+            <a:ext cx="685800" cy="475488"/>
           </a:xfrm>
           <a:prstGeom prst="rect">
             <a:avLst>
-              <a:gd name="adj" fmla="val 9524"/>
+              <a:gd name="adj" fmla="val 7692"/>
             </a:avLst>
           </a:prstGeom>
           <a:solidFill>
@@ -21479,7 +21479,7 @@
         <p:spPr>
           <a:xfrm>
             <a:off x="3639312" y="4169664"/>
-            <a:ext cx="685800" cy="384048"/>
+            <a:ext cx="685800" cy="475488"/>
           </a:xfrm>
           <a:prstGeom prst="rect">
             <a:avLst/>
@@ -21518,11 +21518,11 @@
         <p:spPr>
           <a:xfrm>
             <a:off x="4850892" y="4169664"/>
-            <a:ext cx="685800" cy="384048"/>
+            <a:ext cx="685800" cy="475488"/>
           </a:xfrm>
           <a:prstGeom prst="rect">
             <a:avLst>
-              <a:gd name="adj" fmla="val 9524"/>
+              <a:gd name="adj" fmla="val 7692"/>
             </a:avLst>
           </a:prstGeom>
           <a:solidFill>
@@ -21545,7 +21545,7 @@
         <p:spPr>
           <a:xfrm>
             <a:off x="4850892" y="4169664"/>
-            <a:ext cx="685800" cy="384048"/>
+            <a:ext cx="685800" cy="475488"/>
           </a:xfrm>
           <a:prstGeom prst="rect">
             <a:avLst/>
@@ -21584,11 +21584,11 @@
         <p:spPr>
           <a:xfrm>
             <a:off x="6062472" y="4169664"/>
-            <a:ext cx="685800" cy="384048"/>
+            <a:ext cx="685800" cy="475488"/>
           </a:xfrm>
           <a:prstGeom prst="rect">
             <a:avLst>
-              <a:gd name="adj" fmla="val 9524"/>
+              <a:gd name="adj" fmla="val 7692"/>
             </a:avLst>
           </a:prstGeom>
           <a:solidFill>
@@ -21611,7 +21611,7 @@
         <p:spPr>
           <a:xfrm>
             <a:off x="6062472" y="4169664"/>
-            <a:ext cx="685800" cy="384048"/>
+            <a:ext cx="685800" cy="475488"/>
           </a:xfrm>
           <a:prstGeom prst="rect">
             <a:avLst/>
@@ -21650,11 +21650,11 @@
         <p:spPr>
           <a:xfrm>
             <a:off x="7274052" y="4169664"/>
-            <a:ext cx="685800" cy="384048"/>
+            <a:ext cx="685800" cy="475488"/>
           </a:xfrm>
           <a:prstGeom prst="rect">
             <a:avLst>
-              <a:gd name="adj" fmla="val 9524"/>
+              <a:gd name="adj" fmla="val 7692"/>
             </a:avLst>
           </a:prstGeom>
           <a:solidFill>
@@ -21677,7 +21677,7 @@
         <p:spPr>
           <a:xfrm>
             <a:off x="7274052" y="4169664"/>
-            <a:ext cx="685800" cy="384048"/>
+            <a:ext cx="685800" cy="475488"/>
           </a:xfrm>
           <a:prstGeom prst="rect">
             <a:avLst/>
@@ -21701,48 +21701,9 @@
                 <a:ea typeface="Trebuchet MS" pitchFamily="34" charset="-122"/>
                 <a:cs typeface="Trebuchet MS" pitchFamily="34" charset="-120"/>
               </a:rPr>
-              <a:t>ee</a:t>
+              <a:t>y</a:t>
             </a:r>
             <a:endParaRPr lang="en-US" sz="900" dirty="0"/>
-          </a:p>
-        </p:txBody>
-      </p:sp>
-      <p:sp>
-        <p:nvSpPr>
-          <p:cNvPr id="43" name="Text 41"/>
-          <p:cNvSpPr/>
-          <p:nvPr/>
-        </p:nvSpPr>
-        <p:spPr>
-          <a:xfrm>
-            <a:off x="7274052" y="4572000"/>
-            <a:ext cx="685800" cy="219456"/>
-          </a:xfrm>
-          <a:prstGeom prst="rect">
-            <a:avLst/>
-          </a:prstGeom>
-          <a:noFill/>
-          <a:ln/>
-        </p:spPr>
-        <p:txBody>
-          <a:bodyPr wrap="square" lIns="0" tIns="0" rIns="0" bIns="0" rtlCol="0" anchor="t"/>
-          <a:lstStyle/>
-          <a:p>
-            <a:pPr algn="ctr" indent="0" marL="0">
-              <a:buNone/>
-            </a:pPr>
-            <a:r>
-              <a:rPr lang="en-US" sz="750" i="1" dirty="0">
-                <a:solidFill>
-                  <a:srgbClr val="94A3B8"/>
-                </a:solidFill>
-                <a:latin typeface="Calibri" pitchFamily="34" charset="0"/>
-                <a:ea typeface="Calibri" pitchFamily="34" charset="-122"/>
-                <a:cs typeface="Calibri" pitchFamily="34" charset="-120"/>
-              </a:rPr>
-              <a:t>/ee/</a:t>
-            </a:r>
-            <a:endParaRPr lang="en-US" sz="750" dirty="0"/>
           </a:p>
         </p:txBody>
       </p:sp>
@@ -30995,7 +30956,7 @@
                 <a:ea typeface="Trebuchet MS" pitchFamily="34" charset="-122"/>
                 <a:cs typeface="Trebuchet MS" pitchFamily="34" charset="-120"/>
               </a:rPr>
-              <a:t>e</a:t>
+              <a:t>ew</a:t>
             </a:r>
             <a:endParaRPr lang="en-US" sz="900" dirty="0"/>
           </a:p>
@@ -31061,7 +31022,7 @@
                 <a:ea typeface="Trebuchet MS" pitchFamily="34" charset="-122"/>
                 <a:cs typeface="Trebuchet MS" pitchFamily="34" charset="-120"/>
               </a:rPr>
-              <a:t>w</a:t>
+              <a:t>ar</a:t>
             </a:r>
             <a:endParaRPr lang="en-US" sz="900" dirty="0"/>
           </a:p>
@@ -31127,7 +31088,7 @@
                 <a:ea typeface="Trebuchet MS" pitchFamily="34" charset="-122"/>
                 <a:cs typeface="Trebuchet MS" pitchFamily="34" charset="-120"/>
               </a:rPr>
-              <a:t>ar</a:t>
+              <a:t>m</a:t>
             </a:r>
             <a:endParaRPr lang="en-US" sz="900" dirty="0"/>
           </a:p>
@@ -31193,7 +31154,7 @@
                 <a:ea typeface="Trebuchet MS" pitchFamily="34" charset="-122"/>
                 <a:cs typeface="Trebuchet MS" pitchFamily="34" charset="-120"/>
               </a:rPr>
-              <a:t>m</a:t>
+              <a:t>e</a:t>
             </a:r>
             <a:endParaRPr lang="en-US" sz="900" dirty="0"/>
           </a:p>
@@ -35516,7 +35477,7 @@
                 <a:ea typeface="Calibri" pitchFamily="34" charset="-122"/>
                 <a:cs typeface="Calibri" pitchFamily="34" charset="-120"/>
               </a:rPr>
-              <a:t>1.  A 'warmhearted' person is unkind and unfriendly.</a:t>
+              <a:t>1.  The root 'warm' means extremely cold.</a:t>
             </a:r>
             <a:endParaRPr lang="en-US" sz="1300" dirty="0"/>
           </a:p>
@@ -35655,7 +35616,7 @@
                 <a:ea typeface="Calibri" pitchFamily="34" charset="-122"/>
                 <a:cs typeface="Calibri" pitchFamily="34" charset="-120"/>
               </a:rPr>
-              <a:t>2.  Adding the suffix '-th' to 'warm' makes the word 'warmth'.</a:t>
+              <a:t>2.  A 'warmhearted' person is unkind and unfriendly.</a:t>
             </a:r>
             <a:endParaRPr lang="en-US" sz="1300" dirty="0"/>
           </a:p>
@@ -35678,11 +35639,11 @@
             </a:avLst>
           </a:prstGeom>
           <a:solidFill>
-            <a:srgbClr val="DCFCE7"/>
-          </a:solidFill>
-          <a:ln w="12700">
-            <a:solidFill>
-              <a:srgbClr val="16A34A"/>
+            <a:srgbClr val="FEE2E2"/>
+          </a:solidFill>
+          <a:ln w="12700">
+            <a:solidFill>
+              <a:srgbClr val="DC2626"/>
             </a:solidFill>
             <a:prstDash val="solid"/>
           </a:ln>
@@ -35715,13 +35676,13 @@
             <a:r>
               <a:rPr lang="en-US" sz="1100" b="1" dirty="0">
                 <a:solidFill>
-                  <a:srgbClr val="16A34A"/>
+                  <a:srgbClr val="DC2626"/>
                 </a:solidFill>
                 <a:latin typeface="Trebuchet MS" pitchFamily="34" charset="0"/>
                 <a:ea typeface="Trebuchet MS" pitchFamily="34" charset="-122"/>
                 <a:cs typeface="Trebuchet MS" pitchFamily="34" charset="-120"/>
               </a:rPr>
-              <a:t>TRUE</a:t>
+              <a:t>FALSE</a:t>
             </a:r>
             <a:endParaRPr lang="en-US" sz="1100" dirty="0"/>
           </a:p>
@@ -35794,7 +35755,7 @@
                 <a:ea typeface="Calibri" pitchFamily="34" charset="-122"/>
                 <a:cs typeface="Calibri" pitchFamily="34" charset="-120"/>
               </a:rPr>
-              <a:t>3.  The root 'warm' means extremely cold.</a:t>
+              <a:t>3.  The word 'lukewarm' contains the root 'warm'.</a:t>
             </a:r>
             <a:endParaRPr lang="en-US" sz="1300" dirty="0"/>
           </a:p>
@@ -35817,11 +35778,11 @@
             </a:avLst>
           </a:prstGeom>
           <a:solidFill>
-            <a:srgbClr val="FEE2E2"/>
-          </a:solidFill>
-          <a:ln w="12700">
-            <a:solidFill>
-              <a:srgbClr val="DC2626"/>
+            <a:srgbClr val="DCFCE7"/>
+          </a:solidFill>
+          <a:ln w="12700">
+            <a:solidFill>
+              <a:srgbClr val="16A34A"/>
             </a:solidFill>
             <a:prstDash val="solid"/>
           </a:ln>
@@ -35854,13 +35815,13 @@
             <a:r>
               <a:rPr lang="en-US" sz="1100" b="1" dirty="0">
                 <a:solidFill>
-                  <a:srgbClr val="DC2626"/>
+                  <a:srgbClr val="16A34A"/>
                 </a:solidFill>
                 <a:latin typeface="Trebuchet MS" pitchFamily="34" charset="0"/>
                 <a:ea typeface="Trebuchet MS" pitchFamily="34" charset="-122"/>
                 <a:cs typeface="Trebuchet MS" pitchFamily="34" charset="-120"/>
               </a:rPr>
-              <a:t>FALSE</a:t>
+              <a:t>TRUE</a:t>
             </a:r>
             <a:endParaRPr lang="en-US" sz="1100" dirty="0"/>
           </a:p>
@@ -35933,7 +35894,7 @@
                 <a:ea typeface="Calibri" pitchFamily="34" charset="-122"/>
                 <a:cs typeface="Calibri" pitchFamily="34" charset="-120"/>
               </a:rPr>
-              <a:t>4.  The word 'lukewarm' contains the root 'warm'.</a:t>
+              <a:t>4.  The word 'warming' uses the suffix '-ing' added to the root 'warm'.</a:t>
             </a:r>
             <a:endParaRPr lang="en-US" sz="1300" dirty="0"/>
           </a:p>
@@ -36072,7 +36033,7 @@
                 <a:ea typeface="Calibri" pitchFamily="34" charset="-122"/>
                 <a:cs typeface="Calibri" pitchFamily="34" charset="-120"/>
               </a:rPr>
-              <a:t>5.  The word 'warming' uses the suffix '-ing' added to the root 'warm'.</a:t>
+              <a:t>5.  Adding the suffix '-th' to 'warm' makes the word 'warmth'.</a:t>
             </a:r>
             <a:endParaRPr lang="en-US" sz="1300" dirty="0"/>
           </a:p>

--- a/output/wordlabs-warm-3day.pptx
+++ b/output/wordlabs-warm-3day.pptx
@@ -4240,7 +4240,7 @@
                 <a:ea typeface="Calibri" pitchFamily="34" charset="-122"/>
                 <a:cs typeface="Calibri" pitchFamily="34" charset="-120"/>
               </a:rPr>
-              <a:t>"having moderate heat"</a:t>
+              <a:t>"fairly hot; friendly"</a:t>
             </a:r>
             <a:endParaRPr lang="en-US" sz="2200" dirty="0"/>
           </a:p>
@@ -4279,7 +4279,7 @@
                 <a:ea typeface="Calibri" pitchFamily="34" charset="-122"/>
                 <a:cs typeface="Calibri" pitchFamily="34" charset="-120"/>
               </a:rPr>
-              <a:t>Origin: Latin: formus</a:t>
+              <a:t>Origin: Anglo-Saxon (Old English) root</a:t>
             </a:r>
             <a:endParaRPr lang="en-US" sz="1300" dirty="0"/>
           </a:p>
@@ -5288,7 +5288,7 @@
                 <a:ea typeface="Calibri" pitchFamily="34" charset="-122"/>
                 <a:cs typeface="Calibri" pitchFamily="34" charset="-120"/>
               </a:rPr>
-              <a:t>Word Labs  •  wordlabs.app  •  Root: 'warm' = having moderate heat</a:t>
+              <a:t>Word Labs  •  wordlabs.app  •  Root: 'warm' = fairly hot; friendly</a:t>
             </a:r>
             <a:endParaRPr lang="en-US" sz="800" dirty="0"/>
           </a:p>
@@ -5622,7 +5622,7 @@
                 <a:ea typeface="Trebuchet MS" pitchFamily="34" charset="-122"/>
                 <a:cs typeface="Trebuchet MS" pitchFamily="34" charset="-120"/>
               </a:rPr>
-              <a:t>1</a:t>
+              <a:t>0</a:t>
             </a:r>
             <a:pPr algn="ctr" indent="0" marL="0">
               <a:buNone/>
@@ -5928,7 +5928,7 @@
                 <a:ea typeface="Calibri" pitchFamily="34" charset="-122"/>
                 <a:cs typeface="Calibri" pitchFamily="34" charset="-120"/>
               </a:rPr>
-              <a:t>Word Labs  •  wordlabs.app  •  Root: 'warm' = having moderate heat</a:t>
+              <a:t>Word Labs  •  wordlabs.app  •  Root: 'warm' = fairly hot; friendly</a:t>
             </a:r>
             <a:endParaRPr lang="en-US" sz="800" dirty="0"/>
           </a:p>
@@ -6040,7 +6040,7 @@
                 <a:ea typeface="Calibri" pitchFamily="34" charset="-122"/>
                 <a:cs typeface="Calibri" pitchFamily="34" charset="-120"/>
               </a:rPr>
-              <a:t>The </a:t>
+              <a:t>Today feels much </a:t>
             </a:r>
             <a:pPr algn="l" indent="0" marL="0">
               <a:buNone/>
@@ -6057,7 +6057,7 @@
                 <a:ea typeface="Calibri" pitchFamily="34" charset="-122"/>
                 <a:cs typeface="Calibri" pitchFamily="34" charset="-120"/>
               </a:rPr>
-              <a:t>lukewarm</a:t>
+              <a:t>warmer</a:t>
             </a:r>
             <a:pPr algn="l" indent="0" marL="0">
               <a:buNone/>
@@ -6071,7 +6071,7 @@
                 <a:ea typeface="Calibri" pitchFamily="34" charset="-122"/>
                 <a:cs typeface="Calibri" pitchFamily="34" charset="-120"/>
               </a:rPr>
-              <a:t> water in the pool felt refreshing, and the </a:t>
+              <a:t> than yesterday. She smiled </a:t>
             </a:r>
             <a:pPr algn="l" indent="0" marL="0">
               <a:buNone/>
@@ -6088,7 +6088,7 @@
                 <a:ea typeface="Calibri" pitchFamily="34" charset="-122"/>
                 <a:cs typeface="Calibri" pitchFamily="34" charset="-120"/>
               </a:rPr>
-              <a:t>warming</a:t>
+              <a:t>warmly</a:t>
             </a:r>
             <a:pPr algn="l" indent="0" marL="0">
               <a:buNone/>
@@ -6102,7 +6102,7 @@
                 <a:ea typeface="Calibri" pitchFamily="34" charset="-122"/>
                 <a:cs typeface="Calibri" pitchFamily="34" charset="-120"/>
               </a:rPr>
-              <a:t> sunshine made the afternoon perfect.</a:t>
+              <a:t> and welcomed the new students.</a:t>
             </a:r>
             <a:endParaRPr lang="en-US" sz="1800" dirty="0"/>
           </a:p>
@@ -6257,7 +6257,7 @@
                 <a:ea typeface="Trebuchet MS" pitchFamily="34" charset="-122"/>
                 <a:cs typeface="Trebuchet MS" pitchFamily="34" charset="-120"/>
               </a:rPr>
-              <a:t>lukewarm</a:t>
+              <a:t>warmer</a:t>
             </a:r>
             <a:endParaRPr lang="en-US" sz="1400" dirty="0"/>
           </a:p>
@@ -6385,7 +6385,7 @@
                 <a:ea typeface="Trebuchet MS" pitchFamily="34" charset="-122"/>
                 <a:cs typeface="Trebuchet MS" pitchFamily="34" charset="-120"/>
               </a:rPr>
-              <a:t>warming</a:t>
+              <a:t>warmly</a:t>
             </a:r>
             <a:endParaRPr lang="en-US" sz="1400" dirty="0"/>
           </a:p>
@@ -6716,7 +6716,7 @@
                 <a:ea typeface="Calibri" pitchFamily="34" charset="-122"/>
                 <a:cs typeface="Calibri" pitchFamily="34" charset="-120"/>
               </a:rPr>
-              <a:t>Word Labs  •  wordlabs.app  •  Root: 'warm' = having moderate heat</a:t>
+              <a:t>Word Labs  •  wordlabs.app  •  Root: 'warm' = fairly hot; friendly</a:t>
             </a:r>
             <a:endParaRPr lang="en-US" sz="800" dirty="0"/>
           </a:p>
@@ -6855,7 +6855,7 @@
                 <a:ea typeface="Trebuchet MS" pitchFamily="34" charset="-122"/>
                 <a:cs typeface="Trebuchet MS" pitchFamily="34" charset="-120"/>
               </a:rPr>
-              <a:t>lukewarm</a:t>
+              <a:t>warmer</a:t>
             </a:r>
             <a:endParaRPr lang="en-US" sz="2800" dirty="0"/>
           </a:p>
@@ -7543,7 +7543,7 @@
                 <a:ea typeface="Calibri" pitchFamily="34" charset="-122"/>
                 <a:cs typeface="Calibri" pitchFamily="34" charset="-120"/>
               </a:rPr>
-              <a:t>Word Labs  •  wordlabs.app  •  Root: 'warm' = having moderate heat</a:t>
+              <a:t>Word Labs  •  wordlabs.app  •  Root: 'warm' = fairly hot; friendly</a:t>
             </a:r>
             <a:endParaRPr lang="en-US" sz="800" dirty="0"/>
           </a:p>
@@ -7682,7 +7682,7 @@
                 <a:ea typeface="Trebuchet MS" pitchFamily="34" charset="-122"/>
                 <a:cs typeface="Trebuchet MS" pitchFamily="34" charset="-120"/>
               </a:rPr>
-              <a:t>lukewarm</a:t>
+              <a:t>warmer</a:t>
             </a:r>
             <a:endParaRPr lang="en-US" sz="2800" dirty="0"/>
           </a:p>
@@ -7771,11 +7771,11 @@
             </a:avLst>
           </a:prstGeom>
           <a:solidFill>
-            <a:srgbClr val="DDD6FE"/>
+            <a:srgbClr val="CCFBF1"/>
           </a:solidFill>
           <a:ln w="19050">
             <a:solidFill>
-              <a:srgbClr val="7C3AED"/>
+              <a:srgbClr val="0D9488"/>
             </a:solidFill>
             <a:prstDash val="solid"/>
           </a:ln>
@@ -7815,13 +7815,13 @@
             <a:r>
               <a:rPr lang="en-US" sz="1300" b="1" dirty="0">
                 <a:solidFill>
-                  <a:srgbClr val="4C1D95"/>
+                  <a:srgbClr val="0F766E"/>
                 </a:solidFill>
                 <a:latin typeface="Trebuchet MS" pitchFamily="34" charset="0"/>
                 <a:ea typeface="Trebuchet MS" pitchFamily="34" charset="-122"/>
                 <a:cs typeface="Trebuchet MS" pitchFamily="34" charset="-120"/>
               </a:rPr>
-              <a:t>luke</a:t>
+              <a:t>warm</a:t>
             </a:r>
             <a:endParaRPr lang="en-US" sz="1300" dirty="0"/>
           </a:p>
@@ -7860,7 +7860,7 @@
                 <a:ea typeface="Calibri" pitchFamily="34" charset="-122"/>
                 <a:cs typeface="Calibri" pitchFamily="34" charset="-120"/>
               </a:rPr>
-              <a:t>tepid or slightly warm</a:t>
+              <a:t>fairly hot; friendly</a:t>
             </a:r>
             <a:endParaRPr lang="en-US" sz="850" dirty="0"/>
           </a:p>
@@ -7883,11 +7883,11 @@
             </a:avLst>
           </a:prstGeom>
           <a:solidFill>
-            <a:srgbClr val="CCFBF1"/>
+            <a:srgbClr val="FCE7F3"/>
           </a:solidFill>
           <a:ln w="19050">
             <a:solidFill>
-              <a:srgbClr val="0D9488"/>
+              <a:srgbClr val="DB2777"/>
             </a:solidFill>
             <a:prstDash val="solid"/>
           </a:ln>
@@ -7927,13 +7927,13 @@
             <a:r>
               <a:rPr lang="en-US" sz="1300" b="1" dirty="0">
                 <a:solidFill>
-                  <a:srgbClr val="0F766E"/>
+                  <a:srgbClr val="9D174D"/>
                 </a:solidFill>
                 <a:latin typeface="Trebuchet MS" pitchFamily="34" charset="0"/>
                 <a:ea typeface="Trebuchet MS" pitchFamily="34" charset="-122"/>
                 <a:cs typeface="Trebuchet MS" pitchFamily="34" charset="-120"/>
               </a:rPr>
-              <a:t>warm</a:t>
+              <a:t>er</a:t>
             </a:r>
             <a:endParaRPr lang="en-US" sz="1300" dirty="0"/>
           </a:p>
@@ -7972,7 +7972,7 @@
                 <a:ea typeface="Calibri" pitchFamily="34" charset="-122"/>
                 <a:cs typeface="Calibri" pitchFamily="34" charset="-120"/>
               </a:rPr>
-              <a:t>having moderate heat</a:t>
+              <a:t>person who; more</a:t>
             </a:r>
             <a:endParaRPr lang="en-US" sz="850" dirty="0"/>
           </a:p>
@@ -8528,7 +8528,7 @@
                 <a:ea typeface="Calibri" pitchFamily="34" charset="-122"/>
                 <a:cs typeface="Calibri" pitchFamily="34" charset="-120"/>
               </a:rPr>
-              <a:t>Word Labs  •  wordlabs.app  •  Root: 'warm' = having moderate heat</a:t>
+              <a:t>Word Labs  •  wordlabs.app  •  Root: 'warm' = fairly hot; friendly</a:t>
             </a:r>
             <a:endParaRPr lang="en-US" sz="800" dirty="0"/>
           </a:p>
@@ -8667,7 +8667,7 @@
                 <a:ea typeface="Trebuchet MS" pitchFamily="34" charset="-122"/>
                 <a:cs typeface="Trebuchet MS" pitchFamily="34" charset="-120"/>
               </a:rPr>
-              <a:t>lukewarm</a:t>
+              <a:t>warmer</a:t>
             </a:r>
             <a:endParaRPr lang="en-US" sz="2800" dirty="0"/>
           </a:p>
@@ -8756,11 +8756,11 @@
             </a:avLst>
           </a:prstGeom>
           <a:solidFill>
-            <a:srgbClr val="DDD6FE"/>
+            <a:srgbClr val="CCFBF1"/>
           </a:solidFill>
           <a:ln w="19050">
             <a:solidFill>
-              <a:srgbClr val="7C3AED"/>
+              <a:srgbClr val="0D9488"/>
             </a:solidFill>
             <a:prstDash val="solid"/>
           </a:ln>
@@ -8800,13 +8800,13 @@
             <a:r>
               <a:rPr lang="en-US" sz="1300" b="1" dirty="0">
                 <a:solidFill>
-                  <a:srgbClr val="4C1D95"/>
+                  <a:srgbClr val="0F766E"/>
                 </a:solidFill>
                 <a:latin typeface="Trebuchet MS" pitchFamily="34" charset="0"/>
                 <a:ea typeface="Trebuchet MS" pitchFamily="34" charset="-122"/>
                 <a:cs typeface="Trebuchet MS" pitchFamily="34" charset="-120"/>
               </a:rPr>
-              <a:t>luke</a:t>
+              <a:t>warm</a:t>
             </a:r>
             <a:endParaRPr lang="en-US" sz="1300" dirty="0"/>
           </a:p>
@@ -8845,7 +8845,7 @@
                 <a:ea typeface="Calibri" pitchFamily="34" charset="-122"/>
                 <a:cs typeface="Calibri" pitchFamily="34" charset="-120"/>
               </a:rPr>
-              <a:t>tepid or slightly warm</a:t>
+              <a:t>fairly hot; friendly</a:t>
             </a:r>
             <a:endParaRPr lang="en-US" sz="850" dirty="0"/>
           </a:p>
@@ -8868,11 +8868,11 @@
             </a:avLst>
           </a:prstGeom>
           <a:solidFill>
-            <a:srgbClr val="CCFBF1"/>
+            <a:srgbClr val="FCE7F3"/>
           </a:solidFill>
           <a:ln w="19050">
             <a:solidFill>
-              <a:srgbClr val="0D9488"/>
+              <a:srgbClr val="DB2777"/>
             </a:solidFill>
             <a:prstDash val="solid"/>
           </a:ln>
@@ -8912,13 +8912,13 @@
             <a:r>
               <a:rPr lang="en-US" sz="1300" b="1" dirty="0">
                 <a:solidFill>
-                  <a:srgbClr val="0F766E"/>
+                  <a:srgbClr val="9D174D"/>
                 </a:solidFill>
                 <a:latin typeface="Trebuchet MS" pitchFamily="34" charset="0"/>
                 <a:ea typeface="Trebuchet MS" pitchFamily="34" charset="-122"/>
                 <a:cs typeface="Trebuchet MS" pitchFamily="34" charset="-120"/>
               </a:rPr>
-              <a:t>warm</a:t>
+              <a:t>er</a:t>
             </a:r>
             <a:endParaRPr lang="en-US" sz="1300" dirty="0"/>
           </a:p>
@@ -8957,7 +8957,7 @@
                 <a:ea typeface="Calibri" pitchFamily="34" charset="-122"/>
                 <a:cs typeface="Calibri" pitchFamily="34" charset="-120"/>
               </a:rPr>
-              <a:t>having moderate heat</a:t>
+              <a:t>person who; more</a:t>
             </a:r>
             <a:endParaRPr lang="en-US" sz="850" dirty="0"/>
           </a:p>
@@ -9116,7 +9116,7 @@
                 <a:ea typeface="Trebuchet MS" pitchFamily="34" charset="-122"/>
                 <a:cs typeface="Trebuchet MS" pitchFamily="34" charset="-120"/>
               </a:rPr>
-              <a:t>luke</a:t>
+              <a:t>warm</a:t>
             </a:r>
             <a:endParaRPr lang="en-US" sz="1400" dirty="0"/>
           </a:p>
@@ -9221,7 +9221,7 @@
                 <a:ea typeface="Trebuchet MS" pitchFamily="34" charset="-122"/>
                 <a:cs typeface="Trebuchet MS" pitchFamily="34" charset="-120"/>
               </a:rPr>
-              <a:t>warm</a:t>
+              <a:t>er</a:t>
             </a:r>
             <a:endParaRPr lang="en-US" sz="1400" dirty="0"/>
           </a:p>
@@ -9645,7 +9645,7 @@
                 <a:ea typeface="Calibri" pitchFamily="34" charset="-122"/>
                 <a:cs typeface="Calibri" pitchFamily="34" charset="-120"/>
               </a:rPr>
-              <a:t>Word Labs  •  wordlabs.app  •  Root: 'warm' = having moderate heat</a:t>
+              <a:t>Word Labs  •  wordlabs.app  •  Root: 'warm' = fairly hot; friendly</a:t>
             </a:r>
             <a:endParaRPr lang="en-US" sz="800" dirty="0"/>
           </a:p>
@@ -9784,7 +9784,7 @@
                 <a:ea typeface="Trebuchet MS" pitchFamily="34" charset="-122"/>
                 <a:cs typeface="Trebuchet MS" pitchFamily="34" charset="-120"/>
               </a:rPr>
-              <a:t>lukewarm</a:t>
+              <a:t>warmer</a:t>
             </a:r>
             <a:endParaRPr lang="en-US" sz="2800" dirty="0"/>
           </a:p>
@@ -9873,11 +9873,11 @@
             </a:avLst>
           </a:prstGeom>
           <a:solidFill>
-            <a:srgbClr val="DDD6FE"/>
+            <a:srgbClr val="CCFBF1"/>
           </a:solidFill>
           <a:ln w="19050">
             <a:solidFill>
-              <a:srgbClr val="7C3AED"/>
+              <a:srgbClr val="0D9488"/>
             </a:solidFill>
             <a:prstDash val="solid"/>
           </a:ln>
@@ -9917,13 +9917,13 @@
             <a:r>
               <a:rPr lang="en-US" sz="1300" b="1" dirty="0">
                 <a:solidFill>
-                  <a:srgbClr val="4C1D95"/>
+                  <a:srgbClr val="0F766E"/>
                 </a:solidFill>
                 <a:latin typeface="Trebuchet MS" pitchFamily="34" charset="0"/>
                 <a:ea typeface="Trebuchet MS" pitchFamily="34" charset="-122"/>
                 <a:cs typeface="Trebuchet MS" pitchFamily="34" charset="-120"/>
               </a:rPr>
-              <a:t>luke</a:t>
+              <a:t>warm</a:t>
             </a:r>
             <a:endParaRPr lang="en-US" sz="1300" dirty="0"/>
           </a:p>
@@ -9962,7 +9962,7 @@
                 <a:ea typeface="Calibri" pitchFamily="34" charset="-122"/>
                 <a:cs typeface="Calibri" pitchFamily="34" charset="-120"/>
               </a:rPr>
-              <a:t>tepid or slightly warm</a:t>
+              <a:t>fairly hot; friendly</a:t>
             </a:r>
             <a:endParaRPr lang="en-US" sz="850" dirty="0"/>
           </a:p>
@@ -9985,11 +9985,11 @@
             </a:avLst>
           </a:prstGeom>
           <a:solidFill>
-            <a:srgbClr val="CCFBF1"/>
+            <a:srgbClr val="FCE7F3"/>
           </a:solidFill>
           <a:ln w="19050">
             <a:solidFill>
-              <a:srgbClr val="0D9488"/>
+              <a:srgbClr val="DB2777"/>
             </a:solidFill>
             <a:prstDash val="solid"/>
           </a:ln>
@@ -10029,13 +10029,13 @@
             <a:r>
               <a:rPr lang="en-US" sz="1300" b="1" dirty="0">
                 <a:solidFill>
-                  <a:srgbClr val="0F766E"/>
+                  <a:srgbClr val="9D174D"/>
                 </a:solidFill>
                 <a:latin typeface="Trebuchet MS" pitchFamily="34" charset="0"/>
                 <a:ea typeface="Trebuchet MS" pitchFamily="34" charset="-122"/>
                 <a:cs typeface="Trebuchet MS" pitchFamily="34" charset="-120"/>
               </a:rPr>
-              <a:t>warm</a:t>
+              <a:t>er</a:t>
             </a:r>
             <a:endParaRPr lang="en-US" sz="1300" dirty="0"/>
           </a:p>
@@ -10074,7 +10074,7 @@
                 <a:ea typeface="Calibri" pitchFamily="34" charset="-122"/>
                 <a:cs typeface="Calibri" pitchFamily="34" charset="-120"/>
               </a:rPr>
-              <a:t>having moderate heat</a:t>
+              <a:t>person who; more</a:t>
             </a:r>
             <a:endParaRPr lang="en-US" sz="850" dirty="0"/>
           </a:p>
@@ -10233,7 +10233,7 @@
                 <a:ea typeface="Trebuchet MS" pitchFamily="34" charset="-122"/>
                 <a:cs typeface="Trebuchet MS" pitchFamily="34" charset="-120"/>
               </a:rPr>
-              <a:t>luke</a:t>
+              <a:t>warm</a:t>
             </a:r>
             <a:endParaRPr lang="en-US" sz="1400" dirty="0"/>
           </a:p>
@@ -10338,7 +10338,7 @@
                 <a:ea typeface="Trebuchet MS" pitchFamily="34" charset="-122"/>
                 <a:cs typeface="Trebuchet MS" pitchFamily="34" charset="-120"/>
               </a:rPr>
-              <a:t>warm</a:t>
+              <a:t>er</a:t>
             </a:r>
             <a:endParaRPr lang="en-US" sz="1400" dirty="0"/>
           </a:p>
@@ -10445,7 +10445,7 @@
         </p:nvSpPr>
         <p:spPr>
           <a:xfrm>
-            <a:off x="2124837" y="4169664"/>
+            <a:off x="2670048" y="4169664"/>
             <a:ext cx="685800" cy="475488"/>
           </a:xfrm>
           <a:prstGeom prst="rect">
@@ -10472,7 +10472,7 @@
         </p:nvSpPr>
         <p:spPr>
           <a:xfrm>
-            <a:off x="2124837" y="4169664"/>
+            <a:off x="2670048" y="4169664"/>
             <a:ext cx="685800" cy="475488"/>
           </a:xfrm>
           <a:prstGeom prst="rect">
@@ -10497,7 +10497,7 @@
                 <a:ea typeface="Trebuchet MS" pitchFamily="34" charset="-122"/>
                 <a:cs typeface="Trebuchet MS" pitchFamily="34" charset="-120"/>
               </a:rPr>
-              <a:t>l</a:t>
+              <a:t>w</a:t>
             </a:r>
             <a:endParaRPr lang="en-US" sz="900" dirty="0"/>
           </a:p>
@@ -10511,7 +10511,7 @@
         </p:nvSpPr>
         <p:spPr>
           <a:xfrm>
-            <a:off x="3033522" y="4169664"/>
+            <a:off x="4123944" y="4169664"/>
             <a:ext cx="685800" cy="475488"/>
           </a:xfrm>
           <a:prstGeom prst="rect">
@@ -10538,7 +10538,7 @@
         </p:nvSpPr>
         <p:spPr>
           <a:xfrm>
-            <a:off x="3033522" y="4169664"/>
+            <a:off x="4123944" y="4169664"/>
             <a:ext cx="685800" cy="475488"/>
           </a:xfrm>
           <a:prstGeom prst="rect">
@@ -10563,7 +10563,7 @@
                 <a:ea typeface="Trebuchet MS" pitchFamily="34" charset="-122"/>
                 <a:cs typeface="Trebuchet MS" pitchFamily="34" charset="-120"/>
               </a:rPr>
-              <a:t>u</a:t>
+              <a:t>ar</a:t>
             </a:r>
             <a:endParaRPr lang="en-US" sz="900" dirty="0"/>
           </a:p>
@@ -10577,7 +10577,7 @@
         </p:nvSpPr>
         <p:spPr>
           <a:xfrm>
-            <a:off x="3942207" y="4169664"/>
+            <a:off x="5577840" y="4169664"/>
             <a:ext cx="685800" cy="475488"/>
           </a:xfrm>
           <a:prstGeom prst="rect">
@@ -10604,7 +10604,7 @@
         </p:nvSpPr>
         <p:spPr>
           <a:xfrm>
-            <a:off x="3942207" y="4169664"/>
+            <a:off x="5577840" y="4169664"/>
             <a:ext cx="685800" cy="475488"/>
           </a:xfrm>
           <a:prstGeom prst="rect">
@@ -10629,7 +10629,7 @@
                 <a:ea typeface="Trebuchet MS" pitchFamily="34" charset="-122"/>
                 <a:cs typeface="Trebuchet MS" pitchFamily="34" charset="-120"/>
               </a:rPr>
-              <a:t>k</a:t>
+              <a:t>m</a:t>
             </a:r>
             <a:endParaRPr lang="en-US" sz="900" dirty="0"/>
           </a:p>
@@ -10643,7 +10643,7 @@
         </p:nvSpPr>
         <p:spPr>
           <a:xfrm>
-            <a:off x="4850892" y="4169664"/>
+            <a:off x="7031736" y="4169664"/>
             <a:ext cx="685800" cy="475488"/>
           </a:xfrm>
           <a:prstGeom prst="rect">
@@ -10670,7 +10670,7 @@
         </p:nvSpPr>
         <p:spPr>
           <a:xfrm>
-            <a:off x="4850892" y="4169664"/>
+            <a:off x="7031736" y="4169664"/>
             <a:ext cx="685800" cy="475488"/>
           </a:xfrm>
           <a:prstGeom prst="rect">
@@ -10695,205 +10695,7 @@
                 <a:ea typeface="Trebuchet MS" pitchFamily="34" charset="-122"/>
                 <a:cs typeface="Trebuchet MS" pitchFamily="34" charset="-120"/>
               </a:rPr>
-              <a:t>e</a:t>
-            </a:r>
-            <a:endParaRPr lang="en-US" sz="900" dirty="0"/>
-          </a:p>
-        </p:txBody>
-      </p:sp>
-      <p:sp>
-        <p:nvSpPr>
-          <p:cNvPr id="41" name="Shape 39"/>
-          <p:cNvSpPr/>
-          <p:nvPr/>
-        </p:nvSpPr>
-        <p:spPr>
-          <a:xfrm>
-            <a:off x="5759577" y="4169664"/>
-            <a:ext cx="685800" cy="475488"/>
-          </a:xfrm>
-          <a:prstGeom prst="rect">
-            <a:avLst>
-              <a:gd name="adj" fmla="val 7692"/>
-            </a:avLst>
-          </a:prstGeom>
-          <a:solidFill>
-            <a:srgbClr val="FFFFFF"/>
-          </a:solidFill>
-          <a:ln w="12700">
-            <a:solidFill>
-              <a:srgbClr val="DB2777"/>
-            </a:solidFill>
-            <a:prstDash val="solid"/>
-          </a:ln>
-        </p:spPr>
-      </p:sp>
-      <p:sp>
-        <p:nvSpPr>
-          <p:cNvPr id="42" name="Text 40"/>
-          <p:cNvSpPr/>
-          <p:nvPr/>
-        </p:nvSpPr>
-        <p:spPr>
-          <a:xfrm>
-            <a:off x="5759577" y="4169664"/>
-            <a:ext cx="685800" cy="475488"/>
-          </a:xfrm>
-          <a:prstGeom prst="rect">
-            <a:avLst/>
-          </a:prstGeom>
-          <a:noFill/>
-          <a:ln/>
-        </p:spPr>
-        <p:txBody>
-          <a:bodyPr wrap="square" lIns="0" tIns="0" rIns="0" bIns="0" rtlCol="0" anchor="ctr"/>
-          <a:lstStyle/>
-          <a:p>
-            <a:pPr algn="ctr" indent="0" marL="0">
-              <a:buNone/>
-            </a:pPr>
-            <a:r>
-              <a:rPr lang="en-US" sz="900" b="1" dirty="0">
-                <a:solidFill>
-                  <a:srgbClr val="9D174D"/>
-                </a:solidFill>
-                <a:latin typeface="Trebuchet MS" pitchFamily="34" charset="0"/>
-                <a:ea typeface="Trebuchet MS" pitchFamily="34" charset="-122"/>
-                <a:cs typeface="Trebuchet MS" pitchFamily="34" charset="-120"/>
-              </a:rPr>
-              <a:t>w</a:t>
-            </a:r>
-            <a:endParaRPr lang="en-US" sz="900" dirty="0"/>
-          </a:p>
-        </p:txBody>
-      </p:sp>
-      <p:sp>
-        <p:nvSpPr>
-          <p:cNvPr id="43" name="Shape 41"/>
-          <p:cNvSpPr/>
-          <p:nvPr/>
-        </p:nvSpPr>
-        <p:spPr>
-          <a:xfrm>
-            <a:off x="6668262" y="4169664"/>
-            <a:ext cx="685800" cy="475488"/>
-          </a:xfrm>
-          <a:prstGeom prst="rect">
-            <a:avLst>
-              <a:gd name="adj" fmla="val 7692"/>
-            </a:avLst>
-          </a:prstGeom>
-          <a:solidFill>
-            <a:srgbClr val="FFFFFF"/>
-          </a:solidFill>
-          <a:ln w="12700">
-            <a:solidFill>
-              <a:srgbClr val="DB2777"/>
-            </a:solidFill>
-            <a:prstDash val="solid"/>
-          </a:ln>
-        </p:spPr>
-      </p:sp>
-      <p:sp>
-        <p:nvSpPr>
-          <p:cNvPr id="44" name="Text 42"/>
-          <p:cNvSpPr/>
-          <p:nvPr/>
-        </p:nvSpPr>
-        <p:spPr>
-          <a:xfrm>
-            <a:off x="6668262" y="4169664"/>
-            <a:ext cx="685800" cy="475488"/>
-          </a:xfrm>
-          <a:prstGeom prst="rect">
-            <a:avLst/>
-          </a:prstGeom>
-          <a:noFill/>
-          <a:ln/>
-        </p:spPr>
-        <p:txBody>
-          <a:bodyPr wrap="square" lIns="0" tIns="0" rIns="0" bIns="0" rtlCol="0" anchor="ctr"/>
-          <a:lstStyle/>
-          <a:p>
-            <a:pPr algn="ctr" indent="0" marL="0">
-              <a:buNone/>
-            </a:pPr>
-            <a:r>
-              <a:rPr lang="en-US" sz="900" b="1" dirty="0">
-                <a:solidFill>
-                  <a:srgbClr val="9D174D"/>
-                </a:solidFill>
-                <a:latin typeface="Trebuchet MS" pitchFamily="34" charset="0"/>
-                <a:ea typeface="Trebuchet MS" pitchFamily="34" charset="-122"/>
-                <a:cs typeface="Trebuchet MS" pitchFamily="34" charset="-120"/>
-              </a:rPr>
-              <a:t>ar</a:t>
-            </a:r>
-            <a:endParaRPr lang="en-US" sz="900" dirty="0"/>
-          </a:p>
-        </p:txBody>
-      </p:sp>
-      <p:sp>
-        <p:nvSpPr>
-          <p:cNvPr id="45" name="Shape 43"/>
-          <p:cNvSpPr/>
-          <p:nvPr/>
-        </p:nvSpPr>
-        <p:spPr>
-          <a:xfrm>
-            <a:off x="7576947" y="4169664"/>
-            <a:ext cx="685800" cy="475488"/>
-          </a:xfrm>
-          <a:prstGeom prst="rect">
-            <a:avLst>
-              <a:gd name="adj" fmla="val 7692"/>
-            </a:avLst>
-          </a:prstGeom>
-          <a:solidFill>
-            <a:srgbClr val="FFFFFF"/>
-          </a:solidFill>
-          <a:ln w="12700">
-            <a:solidFill>
-              <a:srgbClr val="DB2777"/>
-            </a:solidFill>
-            <a:prstDash val="solid"/>
-          </a:ln>
-        </p:spPr>
-      </p:sp>
-      <p:sp>
-        <p:nvSpPr>
-          <p:cNvPr id="46" name="Text 44"/>
-          <p:cNvSpPr/>
-          <p:nvPr/>
-        </p:nvSpPr>
-        <p:spPr>
-          <a:xfrm>
-            <a:off x="7576947" y="4169664"/>
-            <a:ext cx="685800" cy="475488"/>
-          </a:xfrm>
-          <a:prstGeom prst="rect">
-            <a:avLst/>
-          </a:prstGeom>
-          <a:noFill/>
-          <a:ln/>
-        </p:spPr>
-        <p:txBody>
-          <a:bodyPr wrap="square" lIns="0" tIns="0" rIns="0" bIns="0" rtlCol="0" anchor="ctr"/>
-          <a:lstStyle/>
-          <a:p>
-            <a:pPr algn="ctr" indent="0" marL="0">
-              <a:buNone/>
-            </a:pPr>
-            <a:r>
-              <a:rPr lang="en-US" sz="900" b="1" dirty="0">
-                <a:solidFill>
-                  <a:srgbClr val="9D174D"/>
-                </a:solidFill>
-                <a:latin typeface="Trebuchet MS" pitchFamily="34" charset="0"/>
-                <a:ea typeface="Trebuchet MS" pitchFamily="34" charset="-122"/>
-                <a:cs typeface="Trebuchet MS" pitchFamily="34" charset="-120"/>
-              </a:rPr>
-              <a:t>m</a:t>
+              <a:t>er</a:t>
             </a:r>
             <a:endParaRPr lang="en-US" sz="900" dirty="0"/>
           </a:p>
@@ -11185,7 +10987,7 @@
                 <a:ea typeface="Calibri" pitchFamily="34" charset="-122"/>
                 <a:cs typeface="Calibri" pitchFamily="34" charset="-120"/>
               </a:rPr>
-              <a:t>Word Labs  •  wordlabs.app  •  Root: 'warm' = having moderate heat</a:t>
+              <a:t>Word Labs  •  wordlabs.app  •  Root: 'warm' = fairly hot; friendly</a:t>
             </a:r>
             <a:endParaRPr lang="en-US" sz="800" dirty="0"/>
           </a:p>
@@ -11324,7 +11126,7 @@
                 <a:ea typeface="Trebuchet MS" pitchFamily="34" charset="-122"/>
                 <a:cs typeface="Trebuchet MS" pitchFamily="34" charset="-120"/>
               </a:rPr>
-              <a:t>warming</a:t>
+              <a:t>warmly</a:t>
             </a:r>
             <a:endParaRPr lang="en-US" sz="2800" dirty="0"/>
           </a:p>
@@ -12012,7 +11814,7 @@
                 <a:ea typeface="Calibri" pitchFamily="34" charset="-122"/>
                 <a:cs typeface="Calibri" pitchFamily="34" charset="-120"/>
               </a:rPr>
-              <a:t>Word Labs  •  wordlabs.app  •  Root: 'warm' = having moderate heat</a:t>
+              <a:t>Word Labs  •  wordlabs.app  •  Root: 'warm' = fairly hot; friendly</a:t>
             </a:r>
             <a:endParaRPr lang="en-US" sz="800" dirty="0"/>
           </a:p>
@@ -12151,7 +11953,7 @@
                 <a:ea typeface="Trebuchet MS" pitchFamily="34" charset="-122"/>
                 <a:cs typeface="Trebuchet MS" pitchFamily="34" charset="-120"/>
               </a:rPr>
-              <a:t>warming</a:t>
+              <a:t>warmly</a:t>
             </a:r>
             <a:endParaRPr lang="en-US" sz="2800" dirty="0"/>
           </a:p>
@@ -12329,7 +12131,7 @@
                 <a:ea typeface="Calibri" pitchFamily="34" charset="-122"/>
                 <a:cs typeface="Calibri" pitchFamily="34" charset="-120"/>
               </a:rPr>
-              <a:t>having moderate heat</a:t>
+              <a:t>fairly hot; friendly</a:t>
             </a:r>
             <a:endParaRPr lang="en-US" sz="850" dirty="0"/>
           </a:p>
@@ -12402,7 +12204,7 @@
                 <a:ea typeface="Trebuchet MS" pitchFamily="34" charset="-122"/>
                 <a:cs typeface="Trebuchet MS" pitchFamily="34" charset="-120"/>
               </a:rPr>
-              <a:t>ing</a:t>
+              <a:t>ly</a:t>
             </a:r>
             <a:endParaRPr lang="en-US" sz="1300" dirty="0"/>
           </a:p>
@@ -12441,7 +12243,7 @@
                 <a:ea typeface="Calibri" pitchFamily="34" charset="-122"/>
                 <a:cs typeface="Calibri" pitchFamily="34" charset="-120"/>
               </a:rPr>
-              <a:t>action in progress</a:t>
+              <a:t>in a way</a:t>
             </a:r>
             <a:endParaRPr lang="en-US" sz="850" dirty="0"/>
           </a:p>
@@ -12997,7 +12799,7 @@
                 <a:ea typeface="Calibri" pitchFamily="34" charset="-122"/>
                 <a:cs typeface="Calibri" pitchFamily="34" charset="-120"/>
               </a:rPr>
-              <a:t>Word Labs  •  wordlabs.app  •  Root: 'warm' = having moderate heat</a:t>
+              <a:t>Word Labs  •  wordlabs.app  •  Root: 'warm' = fairly hot; friendly</a:t>
             </a:r>
             <a:endParaRPr lang="en-US" sz="800" dirty="0"/>
           </a:p>
@@ -13136,7 +12938,7 @@
                 <a:ea typeface="Trebuchet MS" pitchFamily="34" charset="-122"/>
                 <a:cs typeface="Trebuchet MS" pitchFamily="34" charset="-120"/>
               </a:rPr>
-              <a:t>warming</a:t>
+              <a:t>warmly</a:t>
             </a:r>
             <a:endParaRPr lang="en-US" sz="2800" dirty="0"/>
           </a:p>
@@ -13314,7 +13116,7 @@
                 <a:ea typeface="Calibri" pitchFamily="34" charset="-122"/>
                 <a:cs typeface="Calibri" pitchFamily="34" charset="-120"/>
               </a:rPr>
-              <a:t>having moderate heat</a:t>
+              <a:t>fairly hot; friendly</a:t>
             </a:r>
             <a:endParaRPr lang="en-US" sz="850" dirty="0"/>
           </a:p>
@@ -13387,7 +13189,7 @@
                 <a:ea typeface="Trebuchet MS" pitchFamily="34" charset="-122"/>
                 <a:cs typeface="Trebuchet MS" pitchFamily="34" charset="-120"/>
               </a:rPr>
-              <a:t>ing</a:t>
+              <a:t>ly</a:t>
             </a:r>
             <a:endParaRPr lang="en-US" sz="1300" dirty="0"/>
           </a:p>
@@ -13426,7 +13228,7 @@
                 <a:ea typeface="Calibri" pitchFamily="34" charset="-122"/>
                 <a:cs typeface="Calibri" pitchFamily="34" charset="-120"/>
               </a:rPr>
-              <a:t>action in progress</a:t>
+              <a:t>in a way</a:t>
             </a:r>
             <a:endParaRPr lang="en-US" sz="850" dirty="0"/>
           </a:p>
@@ -13690,7 +13492,7 @@
                 <a:ea typeface="Trebuchet MS" pitchFamily="34" charset="-122"/>
                 <a:cs typeface="Trebuchet MS" pitchFamily="34" charset="-120"/>
               </a:rPr>
-              <a:t>ing</a:t>
+              <a:t>ly</a:t>
             </a:r>
             <a:endParaRPr lang="en-US" sz="1400" dirty="0"/>
           </a:p>
@@ -14023,7 +13825,7 @@
                 <a:ea typeface="Calibri" pitchFamily="34" charset="-122"/>
                 <a:cs typeface="Calibri" pitchFamily="34" charset="-120"/>
               </a:rPr>
-              <a:t>Root 'warm' — having moderate heat</a:t>
+              <a:t>Root 'warm' — fairly hot; friendly</a:t>
             </a:r>
             <a:endParaRPr lang="en-US" sz="1600" dirty="0"/>
           </a:p>
@@ -14379,7 +14181,7 @@
                 <a:ea typeface="Calibri" pitchFamily="34" charset="-122"/>
                 <a:cs typeface="Calibri" pitchFamily="34" charset="-120"/>
               </a:rPr>
-              <a:t>Word Labs  •  wordlabs.app  •  Root: 'warm' = having moderate heat</a:t>
+              <a:t>Word Labs  •  wordlabs.app  •  Root: 'warm' = fairly hot; friendly</a:t>
             </a:r>
             <a:endParaRPr lang="en-US" sz="800" dirty="0"/>
           </a:p>
@@ -14518,7 +14320,7 @@
                 <a:ea typeface="Trebuchet MS" pitchFamily="34" charset="-122"/>
                 <a:cs typeface="Trebuchet MS" pitchFamily="34" charset="-120"/>
               </a:rPr>
-              <a:t>warming</a:t>
+              <a:t>warmly</a:t>
             </a:r>
             <a:endParaRPr lang="en-US" sz="2800" dirty="0"/>
           </a:p>
@@ -14696,7 +14498,7 @@
                 <a:ea typeface="Calibri" pitchFamily="34" charset="-122"/>
                 <a:cs typeface="Calibri" pitchFamily="34" charset="-120"/>
               </a:rPr>
-              <a:t>having moderate heat</a:t>
+              <a:t>fairly hot; friendly</a:t>
             </a:r>
             <a:endParaRPr lang="en-US" sz="850" dirty="0"/>
           </a:p>
@@ -14769,7 +14571,7 @@
                 <a:ea typeface="Trebuchet MS" pitchFamily="34" charset="-122"/>
                 <a:cs typeface="Trebuchet MS" pitchFamily="34" charset="-120"/>
               </a:rPr>
-              <a:t>ing</a:t>
+              <a:t>ly</a:t>
             </a:r>
             <a:endParaRPr lang="en-US" sz="1300" dirty="0"/>
           </a:p>
@@ -14808,7 +14610,7 @@
                 <a:ea typeface="Calibri" pitchFamily="34" charset="-122"/>
                 <a:cs typeface="Calibri" pitchFamily="34" charset="-120"/>
               </a:rPr>
-              <a:t>action in progress</a:t>
+              <a:t>in a way</a:t>
             </a:r>
             <a:endParaRPr lang="en-US" sz="850" dirty="0"/>
           </a:p>
@@ -15072,7 +14874,7 @@
                 <a:ea typeface="Trebuchet MS" pitchFamily="34" charset="-122"/>
                 <a:cs typeface="Trebuchet MS" pitchFamily="34" charset="-120"/>
               </a:rPr>
-              <a:t>ing</a:t>
+              <a:t>ly</a:t>
             </a:r>
             <a:endParaRPr lang="en-US" sz="1400" dirty="0"/>
           </a:p>
@@ -15429,7 +15231,7 @@
                 <a:ea typeface="Trebuchet MS" pitchFamily="34" charset="-122"/>
                 <a:cs typeface="Trebuchet MS" pitchFamily="34" charset="-120"/>
               </a:rPr>
-              <a:t>i</a:t>
+              <a:t>l</a:t>
             </a:r>
             <a:endParaRPr lang="en-US" sz="900" dirty="0"/>
           </a:p>
@@ -15495,7 +15297,7 @@
                 <a:ea typeface="Trebuchet MS" pitchFamily="34" charset="-122"/>
                 <a:cs typeface="Trebuchet MS" pitchFamily="34" charset="-120"/>
               </a:rPr>
-              <a:t>ng</a:t>
+              <a:t>y</a:t>
             </a:r>
             <a:endParaRPr lang="en-US" sz="900" dirty="0"/>
           </a:p>
@@ -16069,7 +15871,7 @@
                 <a:ea typeface="Calibri" pitchFamily="34" charset="-122"/>
                 <a:cs typeface="Calibri" pitchFamily="34" charset="-120"/>
               </a:rPr>
-              <a:t>Word Labs  •  wordlabs.app  •  Root: 'warm' = having moderate heat</a:t>
+              <a:t>Word Labs  •  wordlabs.app  •  Root: 'warm' = fairly hot; friendly</a:t>
             </a:r>
             <a:endParaRPr lang="en-US" sz="800" dirty="0"/>
           </a:p>
@@ -16403,7 +16205,7 @@
                 <a:ea typeface="Trebuchet MS" pitchFamily="34" charset="-122"/>
                 <a:cs typeface="Trebuchet MS" pitchFamily="34" charset="-120"/>
               </a:rPr>
-              <a:t>2</a:t>
+              <a:t>0</a:t>
             </a:r>
             <a:pPr algn="ctr" indent="0" marL="0">
               <a:buNone/>
@@ -16417,7 +16219,7 @@
                 <a:ea typeface="Trebuchet MS" pitchFamily="34" charset="-122"/>
                 <a:cs typeface="Trebuchet MS" pitchFamily="34" charset="-120"/>
               </a:rPr>
-              <a:t>  punctuation marks</a:t>
+              <a:t>  punctuation mark</a:t>
             </a:r>
             <a:endParaRPr lang="en-US" sz="2800" dirty="0"/>
           </a:p>
@@ -16709,7 +16511,7 @@
                 <a:ea typeface="Calibri" pitchFamily="34" charset="-122"/>
                 <a:cs typeface="Calibri" pitchFamily="34" charset="-120"/>
               </a:rPr>
-              <a:t>Word Labs  •  wordlabs.app  •  Root: 'warm' = having moderate heat</a:t>
+              <a:t>Word Labs  •  wordlabs.app  •  Root: 'warm' = fairly hot; friendly</a:t>
             </a:r>
             <a:endParaRPr lang="en-US" sz="800" dirty="0"/>
           </a:p>
@@ -16821,7 +16623,7 @@
                 <a:ea typeface="Calibri" pitchFamily="34" charset="-122"/>
                 <a:cs typeface="Calibri" pitchFamily="34" charset="-120"/>
               </a:rPr>
-              <a:t>She </a:t>
+              <a:t>January is usually the </a:t>
             </a:r>
             <a:pPr algn="l" indent="0" marL="0">
               <a:buNone/>
@@ -16838,7 +16640,7 @@
                 <a:ea typeface="Calibri" pitchFamily="34" charset="-122"/>
                 <a:cs typeface="Calibri" pitchFamily="34" charset="-120"/>
               </a:rPr>
-              <a:t>warmly</a:t>
+              <a:t>warmest</a:t>
             </a:r>
             <a:pPr algn="l" indent="0" marL="0">
               <a:buNone/>
@@ -16852,7 +16654,7 @@
                 <a:ea typeface="Calibri" pitchFamily="34" charset="-122"/>
                 <a:cs typeface="Calibri" pitchFamily="34" charset="-120"/>
               </a:rPr>
-              <a:t> greeted her guests, checked the </a:t>
+              <a:t> month in Australia. The soup was </a:t>
             </a:r>
             <a:pPr algn="l" indent="0" marL="0">
               <a:buNone/>
@@ -16869,7 +16671,7 @@
                 <a:ea typeface="Calibri" pitchFamily="34" charset="-122"/>
                 <a:cs typeface="Calibri" pitchFamily="34" charset="-120"/>
               </a:rPr>
-              <a:t>warmth</a:t>
+              <a:t>warming</a:t>
             </a:r>
             <a:pPr algn="l" indent="0" marL="0">
               <a:buNone/>
@@ -16883,7 +16685,7 @@
                 <a:ea typeface="Calibri" pitchFamily="34" charset="-122"/>
                 <a:cs typeface="Calibri" pitchFamily="34" charset="-120"/>
               </a:rPr>
-              <a:t> of the room, and then </a:t>
+              <a:t> nicely on the stove. Mum </a:t>
             </a:r>
             <a:pPr algn="l" indent="0" marL="0">
               <a:buNone/>
@@ -16914,7 +16716,7 @@
                 <a:ea typeface="Calibri" pitchFamily="34" charset="-122"/>
                 <a:cs typeface="Calibri" pitchFamily="34" charset="-120"/>
               </a:rPr>
-              <a:t> the soup on the stove.</a:t>
+              <a:t> the leftovers for dinner.</a:t>
             </a:r>
             <a:endParaRPr lang="en-US" sz="1800" dirty="0"/>
           </a:p>
@@ -17069,7 +16871,7 @@
                 <a:ea typeface="Trebuchet MS" pitchFamily="34" charset="-122"/>
                 <a:cs typeface="Trebuchet MS" pitchFamily="34" charset="-120"/>
               </a:rPr>
-              <a:t>warmly</a:t>
+              <a:t>warmest</a:t>
             </a:r>
             <a:endParaRPr lang="en-US" sz="1400" dirty="0"/>
           </a:p>
@@ -17197,7 +16999,7 @@
                 <a:ea typeface="Trebuchet MS" pitchFamily="34" charset="-122"/>
                 <a:cs typeface="Trebuchet MS" pitchFamily="34" charset="-120"/>
               </a:rPr>
-              <a:t>warmth</a:t>
+              <a:t>warming</a:t>
             </a:r>
             <a:endParaRPr lang="en-US" sz="1400" dirty="0"/>
           </a:p>
@@ -17656,7 +17458,7 @@
                 <a:ea typeface="Calibri" pitchFamily="34" charset="-122"/>
                 <a:cs typeface="Calibri" pitchFamily="34" charset="-120"/>
               </a:rPr>
-              <a:t>Word Labs  •  wordlabs.app  •  Root: 'warm' = having moderate heat</a:t>
+              <a:t>Word Labs  •  wordlabs.app  •  Root: 'warm' = fairly hot; friendly</a:t>
             </a:r>
             <a:endParaRPr lang="en-US" sz="800" dirty="0"/>
           </a:p>
@@ -17795,7 +17597,7 @@
                 <a:ea typeface="Trebuchet MS" pitchFamily="34" charset="-122"/>
                 <a:cs typeface="Trebuchet MS" pitchFamily="34" charset="-120"/>
               </a:rPr>
-              <a:t>warmly</a:t>
+              <a:t>warmest</a:t>
             </a:r>
             <a:endParaRPr lang="en-US" sz="2800" dirty="0"/>
           </a:p>
@@ -18483,7 +18285,7 @@
                 <a:ea typeface="Calibri" pitchFamily="34" charset="-122"/>
                 <a:cs typeface="Calibri" pitchFamily="34" charset="-120"/>
               </a:rPr>
-              <a:t>Word Labs  •  wordlabs.app  •  Root: 'warm' = having moderate heat</a:t>
+              <a:t>Word Labs  •  wordlabs.app  •  Root: 'warm' = fairly hot; friendly</a:t>
             </a:r>
             <a:endParaRPr lang="en-US" sz="800" dirty="0"/>
           </a:p>
@@ -18622,7 +18424,7 @@
                 <a:ea typeface="Trebuchet MS" pitchFamily="34" charset="-122"/>
                 <a:cs typeface="Trebuchet MS" pitchFamily="34" charset="-120"/>
               </a:rPr>
-              <a:t>warmly</a:t>
+              <a:t>warmest</a:t>
             </a:r>
             <a:endParaRPr lang="en-US" sz="2800" dirty="0"/>
           </a:p>
@@ -18800,7 +18602,7 @@
                 <a:ea typeface="Calibri" pitchFamily="34" charset="-122"/>
                 <a:cs typeface="Calibri" pitchFamily="34" charset="-120"/>
               </a:rPr>
-              <a:t>having moderate heat</a:t>
+              <a:t>fairly hot; friendly</a:t>
             </a:r>
             <a:endParaRPr lang="en-US" sz="850" dirty="0"/>
           </a:p>
@@ -18873,7 +18675,7 @@
                 <a:ea typeface="Trebuchet MS" pitchFamily="34" charset="-122"/>
                 <a:cs typeface="Trebuchet MS" pitchFamily="34" charset="-120"/>
               </a:rPr>
-              <a:t>ly</a:t>
+              <a:t>est</a:t>
             </a:r>
             <a:endParaRPr lang="en-US" sz="1300" dirty="0"/>
           </a:p>
@@ -18912,7 +18714,7 @@
                 <a:ea typeface="Calibri" pitchFamily="34" charset="-122"/>
                 <a:cs typeface="Calibri" pitchFamily="34" charset="-120"/>
               </a:rPr>
-              <a:t>in a certain way</a:t>
+              <a:t>most</a:t>
             </a:r>
             <a:endParaRPr lang="en-US" sz="850" dirty="0"/>
           </a:p>
@@ -19468,7 +19270,7 @@
                 <a:ea typeface="Calibri" pitchFamily="34" charset="-122"/>
                 <a:cs typeface="Calibri" pitchFamily="34" charset="-120"/>
               </a:rPr>
-              <a:t>Word Labs  •  wordlabs.app  •  Root: 'warm' = having moderate heat</a:t>
+              <a:t>Word Labs  •  wordlabs.app  •  Root: 'warm' = fairly hot; friendly</a:t>
             </a:r>
             <a:endParaRPr lang="en-US" sz="800" dirty="0"/>
           </a:p>
@@ -19607,7 +19409,7 @@
                 <a:ea typeface="Trebuchet MS" pitchFamily="34" charset="-122"/>
                 <a:cs typeface="Trebuchet MS" pitchFamily="34" charset="-120"/>
               </a:rPr>
-              <a:t>warmly</a:t>
+              <a:t>warmest</a:t>
             </a:r>
             <a:endParaRPr lang="en-US" sz="2800" dirty="0"/>
           </a:p>
@@ -19785,7 +19587,7 @@
                 <a:ea typeface="Calibri" pitchFamily="34" charset="-122"/>
                 <a:cs typeface="Calibri" pitchFamily="34" charset="-120"/>
               </a:rPr>
-              <a:t>having moderate heat</a:t>
+              <a:t>fairly hot; friendly</a:t>
             </a:r>
             <a:endParaRPr lang="en-US" sz="850" dirty="0"/>
           </a:p>
@@ -19858,7 +19660,7 @@
                 <a:ea typeface="Trebuchet MS" pitchFamily="34" charset="-122"/>
                 <a:cs typeface="Trebuchet MS" pitchFamily="34" charset="-120"/>
               </a:rPr>
-              <a:t>ly</a:t>
+              <a:t>est</a:t>
             </a:r>
             <a:endParaRPr lang="en-US" sz="1300" dirty="0"/>
           </a:p>
@@ -19897,7 +19699,7 @@
                 <a:ea typeface="Calibri" pitchFamily="34" charset="-122"/>
                 <a:cs typeface="Calibri" pitchFamily="34" charset="-120"/>
               </a:rPr>
-              <a:t>in a certain way</a:t>
+              <a:t>most</a:t>
             </a:r>
             <a:endParaRPr lang="en-US" sz="850" dirty="0"/>
           </a:p>
@@ -20161,7 +19963,7 @@
                 <a:ea typeface="Trebuchet MS" pitchFamily="34" charset="-122"/>
                 <a:cs typeface="Trebuchet MS" pitchFamily="34" charset="-120"/>
               </a:rPr>
-              <a:t>ly</a:t>
+              <a:t>est</a:t>
             </a:r>
             <a:endParaRPr lang="en-US" sz="1400" dirty="0"/>
           </a:p>
@@ -20585,7 +20387,7 @@
                 <a:ea typeface="Calibri" pitchFamily="34" charset="-122"/>
                 <a:cs typeface="Calibri" pitchFamily="34" charset="-120"/>
               </a:rPr>
-              <a:t>Word Labs  •  wordlabs.app  •  Root: 'warm' = having moderate heat</a:t>
+              <a:t>Word Labs  •  wordlabs.app  •  Root: 'warm' = fairly hot; friendly</a:t>
             </a:r>
             <a:endParaRPr lang="en-US" sz="800" dirty="0"/>
           </a:p>
@@ -20724,7 +20526,7 @@
                 <a:ea typeface="Trebuchet MS" pitchFamily="34" charset="-122"/>
                 <a:cs typeface="Trebuchet MS" pitchFamily="34" charset="-120"/>
               </a:rPr>
-              <a:t>warmly</a:t>
+              <a:t>warmest</a:t>
             </a:r>
             <a:endParaRPr lang="en-US" sz="2800" dirty="0"/>
           </a:p>
@@ -20902,7 +20704,7 @@
                 <a:ea typeface="Calibri" pitchFamily="34" charset="-122"/>
                 <a:cs typeface="Calibri" pitchFamily="34" charset="-120"/>
               </a:rPr>
-              <a:t>having moderate heat</a:t>
+              <a:t>fairly hot; friendly</a:t>
             </a:r>
             <a:endParaRPr lang="en-US" sz="850" dirty="0"/>
           </a:p>
@@ -20975,7 +20777,7 @@
                 <a:ea typeface="Trebuchet MS" pitchFamily="34" charset="-122"/>
                 <a:cs typeface="Trebuchet MS" pitchFamily="34" charset="-120"/>
               </a:rPr>
-              <a:t>ly</a:t>
+              <a:t>est</a:t>
             </a:r>
             <a:endParaRPr lang="en-US" sz="1300" dirty="0"/>
           </a:p>
@@ -21014,7 +20816,7 @@
                 <a:ea typeface="Calibri" pitchFamily="34" charset="-122"/>
                 <a:cs typeface="Calibri" pitchFamily="34" charset="-120"/>
               </a:rPr>
-              <a:t>in a certain way</a:t>
+              <a:t>most</a:t>
             </a:r>
             <a:endParaRPr lang="en-US" sz="850" dirty="0"/>
           </a:p>
@@ -21278,7 +21080,7 @@
                 <a:ea typeface="Trebuchet MS" pitchFamily="34" charset="-122"/>
                 <a:cs typeface="Trebuchet MS" pitchFamily="34" charset="-120"/>
               </a:rPr>
-              <a:t>ly</a:t>
+              <a:t>est</a:t>
             </a:r>
             <a:endParaRPr lang="en-US" sz="1400" dirty="0"/>
           </a:p>
@@ -21385,7 +21187,7 @@
         </p:nvSpPr>
         <p:spPr>
           <a:xfrm>
-            <a:off x="2427732" y="4169664"/>
+            <a:off x="2254649" y="4169664"/>
             <a:ext cx="685800" cy="475488"/>
           </a:xfrm>
           <a:prstGeom prst="rect">
@@ -21412,7 +21214,7 @@
         </p:nvSpPr>
         <p:spPr>
           <a:xfrm>
-            <a:off x="2427732" y="4169664"/>
+            <a:off x="2254649" y="4169664"/>
             <a:ext cx="685800" cy="475488"/>
           </a:xfrm>
           <a:prstGeom prst="rect">
@@ -21451,7 +21253,7 @@
         </p:nvSpPr>
         <p:spPr>
           <a:xfrm>
-            <a:off x="3639312" y="4169664"/>
+            <a:off x="3293146" y="4169664"/>
             <a:ext cx="685800" cy="475488"/>
           </a:xfrm>
           <a:prstGeom prst="rect">
@@ -21478,7 +21280,7 @@
         </p:nvSpPr>
         <p:spPr>
           <a:xfrm>
-            <a:off x="3639312" y="4169664"/>
+            <a:off x="3293146" y="4169664"/>
             <a:ext cx="685800" cy="475488"/>
           </a:xfrm>
           <a:prstGeom prst="rect">
@@ -21517,7 +21319,7 @@
         </p:nvSpPr>
         <p:spPr>
           <a:xfrm>
-            <a:off x="4850892" y="4169664"/>
+            <a:off x="4331643" y="4169664"/>
             <a:ext cx="685800" cy="475488"/>
           </a:xfrm>
           <a:prstGeom prst="rect">
@@ -21544,7 +21346,7 @@
         </p:nvSpPr>
         <p:spPr>
           <a:xfrm>
-            <a:off x="4850892" y="4169664"/>
+            <a:off x="4331643" y="4169664"/>
             <a:ext cx="685800" cy="475488"/>
           </a:xfrm>
           <a:prstGeom prst="rect">
@@ -21583,7 +21385,7 @@
         </p:nvSpPr>
         <p:spPr>
           <a:xfrm>
-            <a:off x="6062472" y="4169664"/>
+            <a:off x="5370141" y="4169664"/>
             <a:ext cx="685800" cy="475488"/>
           </a:xfrm>
           <a:prstGeom prst="rect">
@@ -21610,7 +21412,7 @@
         </p:nvSpPr>
         <p:spPr>
           <a:xfrm>
-            <a:off x="6062472" y="4169664"/>
+            <a:off x="5370141" y="4169664"/>
             <a:ext cx="685800" cy="475488"/>
           </a:xfrm>
           <a:prstGeom prst="rect">
@@ -21635,7 +21437,7 @@
                 <a:ea typeface="Trebuchet MS" pitchFamily="34" charset="-122"/>
                 <a:cs typeface="Trebuchet MS" pitchFamily="34" charset="-120"/>
               </a:rPr>
-              <a:t>l</a:t>
+              <a:t>e</a:t>
             </a:r>
             <a:endParaRPr lang="en-US" sz="900" dirty="0"/>
           </a:p>
@@ -21649,7 +21451,7 @@
         </p:nvSpPr>
         <p:spPr>
           <a:xfrm>
-            <a:off x="7274052" y="4169664"/>
+            <a:off x="6408638" y="4169664"/>
             <a:ext cx="685800" cy="475488"/>
           </a:xfrm>
           <a:prstGeom prst="rect">
@@ -21676,7 +21478,7 @@
         </p:nvSpPr>
         <p:spPr>
           <a:xfrm>
-            <a:off x="7274052" y="4169664"/>
+            <a:off x="6408638" y="4169664"/>
             <a:ext cx="685800" cy="475488"/>
           </a:xfrm>
           <a:prstGeom prst="rect">
@@ -21701,7 +21503,73 @@
                 <a:ea typeface="Trebuchet MS" pitchFamily="34" charset="-122"/>
                 <a:cs typeface="Trebuchet MS" pitchFamily="34" charset="-120"/>
               </a:rPr>
-              <a:t>y</a:t>
+              <a:t>s</a:t>
+            </a:r>
+            <a:endParaRPr lang="en-US" sz="900" dirty="0"/>
+          </a:p>
+        </p:txBody>
+      </p:sp>
+      <p:sp>
+        <p:nvSpPr>
+          <p:cNvPr id="43" name="Shape 41"/>
+          <p:cNvSpPr/>
+          <p:nvPr/>
+        </p:nvSpPr>
+        <p:spPr>
+          <a:xfrm>
+            <a:off x="7447135" y="4169664"/>
+            <a:ext cx="685800" cy="475488"/>
+          </a:xfrm>
+          <a:prstGeom prst="rect">
+            <a:avLst>
+              <a:gd name="adj" fmla="val 7692"/>
+            </a:avLst>
+          </a:prstGeom>
+          <a:solidFill>
+            <a:srgbClr val="FFFFFF"/>
+          </a:solidFill>
+          <a:ln w="12700">
+            <a:solidFill>
+              <a:srgbClr val="DB2777"/>
+            </a:solidFill>
+            <a:prstDash val="solid"/>
+          </a:ln>
+        </p:spPr>
+      </p:sp>
+      <p:sp>
+        <p:nvSpPr>
+          <p:cNvPr id="44" name="Text 42"/>
+          <p:cNvSpPr/>
+          <p:nvPr/>
+        </p:nvSpPr>
+        <p:spPr>
+          <a:xfrm>
+            <a:off x="7447135" y="4169664"/>
+            <a:ext cx="685800" cy="475488"/>
+          </a:xfrm>
+          <a:prstGeom prst="rect">
+            <a:avLst/>
+          </a:prstGeom>
+          <a:noFill/>
+          <a:ln/>
+        </p:spPr>
+        <p:txBody>
+          <a:bodyPr wrap="square" lIns="0" tIns="0" rIns="0" bIns="0" rtlCol="0" anchor="ctr"/>
+          <a:lstStyle/>
+          <a:p>
+            <a:pPr algn="ctr" indent="0" marL="0">
+              <a:buNone/>
+            </a:pPr>
+            <a:r>
+              <a:rPr lang="en-US" sz="900" b="1" dirty="0">
+                <a:solidFill>
+                  <a:srgbClr val="9D174D"/>
+                </a:solidFill>
+                <a:latin typeface="Trebuchet MS" pitchFamily="34" charset="0"/>
+                <a:ea typeface="Trebuchet MS" pitchFamily="34" charset="-122"/>
+                <a:cs typeface="Trebuchet MS" pitchFamily="34" charset="-120"/>
+              </a:rPr>
+              <a:t>t</a:t>
             </a:r>
             <a:endParaRPr lang="en-US" sz="900" dirty="0"/>
           </a:p>
@@ -21993,7 +21861,7 @@
                 <a:ea typeface="Calibri" pitchFamily="34" charset="-122"/>
                 <a:cs typeface="Calibri" pitchFamily="34" charset="-120"/>
               </a:rPr>
-              <a:t>Word Labs  •  wordlabs.app  •  Root: 'warm' = having moderate heat</a:t>
+              <a:t>Word Labs  •  wordlabs.app  •  Root: 'warm' = fairly hot; friendly</a:t>
             </a:r>
             <a:endParaRPr lang="en-US" sz="800" dirty="0"/>
           </a:p>
@@ -22132,7 +22000,7 @@
                 <a:ea typeface="Trebuchet MS" pitchFamily="34" charset="-122"/>
                 <a:cs typeface="Trebuchet MS" pitchFamily="34" charset="-120"/>
               </a:rPr>
-              <a:t>warmth</a:t>
+              <a:t>warming</a:t>
             </a:r>
             <a:endParaRPr lang="en-US" sz="2800" dirty="0"/>
           </a:p>
@@ -22820,7 +22688,7 @@
                 <a:ea typeface="Calibri" pitchFamily="34" charset="-122"/>
                 <a:cs typeface="Calibri" pitchFamily="34" charset="-120"/>
               </a:rPr>
-              <a:t>Word Labs  •  wordlabs.app  •  Root: 'warm' = having moderate heat</a:t>
+              <a:t>Word Labs  •  wordlabs.app  •  Root: 'warm' = fairly hot; friendly</a:t>
             </a:r>
             <a:endParaRPr lang="en-US" sz="800" dirty="0"/>
           </a:p>
@@ -22959,7 +22827,7 @@
                 <a:ea typeface="Trebuchet MS" pitchFamily="34" charset="-122"/>
                 <a:cs typeface="Trebuchet MS" pitchFamily="34" charset="-120"/>
               </a:rPr>
-              <a:t>warmth</a:t>
+              <a:t>warming</a:t>
             </a:r>
             <a:endParaRPr lang="en-US" sz="2800" dirty="0"/>
           </a:p>
@@ -23137,7 +23005,7 @@
                 <a:ea typeface="Calibri" pitchFamily="34" charset="-122"/>
                 <a:cs typeface="Calibri" pitchFamily="34" charset="-120"/>
               </a:rPr>
-              <a:t>having moderate heat</a:t>
+              <a:t>fairly hot; friendly</a:t>
             </a:r>
             <a:endParaRPr lang="en-US" sz="850" dirty="0"/>
           </a:p>
@@ -23210,7 +23078,7 @@
                 <a:ea typeface="Trebuchet MS" pitchFamily="34" charset="-122"/>
                 <a:cs typeface="Trebuchet MS" pitchFamily="34" charset="-120"/>
               </a:rPr>
-              <a:t>th</a:t>
+              <a:t>ing</a:t>
             </a:r>
             <a:endParaRPr lang="en-US" sz="1300" dirty="0"/>
           </a:p>
@@ -23249,7 +23117,7 @@
                 <a:ea typeface="Calibri" pitchFamily="34" charset="-122"/>
                 <a:cs typeface="Calibri" pitchFamily="34" charset="-120"/>
               </a:rPr>
-              <a:t>state or quality of</a:t>
+              <a:t>happening now</a:t>
             </a:r>
             <a:endParaRPr lang="en-US" sz="850" dirty="0"/>
           </a:p>
@@ -23805,7 +23673,7 @@
                 <a:ea typeface="Calibri" pitchFamily="34" charset="-122"/>
                 <a:cs typeface="Calibri" pitchFamily="34" charset="-120"/>
               </a:rPr>
-              <a:t>Word Labs  •  wordlabs.app  •  Root: 'warm' = having moderate heat</a:t>
+              <a:t>Word Labs  •  wordlabs.app  •  Root: 'warm' = fairly hot; friendly</a:t>
             </a:r>
             <a:endParaRPr lang="en-US" sz="800" dirty="0"/>
           </a:p>
@@ -23878,7 +23746,7 @@
                 <a:ea typeface="Trebuchet MS" pitchFamily="34" charset="-122"/>
                 <a:cs typeface="Trebuchet MS" pitchFamily="34" charset="-120"/>
               </a:rPr>
-              <a:t>We are learning that the root 'warm' means 'having moderate heat'.</a:t>
+              <a:t>We are learning that the root 'warm' means 'fairly hot; friendly'.</a:t>
             </a:r>
             <a:endParaRPr lang="en-US" sz="2000" dirty="0"/>
           </a:p>
@@ -24524,7 +24392,7 @@
                 <a:ea typeface="Calibri" pitchFamily="34" charset="-122"/>
                 <a:cs typeface="Calibri" pitchFamily="34" charset="-120"/>
               </a:rPr>
-              <a:t>Word Labs  •  wordlabs.app  •  Root: 'warm' = having moderate heat</a:t>
+              <a:t>Word Labs  •  wordlabs.app  •  Root: 'warm' = fairly hot; friendly</a:t>
             </a:r>
             <a:endParaRPr lang="en-US" sz="800" dirty="0"/>
           </a:p>
@@ -24663,7 +24531,7 @@
                 <a:ea typeface="Trebuchet MS" pitchFamily="34" charset="-122"/>
                 <a:cs typeface="Trebuchet MS" pitchFamily="34" charset="-120"/>
               </a:rPr>
-              <a:t>warmth</a:t>
+              <a:t>warming</a:t>
             </a:r>
             <a:endParaRPr lang="en-US" sz="2800" dirty="0"/>
           </a:p>
@@ -24841,7 +24709,7 @@
                 <a:ea typeface="Calibri" pitchFamily="34" charset="-122"/>
                 <a:cs typeface="Calibri" pitchFamily="34" charset="-120"/>
               </a:rPr>
-              <a:t>having moderate heat</a:t>
+              <a:t>fairly hot; friendly</a:t>
             </a:r>
             <a:endParaRPr lang="en-US" sz="850" dirty="0"/>
           </a:p>
@@ -24914,7 +24782,7 @@
                 <a:ea typeface="Trebuchet MS" pitchFamily="34" charset="-122"/>
                 <a:cs typeface="Trebuchet MS" pitchFamily="34" charset="-120"/>
               </a:rPr>
-              <a:t>th</a:t>
+              <a:t>ing</a:t>
             </a:r>
             <a:endParaRPr lang="en-US" sz="1300" dirty="0"/>
           </a:p>
@@ -24953,7 +24821,7 @@
                 <a:ea typeface="Calibri" pitchFamily="34" charset="-122"/>
                 <a:cs typeface="Calibri" pitchFamily="34" charset="-120"/>
               </a:rPr>
-              <a:t>state or quality of</a:t>
+              <a:t>happening now</a:t>
             </a:r>
             <a:endParaRPr lang="en-US" sz="850" dirty="0"/>
           </a:p>
@@ -25060,7 +24928,7 @@
         </p:nvSpPr>
         <p:spPr>
           <a:xfrm>
-            <a:off x="4370832" y="3364992"/>
+            <a:off x="2999232" y="3364992"/>
             <a:ext cx="1645920" cy="475488"/>
           </a:xfrm>
           <a:prstGeom prst="rect">
@@ -25087,7 +24955,7 @@
         </p:nvSpPr>
         <p:spPr>
           <a:xfrm>
-            <a:off x="4370832" y="3364992"/>
+            <a:off x="2999232" y="3364992"/>
             <a:ext cx="1645920" cy="475488"/>
           </a:xfrm>
           <a:prstGeom prst="rect">
@@ -25112,7 +24980,7 @@
                 <a:ea typeface="Trebuchet MS" pitchFamily="34" charset="-122"/>
                 <a:cs typeface="Trebuchet MS" pitchFamily="34" charset="-120"/>
               </a:rPr>
-              <a:t>warmth</a:t>
+              <a:t>warm</a:t>
             </a:r>
             <a:endParaRPr lang="en-US" sz="1400" dirty="0"/>
           </a:p>
@@ -25120,7 +24988,112 @@
       </p:sp>
       <p:sp>
         <p:nvSpPr>
-          <p:cNvPr id="27" name="Shape 25"/>
+          <p:cNvPr id="27" name="Text 25"/>
+          <p:cNvSpPr/>
+          <p:nvPr/>
+        </p:nvSpPr>
+        <p:spPr>
+          <a:xfrm>
+            <a:off x="4645152" y="3364992"/>
+            <a:ext cx="1097280" cy="475488"/>
+          </a:xfrm>
+          <a:prstGeom prst="rect">
+            <a:avLst/>
+          </a:prstGeom>
+          <a:noFill/>
+          <a:ln/>
+        </p:spPr>
+        <p:txBody>
+          <a:bodyPr wrap="square" lIns="0" tIns="0" rIns="0" bIns="0" rtlCol="0" anchor="ctr"/>
+          <a:lstStyle/>
+          <a:p>
+            <a:pPr algn="ctr" indent="0" marL="0">
+              <a:buNone/>
+            </a:pPr>
+            <a:r>
+              <a:rPr lang="en-US" sz="1600" b="1" dirty="0">
+                <a:solidFill>
+                  <a:srgbClr val="0D9488"/>
+                </a:solidFill>
+                <a:latin typeface="Trebuchet MS" pitchFamily="34" charset="0"/>
+                <a:ea typeface="Trebuchet MS" pitchFamily="34" charset="-122"/>
+                <a:cs typeface="Trebuchet MS" pitchFamily="34" charset="-120"/>
+              </a:rPr>
+              <a:t>·</a:t>
+            </a:r>
+            <a:endParaRPr lang="en-US" sz="1600" dirty="0"/>
+          </a:p>
+        </p:txBody>
+      </p:sp>
+      <p:sp>
+        <p:nvSpPr>
+          <p:cNvPr id="28" name="Shape 26"/>
+          <p:cNvSpPr/>
+          <p:nvPr/>
+        </p:nvSpPr>
+        <p:spPr>
+          <a:xfrm>
+            <a:off x="5742432" y="3364992"/>
+            <a:ext cx="1645920" cy="475488"/>
+          </a:xfrm>
+          <a:prstGeom prst="rect">
+            <a:avLst>
+              <a:gd name="adj" fmla="val 9615"/>
+            </a:avLst>
+          </a:prstGeom>
+          <a:solidFill>
+            <a:srgbClr val="FFFFFF"/>
+          </a:solidFill>
+          <a:ln w="12700">
+            <a:solidFill>
+              <a:srgbClr val="0D9488"/>
+            </a:solidFill>
+            <a:prstDash val="solid"/>
+          </a:ln>
+        </p:spPr>
+      </p:sp>
+      <p:sp>
+        <p:nvSpPr>
+          <p:cNvPr id="29" name="Text 27"/>
+          <p:cNvSpPr/>
+          <p:nvPr/>
+        </p:nvSpPr>
+        <p:spPr>
+          <a:xfrm>
+            <a:off x="5742432" y="3364992"/>
+            <a:ext cx="1645920" cy="475488"/>
+          </a:xfrm>
+          <a:prstGeom prst="rect">
+            <a:avLst/>
+          </a:prstGeom>
+          <a:noFill/>
+          <a:ln/>
+        </p:spPr>
+        <p:txBody>
+          <a:bodyPr wrap="square" lIns="0" tIns="0" rIns="0" bIns="0" rtlCol="0" anchor="ctr"/>
+          <a:lstStyle/>
+          <a:p>
+            <a:pPr algn="ctr" indent="0" marL="0">
+              <a:buNone/>
+            </a:pPr>
+            <a:r>
+              <a:rPr lang="en-US" sz="1400" b="1" dirty="0">
+                <a:solidFill>
+                  <a:srgbClr val="0D9488"/>
+                </a:solidFill>
+                <a:latin typeface="Trebuchet MS" pitchFamily="34" charset="0"/>
+                <a:ea typeface="Trebuchet MS" pitchFamily="34" charset="-122"/>
+                <a:cs typeface="Trebuchet MS" pitchFamily="34" charset="-120"/>
+              </a:rPr>
+              <a:t>ing</a:t>
+            </a:r>
+            <a:endParaRPr lang="en-US" sz="1400" dirty="0"/>
+          </a:p>
+        </p:txBody>
+      </p:sp>
+      <p:sp>
+        <p:nvSpPr>
+          <p:cNvPr id="30" name="Shape 28"/>
           <p:cNvSpPr/>
           <p:nvPr/>
         </p:nvSpPr>
@@ -25147,7 +25120,7 @@
       </p:sp>
       <p:sp>
         <p:nvSpPr>
-          <p:cNvPr id="28" name="Text 26"/>
+          <p:cNvPr id="31" name="Text 29"/>
           <p:cNvSpPr/>
           <p:nvPr/>
         </p:nvSpPr>
@@ -25186,7 +25159,7 @@
       </p:sp>
       <p:sp>
         <p:nvSpPr>
-          <p:cNvPr id="29" name="Shape 27"/>
+          <p:cNvPr id="32" name="Shape 30"/>
           <p:cNvSpPr/>
           <p:nvPr/>
         </p:nvSpPr>
@@ -25213,7 +25186,7 @@
       </p:sp>
       <p:sp>
         <p:nvSpPr>
-          <p:cNvPr id="30" name="Text 28"/>
+          <p:cNvPr id="33" name="Text 31"/>
           <p:cNvSpPr/>
           <p:nvPr/>
         </p:nvSpPr>
@@ -25536,7 +25509,7 @@
                 <a:ea typeface="Calibri" pitchFamily="34" charset="-122"/>
                 <a:cs typeface="Calibri" pitchFamily="34" charset="-120"/>
               </a:rPr>
-              <a:t>Word Labs  •  wordlabs.app  •  Root: 'warm' = having moderate heat</a:t>
+              <a:t>Word Labs  •  wordlabs.app  •  Root: 'warm' = fairly hot; friendly</a:t>
             </a:r>
             <a:endParaRPr lang="en-US" sz="800" dirty="0"/>
           </a:p>
@@ -25675,7 +25648,7 @@
                 <a:ea typeface="Trebuchet MS" pitchFamily="34" charset="-122"/>
                 <a:cs typeface="Trebuchet MS" pitchFamily="34" charset="-120"/>
               </a:rPr>
-              <a:t>warmth</a:t>
+              <a:t>warming</a:t>
             </a:r>
             <a:endParaRPr lang="en-US" sz="2800" dirty="0"/>
           </a:p>
@@ -25853,7 +25826,7 @@
                 <a:ea typeface="Calibri" pitchFamily="34" charset="-122"/>
                 <a:cs typeface="Calibri" pitchFamily="34" charset="-120"/>
               </a:rPr>
-              <a:t>having moderate heat</a:t>
+              <a:t>fairly hot; friendly</a:t>
             </a:r>
             <a:endParaRPr lang="en-US" sz="850" dirty="0"/>
           </a:p>
@@ -25926,7 +25899,7 @@
                 <a:ea typeface="Trebuchet MS" pitchFamily="34" charset="-122"/>
                 <a:cs typeface="Trebuchet MS" pitchFamily="34" charset="-120"/>
               </a:rPr>
-              <a:t>th</a:t>
+              <a:t>ing</a:t>
             </a:r>
             <a:endParaRPr lang="en-US" sz="1300" dirty="0"/>
           </a:p>
@@ -25965,7 +25938,7 @@
                 <a:ea typeface="Calibri" pitchFamily="34" charset="-122"/>
                 <a:cs typeface="Calibri" pitchFamily="34" charset="-120"/>
               </a:rPr>
-              <a:t>state or quality of</a:t>
+              <a:t>happening now</a:t>
             </a:r>
             <a:endParaRPr lang="en-US" sz="850" dirty="0"/>
           </a:p>
@@ -26072,7 +26045,7 @@
         </p:nvSpPr>
         <p:spPr>
           <a:xfrm>
-            <a:off x="4370832" y="3364992"/>
+            <a:off x="2999232" y="3364992"/>
             <a:ext cx="1645920" cy="475488"/>
           </a:xfrm>
           <a:prstGeom prst="rect">
@@ -26099,7 +26072,7 @@
         </p:nvSpPr>
         <p:spPr>
           <a:xfrm>
-            <a:off x="4370832" y="3364992"/>
+            <a:off x="2999232" y="3364992"/>
             <a:ext cx="1645920" cy="475488"/>
           </a:xfrm>
           <a:prstGeom prst="rect">
@@ -26124,7 +26097,7 @@
                 <a:ea typeface="Trebuchet MS" pitchFamily="34" charset="-122"/>
                 <a:cs typeface="Trebuchet MS" pitchFamily="34" charset="-120"/>
               </a:rPr>
-              <a:t>warmth</a:t>
+              <a:t>warm</a:t>
             </a:r>
             <a:endParaRPr lang="en-US" sz="1400" dirty="0"/>
           </a:p>
@@ -26132,7 +26105,112 @@
       </p:sp>
       <p:sp>
         <p:nvSpPr>
-          <p:cNvPr id="27" name="Shape 25"/>
+          <p:cNvPr id="27" name="Text 25"/>
+          <p:cNvSpPr/>
+          <p:nvPr/>
+        </p:nvSpPr>
+        <p:spPr>
+          <a:xfrm>
+            <a:off x="4645152" y="3364992"/>
+            <a:ext cx="1097280" cy="475488"/>
+          </a:xfrm>
+          <a:prstGeom prst="rect">
+            <a:avLst/>
+          </a:prstGeom>
+          <a:noFill/>
+          <a:ln/>
+        </p:spPr>
+        <p:txBody>
+          <a:bodyPr wrap="square" lIns="0" tIns="0" rIns="0" bIns="0" rtlCol="0" anchor="ctr"/>
+          <a:lstStyle/>
+          <a:p>
+            <a:pPr algn="ctr" indent="0" marL="0">
+              <a:buNone/>
+            </a:pPr>
+            <a:r>
+              <a:rPr lang="en-US" sz="1600" b="1" dirty="0">
+                <a:solidFill>
+                  <a:srgbClr val="0D9488"/>
+                </a:solidFill>
+                <a:latin typeface="Trebuchet MS" pitchFamily="34" charset="0"/>
+                <a:ea typeface="Trebuchet MS" pitchFamily="34" charset="-122"/>
+                <a:cs typeface="Trebuchet MS" pitchFamily="34" charset="-120"/>
+              </a:rPr>
+              <a:t>·</a:t>
+            </a:r>
+            <a:endParaRPr lang="en-US" sz="1600" dirty="0"/>
+          </a:p>
+        </p:txBody>
+      </p:sp>
+      <p:sp>
+        <p:nvSpPr>
+          <p:cNvPr id="28" name="Shape 26"/>
+          <p:cNvSpPr/>
+          <p:nvPr/>
+        </p:nvSpPr>
+        <p:spPr>
+          <a:xfrm>
+            <a:off x="5742432" y="3364992"/>
+            <a:ext cx="1645920" cy="475488"/>
+          </a:xfrm>
+          <a:prstGeom prst="rect">
+            <a:avLst>
+              <a:gd name="adj" fmla="val 9615"/>
+            </a:avLst>
+          </a:prstGeom>
+          <a:solidFill>
+            <a:srgbClr val="FFFFFF"/>
+          </a:solidFill>
+          <a:ln w="12700">
+            <a:solidFill>
+              <a:srgbClr val="0D9488"/>
+            </a:solidFill>
+            <a:prstDash val="solid"/>
+          </a:ln>
+        </p:spPr>
+      </p:sp>
+      <p:sp>
+        <p:nvSpPr>
+          <p:cNvPr id="29" name="Text 27"/>
+          <p:cNvSpPr/>
+          <p:nvPr/>
+        </p:nvSpPr>
+        <p:spPr>
+          <a:xfrm>
+            <a:off x="5742432" y="3364992"/>
+            <a:ext cx="1645920" cy="475488"/>
+          </a:xfrm>
+          <a:prstGeom prst="rect">
+            <a:avLst/>
+          </a:prstGeom>
+          <a:noFill/>
+          <a:ln/>
+        </p:spPr>
+        <p:txBody>
+          <a:bodyPr wrap="square" lIns="0" tIns="0" rIns="0" bIns="0" rtlCol="0" anchor="ctr"/>
+          <a:lstStyle/>
+          <a:p>
+            <a:pPr algn="ctr" indent="0" marL="0">
+              <a:buNone/>
+            </a:pPr>
+            <a:r>
+              <a:rPr lang="en-US" sz="1400" b="1" dirty="0">
+                <a:solidFill>
+                  <a:srgbClr val="0D9488"/>
+                </a:solidFill>
+                <a:latin typeface="Trebuchet MS" pitchFamily="34" charset="0"/>
+                <a:ea typeface="Trebuchet MS" pitchFamily="34" charset="-122"/>
+                <a:cs typeface="Trebuchet MS" pitchFamily="34" charset="-120"/>
+              </a:rPr>
+              <a:t>ing</a:t>
+            </a:r>
+            <a:endParaRPr lang="en-US" sz="1400" dirty="0"/>
+          </a:p>
+        </p:txBody>
+      </p:sp>
+      <p:sp>
+        <p:nvSpPr>
+          <p:cNvPr id="30" name="Shape 28"/>
           <p:cNvSpPr/>
           <p:nvPr/>
         </p:nvSpPr>
@@ -26159,7 +26237,7 @@
       </p:sp>
       <p:sp>
         <p:nvSpPr>
-          <p:cNvPr id="28" name="Text 26"/>
+          <p:cNvPr id="31" name="Text 29"/>
           <p:cNvSpPr/>
           <p:nvPr/>
         </p:nvSpPr>
@@ -26198,7 +26276,7 @@
       </p:sp>
       <p:sp>
         <p:nvSpPr>
-          <p:cNvPr id="29" name="Shape 27"/>
+          <p:cNvPr id="32" name="Shape 30"/>
           <p:cNvSpPr/>
           <p:nvPr/>
         </p:nvSpPr>
@@ -26225,13 +26303,13 @@
       </p:sp>
       <p:sp>
         <p:nvSpPr>
-          <p:cNvPr id="30" name="Shape 28"/>
-          <p:cNvSpPr/>
-          <p:nvPr/>
-        </p:nvSpPr>
-        <p:spPr>
-          <a:xfrm>
-            <a:off x="2670048" y="4169664"/>
+          <p:cNvPr id="33" name="Shape 31"/>
+          <p:cNvSpPr/>
+          <p:nvPr/>
+        </p:nvSpPr>
+        <p:spPr>
+          <a:xfrm>
+            <a:off x="2427732" y="4169664"/>
             <a:ext cx="685800" cy="475488"/>
           </a:xfrm>
           <a:prstGeom prst="rect">
@@ -26252,13 +26330,13 @@
       </p:sp>
       <p:sp>
         <p:nvSpPr>
-          <p:cNvPr id="31" name="Text 29"/>
-          <p:cNvSpPr/>
-          <p:nvPr/>
-        </p:nvSpPr>
-        <p:spPr>
-          <a:xfrm>
-            <a:off x="2670048" y="4169664"/>
+          <p:cNvPr id="34" name="Text 32"/>
+          <p:cNvSpPr/>
+          <p:nvPr/>
+        </p:nvSpPr>
+        <p:spPr>
+          <a:xfrm>
+            <a:off x="2427732" y="4169664"/>
             <a:ext cx="685800" cy="475488"/>
           </a:xfrm>
           <a:prstGeom prst="rect">
@@ -26291,13 +26369,13 @@
       </p:sp>
       <p:sp>
         <p:nvSpPr>
-          <p:cNvPr id="32" name="Shape 30"/>
-          <p:cNvSpPr/>
-          <p:nvPr/>
-        </p:nvSpPr>
-        <p:spPr>
-          <a:xfrm>
-            <a:off x="4123944" y="4169664"/>
+          <p:cNvPr id="35" name="Shape 33"/>
+          <p:cNvSpPr/>
+          <p:nvPr/>
+        </p:nvSpPr>
+        <p:spPr>
+          <a:xfrm>
+            <a:off x="3639312" y="4169664"/>
             <a:ext cx="685800" cy="475488"/>
           </a:xfrm>
           <a:prstGeom prst="rect">
@@ -26318,13 +26396,13 @@
       </p:sp>
       <p:sp>
         <p:nvSpPr>
-          <p:cNvPr id="33" name="Text 31"/>
-          <p:cNvSpPr/>
-          <p:nvPr/>
-        </p:nvSpPr>
-        <p:spPr>
-          <a:xfrm>
-            <a:off x="4123944" y="4169664"/>
+          <p:cNvPr id="36" name="Text 34"/>
+          <p:cNvSpPr/>
+          <p:nvPr/>
+        </p:nvSpPr>
+        <p:spPr>
+          <a:xfrm>
+            <a:off x="3639312" y="4169664"/>
             <a:ext cx="685800" cy="475488"/>
           </a:xfrm>
           <a:prstGeom prst="rect">
@@ -26357,13 +26435,13 @@
       </p:sp>
       <p:sp>
         <p:nvSpPr>
-          <p:cNvPr id="34" name="Shape 32"/>
-          <p:cNvSpPr/>
-          <p:nvPr/>
-        </p:nvSpPr>
-        <p:spPr>
-          <a:xfrm>
-            <a:off x="5577840" y="4169664"/>
+          <p:cNvPr id="37" name="Shape 35"/>
+          <p:cNvSpPr/>
+          <p:nvPr/>
+        </p:nvSpPr>
+        <p:spPr>
+          <a:xfrm>
+            <a:off x="4850892" y="4169664"/>
             <a:ext cx="685800" cy="475488"/>
           </a:xfrm>
           <a:prstGeom prst="rect">
@@ -26384,13 +26462,13 @@
       </p:sp>
       <p:sp>
         <p:nvSpPr>
-          <p:cNvPr id="35" name="Text 33"/>
-          <p:cNvSpPr/>
-          <p:nvPr/>
-        </p:nvSpPr>
-        <p:spPr>
-          <a:xfrm>
-            <a:off x="5577840" y="4169664"/>
+          <p:cNvPr id="38" name="Text 36"/>
+          <p:cNvSpPr/>
+          <p:nvPr/>
+        </p:nvSpPr>
+        <p:spPr>
+          <a:xfrm>
+            <a:off x="4850892" y="4169664"/>
             <a:ext cx="685800" cy="475488"/>
           </a:xfrm>
           <a:prstGeom prst="rect">
@@ -26423,13 +26501,13 @@
       </p:sp>
       <p:sp>
         <p:nvSpPr>
-          <p:cNvPr id="36" name="Shape 34"/>
-          <p:cNvSpPr/>
-          <p:nvPr/>
-        </p:nvSpPr>
-        <p:spPr>
-          <a:xfrm>
-            <a:off x="7031736" y="4169664"/>
+          <p:cNvPr id="39" name="Shape 37"/>
+          <p:cNvSpPr/>
+          <p:nvPr/>
+        </p:nvSpPr>
+        <p:spPr>
+          <a:xfrm>
+            <a:off x="6062472" y="4169664"/>
             <a:ext cx="685800" cy="475488"/>
           </a:xfrm>
           <a:prstGeom prst="rect">
@@ -26450,13 +26528,13 @@
       </p:sp>
       <p:sp>
         <p:nvSpPr>
-          <p:cNvPr id="37" name="Text 35"/>
-          <p:cNvSpPr/>
-          <p:nvPr/>
-        </p:nvSpPr>
-        <p:spPr>
-          <a:xfrm>
-            <a:off x="7031736" y="4169664"/>
+          <p:cNvPr id="40" name="Text 38"/>
+          <p:cNvSpPr/>
+          <p:nvPr/>
+        </p:nvSpPr>
+        <p:spPr>
+          <a:xfrm>
+            <a:off x="6062472" y="4169664"/>
             <a:ext cx="685800" cy="475488"/>
           </a:xfrm>
           <a:prstGeom prst="rect">
@@ -26481,7 +26559,73 @@
                 <a:ea typeface="Trebuchet MS" pitchFamily="34" charset="-122"/>
                 <a:cs typeface="Trebuchet MS" pitchFamily="34" charset="-120"/>
               </a:rPr>
-              <a:t>th</a:t>
+              <a:t>i</a:t>
+            </a:r>
+            <a:endParaRPr lang="en-US" sz="900" dirty="0"/>
+          </a:p>
+        </p:txBody>
+      </p:sp>
+      <p:sp>
+        <p:nvSpPr>
+          <p:cNvPr id="41" name="Shape 39"/>
+          <p:cNvSpPr/>
+          <p:nvPr/>
+        </p:nvSpPr>
+        <p:spPr>
+          <a:xfrm>
+            <a:off x="7274052" y="4169664"/>
+            <a:ext cx="685800" cy="475488"/>
+          </a:xfrm>
+          <a:prstGeom prst="rect">
+            <a:avLst>
+              <a:gd name="adj" fmla="val 7692"/>
+            </a:avLst>
+          </a:prstGeom>
+          <a:solidFill>
+            <a:srgbClr val="FFFFFF"/>
+          </a:solidFill>
+          <a:ln w="12700">
+            <a:solidFill>
+              <a:srgbClr val="DB2777"/>
+            </a:solidFill>
+            <a:prstDash val="solid"/>
+          </a:ln>
+        </p:spPr>
+      </p:sp>
+      <p:sp>
+        <p:nvSpPr>
+          <p:cNvPr id="42" name="Text 40"/>
+          <p:cNvSpPr/>
+          <p:nvPr/>
+        </p:nvSpPr>
+        <p:spPr>
+          <a:xfrm>
+            <a:off x="7274052" y="4169664"/>
+            <a:ext cx="685800" cy="475488"/>
+          </a:xfrm>
+          <a:prstGeom prst="rect">
+            <a:avLst/>
+          </a:prstGeom>
+          <a:noFill/>
+          <a:ln/>
+        </p:spPr>
+        <p:txBody>
+          <a:bodyPr wrap="square" lIns="0" tIns="0" rIns="0" bIns="0" rtlCol="0" anchor="ctr"/>
+          <a:lstStyle/>
+          <a:p>
+            <a:pPr algn="ctr" indent="0" marL="0">
+              <a:buNone/>
+            </a:pPr>
+            <a:r>
+              <a:rPr lang="en-US" sz="900" b="1" dirty="0">
+                <a:solidFill>
+                  <a:srgbClr val="9D174D"/>
+                </a:solidFill>
+                <a:latin typeface="Trebuchet MS" pitchFamily="34" charset="0"/>
+                <a:ea typeface="Trebuchet MS" pitchFamily="34" charset="-122"/>
+                <a:cs typeface="Trebuchet MS" pitchFamily="34" charset="-120"/>
+              </a:rPr>
+              <a:t>ng</a:t>
             </a:r>
             <a:endParaRPr lang="en-US" sz="900" dirty="0"/>
           </a:p>
@@ -26773,7 +26917,7 @@
                 <a:ea typeface="Calibri" pitchFamily="34" charset="-122"/>
                 <a:cs typeface="Calibri" pitchFamily="34" charset="-120"/>
               </a:rPr>
-              <a:t>Word Labs  •  wordlabs.app  •  Root: 'warm' = having moderate heat</a:t>
+              <a:t>Word Labs  •  wordlabs.app  •  Root: 'warm' = fairly hot; friendly</a:t>
             </a:r>
             <a:endParaRPr lang="en-US" sz="800" dirty="0"/>
           </a:p>
@@ -27600,7 +27744,7 @@
                 <a:ea typeface="Calibri" pitchFamily="34" charset="-122"/>
                 <a:cs typeface="Calibri" pitchFamily="34" charset="-120"/>
               </a:rPr>
-              <a:t>Word Labs  •  wordlabs.app  •  Root: 'warm' = having moderate heat</a:t>
+              <a:t>Word Labs  •  wordlabs.app  •  Root: 'warm' = fairly hot; friendly</a:t>
             </a:r>
             <a:endParaRPr lang="en-US" sz="800" dirty="0"/>
           </a:p>
@@ -28029,7 +28173,7 @@
                 <a:ea typeface="Calibri" pitchFamily="34" charset="-122"/>
                 <a:cs typeface="Calibri" pitchFamily="34" charset="-120"/>
               </a:rPr>
-              <a:t>having moderate heat</a:t>
+              <a:t>fairly hot; friendly</a:t>
             </a:r>
             <a:endParaRPr lang="en-US" sz="850" dirty="0"/>
           </a:p>
@@ -28697,7 +28841,7 @@
                 <a:ea typeface="Calibri" pitchFamily="34" charset="-122"/>
                 <a:cs typeface="Calibri" pitchFamily="34" charset="-120"/>
               </a:rPr>
-              <a:t>Word Labs  •  wordlabs.app  •  Root: 'warm' = having moderate heat</a:t>
+              <a:t>Word Labs  •  wordlabs.app  •  Root: 'warm' = fairly hot; friendly</a:t>
             </a:r>
             <a:endParaRPr lang="en-US" sz="800" dirty="0"/>
           </a:p>
@@ -29126,7 +29270,7 @@
                 <a:ea typeface="Calibri" pitchFamily="34" charset="-122"/>
                 <a:cs typeface="Calibri" pitchFamily="34" charset="-120"/>
               </a:rPr>
-              <a:t>having moderate heat</a:t>
+              <a:t>fairly hot; friendly</a:t>
             </a:r>
             <a:endParaRPr lang="en-US" sz="850" dirty="0"/>
           </a:p>
@@ -29926,7 +30070,7 @@
                 <a:ea typeface="Calibri" pitchFamily="34" charset="-122"/>
                 <a:cs typeface="Calibri" pitchFamily="34" charset="-120"/>
               </a:rPr>
-              <a:t>Word Labs  •  wordlabs.app  •  Root: 'warm' = having moderate heat</a:t>
+              <a:t>Word Labs  •  wordlabs.app  •  Root: 'warm' = fairly hot; friendly</a:t>
             </a:r>
             <a:endParaRPr lang="en-US" sz="800" dirty="0"/>
           </a:p>
@@ -30355,7 +30499,7 @@
                 <a:ea typeface="Calibri" pitchFamily="34" charset="-122"/>
                 <a:cs typeface="Calibri" pitchFamily="34" charset="-120"/>
               </a:rPr>
-              <a:t>having moderate heat</a:t>
+              <a:t>fairly hot; friendly</a:t>
             </a:r>
             <a:endParaRPr lang="en-US" sz="850" dirty="0"/>
           </a:p>
@@ -30956,7 +31100,7 @@
                 <a:ea typeface="Trebuchet MS" pitchFamily="34" charset="-122"/>
                 <a:cs typeface="Trebuchet MS" pitchFamily="34" charset="-120"/>
               </a:rPr>
-              <a:t>ew</a:t>
+              <a:t>e</a:t>
             </a:r>
             <a:endParaRPr lang="en-US" sz="900" dirty="0"/>
           </a:p>
@@ -31022,7 +31166,7 @@
                 <a:ea typeface="Trebuchet MS" pitchFamily="34" charset="-122"/>
                 <a:cs typeface="Trebuchet MS" pitchFamily="34" charset="-120"/>
               </a:rPr>
-              <a:t>ar</a:t>
+              <a:t>w</a:t>
             </a:r>
             <a:endParaRPr lang="en-US" sz="900" dirty="0"/>
           </a:p>
@@ -31088,7 +31232,7 @@
                 <a:ea typeface="Trebuchet MS" pitchFamily="34" charset="-122"/>
                 <a:cs typeface="Trebuchet MS" pitchFamily="34" charset="-120"/>
               </a:rPr>
-              <a:t>m</a:t>
+              <a:t>ar</a:t>
             </a:r>
             <a:endParaRPr lang="en-US" sz="900" dirty="0"/>
           </a:p>
@@ -31154,7 +31298,7 @@
                 <a:ea typeface="Trebuchet MS" pitchFamily="34" charset="-122"/>
                 <a:cs typeface="Trebuchet MS" pitchFamily="34" charset="-120"/>
               </a:rPr>
-              <a:t>e</a:t>
+              <a:t>m</a:t>
             </a:r>
             <a:endParaRPr lang="en-US" sz="900" dirty="0"/>
           </a:p>
@@ -31220,7 +31364,7 @@
                 <a:ea typeface="Trebuchet MS" pitchFamily="34" charset="-122"/>
                 <a:cs typeface="Trebuchet MS" pitchFamily="34" charset="-120"/>
               </a:rPr>
-              <a:t>d</a:t>
+              <a:t>ed</a:t>
             </a:r>
             <a:endParaRPr lang="en-US" sz="900" dirty="0"/>
           </a:p>
@@ -31512,7 +31656,7 @@
                 <a:ea typeface="Calibri" pitchFamily="34" charset="-122"/>
                 <a:cs typeface="Calibri" pitchFamily="34" charset="-120"/>
               </a:rPr>
-              <a:t>Word Labs  •  wordlabs.app  •  Root: 'warm' = having moderate heat</a:t>
+              <a:t>Word Labs  •  wordlabs.app  •  Root: 'warm' = fairly hot; friendly</a:t>
             </a:r>
             <a:endParaRPr lang="en-US" sz="800" dirty="0"/>
           </a:p>
@@ -32681,7 +32825,7 @@
                 <a:ea typeface="Calibri" pitchFamily="34" charset="-122"/>
                 <a:cs typeface="Calibri" pitchFamily="34" charset="-120"/>
               </a:rPr>
-              <a:t>Word Labs  •  wordlabs.app  •  Root: 'warm' = having moderate heat</a:t>
+              <a:t>Word Labs  •  wordlabs.app  •  Root: 'warm' = fairly hot; friendly</a:t>
             </a:r>
             <a:endParaRPr lang="en-US" sz="800" dirty="0"/>
           </a:p>
@@ -33131,7 +33275,7 @@
             <a:avLst/>
           </a:prstGeom>
           <a:solidFill>
-            <a:srgbClr val="DDD6FE"/>
+            <a:srgbClr val="F1F5F9"/>
           </a:solidFill>
           <a:ln w="12700">
             <a:solidFill>
@@ -33143,14 +33287,64 @@
       </p:sp>
       <p:sp>
         <p:nvSpPr>
-          <p:cNvPr id="24" name="Text 22"/>
-          <p:cNvSpPr/>
-          <p:nvPr/>
-        </p:nvSpPr>
-        <p:spPr>
-          <a:xfrm>
-            <a:off x="365760" y="1984248"/>
-            <a:ext cx="2468880" cy="402336"/>
+          <p:cNvPr id="24" name="Shape 22"/>
+          <p:cNvSpPr/>
+          <p:nvPr/>
+        </p:nvSpPr>
+        <p:spPr>
+          <a:xfrm>
+            <a:off x="2971800" y="1984248"/>
+            <a:ext cx="2834640" cy="402336"/>
+          </a:xfrm>
+          <a:prstGeom prst="rect">
+            <a:avLst/>
+          </a:prstGeom>
+          <a:solidFill>
+            <a:srgbClr val="F1F5F9"/>
+          </a:solidFill>
+          <a:ln w="12700">
+            <a:solidFill>
+              <a:srgbClr val="E2E8F0"/>
+            </a:solidFill>
+            <a:prstDash val="solid"/>
+          </a:ln>
+        </p:spPr>
+      </p:sp>
+      <p:sp>
+        <p:nvSpPr>
+          <p:cNvPr id="25" name="Shape 23"/>
+          <p:cNvSpPr/>
+          <p:nvPr/>
+        </p:nvSpPr>
+        <p:spPr>
+          <a:xfrm>
+            <a:off x="5943600" y="1984248"/>
+            <a:ext cx="2834640" cy="402336"/>
+          </a:xfrm>
+          <a:prstGeom prst="rect">
+            <a:avLst/>
+          </a:prstGeom>
+          <a:solidFill>
+            <a:srgbClr val="FCE7F3"/>
+          </a:solidFill>
+          <a:ln w="12700">
+            <a:solidFill>
+              <a:srgbClr val="E2E8F0"/>
+            </a:solidFill>
+            <a:prstDash val="solid"/>
+          </a:ln>
+        </p:spPr>
+      </p:sp>
+      <p:sp>
+        <p:nvSpPr>
+          <p:cNvPr id="26" name="Text 24"/>
+          <p:cNvSpPr/>
+          <p:nvPr/>
+        </p:nvSpPr>
+        <p:spPr>
+          <a:xfrm>
+            <a:off x="5943600" y="1984248"/>
+            <a:ext cx="2834640" cy="402336"/>
           </a:xfrm>
           <a:prstGeom prst="rect">
             <a:avLst/>
@@ -33168,13 +33362,13 @@
             <a:r>
               <a:rPr lang="en-US" sz="1300" b="1" dirty="0">
                 <a:solidFill>
-                  <a:srgbClr val="4C1D95"/>
+                  <a:srgbClr val="9D174D"/>
                 </a:solidFill>
                 <a:latin typeface="Trebuchet MS" pitchFamily="34" charset="0"/>
                 <a:ea typeface="Trebuchet MS" pitchFamily="34" charset="-122"/>
                 <a:cs typeface="Trebuchet MS" pitchFamily="34" charset="-120"/>
               </a:rPr>
-              <a:t>luke-</a:t>
+              <a:t>-er</a:t>
             </a:r>
             <a:endParaRPr lang="en-US" sz="1300" dirty="0"/>
           </a:p>
@@ -33182,20 +33376,45 @@
       </p:sp>
       <p:sp>
         <p:nvSpPr>
-          <p:cNvPr id="25" name="Shape 23"/>
-          <p:cNvSpPr/>
-          <p:nvPr/>
-        </p:nvSpPr>
-        <p:spPr>
-          <a:xfrm>
-            <a:off x="2971800" y="1984248"/>
+          <p:cNvPr id="27" name="Shape 25"/>
+          <p:cNvSpPr/>
+          <p:nvPr/>
+        </p:nvSpPr>
+        <p:spPr>
+          <a:xfrm>
+            <a:off x="365760" y="2404872"/>
+            <a:ext cx="2468880" cy="402336"/>
+          </a:xfrm>
+          <a:prstGeom prst="rect">
+            <a:avLst/>
+          </a:prstGeom>
+          <a:solidFill>
+            <a:srgbClr val="F8FAFC"/>
+          </a:solidFill>
+          <a:ln w="12700">
+            <a:solidFill>
+              <a:srgbClr val="E2E8F0"/>
+            </a:solidFill>
+            <a:prstDash val="solid"/>
+          </a:ln>
+        </p:spPr>
+      </p:sp>
+      <p:sp>
+        <p:nvSpPr>
+          <p:cNvPr id="28" name="Shape 26"/>
+          <p:cNvSpPr/>
+          <p:nvPr/>
+        </p:nvSpPr>
+        <p:spPr>
+          <a:xfrm>
+            <a:off x="2971800" y="2404872"/>
             <a:ext cx="2834640" cy="402336"/>
           </a:xfrm>
           <a:prstGeom prst="rect">
             <a:avLst/>
           </a:prstGeom>
           <a:solidFill>
-            <a:srgbClr val="F1F5F9"/>
+            <a:srgbClr val="F8FAFC"/>
           </a:solidFill>
           <a:ln w="12700">
             <a:solidFill>
@@ -33207,13 +33426,13 @@
       </p:sp>
       <p:sp>
         <p:nvSpPr>
-          <p:cNvPr id="26" name="Shape 24"/>
-          <p:cNvSpPr/>
-          <p:nvPr/>
-        </p:nvSpPr>
-        <p:spPr>
-          <a:xfrm>
-            <a:off x="5943600" y="1984248"/>
+          <p:cNvPr id="29" name="Shape 27"/>
+          <p:cNvSpPr/>
+          <p:nvPr/>
+        </p:nvSpPr>
+        <p:spPr>
+          <a:xfrm>
+            <a:off x="5943600" y="2404872"/>
             <a:ext cx="2834640" cy="402336"/>
           </a:xfrm>
           <a:prstGeom prst="rect">
@@ -33232,13 +33451,13 @@
       </p:sp>
       <p:sp>
         <p:nvSpPr>
-          <p:cNvPr id="27" name="Text 25"/>
-          <p:cNvSpPr/>
-          <p:nvPr/>
-        </p:nvSpPr>
-        <p:spPr>
-          <a:xfrm>
-            <a:off x="5943600" y="1984248"/>
+          <p:cNvPr id="30" name="Text 28"/>
+          <p:cNvSpPr/>
+          <p:nvPr/>
+        </p:nvSpPr>
+        <p:spPr>
+          <a:xfrm>
+            <a:off x="5943600" y="2404872"/>
             <a:ext cx="2834640" cy="402336"/>
           </a:xfrm>
           <a:prstGeom prst="rect">
@@ -33263,7 +33482,7 @@
                 <a:ea typeface="Trebuchet MS" pitchFamily="34" charset="-122"/>
                 <a:cs typeface="Trebuchet MS" pitchFamily="34" charset="-120"/>
               </a:rPr>
-              <a:t>-ing</a:t>
+              <a:t>-est</a:t>
             </a:r>
             <a:endParaRPr lang="en-US" sz="1300" dirty="0"/>
           </a:p>
@@ -33271,20 +33490,20 @@
       </p:sp>
       <p:sp>
         <p:nvSpPr>
-          <p:cNvPr id="28" name="Shape 26"/>
-          <p:cNvSpPr/>
-          <p:nvPr/>
-        </p:nvSpPr>
-        <p:spPr>
-          <a:xfrm>
-            <a:off x="365760" y="2404872"/>
+          <p:cNvPr id="31" name="Shape 29"/>
+          <p:cNvSpPr/>
+          <p:nvPr/>
+        </p:nvSpPr>
+        <p:spPr>
+          <a:xfrm>
+            <a:off x="365760" y="2825496"/>
             <a:ext cx="2468880" cy="402336"/>
           </a:xfrm>
           <a:prstGeom prst="rect">
             <a:avLst/>
           </a:prstGeom>
           <a:solidFill>
-            <a:srgbClr val="DDD6FE"/>
+            <a:srgbClr val="F1F5F9"/>
           </a:solidFill>
           <a:ln w="12700">
             <a:solidFill>
@@ -33296,14 +33515,64 @@
       </p:sp>
       <p:sp>
         <p:nvSpPr>
-          <p:cNvPr id="29" name="Text 27"/>
-          <p:cNvSpPr/>
-          <p:nvPr/>
-        </p:nvSpPr>
-        <p:spPr>
-          <a:xfrm>
-            <a:off x="365760" y="2404872"/>
-            <a:ext cx="2468880" cy="402336"/>
+          <p:cNvPr id="32" name="Shape 30"/>
+          <p:cNvSpPr/>
+          <p:nvPr/>
+        </p:nvSpPr>
+        <p:spPr>
+          <a:xfrm>
+            <a:off x="2971800" y="2825496"/>
+            <a:ext cx="2834640" cy="402336"/>
+          </a:xfrm>
+          <a:prstGeom prst="rect">
+            <a:avLst/>
+          </a:prstGeom>
+          <a:solidFill>
+            <a:srgbClr val="F1F5F9"/>
+          </a:solidFill>
+          <a:ln w="12700">
+            <a:solidFill>
+              <a:srgbClr val="E2E8F0"/>
+            </a:solidFill>
+            <a:prstDash val="solid"/>
+          </a:ln>
+        </p:spPr>
+      </p:sp>
+      <p:sp>
+        <p:nvSpPr>
+          <p:cNvPr id="33" name="Shape 31"/>
+          <p:cNvSpPr/>
+          <p:nvPr/>
+        </p:nvSpPr>
+        <p:spPr>
+          <a:xfrm>
+            <a:off x="5943600" y="2825496"/>
+            <a:ext cx="2834640" cy="402336"/>
+          </a:xfrm>
+          <a:prstGeom prst="rect">
+            <a:avLst/>
+          </a:prstGeom>
+          <a:solidFill>
+            <a:srgbClr val="FCE7F3"/>
+          </a:solidFill>
+          <a:ln w="12700">
+            <a:solidFill>
+              <a:srgbClr val="E2E8F0"/>
+            </a:solidFill>
+            <a:prstDash val="solid"/>
+          </a:ln>
+        </p:spPr>
+      </p:sp>
+      <p:sp>
+        <p:nvSpPr>
+          <p:cNvPr id="34" name="Text 32"/>
+          <p:cNvSpPr/>
+          <p:nvPr/>
+        </p:nvSpPr>
+        <p:spPr>
+          <a:xfrm>
+            <a:off x="5943600" y="2825496"/>
+            <a:ext cx="2834640" cy="402336"/>
           </a:xfrm>
           <a:prstGeom prst="rect">
             <a:avLst/>
@@ -33321,13 +33590,13 @@
             <a:r>
               <a:rPr lang="en-US" sz="1300" b="1" dirty="0">
                 <a:solidFill>
-                  <a:srgbClr val="4C1D95"/>
+                  <a:srgbClr val="9D174D"/>
                 </a:solidFill>
                 <a:latin typeface="Trebuchet MS" pitchFamily="34" charset="0"/>
                 <a:ea typeface="Trebuchet MS" pitchFamily="34" charset="-122"/>
                 <a:cs typeface="Trebuchet MS" pitchFamily="34" charset="-120"/>
               </a:rPr>
-              <a:t>un-</a:t>
+              <a:t>-ing</a:t>
             </a:r>
             <a:endParaRPr lang="en-US" sz="1300" dirty="0"/>
           </a:p>
@@ -33335,13 +33604,38 @@
       </p:sp>
       <p:sp>
         <p:nvSpPr>
-          <p:cNvPr id="30" name="Shape 28"/>
-          <p:cNvSpPr/>
-          <p:nvPr/>
-        </p:nvSpPr>
-        <p:spPr>
-          <a:xfrm>
-            <a:off x="2971800" y="2404872"/>
+          <p:cNvPr id="35" name="Shape 33"/>
+          <p:cNvSpPr/>
+          <p:nvPr/>
+        </p:nvSpPr>
+        <p:spPr>
+          <a:xfrm>
+            <a:off x="365760" y="3246120"/>
+            <a:ext cx="2468880" cy="402336"/>
+          </a:xfrm>
+          <a:prstGeom prst="rect">
+            <a:avLst/>
+          </a:prstGeom>
+          <a:solidFill>
+            <a:srgbClr val="F8FAFC"/>
+          </a:solidFill>
+          <a:ln w="12700">
+            <a:solidFill>
+              <a:srgbClr val="E2E8F0"/>
+            </a:solidFill>
+            <a:prstDash val="solid"/>
+          </a:ln>
+        </p:spPr>
+      </p:sp>
+      <p:sp>
+        <p:nvSpPr>
+          <p:cNvPr id="36" name="Shape 34"/>
+          <p:cNvSpPr/>
+          <p:nvPr/>
+        </p:nvSpPr>
+        <p:spPr>
+          <a:xfrm>
+            <a:off x="2971800" y="3246120"/>
             <a:ext cx="2834640" cy="402336"/>
           </a:xfrm>
           <a:prstGeom prst="rect">
@@ -33360,13 +33654,13 @@
       </p:sp>
       <p:sp>
         <p:nvSpPr>
-          <p:cNvPr id="31" name="Shape 29"/>
-          <p:cNvSpPr/>
-          <p:nvPr/>
-        </p:nvSpPr>
-        <p:spPr>
-          <a:xfrm>
-            <a:off x="5943600" y="2404872"/>
+          <p:cNvPr id="37" name="Shape 35"/>
+          <p:cNvSpPr/>
+          <p:nvPr/>
+        </p:nvSpPr>
+        <p:spPr>
+          <a:xfrm>
+            <a:off x="5943600" y="3246120"/>
             <a:ext cx="2834640" cy="402336"/>
           </a:xfrm>
           <a:prstGeom prst="rect">
@@ -33385,13 +33679,13 @@
       </p:sp>
       <p:sp>
         <p:nvSpPr>
-          <p:cNvPr id="32" name="Text 30"/>
-          <p:cNvSpPr/>
-          <p:nvPr/>
-        </p:nvSpPr>
-        <p:spPr>
-          <a:xfrm>
-            <a:off x="5943600" y="2404872"/>
+          <p:cNvPr id="38" name="Text 36"/>
+          <p:cNvSpPr/>
+          <p:nvPr/>
+        </p:nvSpPr>
+        <p:spPr>
+          <a:xfrm>
+            <a:off x="5943600" y="3246120"/>
             <a:ext cx="2834640" cy="402336"/>
           </a:xfrm>
           <a:prstGeom prst="rect">
@@ -33416,7 +33710,7 @@
                 <a:ea typeface="Trebuchet MS" pitchFamily="34" charset="-122"/>
                 <a:cs typeface="Trebuchet MS" pitchFamily="34" charset="-120"/>
               </a:rPr>
-              <a:t>-th</a:t>
+              <a:t>-ly</a:t>
             </a:r>
             <a:endParaRPr lang="en-US" sz="1300" dirty="0"/>
           </a:p>
@@ -33424,20 +33718,20 @@
       </p:sp>
       <p:sp>
         <p:nvSpPr>
-          <p:cNvPr id="33" name="Shape 31"/>
-          <p:cNvSpPr/>
-          <p:nvPr/>
-        </p:nvSpPr>
-        <p:spPr>
-          <a:xfrm>
-            <a:off x="365760" y="2825496"/>
+          <p:cNvPr id="39" name="Shape 37"/>
+          <p:cNvSpPr/>
+          <p:nvPr/>
+        </p:nvSpPr>
+        <p:spPr>
+          <a:xfrm>
+            <a:off x="365760" y="3666744"/>
             <a:ext cx="2468880" cy="402336"/>
           </a:xfrm>
           <a:prstGeom prst="rect">
             <a:avLst/>
           </a:prstGeom>
           <a:solidFill>
-            <a:srgbClr val="DDD6FE"/>
+            <a:srgbClr val="F1F5F9"/>
           </a:solidFill>
           <a:ln w="12700">
             <a:solidFill>
@@ -33449,14 +33743,64 @@
       </p:sp>
       <p:sp>
         <p:nvSpPr>
-          <p:cNvPr id="34" name="Text 32"/>
-          <p:cNvSpPr/>
-          <p:nvPr/>
-        </p:nvSpPr>
-        <p:spPr>
-          <a:xfrm>
-            <a:off x="365760" y="2825496"/>
-            <a:ext cx="2468880" cy="402336"/>
+          <p:cNvPr id="40" name="Shape 38"/>
+          <p:cNvSpPr/>
+          <p:nvPr/>
+        </p:nvSpPr>
+        <p:spPr>
+          <a:xfrm>
+            <a:off x="2971800" y="3666744"/>
+            <a:ext cx="2834640" cy="402336"/>
+          </a:xfrm>
+          <a:prstGeom prst="rect">
+            <a:avLst/>
+          </a:prstGeom>
+          <a:solidFill>
+            <a:srgbClr val="F1F5F9"/>
+          </a:solidFill>
+          <a:ln w="12700">
+            <a:solidFill>
+              <a:srgbClr val="E2E8F0"/>
+            </a:solidFill>
+            <a:prstDash val="solid"/>
+          </a:ln>
+        </p:spPr>
+      </p:sp>
+      <p:sp>
+        <p:nvSpPr>
+          <p:cNvPr id="41" name="Shape 39"/>
+          <p:cNvSpPr/>
+          <p:nvPr/>
+        </p:nvSpPr>
+        <p:spPr>
+          <a:xfrm>
+            <a:off x="5943600" y="3666744"/>
+            <a:ext cx="2834640" cy="402336"/>
+          </a:xfrm>
+          <a:prstGeom prst="rect">
+            <a:avLst/>
+          </a:prstGeom>
+          <a:solidFill>
+            <a:srgbClr val="FCE7F3"/>
+          </a:solidFill>
+          <a:ln w="12700">
+            <a:solidFill>
+              <a:srgbClr val="E2E8F0"/>
+            </a:solidFill>
+            <a:prstDash val="solid"/>
+          </a:ln>
+        </p:spPr>
+      </p:sp>
+      <p:sp>
+        <p:nvSpPr>
+          <p:cNvPr id="42" name="Text 40"/>
+          <p:cNvSpPr/>
+          <p:nvPr/>
+        </p:nvSpPr>
+        <p:spPr>
+          <a:xfrm>
+            <a:off x="5943600" y="3666744"/>
+            <a:ext cx="2834640" cy="402336"/>
           </a:xfrm>
           <a:prstGeom prst="rect">
             <a:avLst/>
@@ -33474,13 +33818,13 @@
             <a:r>
               <a:rPr lang="en-US" sz="1300" b="1" dirty="0">
                 <a:solidFill>
-                  <a:srgbClr val="4C1D95"/>
+                  <a:srgbClr val="9D174D"/>
                 </a:solidFill>
                 <a:latin typeface="Trebuchet MS" pitchFamily="34" charset="0"/>
                 <a:ea typeface="Trebuchet MS" pitchFamily="34" charset="-122"/>
                 <a:cs typeface="Trebuchet MS" pitchFamily="34" charset="-120"/>
               </a:rPr>
-              <a:t>over-</a:t>
+              <a:t>-s</a:t>
             </a:r>
             <a:endParaRPr lang="en-US" sz="1300" dirty="0"/>
           </a:p>
@@ -33488,64 +33832,14 @@
       </p:sp>
       <p:sp>
         <p:nvSpPr>
-          <p:cNvPr id="35" name="Shape 33"/>
-          <p:cNvSpPr/>
-          <p:nvPr/>
-        </p:nvSpPr>
-        <p:spPr>
-          <a:xfrm>
-            <a:off x="2971800" y="2825496"/>
-            <a:ext cx="2834640" cy="402336"/>
-          </a:xfrm>
-          <a:prstGeom prst="rect">
-            <a:avLst/>
-          </a:prstGeom>
-          <a:solidFill>
-            <a:srgbClr val="F1F5F9"/>
-          </a:solidFill>
-          <a:ln w="12700">
-            <a:solidFill>
-              <a:srgbClr val="E2E8F0"/>
-            </a:solidFill>
-            <a:prstDash val="solid"/>
-          </a:ln>
-        </p:spPr>
-      </p:sp>
-      <p:sp>
-        <p:nvSpPr>
-          <p:cNvPr id="36" name="Shape 34"/>
-          <p:cNvSpPr/>
-          <p:nvPr/>
-        </p:nvSpPr>
-        <p:spPr>
-          <a:xfrm>
-            <a:off x="5943600" y="2825496"/>
-            <a:ext cx="2834640" cy="402336"/>
-          </a:xfrm>
-          <a:prstGeom prst="rect">
-            <a:avLst/>
-          </a:prstGeom>
-          <a:solidFill>
-            <a:srgbClr val="FCE7F3"/>
-          </a:solidFill>
-          <a:ln w="12700">
-            <a:solidFill>
-              <a:srgbClr val="E2E8F0"/>
-            </a:solidFill>
-            <a:prstDash val="solid"/>
-          </a:ln>
-        </p:spPr>
-      </p:sp>
-      <p:sp>
-        <p:nvSpPr>
-          <p:cNvPr id="37" name="Text 35"/>
-          <p:cNvSpPr/>
-          <p:nvPr/>
-        </p:nvSpPr>
-        <p:spPr>
-          <a:xfrm>
-            <a:off x="5943600" y="2825496"/>
-            <a:ext cx="2834640" cy="402336"/>
+          <p:cNvPr id="43" name="Text 41"/>
+          <p:cNvSpPr/>
+          <p:nvPr/>
+        </p:nvSpPr>
+        <p:spPr>
+          <a:xfrm>
+            <a:off x="365760" y="3611880"/>
+            <a:ext cx="1828800" cy="347472"/>
           </a:xfrm>
           <a:prstGeom prst="rect">
             <a:avLst/>
@@ -33557,59 +33851,61 @@
           <a:bodyPr wrap="square" lIns="0" tIns="0" rIns="0" bIns="0" rtlCol="0" anchor="ctr"/>
           <a:lstStyle/>
           <a:p>
-            <a:pPr algn="ctr" indent="0" marL="0">
-              <a:buNone/>
-            </a:pPr>
-            <a:r>
-              <a:rPr lang="en-US" sz="1300" b="1" dirty="0">
-                <a:solidFill>
-                  <a:srgbClr val="9D174D"/>
+            <a:pPr algn="l" indent="0" marL="0">
+              <a:buNone/>
+            </a:pPr>
+            <a:r>
+              <a:rPr lang="en-US" sz="1200" b="1" dirty="0">
+                <a:solidFill>
+                  <a:srgbClr val="0F172A"/>
                 </a:solidFill>
                 <a:latin typeface="Trebuchet MS" pitchFamily="34" charset="0"/>
                 <a:ea typeface="Trebuchet MS" pitchFamily="34" charset="-122"/>
                 <a:cs typeface="Trebuchet MS" pitchFamily="34" charset="-120"/>
               </a:rPr>
-              <a:t>-er</a:t>
-            </a:r>
-            <a:endParaRPr lang="en-US" sz="1300" dirty="0"/>
-          </a:p>
-        </p:txBody>
-      </p:sp>
-      <p:sp>
-        <p:nvSpPr>
-          <p:cNvPr id="38" name="Shape 36"/>
-          <p:cNvSpPr/>
-          <p:nvPr/>
-        </p:nvSpPr>
-        <p:spPr>
-          <a:xfrm>
-            <a:off x="365760" y="3246120"/>
-            <a:ext cx="2468880" cy="402336"/>
-          </a:xfrm>
-          <a:prstGeom prst="rect">
-            <a:avLst/>
-          </a:prstGeom>
-          <a:solidFill>
-            <a:srgbClr val="DDD6FE"/>
-          </a:solidFill>
-          <a:ln w="12700">
-            <a:solidFill>
-              <a:srgbClr val="E2E8F0"/>
-            </a:solidFill>
-            <a:prstDash val="solid"/>
-          </a:ln>
-        </p:spPr>
-      </p:sp>
-      <p:sp>
-        <p:nvSpPr>
-          <p:cNvPr id="39" name="Text 37"/>
-          <p:cNvSpPr/>
-          <p:nvPr/>
-        </p:nvSpPr>
-        <p:spPr>
-          <a:xfrm>
-            <a:off x="365760" y="3246120"/>
-            <a:ext cx="2468880" cy="402336"/>
+              <a:t>Sample words:</a:t>
+            </a:r>
+            <a:endParaRPr lang="en-US" sz="1200" dirty="0"/>
+          </a:p>
+        </p:txBody>
+      </p:sp>
+      <p:sp>
+        <p:nvSpPr>
+          <p:cNvPr id="44" name="Shape 42"/>
+          <p:cNvSpPr/>
+          <p:nvPr/>
+        </p:nvSpPr>
+        <p:spPr>
+          <a:xfrm>
+            <a:off x="365760" y="4023360"/>
+            <a:ext cx="2011680" cy="402336"/>
+          </a:xfrm>
+          <a:prstGeom prst="rect">
+            <a:avLst>
+              <a:gd name="adj" fmla="val 13636"/>
+            </a:avLst>
+          </a:prstGeom>
+          <a:solidFill>
+            <a:srgbClr val="EEF2FF"/>
+          </a:solidFill>
+          <a:ln w="12700">
+            <a:solidFill>
+              <a:srgbClr val="6366F1"/>
+            </a:solidFill>
+            <a:prstDash val="solid"/>
+          </a:ln>
+        </p:spPr>
+      </p:sp>
+      <p:sp>
+        <p:nvSpPr>
+          <p:cNvPr id="45" name="Text 43"/>
+          <p:cNvSpPr/>
+          <p:nvPr/>
+        </p:nvSpPr>
+        <p:spPr>
+          <a:xfrm>
+            <a:off x="365760" y="4023360"/>
+            <a:ext cx="2011680" cy="402336"/>
           </a:xfrm>
           <a:prstGeom prst="rect">
             <a:avLst/>
@@ -33625,80 +33921,57 @@
               <a:buNone/>
             </a:pPr>
             <a:r>
-              <a:rPr lang="en-US" sz="1300" b="1" dirty="0">
-                <a:solidFill>
-                  <a:srgbClr val="4C1D95"/>
+              <a:rPr lang="en-US" sz="1200" b="1" dirty="0">
+                <a:solidFill>
+                  <a:srgbClr val="4338CA"/>
                 </a:solidFill>
                 <a:latin typeface="Trebuchet MS" pitchFamily="34" charset="0"/>
                 <a:ea typeface="Trebuchet MS" pitchFamily="34" charset="-122"/>
                 <a:cs typeface="Trebuchet MS" pitchFamily="34" charset="-120"/>
               </a:rPr>
-              <a:t>heart-</a:t>
-            </a:r>
-            <a:endParaRPr lang="en-US" sz="1300" dirty="0"/>
-          </a:p>
-        </p:txBody>
-      </p:sp>
-      <p:sp>
-        <p:nvSpPr>
-          <p:cNvPr id="40" name="Shape 38"/>
-          <p:cNvSpPr/>
-          <p:nvPr/>
-        </p:nvSpPr>
-        <p:spPr>
-          <a:xfrm>
-            <a:off x="2971800" y="3246120"/>
-            <a:ext cx="2834640" cy="402336"/>
-          </a:xfrm>
-          <a:prstGeom prst="rect">
-            <a:avLst/>
-          </a:prstGeom>
-          <a:solidFill>
-            <a:srgbClr val="F8FAFC"/>
-          </a:solidFill>
-          <a:ln w="12700">
-            <a:solidFill>
-              <a:srgbClr val="E2E8F0"/>
-            </a:solidFill>
-            <a:prstDash val="solid"/>
-          </a:ln>
-        </p:spPr>
-      </p:sp>
-      <p:sp>
-        <p:nvSpPr>
-          <p:cNvPr id="41" name="Shape 39"/>
-          <p:cNvSpPr/>
-          <p:nvPr/>
-        </p:nvSpPr>
-        <p:spPr>
-          <a:xfrm>
-            <a:off x="5943600" y="3246120"/>
-            <a:ext cx="2834640" cy="402336"/>
-          </a:xfrm>
-          <a:prstGeom prst="rect">
-            <a:avLst/>
-          </a:prstGeom>
-          <a:solidFill>
-            <a:srgbClr val="FCE7F3"/>
-          </a:solidFill>
-          <a:ln w="12700">
-            <a:solidFill>
-              <a:srgbClr val="E2E8F0"/>
-            </a:solidFill>
-            <a:prstDash val="solid"/>
-          </a:ln>
-        </p:spPr>
-      </p:sp>
-      <p:sp>
-        <p:nvSpPr>
-          <p:cNvPr id="42" name="Text 40"/>
-          <p:cNvSpPr/>
-          <p:nvPr/>
-        </p:nvSpPr>
-        <p:spPr>
-          <a:xfrm>
-            <a:off x="5943600" y="3246120"/>
-            <a:ext cx="2834640" cy="402336"/>
+              <a:t>warm</a:t>
+            </a:r>
+            <a:endParaRPr lang="en-US" sz="1200" dirty="0"/>
+          </a:p>
+        </p:txBody>
+      </p:sp>
+      <p:sp>
+        <p:nvSpPr>
+          <p:cNvPr id="46" name="Shape 44"/>
+          <p:cNvSpPr/>
+          <p:nvPr/>
+        </p:nvSpPr>
+        <p:spPr>
+          <a:xfrm>
+            <a:off x="2542032" y="4023360"/>
+            <a:ext cx="2011680" cy="402336"/>
+          </a:xfrm>
+          <a:prstGeom prst="rect">
+            <a:avLst>
+              <a:gd name="adj" fmla="val 13636"/>
+            </a:avLst>
+          </a:prstGeom>
+          <a:solidFill>
+            <a:srgbClr val="EEF2FF"/>
+          </a:solidFill>
+          <a:ln w="12700">
+            <a:solidFill>
+              <a:srgbClr val="6366F1"/>
+            </a:solidFill>
+            <a:prstDash val="solid"/>
+          </a:ln>
+        </p:spPr>
+      </p:sp>
+      <p:sp>
+        <p:nvSpPr>
+          <p:cNvPr id="47" name="Text 45"/>
+          <p:cNvSpPr/>
+          <p:nvPr/>
+        </p:nvSpPr>
+        <p:spPr>
+          <a:xfrm>
+            <a:off x="2542032" y="4023360"/>
+            <a:ext cx="2011680" cy="402336"/>
           </a:xfrm>
           <a:prstGeom prst="rect">
             <a:avLst/>
@@ -33714,30 +33987,57 @@
               <a:buNone/>
             </a:pPr>
             <a:r>
-              <a:rPr lang="en-US" sz="1300" b="1" dirty="0">
-                <a:solidFill>
-                  <a:srgbClr val="9D174D"/>
+              <a:rPr lang="en-US" sz="1200" b="1" dirty="0">
+                <a:solidFill>
+                  <a:srgbClr val="4338CA"/>
                 </a:solidFill>
                 <a:latin typeface="Trebuchet MS" pitchFamily="34" charset="0"/>
                 <a:ea typeface="Trebuchet MS" pitchFamily="34" charset="-122"/>
                 <a:cs typeface="Trebuchet MS" pitchFamily="34" charset="-120"/>
               </a:rPr>
-              <a:t>-ly</a:t>
-            </a:r>
-            <a:endParaRPr lang="en-US" sz="1300" dirty="0"/>
-          </a:p>
-        </p:txBody>
-      </p:sp>
-      <p:sp>
-        <p:nvSpPr>
-          <p:cNvPr id="43" name="Text 41"/>
-          <p:cNvSpPr/>
-          <p:nvPr/>
-        </p:nvSpPr>
-        <p:spPr>
-          <a:xfrm>
-            <a:off x="365760" y="3611880"/>
-            <a:ext cx="1828800" cy="347472"/>
+              <a:t>warms</a:t>
+            </a:r>
+            <a:endParaRPr lang="en-US" sz="1200" dirty="0"/>
+          </a:p>
+        </p:txBody>
+      </p:sp>
+      <p:sp>
+        <p:nvSpPr>
+          <p:cNvPr id="48" name="Shape 46"/>
+          <p:cNvSpPr/>
+          <p:nvPr/>
+        </p:nvSpPr>
+        <p:spPr>
+          <a:xfrm>
+            <a:off x="4718304" y="4023360"/>
+            <a:ext cx="2011680" cy="402336"/>
+          </a:xfrm>
+          <a:prstGeom prst="rect">
+            <a:avLst>
+              <a:gd name="adj" fmla="val 13636"/>
+            </a:avLst>
+          </a:prstGeom>
+          <a:solidFill>
+            <a:srgbClr val="EEF2FF"/>
+          </a:solidFill>
+          <a:ln w="12700">
+            <a:solidFill>
+              <a:srgbClr val="6366F1"/>
+            </a:solidFill>
+            <a:prstDash val="solid"/>
+          </a:ln>
+        </p:spPr>
+      </p:sp>
+      <p:sp>
+        <p:nvSpPr>
+          <p:cNvPr id="49" name="Text 47"/>
+          <p:cNvSpPr/>
+          <p:nvPr/>
+        </p:nvSpPr>
+        <p:spPr>
+          <a:xfrm>
+            <a:off x="4718304" y="4023360"/>
+            <a:ext cx="2011680" cy="402336"/>
           </a:xfrm>
           <a:prstGeom prst="rect">
             <a:avLst/>
@@ -33749,19 +34049,19 @@
           <a:bodyPr wrap="square" lIns="0" tIns="0" rIns="0" bIns="0" rtlCol="0" anchor="ctr"/>
           <a:lstStyle/>
           <a:p>
-            <a:pPr algn="l" indent="0" marL="0">
+            <a:pPr algn="ctr" indent="0" marL="0">
               <a:buNone/>
             </a:pPr>
             <a:r>
               <a:rPr lang="en-US" sz="1200" b="1" dirty="0">
                 <a:solidFill>
-                  <a:srgbClr val="0F172A"/>
+                  <a:srgbClr val="4338CA"/>
                 </a:solidFill>
                 <a:latin typeface="Trebuchet MS" pitchFamily="34" charset="0"/>
                 <a:ea typeface="Trebuchet MS" pitchFamily="34" charset="-122"/>
                 <a:cs typeface="Trebuchet MS" pitchFamily="34" charset="-120"/>
               </a:rPr>
-              <a:t>Sample words:</a:t>
+              <a:t>rewarm</a:t>
             </a:r>
             <a:endParaRPr lang="en-US" sz="1200" dirty="0"/>
           </a:p>
@@ -33769,13 +34069,13 @@
       </p:sp>
       <p:sp>
         <p:nvSpPr>
-          <p:cNvPr id="44" name="Shape 42"/>
-          <p:cNvSpPr/>
-          <p:nvPr/>
-        </p:nvSpPr>
-        <p:spPr>
-          <a:xfrm>
-            <a:off x="365760" y="4023360"/>
+          <p:cNvPr id="50" name="Shape 48"/>
+          <p:cNvSpPr/>
+          <p:nvPr/>
+        </p:nvSpPr>
+        <p:spPr>
+          <a:xfrm>
+            <a:off x="6894576" y="4023360"/>
             <a:ext cx="2011680" cy="402336"/>
           </a:xfrm>
           <a:prstGeom prst="rect">
@@ -33796,13 +34096,13 @@
       </p:sp>
       <p:sp>
         <p:nvSpPr>
-          <p:cNvPr id="45" name="Text 43"/>
-          <p:cNvSpPr/>
-          <p:nvPr/>
-        </p:nvSpPr>
-        <p:spPr>
-          <a:xfrm>
-            <a:off x="365760" y="4023360"/>
+          <p:cNvPr id="51" name="Text 49"/>
+          <p:cNvSpPr/>
+          <p:nvPr/>
+        </p:nvSpPr>
+        <p:spPr>
+          <a:xfrm>
+            <a:off x="6894576" y="4023360"/>
             <a:ext cx="2011680" cy="402336"/>
           </a:xfrm>
           <a:prstGeom prst="rect">
@@ -33828,468 +34128,6 @@
                 <a:cs typeface="Trebuchet MS" pitchFamily="34" charset="-120"/>
               </a:rPr>
               <a:t>warmed</a:t>
-            </a:r>
-            <a:endParaRPr lang="en-US" sz="1200" dirty="0"/>
-          </a:p>
-        </p:txBody>
-      </p:sp>
-      <p:sp>
-        <p:nvSpPr>
-          <p:cNvPr id="46" name="Shape 44"/>
-          <p:cNvSpPr/>
-          <p:nvPr/>
-        </p:nvSpPr>
-        <p:spPr>
-          <a:xfrm>
-            <a:off x="2542032" y="4023360"/>
-            <a:ext cx="2011680" cy="402336"/>
-          </a:xfrm>
-          <a:prstGeom prst="rect">
-            <a:avLst>
-              <a:gd name="adj" fmla="val 13636"/>
-            </a:avLst>
-          </a:prstGeom>
-          <a:solidFill>
-            <a:srgbClr val="EEF2FF"/>
-          </a:solidFill>
-          <a:ln w="12700">
-            <a:solidFill>
-              <a:srgbClr val="6366F1"/>
-            </a:solidFill>
-            <a:prstDash val="solid"/>
-          </a:ln>
-        </p:spPr>
-      </p:sp>
-      <p:sp>
-        <p:nvSpPr>
-          <p:cNvPr id="47" name="Text 45"/>
-          <p:cNvSpPr/>
-          <p:nvPr/>
-        </p:nvSpPr>
-        <p:spPr>
-          <a:xfrm>
-            <a:off x="2542032" y="4023360"/>
-            <a:ext cx="2011680" cy="402336"/>
-          </a:xfrm>
-          <a:prstGeom prst="rect">
-            <a:avLst/>
-          </a:prstGeom>
-          <a:noFill/>
-          <a:ln/>
-        </p:spPr>
-        <p:txBody>
-          <a:bodyPr wrap="square" lIns="0" tIns="0" rIns="0" bIns="0" rtlCol="0" anchor="ctr"/>
-          <a:lstStyle/>
-          <a:p>
-            <a:pPr algn="ctr" indent="0" marL="0">
-              <a:buNone/>
-            </a:pPr>
-            <a:r>
-              <a:rPr lang="en-US" sz="1200" b="1" dirty="0">
-                <a:solidFill>
-                  <a:srgbClr val="4338CA"/>
-                </a:solidFill>
-                <a:latin typeface="Trebuchet MS" pitchFamily="34" charset="0"/>
-                <a:ea typeface="Trebuchet MS" pitchFamily="34" charset="-122"/>
-                <a:cs typeface="Trebuchet MS" pitchFamily="34" charset="-120"/>
-              </a:rPr>
-              <a:t>warming</a:t>
-            </a:r>
-            <a:endParaRPr lang="en-US" sz="1200" dirty="0"/>
-          </a:p>
-        </p:txBody>
-      </p:sp>
-      <p:sp>
-        <p:nvSpPr>
-          <p:cNvPr id="48" name="Shape 46"/>
-          <p:cNvSpPr/>
-          <p:nvPr/>
-        </p:nvSpPr>
-        <p:spPr>
-          <a:xfrm>
-            <a:off x="4718304" y="4023360"/>
-            <a:ext cx="2011680" cy="402336"/>
-          </a:xfrm>
-          <a:prstGeom prst="rect">
-            <a:avLst>
-              <a:gd name="adj" fmla="val 13636"/>
-            </a:avLst>
-          </a:prstGeom>
-          <a:solidFill>
-            <a:srgbClr val="EEF2FF"/>
-          </a:solidFill>
-          <a:ln w="12700">
-            <a:solidFill>
-              <a:srgbClr val="6366F1"/>
-            </a:solidFill>
-            <a:prstDash val="solid"/>
-          </a:ln>
-        </p:spPr>
-      </p:sp>
-      <p:sp>
-        <p:nvSpPr>
-          <p:cNvPr id="49" name="Text 47"/>
-          <p:cNvSpPr/>
-          <p:nvPr/>
-        </p:nvSpPr>
-        <p:spPr>
-          <a:xfrm>
-            <a:off x="4718304" y="4023360"/>
-            <a:ext cx="2011680" cy="402336"/>
-          </a:xfrm>
-          <a:prstGeom prst="rect">
-            <a:avLst/>
-          </a:prstGeom>
-          <a:noFill/>
-          <a:ln/>
-        </p:spPr>
-        <p:txBody>
-          <a:bodyPr wrap="square" lIns="0" tIns="0" rIns="0" bIns="0" rtlCol="0" anchor="ctr"/>
-          <a:lstStyle/>
-          <a:p>
-            <a:pPr algn="ctr" indent="0" marL="0">
-              <a:buNone/>
-            </a:pPr>
-            <a:r>
-              <a:rPr lang="en-US" sz="1200" b="1" dirty="0">
-                <a:solidFill>
-                  <a:srgbClr val="4338CA"/>
-                </a:solidFill>
-                <a:latin typeface="Trebuchet MS" pitchFamily="34" charset="0"/>
-                <a:ea typeface="Trebuchet MS" pitchFamily="34" charset="-122"/>
-                <a:cs typeface="Trebuchet MS" pitchFamily="34" charset="-120"/>
-              </a:rPr>
-              <a:t>warmth</a:t>
-            </a:r>
-            <a:endParaRPr lang="en-US" sz="1200" dirty="0"/>
-          </a:p>
-        </p:txBody>
-      </p:sp>
-      <p:sp>
-        <p:nvSpPr>
-          <p:cNvPr id="50" name="Shape 48"/>
-          <p:cNvSpPr/>
-          <p:nvPr/>
-        </p:nvSpPr>
-        <p:spPr>
-          <a:xfrm>
-            <a:off x="6894576" y="4023360"/>
-            <a:ext cx="2011680" cy="402336"/>
-          </a:xfrm>
-          <a:prstGeom prst="rect">
-            <a:avLst>
-              <a:gd name="adj" fmla="val 13636"/>
-            </a:avLst>
-          </a:prstGeom>
-          <a:solidFill>
-            <a:srgbClr val="EEF2FF"/>
-          </a:solidFill>
-          <a:ln w="12700">
-            <a:solidFill>
-              <a:srgbClr val="6366F1"/>
-            </a:solidFill>
-            <a:prstDash val="solid"/>
-          </a:ln>
-        </p:spPr>
-      </p:sp>
-      <p:sp>
-        <p:nvSpPr>
-          <p:cNvPr id="51" name="Text 49"/>
-          <p:cNvSpPr/>
-          <p:nvPr/>
-        </p:nvSpPr>
-        <p:spPr>
-          <a:xfrm>
-            <a:off x="6894576" y="4023360"/>
-            <a:ext cx="2011680" cy="402336"/>
-          </a:xfrm>
-          <a:prstGeom prst="rect">
-            <a:avLst/>
-          </a:prstGeom>
-          <a:noFill/>
-          <a:ln/>
-        </p:spPr>
-        <p:txBody>
-          <a:bodyPr wrap="square" lIns="0" tIns="0" rIns="0" bIns="0" rtlCol="0" anchor="ctr"/>
-          <a:lstStyle/>
-          <a:p>
-            <a:pPr algn="ctr" indent="0" marL="0">
-              <a:buNone/>
-            </a:pPr>
-            <a:r>
-              <a:rPr lang="en-US" sz="1200" b="1" dirty="0">
-                <a:solidFill>
-                  <a:srgbClr val="4338CA"/>
-                </a:solidFill>
-                <a:latin typeface="Trebuchet MS" pitchFamily="34" charset="0"/>
-                <a:ea typeface="Trebuchet MS" pitchFamily="34" charset="-122"/>
-                <a:cs typeface="Trebuchet MS" pitchFamily="34" charset="-120"/>
-              </a:rPr>
-              <a:t>warmer</a:t>
-            </a:r>
-            <a:endParaRPr lang="en-US" sz="1200" dirty="0"/>
-          </a:p>
-        </p:txBody>
-      </p:sp>
-      <p:sp>
-        <p:nvSpPr>
-          <p:cNvPr id="52" name="Shape 50"/>
-          <p:cNvSpPr/>
-          <p:nvPr/>
-        </p:nvSpPr>
-        <p:spPr>
-          <a:xfrm>
-            <a:off x="365760" y="4498848"/>
-            <a:ext cx="2011680" cy="402336"/>
-          </a:xfrm>
-          <a:prstGeom prst="rect">
-            <a:avLst>
-              <a:gd name="adj" fmla="val 13636"/>
-            </a:avLst>
-          </a:prstGeom>
-          <a:solidFill>
-            <a:srgbClr val="EEF2FF"/>
-          </a:solidFill>
-          <a:ln w="12700">
-            <a:solidFill>
-              <a:srgbClr val="6366F1"/>
-            </a:solidFill>
-            <a:prstDash val="solid"/>
-          </a:ln>
-        </p:spPr>
-      </p:sp>
-      <p:sp>
-        <p:nvSpPr>
-          <p:cNvPr id="53" name="Text 51"/>
-          <p:cNvSpPr/>
-          <p:nvPr/>
-        </p:nvSpPr>
-        <p:spPr>
-          <a:xfrm>
-            <a:off x="365760" y="4498848"/>
-            <a:ext cx="2011680" cy="402336"/>
-          </a:xfrm>
-          <a:prstGeom prst="rect">
-            <a:avLst/>
-          </a:prstGeom>
-          <a:noFill/>
-          <a:ln/>
-        </p:spPr>
-        <p:txBody>
-          <a:bodyPr wrap="square" lIns="0" tIns="0" rIns="0" bIns="0" rtlCol="0" anchor="ctr"/>
-          <a:lstStyle/>
-          <a:p>
-            <a:pPr algn="ctr" indent="0" marL="0">
-              <a:buNone/>
-            </a:pPr>
-            <a:r>
-              <a:rPr lang="en-US" sz="1200" b="1" dirty="0">
-                <a:solidFill>
-                  <a:srgbClr val="4338CA"/>
-                </a:solidFill>
-                <a:latin typeface="Trebuchet MS" pitchFamily="34" charset="0"/>
-                <a:ea typeface="Trebuchet MS" pitchFamily="34" charset="-122"/>
-                <a:cs typeface="Trebuchet MS" pitchFamily="34" charset="-120"/>
-              </a:rPr>
-              <a:t>warmly</a:t>
-            </a:r>
-            <a:endParaRPr lang="en-US" sz="1200" dirty="0"/>
-          </a:p>
-        </p:txBody>
-      </p:sp>
-      <p:sp>
-        <p:nvSpPr>
-          <p:cNvPr id="54" name="Shape 52"/>
-          <p:cNvSpPr/>
-          <p:nvPr/>
-        </p:nvSpPr>
-        <p:spPr>
-          <a:xfrm>
-            <a:off x="2542032" y="4498848"/>
-            <a:ext cx="2011680" cy="402336"/>
-          </a:xfrm>
-          <a:prstGeom prst="rect">
-            <a:avLst>
-              <a:gd name="adj" fmla="val 13636"/>
-            </a:avLst>
-          </a:prstGeom>
-          <a:solidFill>
-            <a:srgbClr val="EEF2FF"/>
-          </a:solidFill>
-          <a:ln w="12700">
-            <a:solidFill>
-              <a:srgbClr val="6366F1"/>
-            </a:solidFill>
-            <a:prstDash val="solid"/>
-          </a:ln>
-        </p:spPr>
-      </p:sp>
-      <p:sp>
-        <p:nvSpPr>
-          <p:cNvPr id="55" name="Text 53"/>
-          <p:cNvSpPr/>
-          <p:nvPr/>
-        </p:nvSpPr>
-        <p:spPr>
-          <a:xfrm>
-            <a:off x="2542032" y="4498848"/>
-            <a:ext cx="2011680" cy="402336"/>
-          </a:xfrm>
-          <a:prstGeom prst="rect">
-            <a:avLst/>
-          </a:prstGeom>
-          <a:noFill/>
-          <a:ln/>
-        </p:spPr>
-        <p:txBody>
-          <a:bodyPr wrap="square" lIns="0" tIns="0" rIns="0" bIns="0" rtlCol="0" anchor="ctr"/>
-          <a:lstStyle/>
-          <a:p>
-            <a:pPr algn="ctr" indent="0" marL="0">
-              <a:buNone/>
-            </a:pPr>
-            <a:r>
-              <a:rPr lang="en-US" sz="1200" b="1" dirty="0">
-                <a:solidFill>
-                  <a:srgbClr val="4338CA"/>
-                </a:solidFill>
-                <a:latin typeface="Trebuchet MS" pitchFamily="34" charset="0"/>
-                <a:ea typeface="Trebuchet MS" pitchFamily="34" charset="-122"/>
-                <a:cs typeface="Trebuchet MS" pitchFamily="34" charset="-120"/>
-              </a:rPr>
-              <a:t>rewarm</a:t>
-            </a:r>
-            <a:endParaRPr lang="en-US" sz="1200" dirty="0"/>
-          </a:p>
-        </p:txBody>
-      </p:sp>
-      <p:sp>
-        <p:nvSpPr>
-          <p:cNvPr id="56" name="Shape 54"/>
-          <p:cNvSpPr/>
-          <p:nvPr/>
-        </p:nvSpPr>
-        <p:spPr>
-          <a:xfrm>
-            <a:off x="4718304" y="4498848"/>
-            <a:ext cx="2011680" cy="402336"/>
-          </a:xfrm>
-          <a:prstGeom prst="rect">
-            <a:avLst>
-              <a:gd name="adj" fmla="val 13636"/>
-            </a:avLst>
-          </a:prstGeom>
-          <a:solidFill>
-            <a:srgbClr val="EEF2FF"/>
-          </a:solidFill>
-          <a:ln w="12700">
-            <a:solidFill>
-              <a:srgbClr val="6366F1"/>
-            </a:solidFill>
-            <a:prstDash val="solid"/>
-          </a:ln>
-        </p:spPr>
-      </p:sp>
-      <p:sp>
-        <p:nvSpPr>
-          <p:cNvPr id="57" name="Text 55"/>
-          <p:cNvSpPr/>
-          <p:nvPr/>
-        </p:nvSpPr>
-        <p:spPr>
-          <a:xfrm>
-            <a:off x="4718304" y="4498848"/>
-            <a:ext cx="2011680" cy="402336"/>
-          </a:xfrm>
-          <a:prstGeom prst="rect">
-            <a:avLst/>
-          </a:prstGeom>
-          <a:noFill/>
-          <a:ln/>
-        </p:spPr>
-        <p:txBody>
-          <a:bodyPr wrap="square" lIns="0" tIns="0" rIns="0" bIns="0" rtlCol="0" anchor="ctr"/>
-          <a:lstStyle/>
-          <a:p>
-            <a:pPr algn="ctr" indent="0" marL="0">
-              <a:buNone/>
-            </a:pPr>
-            <a:r>
-              <a:rPr lang="en-US" sz="1200" b="1" dirty="0">
-                <a:solidFill>
-                  <a:srgbClr val="4338CA"/>
-                </a:solidFill>
-                <a:latin typeface="Trebuchet MS" pitchFamily="34" charset="0"/>
-                <a:ea typeface="Trebuchet MS" pitchFamily="34" charset="-122"/>
-                <a:cs typeface="Trebuchet MS" pitchFamily="34" charset="-120"/>
-              </a:rPr>
-              <a:t>lukewarm</a:t>
-            </a:r>
-            <a:endParaRPr lang="en-US" sz="1200" dirty="0"/>
-          </a:p>
-        </p:txBody>
-      </p:sp>
-      <p:sp>
-        <p:nvSpPr>
-          <p:cNvPr id="58" name="Shape 56"/>
-          <p:cNvSpPr/>
-          <p:nvPr/>
-        </p:nvSpPr>
-        <p:spPr>
-          <a:xfrm>
-            <a:off x="6894576" y="4498848"/>
-            <a:ext cx="2011680" cy="402336"/>
-          </a:xfrm>
-          <a:prstGeom prst="rect">
-            <a:avLst>
-              <a:gd name="adj" fmla="val 13636"/>
-            </a:avLst>
-          </a:prstGeom>
-          <a:solidFill>
-            <a:srgbClr val="EEF2FF"/>
-          </a:solidFill>
-          <a:ln w="12700">
-            <a:solidFill>
-              <a:srgbClr val="6366F1"/>
-            </a:solidFill>
-            <a:prstDash val="solid"/>
-          </a:ln>
-        </p:spPr>
-      </p:sp>
-      <p:sp>
-        <p:nvSpPr>
-          <p:cNvPr id="59" name="Text 57"/>
-          <p:cNvSpPr/>
-          <p:nvPr/>
-        </p:nvSpPr>
-        <p:spPr>
-          <a:xfrm>
-            <a:off x="6894576" y="4498848"/>
-            <a:ext cx="2011680" cy="402336"/>
-          </a:xfrm>
-          <a:prstGeom prst="rect">
-            <a:avLst/>
-          </a:prstGeom>
-          <a:noFill/>
-          <a:ln/>
-        </p:spPr>
-        <p:txBody>
-          <a:bodyPr wrap="square" lIns="0" tIns="0" rIns="0" bIns="0" rtlCol="0" anchor="ctr"/>
-          <a:lstStyle/>
-          <a:p>
-            <a:pPr algn="ctr" indent="0" marL="0">
-              <a:buNone/>
-            </a:pPr>
-            <a:r>
-              <a:rPr lang="en-US" sz="1200" b="1" dirty="0">
-                <a:solidFill>
-                  <a:srgbClr val="4338CA"/>
-                </a:solidFill>
-                <a:latin typeface="Trebuchet MS" pitchFamily="34" charset="0"/>
-                <a:ea typeface="Trebuchet MS" pitchFamily="34" charset="-122"/>
-                <a:cs typeface="Trebuchet MS" pitchFamily="34" charset="-120"/>
-              </a:rPr>
-              <a:t>warmhearted</a:t>
             </a:r>
             <a:endParaRPr lang="en-US" sz="1200" dirty="0"/>
           </a:p>
@@ -34581,7 +34419,7 @@
                 <a:ea typeface="Calibri" pitchFamily="34" charset="-122"/>
                 <a:cs typeface="Calibri" pitchFamily="34" charset="-120"/>
               </a:rPr>
-              <a:t>Word Labs  •  wordlabs.app  •  Root: 'warm' = having moderate heat</a:t>
+              <a:t>Word Labs  •  wordlabs.app  •  Root: 'warm' = fairly hot; friendly</a:t>
             </a:r>
             <a:endParaRPr lang="en-US" sz="800" dirty="0"/>
           </a:p>
@@ -34745,7 +34583,7 @@
                 <a:ea typeface="Calibri" pitchFamily="34" charset="-122"/>
                 <a:cs typeface="Calibri" pitchFamily="34" charset="-120"/>
               </a:rPr>
-              <a:t>The core part of a word carrying its basic meaning. For example, 'warm' means 'having moderate heat'.</a:t>
+              <a:t>The core part of a word carrying its basic meaning. For example, 'warm' means 'fairly hot; friendly'.</a:t>
             </a:r>
             <a:endParaRPr lang="en-US" sz="1350" dirty="0"/>
           </a:p>
@@ -35365,7 +35203,7 @@
                 <a:ea typeface="Calibri" pitchFamily="34" charset="-122"/>
                 <a:cs typeface="Calibri" pitchFamily="34" charset="-120"/>
               </a:rPr>
-              <a:t>Word Labs  •  wordlabs.app  •  Root: 'warm' = having moderate heat</a:t>
+              <a:t>Word Labs  •  wordlabs.app  •  Root: 'warm' = fairly hot; friendly</a:t>
             </a:r>
             <a:endParaRPr lang="en-US" sz="800" dirty="0"/>
           </a:p>
@@ -35477,7 +35315,7 @@
                 <a:ea typeface="Calibri" pitchFamily="34" charset="-122"/>
                 <a:cs typeface="Calibri" pitchFamily="34" charset="-120"/>
               </a:rPr>
-              <a:t>1.  The root 'warm' means extremely cold.</a:t>
+              <a:t>1.  'warms' means 'makes something warmer'.</a:t>
             </a:r>
             <a:endParaRPr lang="en-US" sz="1300" dirty="0"/>
           </a:p>
@@ -35500,11 +35338,11 @@
             </a:avLst>
           </a:prstGeom>
           <a:solidFill>
-            <a:srgbClr val="FEE2E2"/>
-          </a:solidFill>
-          <a:ln w="12700">
-            <a:solidFill>
-              <a:srgbClr val="DC2626"/>
+            <a:srgbClr val="DCFCE7"/>
+          </a:solidFill>
+          <a:ln w="12700">
+            <a:solidFill>
+              <a:srgbClr val="16A34A"/>
             </a:solidFill>
             <a:prstDash val="solid"/>
           </a:ln>
@@ -35537,13 +35375,13 @@
             <a:r>
               <a:rPr lang="en-US" sz="1100" b="1" dirty="0">
                 <a:solidFill>
-                  <a:srgbClr val="DC2626"/>
+                  <a:srgbClr val="16A34A"/>
                 </a:solidFill>
                 <a:latin typeface="Trebuchet MS" pitchFamily="34" charset="0"/>
                 <a:ea typeface="Trebuchet MS" pitchFamily="34" charset="-122"/>
                 <a:cs typeface="Trebuchet MS" pitchFamily="34" charset="-120"/>
               </a:rPr>
-              <a:t>FALSE</a:t>
+              <a:t>TRUE</a:t>
             </a:r>
             <a:endParaRPr lang="en-US" sz="1100" dirty="0"/>
           </a:p>
@@ -35616,7 +35454,7 @@
                 <a:ea typeface="Calibri" pitchFamily="34" charset="-122"/>
                 <a:cs typeface="Calibri" pitchFamily="34" charset="-120"/>
               </a:rPr>
-              <a:t>2.  A 'warmhearted' person is unkind and unfriendly.</a:t>
+              <a:t>2.  'warms' means 'makes something much colder'.</a:t>
             </a:r>
             <a:endParaRPr lang="en-US" sz="1300" dirty="0"/>
           </a:p>
@@ -35755,7 +35593,7 @@
                 <a:ea typeface="Calibri" pitchFamily="34" charset="-122"/>
                 <a:cs typeface="Calibri" pitchFamily="34" charset="-120"/>
               </a:rPr>
-              <a:t>3.  The word 'lukewarm' contains the root 'warm'.</a:t>
+              <a:t>3.  'warm' means 'fairly hot; friendly'.</a:t>
             </a:r>
             <a:endParaRPr lang="en-US" sz="1300" dirty="0"/>
           </a:p>
@@ -35894,7 +35732,7 @@
                 <a:ea typeface="Calibri" pitchFamily="34" charset="-122"/>
                 <a:cs typeface="Calibri" pitchFamily="34" charset="-120"/>
               </a:rPr>
-              <a:t>4.  The word 'warming' uses the suffix '-ing' added to the root 'warm'.</a:t>
+              <a:t>4.  'warm' means 'having a comfortably high temperature, or friendly and kind'.</a:t>
             </a:r>
             <a:endParaRPr lang="en-US" sz="1300" dirty="0"/>
           </a:p>
@@ -36033,7 +35871,7 @@
                 <a:ea typeface="Calibri" pitchFamily="34" charset="-122"/>
                 <a:cs typeface="Calibri" pitchFamily="34" charset="-120"/>
               </a:rPr>
-              <a:t>5.  Adding the suffix '-th' to 'warm' makes the word 'warmth'.</a:t>
+              <a:t>5.  'warm' means 'extremely cold and icy'.</a:t>
             </a:r>
             <a:endParaRPr lang="en-US" sz="1300" dirty="0"/>
           </a:p>
@@ -36056,11 +35894,11 @@
             </a:avLst>
           </a:prstGeom>
           <a:solidFill>
-            <a:srgbClr val="DCFCE7"/>
-          </a:solidFill>
-          <a:ln w="12700">
-            <a:solidFill>
-              <a:srgbClr val="16A34A"/>
+            <a:srgbClr val="FEE2E2"/>
+          </a:solidFill>
+          <a:ln w="12700">
+            <a:solidFill>
+              <a:srgbClr val="DC2626"/>
             </a:solidFill>
             <a:prstDash val="solid"/>
           </a:ln>
@@ -36093,13 +35931,13 @@
             <a:r>
               <a:rPr lang="en-US" sz="1100" b="1" dirty="0">
                 <a:solidFill>
-                  <a:srgbClr val="16A34A"/>
+                  <a:srgbClr val="DC2626"/>
                 </a:solidFill>
                 <a:latin typeface="Trebuchet MS" pitchFamily="34" charset="0"/>
                 <a:ea typeface="Trebuchet MS" pitchFamily="34" charset="-122"/>
                 <a:cs typeface="Trebuchet MS" pitchFamily="34" charset="-120"/>
               </a:rPr>
-              <a:t>TRUE</a:t>
+              <a:t>FALSE</a:t>
             </a:r>
             <a:endParaRPr lang="en-US" sz="1100" dirty="0"/>
           </a:p>
@@ -36391,7 +36229,7 @@
                 <a:ea typeface="Calibri" pitchFamily="34" charset="-122"/>
                 <a:cs typeface="Calibri" pitchFamily="34" charset="-120"/>
               </a:rPr>
-              <a:t>Word Labs  •  wordlabs.app  •  Root: 'warm' = having moderate heat</a:t>
+              <a:t>Word Labs  •  wordlabs.app  •  Root: 'warm' = fairly hot; friendly</a:t>
             </a:r>
             <a:endParaRPr lang="en-US" sz="800" dirty="0"/>
           </a:p>
@@ -36528,7 +36366,7 @@
                 <a:ea typeface="Trebuchet MS" pitchFamily="34" charset="-122"/>
                 <a:cs typeface="Trebuchet MS" pitchFamily="34" charset="-120"/>
               </a:rPr>
-              <a:t>having moderate heat</a:t>
+              <a:t>fairly hot; friendly</a:t>
             </a:r>
             <a:endParaRPr lang="en-US" sz="2000" dirty="0"/>
           </a:p>
@@ -36567,7 +36405,7 @@
                 <a:ea typeface="Calibri" pitchFamily="34" charset="-122"/>
                 <a:cs typeface="Calibri" pitchFamily="34" charset="-120"/>
               </a:rPr>
-              <a:t>Origin: Latin: formus</a:t>
+              <a:t>Origin: Anglo-Saxon (Old English) root</a:t>
             </a:r>
             <a:endParaRPr lang="en-US" sz="1100" dirty="0"/>
           </a:p>
@@ -36672,7 +36510,7 @@
                 <a:ea typeface="Trebuchet MS" pitchFamily="34" charset="-122"/>
                 <a:cs typeface="Trebuchet MS" pitchFamily="34" charset="-120"/>
               </a:rPr>
-              <a:t>warmed</a:t>
+              <a:t>warm</a:t>
             </a:r>
             <a:endParaRPr lang="en-US" sz="1300" dirty="0"/>
           </a:p>
@@ -36738,7 +36576,7 @@
                 <a:ea typeface="Trebuchet MS" pitchFamily="34" charset="-122"/>
                 <a:cs typeface="Trebuchet MS" pitchFamily="34" charset="-120"/>
               </a:rPr>
-              <a:t>warming</a:t>
+              <a:t>warms</a:t>
             </a:r>
             <a:endParaRPr lang="en-US" sz="1300" dirty="0"/>
           </a:p>
@@ -36804,7 +36642,7 @@
                 <a:ea typeface="Trebuchet MS" pitchFamily="34" charset="-122"/>
                 <a:cs typeface="Trebuchet MS" pitchFamily="34" charset="-120"/>
               </a:rPr>
-              <a:t>warmth</a:t>
+              <a:t>rewarm</a:t>
             </a:r>
             <a:endParaRPr lang="en-US" sz="1300" dirty="0"/>
           </a:p>
@@ -36870,205 +36708,7 @@
                 <a:ea typeface="Trebuchet MS" pitchFamily="34" charset="-122"/>
                 <a:cs typeface="Trebuchet MS" pitchFamily="34" charset="-120"/>
               </a:rPr>
-              <a:t>warmer</a:t>
-            </a:r>
-            <a:endParaRPr lang="en-US" sz="1300" dirty="0"/>
-          </a:p>
-        </p:txBody>
-      </p:sp>
-      <p:sp>
-        <p:nvSpPr>
-          <p:cNvPr id="24" name="Shape 22"/>
-          <p:cNvSpPr/>
-          <p:nvPr/>
-        </p:nvSpPr>
-        <p:spPr>
-          <a:xfrm>
-            <a:off x="365760" y="3401568"/>
-            <a:ext cx="2011680" cy="502920"/>
-          </a:xfrm>
-          <a:prstGeom prst="rect">
-            <a:avLst>
-              <a:gd name="adj" fmla="val 14545"/>
-            </a:avLst>
-          </a:prstGeom>
-          <a:solidFill>
-            <a:srgbClr val="EEF2FF"/>
-          </a:solidFill>
-          <a:ln w="12700">
-            <a:solidFill>
-              <a:srgbClr val="6366F1"/>
-            </a:solidFill>
-            <a:prstDash val="solid"/>
-          </a:ln>
-        </p:spPr>
-      </p:sp>
-      <p:sp>
-        <p:nvSpPr>
-          <p:cNvPr id="25" name="Text 23"/>
-          <p:cNvSpPr/>
-          <p:nvPr/>
-        </p:nvSpPr>
-        <p:spPr>
-          <a:xfrm>
-            <a:off x="365760" y="3401568"/>
-            <a:ext cx="2011680" cy="502920"/>
-          </a:xfrm>
-          <a:prstGeom prst="rect">
-            <a:avLst/>
-          </a:prstGeom>
-          <a:noFill/>
-          <a:ln/>
-        </p:spPr>
-        <p:txBody>
-          <a:bodyPr wrap="square" lIns="0" tIns="0" rIns="0" bIns="0" rtlCol="0" anchor="ctr"/>
-          <a:lstStyle/>
-          <a:p>
-            <a:pPr algn="ctr" indent="0" marL="0">
-              <a:buNone/>
-            </a:pPr>
-            <a:r>
-              <a:rPr lang="en-US" sz="1300" b="1" dirty="0">
-                <a:solidFill>
-                  <a:srgbClr val="4338CA"/>
-                </a:solidFill>
-                <a:latin typeface="Trebuchet MS" pitchFamily="34" charset="0"/>
-                <a:ea typeface="Trebuchet MS" pitchFamily="34" charset="-122"/>
-                <a:cs typeface="Trebuchet MS" pitchFamily="34" charset="-120"/>
-              </a:rPr>
-              <a:t>warmly</a:t>
-            </a:r>
-            <a:endParaRPr lang="en-US" sz="1300" dirty="0"/>
-          </a:p>
-        </p:txBody>
-      </p:sp>
-      <p:sp>
-        <p:nvSpPr>
-          <p:cNvPr id="26" name="Shape 24"/>
-          <p:cNvSpPr/>
-          <p:nvPr/>
-        </p:nvSpPr>
-        <p:spPr>
-          <a:xfrm>
-            <a:off x="2514600" y="3401568"/>
-            <a:ext cx="2011680" cy="502920"/>
-          </a:xfrm>
-          <a:prstGeom prst="rect">
-            <a:avLst>
-              <a:gd name="adj" fmla="val 14545"/>
-            </a:avLst>
-          </a:prstGeom>
-          <a:solidFill>
-            <a:srgbClr val="EEF2FF"/>
-          </a:solidFill>
-          <a:ln w="12700">
-            <a:solidFill>
-              <a:srgbClr val="6366F1"/>
-            </a:solidFill>
-            <a:prstDash val="solid"/>
-          </a:ln>
-        </p:spPr>
-      </p:sp>
-      <p:sp>
-        <p:nvSpPr>
-          <p:cNvPr id="27" name="Text 25"/>
-          <p:cNvSpPr/>
-          <p:nvPr/>
-        </p:nvSpPr>
-        <p:spPr>
-          <a:xfrm>
-            <a:off x="2514600" y="3401568"/>
-            <a:ext cx="2011680" cy="502920"/>
-          </a:xfrm>
-          <a:prstGeom prst="rect">
-            <a:avLst/>
-          </a:prstGeom>
-          <a:noFill/>
-          <a:ln/>
-        </p:spPr>
-        <p:txBody>
-          <a:bodyPr wrap="square" lIns="0" tIns="0" rIns="0" bIns="0" rtlCol="0" anchor="ctr"/>
-          <a:lstStyle/>
-          <a:p>
-            <a:pPr algn="ctr" indent="0" marL="0">
-              <a:buNone/>
-            </a:pPr>
-            <a:r>
-              <a:rPr lang="en-US" sz="1300" b="1" dirty="0">
-                <a:solidFill>
-                  <a:srgbClr val="4338CA"/>
-                </a:solidFill>
-                <a:latin typeface="Trebuchet MS" pitchFamily="34" charset="0"/>
-                <a:ea typeface="Trebuchet MS" pitchFamily="34" charset="-122"/>
-                <a:cs typeface="Trebuchet MS" pitchFamily="34" charset="-120"/>
-              </a:rPr>
-              <a:t>rewarm</a:t>
-            </a:r>
-            <a:endParaRPr lang="en-US" sz="1300" dirty="0"/>
-          </a:p>
-        </p:txBody>
-      </p:sp>
-      <p:sp>
-        <p:nvSpPr>
-          <p:cNvPr id="28" name="Shape 26"/>
-          <p:cNvSpPr/>
-          <p:nvPr/>
-        </p:nvSpPr>
-        <p:spPr>
-          <a:xfrm>
-            <a:off x="4663440" y="3401568"/>
-            <a:ext cx="2011680" cy="502920"/>
-          </a:xfrm>
-          <a:prstGeom prst="rect">
-            <a:avLst>
-              <a:gd name="adj" fmla="val 14545"/>
-            </a:avLst>
-          </a:prstGeom>
-          <a:solidFill>
-            <a:srgbClr val="EEF2FF"/>
-          </a:solidFill>
-          <a:ln w="12700">
-            <a:solidFill>
-              <a:srgbClr val="6366F1"/>
-            </a:solidFill>
-            <a:prstDash val="solid"/>
-          </a:ln>
-        </p:spPr>
-      </p:sp>
-      <p:sp>
-        <p:nvSpPr>
-          <p:cNvPr id="29" name="Text 27"/>
-          <p:cNvSpPr/>
-          <p:nvPr/>
-        </p:nvSpPr>
-        <p:spPr>
-          <a:xfrm>
-            <a:off x="4663440" y="3401568"/>
-            <a:ext cx="2011680" cy="502920"/>
-          </a:xfrm>
-          <a:prstGeom prst="rect">
-            <a:avLst/>
-          </a:prstGeom>
-          <a:noFill/>
-          <a:ln/>
-        </p:spPr>
-        <p:txBody>
-          <a:bodyPr wrap="square" lIns="0" tIns="0" rIns="0" bIns="0" rtlCol="0" anchor="ctr"/>
-          <a:lstStyle/>
-          <a:p>
-            <a:pPr algn="ctr" indent="0" marL="0">
-              <a:buNone/>
-            </a:pPr>
-            <a:r>
-              <a:rPr lang="en-US" sz="1300" b="1" dirty="0">
-                <a:solidFill>
-                  <a:srgbClr val="4338CA"/>
-                </a:solidFill>
-                <a:latin typeface="Trebuchet MS" pitchFamily="34" charset="0"/>
-                <a:ea typeface="Trebuchet MS" pitchFamily="34" charset="-122"/>
-                <a:cs typeface="Trebuchet MS" pitchFamily="34" charset="-120"/>
-              </a:rPr>
-              <a:t>lukewarm</a:t>
+              <a:t>warmed</a:t>
             </a:r>
             <a:endParaRPr lang="en-US" sz="1300" dirty="0"/>
           </a:p>
@@ -37360,7 +37000,7 @@
                 <a:ea typeface="Calibri" pitchFamily="34" charset="-122"/>
                 <a:cs typeface="Calibri" pitchFamily="34" charset="-120"/>
               </a:rPr>
-              <a:t>Word Labs  •  wordlabs.app  •  Root: 'warm' = having moderate heat</a:t>
+              <a:t>Word Labs  •  wordlabs.app  •  Root: 'warm' = fairly hot; friendly</a:t>
             </a:r>
             <a:endParaRPr lang="en-US" sz="800" dirty="0"/>
           </a:p>
@@ -37810,7 +37450,7 @@
             <a:avLst/>
           </a:prstGeom>
           <a:solidFill>
-            <a:srgbClr val="DDD6FE"/>
+            <a:srgbClr val="F1F5F9"/>
           </a:solidFill>
           <a:ln w="12700">
             <a:solidFill>
@@ -37822,18 +37462,68 @@
       </p:sp>
       <p:sp>
         <p:nvSpPr>
-          <p:cNvPr id="24" name="Text 22"/>
-          <p:cNvSpPr/>
-          <p:nvPr/>
-        </p:nvSpPr>
-        <p:spPr>
-          <a:xfrm>
-            <a:off x="640080" y="2212848"/>
+          <p:cNvPr id="24" name="Shape 22"/>
+          <p:cNvSpPr/>
+          <p:nvPr/>
+        </p:nvSpPr>
+        <p:spPr>
+          <a:xfrm>
+            <a:off x="3291840" y="2212848"/>
+            <a:ext cx="1645920" cy="420624"/>
+          </a:xfrm>
+          <a:prstGeom prst="rect">
+            <a:avLst/>
+          </a:prstGeom>
+          <a:solidFill>
+            <a:srgbClr val="F1F5F9"/>
+          </a:solidFill>
+          <a:ln w="12700">
+            <a:solidFill>
+              <a:srgbClr val="E5E7EB"/>
+            </a:solidFill>
+            <a:prstDash val="solid"/>
+          </a:ln>
+        </p:spPr>
+      </p:sp>
+      <p:sp>
+        <p:nvSpPr>
+          <p:cNvPr id="25" name="Shape 23"/>
+          <p:cNvSpPr/>
+          <p:nvPr/>
+        </p:nvSpPr>
+        <p:spPr>
+          <a:xfrm>
+            <a:off x="5943600" y="2212848"/>
             <a:ext cx="1463040" cy="420624"/>
           </a:xfrm>
           <a:prstGeom prst="rect">
             <a:avLst/>
           </a:prstGeom>
+          <a:solidFill>
+            <a:srgbClr val="FCE7F3"/>
+          </a:solidFill>
+          <a:ln w="12700">
+            <a:solidFill>
+              <a:srgbClr val="E5E7EB"/>
+            </a:solidFill>
+            <a:prstDash val="solid"/>
+          </a:ln>
+        </p:spPr>
+      </p:sp>
+      <p:sp>
+        <p:nvSpPr>
+          <p:cNvPr id="26" name="Text 24"/>
+          <p:cNvSpPr/>
+          <p:nvPr/>
+        </p:nvSpPr>
+        <p:spPr>
+          <a:xfrm>
+            <a:off x="5943600" y="2212848"/>
+            <a:ext cx="1463040" cy="420624"/>
+          </a:xfrm>
+          <a:prstGeom prst="rect">
+            <a:avLst/>
+          </a:prstGeom>
           <a:noFill/>
           <a:ln/>
         </p:spPr>
@@ -37847,13 +37537,13 @@
             <a:r>
               <a:rPr lang="en-US" sz="1300" b="1" dirty="0">
                 <a:solidFill>
-                  <a:srgbClr val="4C1D95"/>
+                  <a:srgbClr val="9D174D"/>
                 </a:solidFill>
                 <a:latin typeface="Trebuchet MS" pitchFamily="34" charset="0"/>
                 <a:ea typeface="Trebuchet MS" pitchFamily="34" charset="-122"/>
                 <a:cs typeface="Trebuchet MS" pitchFamily="34" charset="-120"/>
               </a:rPr>
-              <a:t>luke-</a:t>
+              <a:t>-er</a:t>
             </a:r>
             <a:endParaRPr lang="en-US" sz="1300" dirty="0"/>
           </a:p>
@@ -37861,20 +37551,45 @@
       </p:sp>
       <p:sp>
         <p:nvSpPr>
-          <p:cNvPr id="25" name="Shape 23"/>
-          <p:cNvSpPr/>
-          <p:nvPr/>
-        </p:nvSpPr>
-        <p:spPr>
-          <a:xfrm>
-            <a:off x="3291840" y="2212848"/>
+          <p:cNvPr id="27" name="Shape 25"/>
+          <p:cNvSpPr/>
+          <p:nvPr/>
+        </p:nvSpPr>
+        <p:spPr>
+          <a:xfrm>
+            <a:off x="640080" y="2670048"/>
+            <a:ext cx="1463040" cy="420624"/>
+          </a:xfrm>
+          <a:prstGeom prst="rect">
+            <a:avLst/>
+          </a:prstGeom>
+          <a:solidFill>
+            <a:srgbClr val="F8FAFC"/>
+          </a:solidFill>
+          <a:ln w="12700">
+            <a:solidFill>
+              <a:srgbClr val="E5E7EB"/>
+            </a:solidFill>
+            <a:prstDash val="solid"/>
+          </a:ln>
+        </p:spPr>
+      </p:sp>
+      <p:sp>
+        <p:nvSpPr>
+          <p:cNvPr id="28" name="Shape 26"/>
+          <p:cNvSpPr/>
+          <p:nvPr/>
+        </p:nvSpPr>
+        <p:spPr>
+          <a:xfrm>
+            <a:off x="3291840" y="2670048"/>
             <a:ext cx="1645920" cy="420624"/>
           </a:xfrm>
           <a:prstGeom prst="rect">
             <a:avLst/>
           </a:prstGeom>
           <a:solidFill>
-            <a:srgbClr val="F1F5F9"/>
+            <a:srgbClr val="F8FAFC"/>
           </a:solidFill>
           <a:ln w="12700">
             <a:solidFill>
@@ -37886,13 +37601,13 @@
       </p:sp>
       <p:sp>
         <p:nvSpPr>
-          <p:cNvPr id="26" name="Shape 24"/>
-          <p:cNvSpPr/>
-          <p:nvPr/>
-        </p:nvSpPr>
-        <p:spPr>
-          <a:xfrm>
-            <a:off x="5943600" y="2212848"/>
+          <p:cNvPr id="29" name="Shape 27"/>
+          <p:cNvSpPr/>
+          <p:nvPr/>
+        </p:nvSpPr>
+        <p:spPr>
+          <a:xfrm>
+            <a:off x="5943600" y="2670048"/>
             <a:ext cx="1463040" cy="420624"/>
           </a:xfrm>
           <a:prstGeom prst="rect">
@@ -37911,13 +37626,13 @@
       </p:sp>
       <p:sp>
         <p:nvSpPr>
-          <p:cNvPr id="27" name="Text 25"/>
-          <p:cNvSpPr/>
-          <p:nvPr/>
-        </p:nvSpPr>
-        <p:spPr>
-          <a:xfrm>
-            <a:off x="5943600" y="2212848"/>
+          <p:cNvPr id="30" name="Text 28"/>
+          <p:cNvSpPr/>
+          <p:nvPr/>
+        </p:nvSpPr>
+        <p:spPr>
+          <a:xfrm>
+            <a:off x="5943600" y="2670048"/>
             <a:ext cx="1463040" cy="420624"/>
           </a:xfrm>
           <a:prstGeom prst="rect">
@@ -37942,7 +37657,7 @@
                 <a:ea typeface="Trebuchet MS" pitchFamily="34" charset="-122"/>
                 <a:cs typeface="Trebuchet MS" pitchFamily="34" charset="-120"/>
               </a:rPr>
-              <a:t>-ing</a:t>
+              <a:t>-est</a:t>
             </a:r>
             <a:endParaRPr lang="en-US" sz="1300" dirty="0"/>
           </a:p>
@@ -37950,20 +37665,20 @@
       </p:sp>
       <p:sp>
         <p:nvSpPr>
-          <p:cNvPr id="28" name="Shape 26"/>
-          <p:cNvSpPr/>
-          <p:nvPr/>
-        </p:nvSpPr>
-        <p:spPr>
-          <a:xfrm>
-            <a:off x="640080" y="2670048"/>
+          <p:cNvPr id="31" name="Shape 29"/>
+          <p:cNvSpPr/>
+          <p:nvPr/>
+        </p:nvSpPr>
+        <p:spPr>
+          <a:xfrm>
+            <a:off x="640080" y="3127248"/>
             <a:ext cx="1463040" cy="420624"/>
           </a:xfrm>
           <a:prstGeom prst="rect">
             <a:avLst/>
           </a:prstGeom>
           <a:solidFill>
-            <a:srgbClr val="DDD6FE"/>
+            <a:srgbClr val="F1F5F9"/>
           </a:solidFill>
           <a:ln w="12700">
             <a:solidFill>
@@ -37975,18 +37690,68 @@
       </p:sp>
       <p:sp>
         <p:nvSpPr>
-          <p:cNvPr id="29" name="Text 27"/>
-          <p:cNvSpPr/>
-          <p:nvPr/>
-        </p:nvSpPr>
-        <p:spPr>
-          <a:xfrm>
-            <a:off x="640080" y="2670048"/>
+          <p:cNvPr id="32" name="Shape 30"/>
+          <p:cNvSpPr/>
+          <p:nvPr/>
+        </p:nvSpPr>
+        <p:spPr>
+          <a:xfrm>
+            <a:off x="3291840" y="3127248"/>
+            <a:ext cx="1645920" cy="420624"/>
+          </a:xfrm>
+          <a:prstGeom prst="rect">
+            <a:avLst/>
+          </a:prstGeom>
+          <a:solidFill>
+            <a:srgbClr val="F1F5F9"/>
+          </a:solidFill>
+          <a:ln w="12700">
+            <a:solidFill>
+              <a:srgbClr val="E5E7EB"/>
+            </a:solidFill>
+            <a:prstDash val="solid"/>
+          </a:ln>
+        </p:spPr>
+      </p:sp>
+      <p:sp>
+        <p:nvSpPr>
+          <p:cNvPr id="33" name="Shape 31"/>
+          <p:cNvSpPr/>
+          <p:nvPr/>
+        </p:nvSpPr>
+        <p:spPr>
+          <a:xfrm>
+            <a:off x="5943600" y="3127248"/>
             <a:ext cx="1463040" cy="420624"/>
           </a:xfrm>
           <a:prstGeom prst="rect">
             <a:avLst/>
           </a:prstGeom>
+          <a:solidFill>
+            <a:srgbClr val="FCE7F3"/>
+          </a:solidFill>
+          <a:ln w="12700">
+            <a:solidFill>
+              <a:srgbClr val="E5E7EB"/>
+            </a:solidFill>
+            <a:prstDash val="solid"/>
+          </a:ln>
+        </p:spPr>
+      </p:sp>
+      <p:sp>
+        <p:nvSpPr>
+          <p:cNvPr id="34" name="Text 32"/>
+          <p:cNvSpPr/>
+          <p:nvPr/>
+        </p:nvSpPr>
+        <p:spPr>
+          <a:xfrm>
+            <a:off x="5943600" y="3127248"/>
+            <a:ext cx="1463040" cy="420624"/>
+          </a:xfrm>
+          <a:prstGeom prst="rect">
+            <a:avLst/>
+          </a:prstGeom>
           <a:noFill/>
           <a:ln/>
         </p:spPr>
@@ -38000,13 +37765,13 @@
             <a:r>
               <a:rPr lang="en-US" sz="1300" b="1" dirty="0">
                 <a:solidFill>
-                  <a:srgbClr val="4C1D95"/>
+                  <a:srgbClr val="9D174D"/>
                 </a:solidFill>
                 <a:latin typeface="Trebuchet MS" pitchFamily="34" charset="0"/>
                 <a:ea typeface="Trebuchet MS" pitchFamily="34" charset="-122"/>
                 <a:cs typeface="Trebuchet MS" pitchFamily="34" charset="-120"/>
               </a:rPr>
-              <a:t>un-</a:t>
+              <a:t>-ing</a:t>
             </a:r>
             <a:endParaRPr lang="en-US" sz="1300" dirty="0"/>
           </a:p>
@@ -38014,13 +37779,38 @@
       </p:sp>
       <p:sp>
         <p:nvSpPr>
-          <p:cNvPr id="30" name="Shape 28"/>
-          <p:cNvSpPr/>
-          <p:nvPr/>
-        </p:nvSpPr>
-        <p:spPr>
-          <a:xfrm>
-            <a:off x="3291840" y="2670048"/>
+          <p:cNvPr id="35" name="Shape 33"/>
+          <p:cNvSpPr/>
+          <p:nvPr/>
+        </p:nvSpPr>
+        <p:spPr>
+          <a:xfrm>
+            <a:off x="640080" y="3584448"/>
+            <a:ext cx="1463040" cy="420624"/>
+          </a:xfrm>
+          <a:prstGeom prst="rect">
+            <a:avLst/>
+          </a:prstGeom>
+          <a:solidFill>
+            <a:srgbClr val="F8FAFC"/>
+          </a:solidFill>
+          <a:ln w="12700">
+            <a:solidFill>
+              <a:srgbClr val="E5E7EB"/>
+            </a:solidFill>
+            <a:prstDash val="solid"/>
+          </a:ln>
+        </p:spPr>
+      </p:sp>
+      <p:sp>
+        <p:nvSpPr>
+          <p:cNvPr id="36" name="Shape 34"/>
+          <p:cNvSpPr/>
+          <p:nvPr/>
+        </p:nvSpPr>
+        <p:spPr>
+          <a:xfrm>
+            <a:off x="3291840" y="3584448"/>
             <a:ext cx="1645920" cy="420624"/>
           </a:xfrm>
           <a:prstGeom prst="rect">
@@ -38039,13 +37829,13 @@
       </p:sp>
       <p:sp>
         <p:nvSpPr>
-          <p:cNvPr id="31" name="Shape 29"/>
-          <p:cNvSpPr/>
-          <p:nvPr/>
-        </p:nvSpPr>
-        <p:spPr>
-          <a:xfrm>
-            <a:off x="5943600" y="2670048"/>
+          <p:cNvPr id="37" name="Shape 35"/>
+          <p:cNvSpPr/>
+          <p:nvPr/>
+        </p:nvSpPr>
+        <p:spPr>
+          <a:xfrm>
+            <a:off x="5943600" y="3584448"/>
             <a:ext cx="1463040" cy="420624"/>
           </a:xfrm>
           <a:prstGeom prst="rect">
@@ -38064,13 +37854,13 @@
       </p:sp>
       <p:sp>
         <p:nvSpPr>
-          <p:cNvPr id="32" name="Text 30"/>
-          <p:cNvSpPr/>
-          <p:nvPr/>
-        </p:nvSpPr>
-        <p:spPr>
-          <a:xfrm>
-            <a:off x="5943600" y="2670048"/>
+          <p:cNvPr id="38" name="Text 36"/>
+          <p:cNvSpPr/>
+          <p:nvPr/>
+        </p:nvSpPr>
+        <p:spPr>
+          <a:xfrm>
+            <a:off x="5943600" y="3584448"/>
             <a:ext cx="1463040" cy="420624"/>
           </a:xfrm>
           <a:prstGeom prst="rect">
@@ -38095,7 +37885,7 @@
                 <a:ea typeface="Trebuchet MS" pitchFamily="34" charset="-122"/>
                 <a:cs typeface="Trebuchet MS" pitchFamily="34" charset="-120"/>
               </a:rPr>
-              <a:t>-th</a:t>
+              <a:t>-ly</a:t>
             </a:r>
             <a:endParaRPr lang="en-US" sz="1300" dirty="0"/>
           </a:p>
@@ -38103,20 +37893,20 @@
       </p:sp>
       <p:sp>
         <p:nvSpPr>
-          <p:cNvPr id="33" name="Shape 31"/>
-          <p:cNvSpPr/>
-          <p:nvPr/>
-        </p:nvSpPr>
-        <p:spPr>
-          <a:xfrm>
-            <a:off x="640080" y="3127248"/>
+          <p:cNvPr id="39" name="Shape 37"/>
+          <p:cNvSpPr/>
+          <p:nvPr/>
+        </p:nvSpPr>
+        <p:spPr>
+          <a:xfrm>
+            <a:off x="640080" y="4041648"/>
             <a:ext cx="1463040" cy="420624"/>
           </a:xfrm>
           <a:prstGeom prst="rect">
             <a:avLst/>
           </a:prstGeom>
           <a:solidFill>
-            <a:srgbClr val="DDD6FE"/>
+            <a:srgbClr val="F1F5F9"/>
           </a:solidFill>
           <a:ln w="12700">
             <a:solidFill>
@@ -38128,18 +37918,68 @@
       </p:sp>
       <p:sp>
         <p:nvSpPr>
-          <p:cNvPr id="34" name="Text 32"/>
-          <p:cNvSpPr/>
-          <p:nvPr/>
-        </p:nvSpPr>
-        <p:spPr>
-          <a:xfrm>
-            <a:off x="640080" y="3127248"/>
+          <p:cNvPr id="40" name="Shape 38"/>
+          <p:cNvSpPr/>
+          <p:nvPr/>
+        </p:nvSpPr>
+        <p:spPr>
+          <a:xfrm>
+            <a:off x="3291840" y="4041648"/>
+            <a:ext cx="1645920" cy="420624"/>
+          </a:xfrm>
+          <a:prstGeom prst="rect">
+            <a:avLst/>
+          </a:prstGeom>
+          <a:solidFill>
+            <a:srgbClr val="F1F5F9"/>
+          </a:solidFill>
+          <a:ln w="12700">
+            <a:solidFill>
+              <a:srgbClr val="E5E7EB"/>
+            </a:solidFill>
+            <a:prstDash val="solid"/>
+          </a:ln>
+        </p:spPr>
+      </p:sp>
+      <p:sp>
+        <p:nvSpPr>
+          <p:cNvPr id="41" name="Shape 39"/>
+          <p:cNvSpPr/>
+          <p:nvPr/>
+        </p:nvSpPr>
+        <p:spPr>
+          <a:xfrm>
+            <a:off x="5943600" y="4041648"/>
             <a:ext cx="1463040" cy="420624"/>
           </a:xfrm>
           <a:prstGeom prst="rect">
             <a:avLst/>
           </a:prstGeom>
+          <a:solidFill>
+            <a:srgbClr val="FCE7F3"/>
+          </a:solidFill>
+          <a:ln w="12700">
+            <a:solidFill>
+              <a:srgbClr val="E5E7EB"/>
+            </a:solidFill>
+            <a:prstDash val="solid"/>
+          </a:ln>
+        </p:spPr>
+      </p:sp>
+      <p:sp>
+        <p:nvSpPr>
+          <p:cNvPr id="42" name="Text 40"/>
+          <p:cNvSpPr/>
+          <p:nvPr/>
+        </p:nvSpPr>
+        <p:spPr>
+          <a:xfrm>
+            <a:off x="5943600" y="4041648"/>
+            <a:ext cx="1463040" cy="420624"/>
+          </a:xfrm>
+          <a:prstGeom prst="rect">
+            <a:avLst/>
+          </a:prstGeom>
           <a:noFill/>
           <a:ln/>
         </p:spPr>
@@ -38153,13 +37993,13 @@
             <a:r>
               <a:rPr lang="en-US" sz="1300" b="1" dirty="0">
                 <a:solidFill>
-                  <a:srgbClr val="4C1D95"/>
+                  <a:srgbClr val="9D174D"/>
                 </a:solidFill>
                 <a:latin typeface="Trebuchet MS" pitchFamily="34" charset="0"/>
                 <a:ea typeface="Trebuchet MS" pitchFamily="34" charset="-122"/>
                 <a:cs typeface="Trebuchet MS" pitchFamily="34" charset="-120"/>
               </a:rPr>
-              <a:t>over-</a:t>
+              <a:t>-s</a:t>
             </a:r>
             <a:endParaRPr lang="en-US" sz="1300" dirty="0"/>
           </a:p>
@@ -38167,255 +38007,13 @@
       </p:sp>
       <p:sp>
         <p:nvSpPr>
-          <p:cNvPr id="35" name="Shape 33"/>
-          <p:cNvSpPr/>
-          <p:nvPr/>
-        </p:nvSpPr>
-        <p:spPr>
-          <a:xfrm>
-            <a:off x="3291840" y="3127248"/>
-            <a:ext cx="1645920" cy="420624"/>
-          </a:xfrm>
-          <a:prstGeom prst="rect">
-            <a:avLst/>
-          </a:prstGeom>
-          <a:solidFill>
-            <a:srgbClr val="F1F5F9"/>
-          </a:solidFill>
-          <a:ln w="12700">
-            <a:solidFill>
-              <a:srgbClr val="E5E7EB"/>
-            </a:solidFill>
-            <a:prstDash val="solid"/>
-          </a:ln>
-        </p:spPr>
-      </p:sp>
-      <p:sp>
-        <p:nvSpPr>
-          <p:cNvPr id="36" name="Shape 34"/>
-          <p:cNvSpPr/>
-          <p:nvPr/>
-        </p:nvSpPr>
-        <p:spPr>
-          <a:xfrm>
-            <a:off x="5943600" y="3127248"/>
-            <a:ext cx="1463040" cy="420624"/>
-          </a:xfrm>
-          <a:prstGeom prst="rect">
-            <a:avLst/>
-          </a:prstGeom>
-          <a:solidFill>
-            <a:srgbClr val="FCE7F3"/>
-          </a:solidFill>
-          <a:ln w="12700">
-            <a:solidFill>
-              <a:srgbClr val="E5E7EB"/>
-            </a:solidFill>
-            <a:prstDash val="solid"/>
-          </a:ln>
-        </p:spPr>
-      </p:sp>
-      <p:sp>
-        <p:nvSpPr>
-          <p:cNvPr id="37" name="Text 35"/>
-          <p:cNvSpPr/>
-          <p:nvPr/>
-        </p:nvSpPr>
-        <p:spPr>
-          <a:xfrm>
-            <a:off x="5943600" y="3127248"/>
-            <a:ext cx="1463040" cy="420624"/>
-          </a:xfrm>
-          <a:prstGeom prst="rect">
-            <a:avLst/>
-          </a:prstGeom>
-          <a:noFill/>
-          <a:ln/>
-        </p:spPr>
-        <p:txBody>
-          <a:bodyPr wrap="square" lIns="0" tIns="0" rIns="0" bIns="0" rtlCol="0" anchor="ctr"/>
-          <a:lstStyle/>
-          <a:p>
-            <a:pPr algn="ctr" indent="0" marL="0">
-              <a:buNone/>
-            </a:pPr>
-            <a:r>
-              <a:rPr lang="en-US" sz="1300" b="1" dirty="0">
-                <a:solidFill>
-                  <a:srgbClr val="9D174D"/>
-                </a:solidFill>
-                <a:latin typeface="Trebuchet MS" pitchFamily="34" charset="0"/>
-                <a:ea typeface="Trebuchet MS" pitchFamily="34" charset="-122"/>
-                <a:cs typeface="Trebuchet MS" pitchFamily="34" charset="-120"/>
-              </a:rPr>
-              <a:t>-er</a:t>
-            </a:r>
-            <a:endParaRPr lang="en-US" sz="1300" dirty="0"/>
-          </a:p>
-        </p:txBody>
-      </p:sp>
-      <p:sp>
-        <p:nvSpPr>
-          <p:cNvPr id="38" name="Shape 36"/>
-          <p:cNvSpPr/>
-          <p:nvPr/>
-        </p:nvSpPr>
-        <p:spPr>
-          <a:xfrm>
-            <a:off x="640080" y="3584448"/>
-            <a:ext cx="1463040" cy="420624"/>
-          </a:xfrm>
-          <a:prstGeom prst="rect">
-            <a:avLst/>
-          </a:prstGeom>
-          <a:solidFill>
-            <a:srgbClr val="DDD6FE"/>
-          </a:solidFill>
-          <a:ln w="12700">
-            <a:solidFill>
-              <a:srgbClr val="E5E7EB"/>
-            </a:solidFill>
-            <a:prstDash val="solid"/>
-          </a:ln>
-        </p:spPr>
-      </p:sp>
-      <p:sp>
-        <p:nvSpPr>
-          <p:cNvPr id="39" name="Text 37"/>
-          <p:cNvSpPr/>
-          <p:nvPr/>
-        </p:nvSpPr>
-        <p:spPr>
-          <a:xfrm>
-            <a:off x="640080" y="3584448"/>
-            <a:ext cx="1463040" cy="420624"/>
-          </a:xfrm>
-          <a:prstGeom prst="rect">
-            <a:avLst/>
-          </a:prstGeom>
-          <a:noFill/>
-          <a:ln/>
-        </p:spPr>
-        <p:txBody>
-          <a:bodyPr wrap="square" lIns="0" tIns="0" rIns="0" bIns="0" rtlCol="0" anchor="ctr"/>
-          <a:lstStyle/>
-          <a:p>
-            <a:pPr algn="ctr" indent="0" marL="0">
-              <a:buNone/>
-            </a:pPr>
-            <a:r>
-              <a:rPr lang="en-US" sz="1300" b="1" dirty="0">
-                <a:solidFill>
-                  <a:srgbClr val="4C1D95"/>
-                </a:solidFill>
-                <a:latin typeface="Trebuchet MS" pitchFamily="34" charset="0"/>
-                <a:ea typeface="Trebuchet MS" pitchFamily="34" charset="-122"/>
-                <a:cs typeface="Trebuchet MS" pitchFamily="34" charset="-120"/>
-              </a:rPr>
-              <a:t>heart-</a:t>
-            </a:r>
-            <a:endParaRPr lang="en-US" sz="1300" dirty="0"/>
-          </a:p>
-        </p:txBody>
-      </p:sp>
-      <p:sp>
-        <p:nvSpPr>
-          <p:cNvPr id="40" name="Shape 38"/>
-          <p:cNvSpPr/>
-          <p:nvPr/>
-        </p:nvSpPr>
-        <p:spPr>
-          <a:xfrm>
-            <a:off x="3291840" y="3584448"/>
-            <a:ext cx="1645920" cy="420624"/>
-          </a:xfrm>
-          <a:prstGeom prst="rect">
-            <a:avLst/>
-          </a:prstGeom>
-          <a:solidFill>
-            <a:srgbClr val="F8FAFC"/>
-          </a:solidFill>
-          <a:ln w="12700">
-            <a:solidFill>
-              <a:srgbClr val="E5E7EB"/>
-            </a:solidFill>
-            <a:prstDash val="solid"/>
-          </a:ln>
-        </p:spPr>
-      </p:sp>
-      <p:sp>
-        <p:nvSpPr>
-          <p:cNvPr id="41" name="Shape 39"/>
-          <p:cNvSpPr/>
-          <p:nvPr/>
-        </p:nvSpPr>
-        <p:spPr>
-          <a:xfrm>
-            <a:off x="5943600" y="3584448"/>
-            <a:ext cx="1463040" cy="420624"/>
-          </a:xfrm>
-          <a:prstGeom prst="rect">
-            <a:avLst/>
-          </a:prstGeom>
-          <a:solidFill>
-            <a:srgbClr val="FCE7F3"/>
-          </a:solidFill>
-          <a:ln w="12700">
-            <a:solidFill>
-              <a:srgbClr val="E5E7EB"/>
-            </a:solidFill>
-            <a:prstDash val="solid"/>
-          </a:ln>
-        </p:spPr>
-      </p:sp>
-      <p:sp>
-        <p:nvSpPr>
-          <p:cNvPr id="42" name="Text 40"/>
-          <p:cNvSpPr/>
-          <p:nvPr/>
-        </p:nvSpPr>
-        <p:spPr>
-          <a:xfrm>
-            <a:off x="5943600" y="3584448"/>
-            <a:ext cx="1463040" cy="420624"/>
-          </a:xfrm>
-          <a:prstGeom prst="rect">
-            <a:avLst/>
-          </a:prstGeom>
-          <a:noFill/>
-          <a:ln/>
-        </p:spPr>
-        <p:txBody>
-          <a:bodyPr wrap="square" lIns="0" tIns="0" rIns="0" bIns="0" rtlCol="0" anchor="ctr"/>
-          <a:lstStyle/>
-          <a:p>
-            <a:pPr algn="ctr" indent="0" marL="0">
-              <a:buNone/>
-            </a:pPr>
-            <a:r>
-              <a:rPr lang="en-US" sz="1300" b="1" dirty="0">
-                <a:solidFill>
-                  <a:srgbClr val="9D174D"/>
-                </a:solidFill>
-                <a:latin typeface="Trebuchet MS" pitchFamily="34" charset="0"/>
-                <a:ea typeface="Trebuchet MS" pitchFamily="34" charset="-122"/>
-                <a:cs typeface="Trebuchet MS" pitchFamily="34" charset="-120"/>
-              </a:rPr>
-              <a:t>-ly</a:t>
-            </a:r>
-            <a:endParaRPr lang="en-US" sz="1300" dirty="0"/>
-          </a:p>
-        </p:txBody>
-      </p:sp>
-      <p:sp>
-        <p:nvSpPr>
           <p:cNvPr id="43" name="Text 41"/>
           <p:cNvSpPr/>
           <p:nvPr/>
         </p:nvSpPr>
         <p:spPr>
           <a:xfrm>
-            <a:off x="365760" y="4178808"/>
+            <a:off x="365760" y="4636008"/>
             <a:ext cx="1097280" cy="420624"/>
           </a:xfrm>
           <a:prstGeom prst="rect">
@@ -38454,7 +38052,7 @@
         </p:nvSpPr>
         <p:spPr>
           <a:xfrm>
-            <a:off x="1508760" y="4178808"/>
+            <a:off x="1508760" y="4636008"/>
             <a:ext cx="822960" cy="420624"/>
           </a:xfrm>
           <a:prstGeom prst="rect">
@@ -38488,7 +38086,7 @@
         </p:nvSpPr>
         <p:spPr>
           <a:xfrm>
-            <a:off x="1508760" y="4178808"/>
+            <a:off x="1508760" y="4636008"/>
             <a:ext cx="822960" cy="420624"/>
           </a:xfrm>
           <a:prstGeom prst="rect">
@@ -38527,7 +38125,7 @@
         </p:nvSpPr>
         <p:spPr>
           <a:xfrm>
-            <a:off x="2359152" y="4178808"/>
+            <a:off x="2359152" y="4636008"/>
             <a:ext cx="320040" cy="420624"/>
           </a:xfrm>
           <a:prstGeom prst="rect">
@@ -38566,7 +38164,7 @@
         </p:nvSpPr>
         <p:spPr>
           <a:xfrm>
-            <a:off x="2706624" y="4178808"/>
+            <a:off x="2706624" y="4636008"/>
             <a:ext cx="1243584" cy="420624"/>
           </a:xfrm>
           <a:prstGeom prst="rect">
@@ -38600,7 +38198,7 @@
         </p:nvSpPr>
         <p:spPr>
           <a:xfrm>
-            <a:off x="2706624" y="4178808"/>
+            <a:off x="2706624" y="4636008"/>
             <a:ext cx="1243584" cy="420624"/>
           </a:xfrm>
           <a:prstGeom prst="rect">
@@ -38639,7 +38237,7 @@
         </p:nvSpPr>
         <p:spPr>
           <a:xfrm>
-            <a:off x="3977640" y="4178808"/>
+            <a:off x="3977640" y="4636008"/>
             <a:ext cx="320040" cy="420624"/>
           </a:xfrm>
           <a:prstGeom prst="rect">
@@ -38678,7 +38276,7 @@
         </p:nvSpPr>
         <p:spPr>
           <a:xfrm>
-            <a:off x="4325112" y="4178808"/>
+            <a:off x="4325112" y="4636008"/>
             <a:ext cx="822960" cy="420624"/>
           </a:xfrm>
           <a:prstGeom prst="rect">
@@ -38712,7 +38310,7 @@
         </p:nvSpPr>
         <p:spPr>
           <a:xfrm>
-            <a:off x="4325112" y="4178808"/>
+            <a:off x="4325112" y="4636008"/>
             <a:ext cx="822960" cy="420624"/>
           </a:xfrm>
           <a:prstGeom prst="rect">
@@ -38751,7 +38349,7 @@
         </p:nvSpPr>
         <p:spPr>
           <a:xfrm>
-            <a:off x="5221224" y="4178808"/>
+            <a:off x="5221224" y="4636008"/>
             <a:ext cx="365760" cy="420624"/>
           </a:xfrm>
           <a:prstGeom prst="rect">
@@ -38790,7 +38388,7 @@
         </p:nvSpPr>
         <p:spPr>
           <a:xfrm>
-            <a:off x="5632704" y="4178808"/>
+            <a:off x="5632704" y="4636008"/>
             <a:ext cx="2194560" cy="420624"/>
           </a:xfrm>
           <a:prstGeom prst="rect">
@@ -38817,7 +38415,7 @@
         </p:nvSpPr>
         <p:spPr>
           <a:xfrm>
-            <a:off x="5632704" y="4178808"/>
+            <a:off x="5632704" y="4636008"/>
             <a:ext cx="2194560" cy="420624"/>
           </a:xfrm>
           <a:prstGeom prst="rect">
@@ -38842,7 +38440,7 @@
                 <a:ea typeface="Trebuchet MS" pitchFamily="34" charset="-122"/>
                 <a:cs typeface="Trebuchet MS" pitchFamily="34" charset="-120"/>
               </a:rPr>
-              <a:t>warmed</a:t>
+              <a:t>warm</a:t>
             </a:r>
             <a:endParaRPr lang="en-US" sz="1400" dirty="0"/>
           </a:p>
@@ -39134,7 +38732,7 @@
                 <a:ea typeface="Calibri" pitchFamily="34" charset="-122"/>
                 <a:cs typeface="Calibri" pitchFamily="34" charset="-120"/>
               </a:rPr>
-              <a:t>Word Labs  •  wordlabs.app  •  Root: 'warm' = having moderate heat</a:t>
+              <a:t>Word Labs  •  wordlabs.app  •  Root: 'warm' = fairly hot; friendly</a:t>
             </a:r>
             <a:endParaRPr lang="en-US" sz="800" dirty="0"/>
           </a:p>
@@ -39246,7 +38844,7 @@
                 <a:ea typeface="Trebuchet MS" pitchFamily="34" charset="-122"/>
                 <a:cs typeface="Trebuchet MS" pitchFamily="34" charset="-120"/>
               </a:rPr>
-              <a:t>warmed</a:t>
+              <a:t>warm</a:t>
             </a:r>
             <a:endParaRPr lang="en-US" sz="1200" dirty="0"/>
           </a:p>
@@ -39312,7 +38910,7 @@
                 <a:ea typeface="Calibri" pitchFamily="34" charset="-122"/>
                 <a:cs typeface="Calibri" pitchFamily="34" charset="-120"/>
               </a:rPr>
-              <a:t>A pleasant feeling of heat or friendliness.</a:t>
+              <a:t>to heat something up again after it has gone cold</a:t>
             </a:r>
             <a:endParaRPr lang="en-US" sz="1200" dirty="0"/>
           </a:p>
@@ -39385,7 +38983,7 @@
                 <a:ea typeface="Trebuchet MS" pitchFamily="34" charset="-122"/>
                 <a:cs typeface="Trebuchet MS" pitchFamily="34" charset="-120"/>
               </a:rPr>
-              <a:t>warming</a:t>
+              <a:t>warms</a:t>
             </a:r>
             <a:endParaRPr lang="en-US" sz="1200" dirty="0"/>
           </a:p>
@@ -39451,7 +39049,7 @@
                 <a:ea typeface="Calibri" pitchFamily="34" charset="-122"/>
                 <a:cs typeface="Calibri" pitchFamily="34" charset="-120"/>
               </a:rPr>
-              <a:t>Something or someone that has more heat than another, or a device that heats things up.</a:t>
+              <a:t>made warmer than before</a:t>
             </a:r>
             <a:endParaRPr lang="en-US" sz="1200" dirty="0"/>
           </a:p>
@@ -39524,7 +39122,7 @@
                 <a:ea typeface="Trebuchet MS" pitchFamily="34" charset="-122"/>
                 <a:cs typeface="Trebuchet MS" pitchFamily="34" charset="-120"/>
               </a:rPr>
-              <a:t>warmth</a:t>
+              <a:t>rewarm</a:t>
             </a:r>
             <a:endParaRPr lang="en-US" sz="1200" dirty="0"/>
           </a:p>
@@ -39590,7 +39188,7 @@
                 <a:ea typeface="Calibri" pitchFamily="34" charset="-122"/>
                 <a:cs typeface="Calibri" pitchFamily="34" charset="-120"/>
               </a:rPr>
-              <a:t>Only slightly warm — not hot and not cold, like lukewarm bathwater.</a:t>
+              <a:t>makes something warmer</a:t>
             </a:r>
             <a:endParaRPr lang="en-US" sz="1200" dirty="0"/>
           </a:p>
@@ -39663,7 +39261,7 @@
                 <a:ea typeface="Trebuchet MS" pitchFamily="34" charset="-122"/>
                 <a:cs typeface="Trebuchet MS" pitchFamily="34" charset="-120"/>
               </a:rPr>
-              <a:t>warmer</a:t>
+              <a:t>warmed</a:t>
             </a:r>
             <a:endParaRPr lang="en-US" sz="1200" dirty="0"/>
           </a:p>
@@ -39729,424 +39327,7 @@
                 <a:ea typeface="Calibri" pitchFamily="34" charset="-122"/>
                 <a:cs typeface="Calibri" pitchFamily="34" charset="-120"/>
               </a:rPr>
-              <a:t>To heat something up again after it has cooled down.</a:t>
-            </a:r>
-            <a:endParaRPr lang="en-US" sz="1200" dirty="0"/>
-          </a:p>
-        </p:txBody>
-      </p:sp>
-      <p:sp>
-        <p:nvSpPr>
-          <p:cNvPr id="27" name="Shape 25"/>
-          <p:cNvSpPr/>
-          <p:nvPr/>
-        </p:nvSpPr>
-        <p:spPr>
-          <a:xfrm>
-            <a:off x="365760" y="3310128"/>
-            <a:ext cx="2011680" cy="457200"/>
-          </a:xfrm>
-          <a:prstGeom prst="rect">
-            <a:avLst>
-              <a:gd name="adj" fmla="val 12000"/>
-            </a:avLst>
-          </a:prstGeom>
-          <a:solidFill>
-            <a:srgbClr val="EEF2FF"/>
-          </a:solidFill>
-          <a:ln w="12700">
-            <a:solidFill>
-              <a:srgbClr val="6366F1"/>
-            </a:solidFill>
-            <a:prstDash val="solid"/>
-          </a:ln>
-          <a:effectLst>
-            <a:outerShdw sx="100000" sy="100000" kx="0" ky="0" algn="bl" rotWithShape="0" blurRad="101600" dist="38100" dir="8100000">
-              <a:srgbClr val="000000">
-                <a:alpha val="12000"/>
-              </a:srgbClr>
-            </a:outerShdw>
-          </a:effectLst>
-        </p:spPr>
-      </p:sp>
-      <p:sp>
-        <p:nvSpPr>
-          <p:cNvPr id="28" name="Text 26"/>
-          <p:cNvSpPr/>
-          <p:nvPr/>
-        </p:nvSpPr>
-        <p:spPr>
-          <a:xfrm>
-            <a:off x="365760" y="3310128"/>
-            <a:ext cx="2011680" cy="457200"/>
-          </a:xfrm>
-          <a:prstGeom prst="rect">
-            <a:avLst/>
-          </a:prstGeom>
-          <a:noFill/>
-          <a:ln/>
-        </p:spPr>
-        <p:txBody>
-          <a:bodyPr wrap="square" lIns="0" tIns="0" rIns="0" bIns="0" rtlCol="0" anchor="ctr"/>
-          <a:lstStyle/>
-          <a:p>
-            <a:pPr algn="ctr" indent="0" marL="0">
-              <a:buNone/>
-            </a:pPr>
-            <a:r>
-              <a:rPr lang="en-US" sz="1200" b="1" dirty="0">
-                <a:solidFill>
-                  <a:srgbClr val="4338CA"/>
-                </a:solidFill>
-                <a:latin typeface="Trebuchet MS" pitchFamily="34" charset="0"/>
-                <a:ea typeface="Trebuchet MS" pitchFamily="34" charset="-122"/>
-                <a:cs typeface="Trebuchet MS" pitchFamily="34" charset="-120"/>
-              </a:rPr>
-              <a:t>warmly</a:t>
-            </a:r>
-            <a:endParaRPr lang="en-US" sz="1200" dirty="0"/>
-          </a:p>
-        </p:txBody>
-      </p:sp>
-      <p:sp>
-        <p:nvSpPr>
-          <p:cNvPr id="29" name="Shape 27"/>
-          <p:cNvSpPr/>
-          <p:nvPr/>
-        </p:nvSpPr>
-        <p:spPr>
-          <a:xfrm>
-            <a:off x="2514600" y="3310128"/>
-            <a:ext cx="6263640" cy="457200"/>
-          </a:xfrm>
-          <a:prstGeom prst="rect">
-            <a:avLst>
-              <a:gd name="adj" fmla="val 12000"/>
-            </a:avLst>
-          </a:prstGeom>
-          <a:solidFill>
-            <a:srgbClr val="F8FAFC"/>
-          </a:solidFill>
-          <a:ln w="12700">
-            <a:solidFill>
-              <a:srgbClr val="E2E8F0"/>
-            </a:solidFill>
-            <a:prstDash val="solid"/>
-          </a:ln>
-        </p:spPr>
-      </p:sp>
-      <p:sp>
-        <p:nvSpPr>
-          <p:cNvPr id="30" name="Text 28"/>
-          <p:cNvSpPr/>
-          <p:nvPr/>
-        </p:nvSpPr>
-        <p:spPr>
-          <a:xfrm>
-            <a:off x="2651760" y="3310128"/>
-            <a:ext cx="6035040" cy="457200"/>
-          </a:xfrm>
-          <a:prstGeom prst="rect">
-            <a:avLst/>
-          </a:prstGeom>
-          <a:noFill/>
-          <a:ln/>
-        </p:spPr>
-        <p:txBody>
-          <a:bodyPr wrap="square" rtlCol="0" anchor="ctr"/>
-          <a:lstStyle/>
-          <a:p>
-            <a:pPr algn="l" indent="0" marL="0">
-              <a:buNone/>
-            </a:pPr>
-            <a:r>
-              <a:rPr lang="en-US" sz="1200" dirty="0">
-                <a:solidFill>
-                  <a:srgbClr val="0F172A"/>
-                </a:solidFill>
-                <a:latin typeface="Calibri" pitchFamily="34" charset="0"/>
-                <a:ea typeface="Calibri" pitchFamily="34" charset="-122"/>
-                <a:cs typeface="Calibri" pitchFamily="34" charset="-120"/>
-              </a:rPr>
-              <a:t>Made something hotter or less cold, like warmed-up soup.</a:t>
-            </a:r>
-            <a:endParaRPr lang="en-US" sz="1200" dirty="0"/>
-          </a:p>
-        </p:txBody>
-      </p:sp>
-      <p:sp>
-        <p:nvSpPr>
-          <p:cNvPr id="31" name="Shape 29"/>
-          <p:cNvSpPr/>
-          <p:nvPr/>
-        </p:nvSpPr>
-        <p:spPr>
-          <a:xfrm>
-            <a:off x="365760" y="3840480"/>
-            <a:ext cx="2011680" cy="457200"/>
-          </a:xfrm>
-          <a:prstGeom prst="rect">
-            <a:avLst>
-              <a:gd name="adj" fmla="val 12000"/>
-            </a:avLst>
-          </a:prstGeom>
-          <a:solidFill>
-            <a:srgbClr val="EEF2FF"/>
-          </a:solidFill>
-          <a:ln w="12700">
-            <a:solidFill>
-              <a:srgbClr val="6366F1"/>
-            </a:solidFill>
-            <a:prstDash val="solid"/>
-          </a:ln>
-          <a:effectLst>
-            <a:outerShdw sx="100000" sy="100000" kx="0" ky="0" algn="bl" rotWithShape="0" blurRad="101600" dist="38100" dir="8100000">
-              <a:srgbClr val="000000">
-                <a:alpha val="12000"/>
-              </a:srgbClr>
-            </a:outerShdw>
-          </a:effectLst>
-        </p:spPr>
-      </p:sp>
-      <p:sp>
-        <p:nvSpPr>
-          <p:cNvPr id="32" name="Text 30"/>
-          <p:cNvSpPr/>
-          <p:nvPr/>
-        </p:nvSpPr>
-        <p:spPr>
-          <a:xfrm>
-            <a:off x="365760" y="3840480"/>
-            <a:ext cx="2011680" cy="457200"/>
-          </a:xfrm>
-          <a:prstGeom prst="rect">
-            <a:avLst/>
-          </a:prstGeom>
-          <a:noFill/>
-          <a:ln/>
-        </p:spPr>
-        <p:txBody>
-          <a:bodyPr wrap="square" lIns="0" tIns="0" rIns="0" bIns="0" rtlCol="0" anchor="ctr"/>
-          <a:lstStyle/>
-          <a:p>
-            <a:pPr algn="ctr" indent="0" marL="0">
-              <a:buNone/>
-            </a:pPr>
-            <a:r>
-              <a:rPr lang="en-US" sz="1200" b="1" dirty="0">
-                <a:solidFill>
-                  <a:srgbClr val="4338CA"/>
-                </a:solidFill>
-                <a:latin typeface="Trebuchet MS" pitchFamily="34" charset="0"/>
-                <a:ea typeface="Trebuchet MS" pitchFamily="34" charset="-122"/>
-                <a:cs typeface="Trebuchet MS" pitchFamily="34" charset="-120"/>
-              </a:rPr>
-              <a:t>rewarm</a:t>
-            </a:r>
-            <a:endParaRPr lang="en-US" sz="1200" dirty="0"/>
-          </a:p>
-        </p:txBody>
-      </p:sp>
-      <p:sp>
-        <p:nvSpPr>
-          <p:cNvPr id="33" name="Shape 31"/>
-          <p:cNvSpPr/>
-          <p:nvPr/>
-        </p:nvSpPr>
-        <p:spPr>
-          <a:xfrm>
-            <a:off x="2514600" y="3840480"/>
-            <a:ext cx="6263640" cy="457200"/>
-          </a:xfrm>
-          <a:prstGeom prst="rect">
-            <a:avLst>
-              <a:gd name="adj" fmla="val 12000"/>
-            </a:avLst>
-          </a:prstGeom>
-          <a:solidFill>
-            <a:srgbClr val="F8FAFC"/>
-          </a:solidFill>
-          <a:ln w="12700">
-            <a:solidFill>
-              <a:srgbClr val="E2E8F0"/>
-            </a:solidFill>
-            <a:prstDash val="solid"/>
-          </a:ln>
-        </p:spPr>
-      </p:sp>
-      <p:sp>
-        <p:nvSpPr>
-          <p:cNvPr id="34" name="Text 32"/>
-          <p:cNvSpPr/>
-          <p:nvPr/>
-        </p:nvSpPr>
-        <p:spPr>
-          <a:xfrm>
-            <a:off x="2651760" y="3840480"/>
-            <a:ext cx="6035040" cy="457200"/>
-          </a:xfrm>
-          <a:prstGeom prst="rect">
-            <a:avLst/>
-          </a:prstGeom>
-          <a:noFill/>
-          <a:ln/>
-        </p:spPr>
-        <p:txBody>
-          <a:bodyPr wrap="square" rtlCol="0" anchor="ctr"/>
-          <a:lstStyle/>
-          <a:p>
-            <a:pPr algn="l" indent="0" marL="0">
-              <a:buNone/>
-            </a:pPr>
-            <a:r>
-              <a:rPr lang="en-US" sz="1200" dirty="0">
-                <a:solidFill>
-                  <a:srgbClr val="0F172A"/>
-                </a:solidFill>
-                <a:latin typeface="Calibri" pitchFamily="34" charset="0"/>
-                <a:ea typeface="Calibri" pitchFamily="34" charset="-122"/>
-                <a:cs typeface="Calibri" pitchFamily="34" charset="-120"/>
-              </a:rPr>
-              <a:t>In a friendly or heated way, like greeting someone warmly.</a:t>
-            </a:r>
-            <a:endParaRPr lang="en-US" sz="1200" dirty="0"/>
-          </a:p>
-        </p:txBody>
-      </p:sp>
-      <p:sp>
-        <p:nvSpPr>
-          <p:cNvPr id="35" name="Shape 33"/>
-          <p:cNvSpPr/>
-          <p:nvPr/>
-        </p:nvSpPr>
-        <p:spPr>
-          <a:xfrm>
-            <a:off x="365760" y="4370832"/>
-            <a:ext cx="2011680" cy="457200"/>
-          </a:xfrm>
-          <a:prstGeom prst="rect">
-            <a:avLst>
-              <a:gd name="adj" fmla="val 12000"/>
-            </a:avLst>
-          </a:prstGeom>
-          <a:solidFill>
-            <a:srgbClr val="EEF2FF"/>
-          </a:solidFill>
-          <a:ln w="12700">
-            <a:solidFill>
-              <a:srgbClr val="6366F1"/>
-            </a:solidFill>
-            <a:prstDash val="solid"/>
-          </a:ln>
-          <a:effectLst>
-            <a:outerShdw sx="100000" sy="100000" kx="0" ky="0" algn="bl" rotWithShape="0" blurRad="101600" dist="38100" dir="8100000">
-              <a:srgbClr val="000000">
-                <a:alpha val="12000"/>
-              </a:srgbClr>
-            </a:outerShdw>
-          </a:effectLst>
-        </p:spPr>
-      </p:sp>
-      <p:sp>
-        <p:nvSpPr>
-          <p:cNvPr id="36" name="Text 34"/>
-          <p:cNvSpPr/>
-          <p:nvPr/>
-        </p:nvSpPr>
-        <p:spPr>
-          <a:xfrm>
-            <a:off x="365760" y="4370832"/>
-            <a:ext cx="2011680" cy="457200"/>
-          </a:xfrm>
-          <a:prstGeom prst="rect">
-            <a:avLst/>
-          </a:prstGeom>
-          <a:noFill/>
-          <a:ln/>
-        </p:spPr>
-        <p:txBody>
-          <a:bodyPr wrap="square" lIns="0" tIns="0" rIns="0" bIns="0" rtlCol="0" anchor="ctr"/>
-          <a:lstStyle/>
-          <a:p>
-            <a:pPr algn="ctr" indent="0" marL="0">
-              <a:buNone/>
-            </a:pPr>
-            <a:r>
-              <a:rPr lang="en-US" sz="1200" b="1" dirty="0">
-                <a:solidFill>
-                  <a:srgbClr val="4338CA"/>
-                </a:solidFill>
-                <a:latin typeface="Trebuchet MS" pitchFamily="34" charset="0"/>
-                <a:ea typeface="Trebuchet MS" pitchFamily="34" charset="-122"/>
-                <a:cs typeface="Trebuchet MS" pitchFamily="34" charset="-120"/>
-              </a:rPr>
-              <a:t>lukewarm</a:t>
-            </a:r>
-            <a:endParaRPr lang="en-US" sz="1200" dirty="0"/>
-          </a:p>
-        </p:txBody>
-      </p:sp>
-      <p:sp>
-        <p:nvSpPr>
-          <p:cNvPr id="37" name="Shape 35"/>
-          <p:cNvSpPr/>
-          <p:nvPr/>
-        </p:nvSpPr>
-        <p:spPr>
-          <a:xfrm>
-            <a:off x="2514600" y="4370832"/>
-            <a:ext cx="6263640" cy="457200"/>
-          </a:xfrm>
-          <a:prstGeom prst="rect">
-            <a:avLst>
-              <a:gd name="adj" fmla="val 12000"/>
-            </a:avLst>
-          </a:prstGeom>
-          <a:solidFill>
-            <a:srgbClr val="F8FAFC"/>
-          </a:solidFill>
-          <a:ln w="12700">
-            <a:solidFill>
-              <a:srgbClr val="E2E8F0"/>
-            </a:solidFill>
-            <a:prstDash val="solid"/>
-          </a:ln>
-        </p:spPr>
-      </p:sp>
-      <p:sp>
-        <p:nvSpPr>
-          <p:cNvPr id="38" name="Text 36"/>
-          <p:cNvSpPr/>
-          <p:nvPr/>
-        </p:nvSpPr>
-        <p:spPr>
-          <a:xfrm>
-            <a:off x="2651760" y="4370832"/>
-            <a:ext cx="6035040" cy="457200"/>
-          </a:xfrm>
-          <a:prstGeom prst="rect">
-            <a:avLst/>
-          </a:prstGeom>
-          <a:noFill/>
-          <a:ln/>
-        </p:spPr>
-        <p:txBody>
-          <a:bodyPr wrap="square" rtlCol="0" anchor="ctr"/>
-          <a:lstStyle/>
-          <a:p>
-            <a:pPr algn="l" indent="0" marL="0">
-              <a:buNone/>
-            </a:pPr>
-            <a:r>
-              <a:rPr lang="en-US" sz="1200" dirty="0">
-                <a:solidFill>
-                  <a:srgbClr val="0F172A"/>
-                </a:solidFill>
-                <a:latin typeface="Calibri" pitchFamily="34" charset="0"/>
-                <a:ea typeface="Calibri" pitchFamily="34" charset="-122"/>
-                <a:cs typeface="Calibri" pitchFamily="34" charset="-120"/>
-              </a:rPr>
-              <a:t>The process of making something warmer, like warming your hands by a fire.</a:t>
+              <a:t>having a comfortably high temperature, or friendly and kind</a:t>
             </a:r>
             <a:endParaRPr lang="en-US" sz="1200" dirty="0"/>
           </a:p>
@@ -40438,7 +39619,7 @@
                 <a:ea typeface="Calibri" pitchFamily="34" charset="-122"/>
                 <a:cs typeface="Calibri" pitchFamily="34" charset="-120"/>
               </a:rPr>
-              <a:t>Word Labs  •  wordlabs.app  •  Root: 'warm' = having moderate heat</a:t>
+              <a:t>Word Labs  •  wordlabs.app  •  Root: 'warm' = fairly hot; friendly</a:t>
             </a:r>
             <a:endParaRPr lang="en-US" sz="800" dirty="0"/>
           </a:p>
@@ -40641,7 +39822,7 @@
                 <a:ea typeface="Calibri" pitchFamily="34" charset="-122"/>
                 <a:cs typeface="Calibri" pitchFamily="34" charset="-120"/>
               </a:rPr>
-              <a:t>The warmth of the campfire made everyone feel safe and comfortable on the cold night.</a:t>
+              <a:t>She wrapped herself in a warm blanket by the fire.</a:t>
             </a:r>
             <a:endParaRPr lang="en-US" sz="1500" dirty="0"/>
           </a:p>
@@ -40805,7 +39986,7 @@
                 <a:ea typeface="Calibri" pitchFamily="34" charset="-122"/>
                 <a:cs typeface="Calibri" pitchFamily="34" charset="-120"/>
               </a:rPr>
-              <a:t>She warmed up her breakfast in the microwave before eating it at the kitchen table.</a:t>
+              <a:t>The sun warms the sand on a summer's day.</a:t>
             </a:r>
             <a:endParaRPr lang="en-US" sz="1500" dirty="0"/>
           </a:p>
@@ -40969,7 +40150,7 @@
                 <a:ea typeface="Calibri" pitchFamily="34" charset="-122"/>
                 <a:cs typeface="Calibri" pitchFamily="34" charset="-120"/>
               </a:rPr>
-              <a:t>The teacher gave the new student a warmly worded welcome card on her first day of school.</a:t>
+              <a:t>I will rewarm the soup in the microwave.</a:t>
             </a:r>
             <a:endParaRPr lang="en-US" sz="1500" dirty="0"/>
           </a:p>
